--- a/python_course_4p/2_syntax_classes/2_syntax_classes.pptx
+++ b/python_course_4p/2_syntax_classes/2_syntax_classes.pptx
@@ -5,7 +5,7 @@
     <p:sldMasterId id="2147483648" r:id="rId1"/>
   </p:sldMasterIdLst>
   <p:notesMasterIdLst>
-    <p:notesMasterId r:id="rId54"/>
+    <p:notesMasterId r:id="rId52"/>
   </p:notesMasterIdLst>
   <p:sldIdLst>
     <p:sldId id="256" r:id="rId2"/>
@@ -46,11 +46,11 @@
     <p:sldId id="313" r:id="rId37"/>
     <p:sldId id="333" r:id="rId38"/>
     <p:sldId id="323" r:id="rId39"/>
-    <p:sldId id="356" r:id="rId40"/>
-    <p:sldId id="331" r:id="rId41"/>
+    <p:sldId id="331" r:id="rId40"/>
+    <p:sldId id="332" r:id="rId41"/>
     <p:sldId id="324" r:id="rId42"/>
     <p:sldId id="325" r:id="rId43"/>
-    <p:sldId id="332" r:id="rId44"/>
+    <p:sldId id="363" r:id="rId44"/>
     <p:sldId id="326" r:id="rId45"/>
     <p:sldId id="355" r:id="rId46"/>
     <p:sldId id="353" r:id="rId47"/>
@@ -58,8 +58,6 @@
     <p:sldId id="347" r:id="rId49"/>
     <p:sldId id="336" r:id="rId50"/>
     <p:sldId id="348" r:id="rId51"/>
-    <p:sldId id="334" r:id="rId52"/>
-    <p:sldId id="335" r:id="rId53"/>
   </p:sldIdLst>
   <p:sldSz cx="12192000" cy="6858000"/>
   <p:notesSz cx="6858000" cy="9144000"/>
@@ -544,6 +542,13 @@
           </p:nvPr>
         </p:nvSpPr>
         <p:spPr/>
+        <p:txBody>
+          <a:bodyPr/>
+          <a:lstStyle/>
+          <a:p>
+            <a:endParaRPr lang="en-NL"/>
+          </a:p>
+        </p:txBody>
       </p:sp>
       <p:sp>
         <p:nvSpPr>
@@ -676,6 +681,13 @@
           </p:nvPr>
         </p:nvSpPr>
         <p:spPr/>
+        <p:txBody>
+          <a:bodyPr/>
+          <a:lstStyle/>
+          <a:p>
+            <a:endParaRPr lang="en-NL"/>
+          </a:p>
+        </p:txBody>
       </p:sp>
       <p:sp>
         <p:nvSpPr>
@@ -692,10 +704,6 @@
           <a:bodyPr/>
           <a:lstStyle/>
           <a:p>
-            <a:r>
-              <a:rPr lang="en-US" dirty="0"/>
-              <a:t>Notebook: 1_classes_dunder_methods</a:t>
-            </a:r>
             <a:endParaRPr lang="en-NL" dirty="0"/>
           </a:p>
         </p:txBody>
@@ -782,7 +790,7 @@
           <a:p>
             <a:r>
               <a:rPr lang="en-US" dirty="0"/>
-              <a:t>Notebook: 2_classes_inheritance</a:t>
+              <a:t>Demo: 1_classes_dunder_methods</a:t>
             </a:r>
             <a:endParaRPr lang="en-NL" dirty="0"/>
           </a:p>
@@ -805,6 +813,97 @@
           <a:p>
             <a:fld id="{4BAF0DEA-1372-46C0-8FC9-2869E9CCF7DA}" type="slidenum">
               <a:rPr lang="en-NL" smtClean="0"/>
+              <a:t>39</a:t>
+            </a:fld>
+            <a:endParaRPr lang="en-NL"/>
+          </a:p>
+        </p:txBody>
+      </p:sp>
+    </p:spTree>
+    <p:extLst>
+      <p:ext uri="{BB962C8B-B14F-4D97-AF65-F5344CB8AC3E}">
+        <p14:creationId xmlns:p14="http://schemas.microsoft.com/office/powerpoint/2010/main" val="1342459571"/>
+      </p:ext>
+    </p:extLst>
+  </p:cSld>
+  <p:clrMapOvr>
+    <a:masterClrMapping/>
+  </p:clrMapOvr>
+</p:notes>
+</file>
+
+<file path=ppt/notesSlides/notesSlide4.xml><?xml version="1.0" encoding="utf-8"?>
+<p:notes xmlns:a="http://schemas.openxmlformats.org/drawingml/2006/main" xmlns:r="http://schemas.openxmlformats.org/officeDocument/2006/relationships" xmlns:p="http://schemas.openxmlformats.org/presentationml/2006/main">
+  <p:cSld>
+    <p:spTree>
+      <p:nvGrpSpPr>
+        <p:cNvPr id="1" name=""/>
+        <p:cNvGrpSpPr/>
+        <p:nvPr/>
+      </p:nvGrpSpPr>
+      <p:grpSpPr>
+        <a:xfrm>
+          <a:off x="0" y="0"/>
+          <a:ext cx="0" cy="0"/>
+          <a:chOff x="0" y="0"/>
+          <a:chExt cx="0" cy="0"/>
+        </a:xfrm>
+      </p:grpSpPr>
+      <p:sp>
+        <p:nvSpPr>
+          <p:cNvPr id="2" name="Slide Image Placeholder 1"/>
+          <p:cNvSpPr>
+            <a:spLocks noGrp="1" noRot="1" noChangeAspect="1"/>
+          </p:cNvSpPr>
+          <p:nvPr>
+            <p:ph type="sldImg"/>
+          </p:nvPr>
+        </p:nvSpPr>
+        <p:spPr/>
+        <p:txBody>
+          <a:bodyPr/>
+          <a:lstStyle/>
+          <a:p>
+            <a:endParaRPr lang="en-NL"/>
+          </a:p>
+        </p:txBody>
+      </p:sp>
+      <p:sp>
+        <p:nvSpPr>
+          <p:cNvPr id="3" name="Notes Placeholder 2"/>
+          <p:cNvSpPr>
+            <a:spLocks noGrp="1"/>
+          </p:cNvSpPr>
+          <p:nvPr>
+            <p:ph type="body" idx="1"/>
+          </p:nvPr>
+        </p:nvSpPr>
+        <p:spPr/>
+        <p:txBody>
+          <a:bodyPr/>
+          <a:lstStyle/>
+          <a:p>
+            <a:endParaRPr lang="en-NL" dirty="0"/>
+          </a:p>
+        </p:txBody>
+      </p:sp>
+      <p:sp>
+        <p:nvSpPr>
+          <p:cNvPr id="4" name="Slide Number Placeholder 3"/>
+          <p:cNvSpPr>
+            <a:spLocks noGrp="1"/>
+          </p:cNvSpPr>
+          <p:nvPr>
+            <p:ph type="sldNum" sz="quarter" idx="5"/>
+          </p:nvPr>
+        </p:nvSpPr>
+        <p:spPr/>
+        <p:txBody>
+          <a:bodyPr/>
+          <a:lstStyle/>
+          <a:p>
+            <a:fld id="{4BAF0DEA-1372-46C0-8FC9-2869E9CCF7DA}" type="slidenum">
+              <a:rPr lang="en-NL" smtClean="0"/>
               <a:t>48</a:t>
             </a:fld>
             <a:endParaRPr lang="en-NL"/>
@@ -815,6 +914,114 @@
     <p:extLst>
       <p:ext uri="{BB962C8B-B14F-4D97-AF65-F5344CB8AC3E}">
         <p14:creationId xmlns:p14="http://schemas.microsoft.com/office/powerpoint/2010/main" val="3984041361"/>
+      </p:ext>
+    </p:extLst>
+  </p:cSld>
+  <p:clrMapOvr>
+    <a:masterClrMapping/>
+  </p:clrMapOvr>
+</p:notes>
+</file>
+
+<file path=ppt/notesSlides/notesSlide5.xml><?xml version="1.0" encoding="utf-8"?>
+<p:notes xmlns:a="http://schemas.openxmlformats.org/drawingml/2006/main" xmlns:r="http://schemas.openxmlformats.org/officeDocument/2006/relationships" xmlns:p="http://schemas.openxmlformats.org/presentationml/2006/main">
+  <p:cSld>
+    <p:spTree>
+      <p:nvGrpSpPr>
+        <p:cNvPr id="1" name=""/>
+        <p:cNvGrpSpPr/>
+        <p:nvPr/>
+      </p:nvGrpSpPr>
+      <p:grpSpPr>
+        <a:xfrm>
+          <a:off x="0" y="0"/>
+          <a:ext cx="0" cy="0"/>
+          <a:chOff x="0" y="0"/>
+          <a:chExt cx="0" cy="0"/>
+        </a:xfrm>
+      </p:grpSpPr>
+      <p:sp>
+        <p:nvSpPr>
+          <p:cNvPr id="2" name="Slide Image Placeholder 1"/>
+          <p:cNvSpPr>
+            <a:spLocks noGrp="1" noRot="1" noChangeAspect="1"/>
+          </p:cNvSpPr>
+          <p:nvPr>
+            <p:ph type="sldImg"/>
+          </p:nvPr>
+        </p:nvSpPr>
+        <p:spPr/>
+      </p:sp>
+      <p:sp>
+        <p:nvSpPr>
+          <p:cNvPr id="3" name="Notes Placeholder 2"/>
+          <p:cNvSpPr>
+            <a:spLocks noGrp="1"/>
+          </p:cNvSpPr>
+          <p:nvPr>
+            <p:ph type="body" idx="1"/>
+          </p:nvPr>
+        </p:nvSpPr>
+        <p:spPr/>
+        <p:txBody>
+          <a:bodyPr/>
+          <a:lstStyle/>
+          <a:p>
+            <a:pPr marL="0" marR="0" lvl="0" indent="0" algn="l" defTabSz="914400" rtl="0" eaLnBrk="1" fontAlgn="auto" latinLnBrk="0" hangingPunct="1">
+              <a:lnSpc>
+                <a:spcPct val="100000"/>
+              </a:lnSpc>
+              <a:spcBef>
+                <a:spcPts val="0"/>
+              </a:spcBef>
+              <a:spcAft>
+                <a:spcPts val="0"/>
+              </a:spcAft>
+              <a:buClrTx/>
+              <a:buSzTx/>
+              <a:buFontTx/>
+              <a:buNone/>
+              <a:tabLst/>
+              <a:defRPr/>
+            </a:pPr>
+            <a:r>
+              <a:rPr lang="en-US" dirty="0"/>
+              <a:t>Demo: 2_classes_inheritance</a:t>
+            </a:r>
+            <a:endParaRPr lang="en-NL" dirty="0"/>
+          </a:p>
+          <a:p>
+            <a:endParaRPr lang="en-NL" dirty="0"/>
+          </a:p>
+        </p:txBody>
+      </p:sp>
+      <p:sp>
+        <p:nvSpPr>
+          <p:cNvPr id="4" name="Slide Number Placeholder 3"/>
+          <p:cNvSpPr>
+            <a:spLocks noGrp="1"/>
+          </p:cNvSpPr>
+          <p:nvPr>
+            <p:ph type="sldNum" sz="quarter" idx="5"/>
+          </p:nvPr>
+        </p:nvSpPr>
+        <p:spPr/>
+        <p:txBody>
+          <a:bodyPr/>
+          <a:lstStyle/>
+          <a:p>
+            <a:fld id="{4BAF0DEA-1372-46C0-8FC9-2869E9CCF7DA}" type="slidenum">
+              <a:rPr lang="en-NL" smtClean="0"/>
+              <a:t>49</a:t>
+            </a:fld>
+            <a:endParaRPr lang="en-NL"/>
+          </a:p>
+        </p:txBody>
+      </p:sp>
+    </p:spTree>
+    <p:extLst>
+      <p:ext uri="{BB962C8B-B14F-4D97-AF65-F5344CB8AC3E}">
+        <p14:creationId xmlns:p14="http://schemas.microsoft.com/office/powerpoint/2010/main" val="2809289137"/>
       </p:ext>
     </p:extLst>
   </p:cSld>
@@ -9737,7 +9944,7 @@
                 <a:latin typeface="Courier New" panose="02070309020205020404" pitchFamily="49" charset="0"/>
                 <a:cs typeface="Courier New" panose="02070309020205020404" pitchFamily="49" charset="0"/>
               </a:rPr>
-              <a:t>type</a:t>
+              <a:t>help</a:t>
             </a:r>
             <a:r>
               <a:rPr lang="nl-NL" sz="2000" dirty="0">
@@ -9786,24 +9993,24 @@
               <a:buNone/>
             </a:pPr>
             <a:r>
-              <a:rPr lang="nl-NL" sz="2000" noProof="0" dirty="0">
+              <a:rPr lang="nl-NL" sz="2000" dirty="0">
                 <a:solidFill>
                   <a:srgbClr val="7030A0"/>
                 </a:solidFill>
                 <a:latin typeface="Courier New" panose="02070309020205020404" pitchFamily="49" charset="0"/>
                 <a:cs typeface="Courier New" panose="02070309020205020404" pitchFamily="49" charset="0"/>
               </a:rPr>
-              <a:t>help</a:t>
-            </a:r>
-            <a:r>
-              <a:rPr lang="nl-NL" sz="2000" noProof="0" dirty="0">
+              <a:t>type</a:t>
+            </a:r>
+            <a:r>
+              <a:rPr lang="nl-NL" sz="2000" dirty="0">
                 <a:latin typeface="Courier New" panose="02070309020205020404" pitchFamily="49" charset="0"/>
                 <a:cs typeface="Courier New" panose="02070309020205020404" pitchFamily="49" charset="0"/>
               </a:rPr>
               <a:t>(</a:t>
             </a:r>
             <a:r>
-              <a:rPr lang="nl-NL" sz="2000" noProof="0" dirty="0">
+              <a:rPr lang="nl-NL" sz="2000" dirty="0">
                 <a:solidFill>
                   <a:schemeClr val="accent1">
                     <a:lumMod val="75000"/>
@@ -9815,12 +10022,16 @@
               <a:t>&lt;object&gt;</a:t>
             </a:r>
             <a:r>
-              <a:rPr lang="nl-NL" sz="2000" noProof="0" dirty="0">
+              <a:rPr lang="nl-NL" sz="2000" dirty="0">
                 <a:latin typeface="Courier New" panose="02070309020205020404" pitchFamily="49" charset="0"/>
                 <a:cs typeface="Courier New" panose="02070309020205020404" pitchFamily="49" charset="0"/>
               </a:rPr>
               <a:t>)</a:t>
             </a:r>
+            <a:endParaRPr lang="nl-NL" sz="2000" noProof="0" dirty="0">
+              <a:latin typeface="Courier New" panose="02070309020205020404" pitchFamily="49" charset="0"/>
+              <a:cs typeface="Courier New" panose="02070309020205020404" pitchFamily="49" charset="0"/>
+            </a:endParaRPr>
           </a:p>
           <a:p>
             <a:pPr marL="0" indent="0">
@@ -10018,26 +10229,26 @@
             </a:pPr>
             <a:r>
               <a:rPr lang="nl-NL" sz="2000" dirty="0"/>
+              <a:t>Geeft hulp over het object.</a:t>
+            </a:r>
+          </a:p>
+          <a:p>
+            <a:pPr>
+              <a:spcBef>
+                <a:spcPts val="1000"/>
+              </a:spcBef>
+            </a:pPr>
+            <a:endParaRPr lang="nl-NL" sz="2000" dirty="0"/>
+          </a:p>
+          <a:p>
+            <a:pPr>
+              <a:spcBef>
+                <a:spcPts val="1000"/>
+              </a:spcBef>
+            </a:pPr>
+            <a:r>
+              <a:rPr lang="nl-NL" sz="2000" dirty="0"/>
               <a:t>Geeft type van een object weer.</a:t>
-            </a:r>
-          </a:p>
-          <a:p>
-            <a:pPr>
-              <a:spcBef>
-                <a:spcPts val="1000"/>
-              </a:spcBef>
-            </a:pPr>
-            <a:endParaRPr lang="nl-NL" sz="2000" dirty="0"/>
-          </a:p>
-          <a:p>
-            <a:pPr>
-              <a:spcBef>
-                <a:spcPts val="1000"/>
-              </a:spcBef>
-            </a:pPr>
-            <a:r>
-              <a:rPr lang="nl-NL" sz="2000" dirty="0"/>
-              <a:t>Geeft hulp over het object.</a:t>
             </a:r>
           </a:p>
           <a:p>
@@ -13926,7 +14137,7 @@
             </a:pPr>
             <a:r>
               <a:rPr lang="nl-NL" sz="2000" noProof="0" dirty="0"/>
-              <a:t>Inspringen creëert een nieuwe </a:t>
+              <a:t>Inspringen maakt een nieuwe </a:t>
             </a:r>
             <a:r>
               <a:rPr lang="nl-NL" sz="2000" noProof="0" dirty="0" err="1"/>
@@ -13962,7 +14173,7 @@
             </a:pPr>
             <a:r>
               <a:rPr lang="nl-NL" sz="2000" noProof="0" dirty="0"/>
-              <a:t>Als een naam niet gevonden wordt, zoekt Python hogerop in de hiërarchie.</a:t>
+              <a:t>Als een naam niet in scope is, zoekt Python hogerop in de hiërarchie.</a:t>
             </a:r>
           </a:p>
           <a:p>
@@ -13977,7 +14188,7 @@
             </a:pPr>
             <a:r>
               <a:rPr lang="nl-NL" sz="2000" noProof="0" dirty="0"/>
-              <a:t>De hiërarchische volgorde is:</a:t>
+              <a:t>De hiërarchische is:</a:t>
             </a:r>
           </a:p>
           <a:p>
@@ -14394,7 +14605,24 @@
                 <a:latin typeface="Courier New" panose="02070309020205020404" pitchFamily="49" charset="0"/>
                 <a:cs typeface="Courier New" panose="02070309020205020404" pitchFamily="49" charset="0"/>
               </a:rPr>
-              <a:t>    print(x)</a:t>
+              <a:t>    </a:t>
+            </a:r>
+            <a:r>
+              <a:rPr lang="nl-NL" sz="1600" dirty="0">
+                <a:solidFill>
+                  <a:srgbClr val="7030A0"/>
+                </a:solidFill>
+                <a:latin typeface="Courier New" panose="02070309020205020404" pitchFamily="49" charset="0"/>
+                <a:cs typeface="Courier New" panose="02070309020205020404" pitchFamily="49" charset="0"/>
+              </a:rPr>
+              <a:t>print</a:t>
+            </a:r>
+            <a:r>
+              <a:rPr lang="nl-NL" sz="1600" dirty="0">
+                <a:latin typeface="Courier New" panose="02070309020205020404" pitchFamily="49" charset="0"/>
+                <a:cs typeface="Courier New" panose="02070309020205020404" pitchFamily="49" charset="0"/>
+              </a:rPr>
+              <a:t>(x)</a:t>
             </a:r>
           </a:p>
         </p:txBody>
@@ -15249,11 +15477,38 @@
               <a:buNone/>
             </a:pPr>
             <a:r>
-              <a:rPr lang="en-US" sz="1600" b="1" dirty="0">
-                <a:latin typeface="Courier New" panose="02070309020205020404" pitchFamily="49" charset="0"/>
-                <a:cs typeface="Courier New" panose="02070309020205020404" pitchFamily="49" charset="0"/>
-              </a:rPr>
-              <a:t>from pandas import *</a:t>
+              <a:rPr lang="en-US" sz="1600" dirty="0">
+                <a:solidFill>
+                  <a:srgbClr val="7030A0"/>
+                </a:solidFill>
+                <a:latin typeface="Courier New" panose="02070309020205020404" pitchFamily="49" charset="0"/>
+                <a:cs typeface="Courier New" panose="02070309020205020404" pitchFamily="49" charset="0"/>
+              </a:rPr>
+              <a:t>from</a:t>
+            </a:r>
+            <a:r>
+              <a:rPr lang="en-US" sz="1600" dirty="0">
+                <a:latin typeface="Courier New" panose="02070309020205020404" pitchFamily="49" charset="0"/>
+                <a:cs typeface="Courier New" panose="02070309020205020404" pitchFamily="49" charset="0"/>
+              </a:rPr>
+              <a:t> pandas </a:t>
+            </a:r>
+            <a:r>
+              <a:rPr lang="en-US" sz="1600" dirty="0">
+                <a:solidFill>
+                  <a:srgbClr val="7030A0"/>
+                </a:solidFill>
+                <a:latin typeface="Courier New" panose="02070309020205020404" pitchFamily="49" charset="0"/>
+                <a:cs typeface="Courier New" panose="02070309020205020404" pitchFamily="49" charset="0"/>
+              </a:rPr>
+              <a:t>import</a:t>
+            </a:r>
+            <a:r>
+              <a:rPr lang="en-US" sz="1600" dirty="0">
+                <a:latin typeface="Courier New" panose="02070309020205020404" pitchFamily="49" charset="0"/>
+                <a:cs typeface="Courier New" panose="02070309020205020404" pitchFamily="49" charset="0"/>
+              </a:rPr>
+              <a:t> *</a:t>
             </a:r>
           </a:p>
           <a:p>
@@ -15364,11 +15619,21 @@
               <a:buNone/>
             </a:pPr>
             <a:r>
-              <a:rPr lang="en-US" sz="1600" b="1" dirty="0">
-                <a:latin typeface="Courier New" panose="02070309020205020404" pitchFamily="49" charset="0"/>
-                <a:cs typeface="Courier New" panose="02070309020205020404" pitchFamily="49" charset="0"/>
-              </a:rPr>
-              <a:t>def print(name):</a:t>
+              <a:rPr lang="en-US" sz="1600" dirty="0">
+                <a:solidFill>
+                  <a:srgbClr val="7030A0"/>
+                </a:solidFill>
+                <a:latin typeface="Courier New" panose="02070309020205020404" pitchFamily="49" charset="0"/>
+                <a:cs typeface="Courier New" panose="02070309020205020404" pitchFamily="49" charset="0"/>
+              </a:rPr>
+              <a:t>def </a:t>
+            </a:r>
+            <a:r>
+              <a:rPr lang="en-US" sz="1600" dirty="0">
+                <a:latin typeface="Courier New" panose="02070309020205020404" pitchFamily="49" charset="0"/>
+                <a:cs typeface="Courier New" panose="02070309020205020404" pitchFamily="49" charset="0"/>
+              </a:rPr>
+              <a:t>print(name):</a:t>
             </a:r>
           </a:p>
           <a:p>
@@ -15387,7 +15652,24 @@
                 <a:latin typeface="Courier New" panose="02070309020205020404" pitchFamily="49" charset="0"/>
                 <a:cs typeface="Courier New" panose="02070309020205020404" pitchFamily="49" charset="0"/>
               </a:rPr>
-              <a:t>  print(</a:t>
+              <a:t>  </a:t>
+            </a:r>
+            <a:r>
+              <a:rPr lang="en-US" sz="1600" dirty="0">
+                <a:solidFill>
+                  <a:srgbClr val="7030A0"/>
+                </a:solidFill>
+                <a:latin typeface="Courier New" panose="02070309020205020404" pitchFamily="49" charset="0"/>
+                <a:cs typeface="Courier New" panose="02070309020205020404" pitchFamily="49" charset="0"/>
+              </a:rPr>
+              <a:t>print</a:t>
+            </a:r>
+            <a:r>
+              <a:rPr lang="en-US" sz="1600" dirty="0">
+                <a:latin typeface="Courier New" panose="02070309020205020404" pitchFamily="49" charset="0"/>
+                <a:cs typeface="Courier New" panose="02070309020205020404" pitchFamily="49" charset="0"/>
+              </a:rPr>
+              <a:t>(</a:t>
             </a:r>
             <a:r>
               <a:rPr lang="en-US" sz="1600" dirty="0" err="1">
@@ -15537,11 +15819,28 @@
                 <a:latin typeface="Courier New" panose="02070309020205020404" pitchFamily="49" charset="0"/>
                 <a:cs typeface="Courier New" panose="02070309020205020404" pitchFamily="49" charset="0"/>
               </a:rPr>
-              <a:t>sum = sum([</a:t>
+              <a:t>sum = </a:t>
             </a:r>
             <a:r>
               <a:rPr lang="en-US" sz="1600" dirty="0">
                 <a:solidFill>
+                  <a:srgbClr val="7030A0"/>
+                </a:solidFill>
+                <a:latin typeface="Courier New" panose="02070309020205020404" pitchFamily="49" charset="0"/>
+                <a:cs typeface="Courier New" panose="02070309020205020404" pitchFamily="49" charset="0"/>
+              </a:rPr>
+              <a:t>sum</a:t>
+            </a:r>
+            <a:r>
+              <a:rPr lang="en-US" sz="1600" dirty="0">
+                <a:latin typeface="Courier New" panose="02070309020205020404" pitchFamily="49" charset="0"/>
+                <a:cs typeface="Courier New" panose="02070309020205020404" pitchFamily="49" charset="0"/>
+              </a:rPr>
+              <a:t>([</a:t>
+            </a:r>
+            <a:r>
+              <a:rPr lang="en-US" sz="1600" dirty="0">
+                <a:solidFill>
                   <a:srgbClr val="00B050"/>
                 </a:solidFill>
                 <a:latin typeface="Courier New" panose="02070309020205020404" pitchFamily="49" charset="0"/>
@@ -15604,10 +15903,20 @@
             </a:pPr>
             <a:r>
               <a:rPr lang="en-US" sz="1600" dirty="0">
-                <a:latin typeface="Courier New" panose="02070309020205020404" pitchFamily="49" charset="0"/>
-                <a:cs typeface="Courier New" panose="02070309020205020404" pitchFamily="49" charset="0"/>
-              </a:rPr>
-              <a:t>print(sum)</a:t>
+                <a:solidFill>
+                  <a:srgbClr val="7030A0"/>
+                </a:solidFill>
+                <a:latin typeface="Courier New" panose="02070309020205020404" pitchFamily="49" charset="0"/>
+                <a:cs typeface="Courier New" panose="02070309020205020404" pitchFamily="49" charset="0"/>
+              </a:rPr>
+              <a:t>print</a:t>
+            </a:r>
+            <a:r>
+              <a:rPr lang="en-US" sz="1600" dirty="0">
+                <a:latin typeface="Courier New" panose="02070309020205020404" pitchFamily="49" charset="0"/>
+                <a:cs typeface="Courier New" panose="02070309020205020404" pitchFamily="49" charset="0"/>
+              </a:rPr>
+              <a:t>(sum)</a:t>
             </a:r>
           </a:p>
         </p:txBody>
@@ -21153,7 +21462,7 @@
             </a:pPr>
             <a:r>
               <a:rPr lang="nl-NL" sz="2000" noProof="0" dirty="0"/>
-              <a:t>Methodes:	Logica / gedrag</a:t>
+              <a:t>Methodes:	Logica</a:t>
             </a:r>
           </a:p>
           <a:p>
@@ -21167,8 +21476,34 @@
               <a:buNone/>
             </a:pPr>
             <a:r>
+              <a:rPr lang="nl-NL" sz="2000" dirty="0"/>
+              <a:t>Methodes hebben </a:t>
+            </a:r>
+            <a:r>
+              <a:rPr lang="nl-NL" sz="2000" dirty="0" err="1">
+                <a:latin typeface="Courier New" panose="02070309020205020404" pitchFamily="49" charset="0"/>
+                <a:cs typeface="Courier New" panose="02070309020205020404" pitchFamily="49" charset="0"/>
+              </a:rPr>
+              <a:t>self</a:t>
+            </a:r>
+            <a:r>
+              <a:rPr lang="nl-NL" sz="2000" dirty="0"/>
+              <a:t> als eerste argument.</a:t>
+            </a:r>
+          </a:p>
+          <a:p>
+            <a:pPr marL="0" indent="0">
+              <a:buNone/>
+            </a:pPr>
+            <a:endParaRPr lang="nl-NL" sz="2000" noProof="0" dirty="0"/>
+          </a:p>
+          <a:p>
+            <a:pPr marL="0" indent="0">
+              <a:buNone/>
+            </a:pPr>
+            <a:r>
               <a:rPr lang="nl-NL" sz="2000" noProof="0" dirty="0"/>
-              <a:t>Methodes kunnen bij eigen attributen en methodes via </a:t>
+              <a:t>Gebruik </a:t>
             </a:r>
             <a:r>
               <a:rPr lang="nl-NL" sz="2000" noProof="0" dirty="0" err="1">
@@ -21179,7 +21514,7 @@
             </a:r>
             <a:r>
               <a:rPr lang="nl-NL" sz="2000" noProof="0" dirty="0"/>
-              <a:t>.</a:t>
+              <a:t> om attributen en methodes van de class te benaderen.</a:t>
             </a:r>
           </a:p>
           <a:p>
@@ -21187,27 +21522,6 @@
               <a:buNone/>
             </a:pPr>
             <a:endParaRPr lang="nl-NL" sz="2000" dirty="0"/>
-          </a:p>
-          <a:p>
-            <a:pPr marL="0" indent="0">
-              <a:buNone/>
-            </a:pPr>
-            <a:r>
-              <a:rPr lang="nl-NL" sz="2000" dirty="0"/>
-              <a:t>Elke methode heeft </a:t>
-            </a:r>
-            <a:r>
-              <a:rPr lang="nl-NL" sz="2000" dirty="0" err="1">
-                <a:latin typeface="Courier New" panose="02070309020205020404" pitchFamily="49" charset="0"/>
-                <a:cs typeface="Courier New" panose="02070309020205020404" pitchFamily="49" charset="0"/>
-              </a:rPr>
-              <a:t>self</a:t>
-            </a:r>
-            <a:r>
-              <a:rPr lang="nl-NL" sz="2000" dirty="0"/>
-              <a:t> als argument.</a:t>
-            </a:r>
-            <a:endParaRPr lang="nl-NL" sz="2000" noProof="0" dirty="0"/>
           </a:p>
           <a:p>
             <a:pPr marL="0" indent="0">
@@ -21433,10 +21747,20 @@
             </a:pPr>
             <a:r>
               <a:rPr lang="nl-NL" sz="1400" b="1" dirty="0">
-                <a:latin typeface="Courier New" panose="02070309020205020404" pitchFamily="49" charset="0"/>
-                <a:cs typeface="Courier New" panose="02070309020205020404" pitchFamily="49" charset="0"/>
-              </a:rPr>
-              <a:t>class Person:</a:t>
+                <a:solidFill>
+                  <a:srgbClr val="7030A0"/>
+                </a:solidFill>
+                <a:latin typeface="Courier New" panose="02070309020205020404" pitchFamily="49" charset="0"/>
+                <a:cs typeface="Courier New" panose="02070309020205020404" pitchFamily="49" charset="0"/>
+              </a:rPr>
+              <a:t>class</a:t>
+            </a:r>
+            <a:r>
+              <a:rPr lang="nl-NL" sz="1400" b="1" dirty="0">
+                <a:latin typeface="Courier New" panose="02070309020205020404" pitchFamily="49" charset="0"/>
+                <a:cs typeface="Courier New" panose="02070309020205020404" pitchFamily="49" charset="0"/>
+              </a:rPr>
+              <a:t> Person:</a:t>
             </a:r>
           </a:p>
           <a:p>
@@ -21699,6 +22023,9 @@
             </a:r>
             <a:r>
               <a:rPr lang="nl-NL" sz="1400" dirty="0" err="1">
+                <a:solidFill>
+                  <a:srgbClr val="7030A0"/>
+                </a:solidFill>
                 <a:latin typeface="Courier New" panose="02070309020205020404" pitchFamily="49" charset="0"/>
                 <a:cs typeface="Courier New" panose="02070309020205020404" pitchFamily="49" charset="0"/>
               </a:rPr>
@@ -21756,7 +22083,24 @@
                 <a:latin typeface="Courier New" panose="02070309020205020404" pitchFamily="49" charset="0"/>
                 <a:cs typeface="Courier New" panose="02070309020205020404" pitchFamily="49" charset="0"/>
               </a:rPr>
-              <a:t>    return </a:t>
+              <a:t>    </a:t>
+            </a:r>
+            <a:r>
+              <a:rPr lang="nl-NL" sz="1400" dirty="0">
+                <a:solidFill>
+                  <a:srgbClr val="7030A0"/>
+                </a:solidFill>
+                <a:latin typeface="Courier New" panose="02070309020205020404" pitchFamily="49" charset="0"/>
+                <a:cs typeface="Courier New" panose="02070309020205020404" pitchFamily="49" charset="0"/>
+              </a:rPr>
+              <a:t>return</a:t>
+            </a:r>
+            <a:r>
+              <a:rPr lang="nl-NL" sz="1400" dirty="0">
+                <a:latin typeface="Courier New" panose="02070309020205020404" pitchFamily="49" charset="0"/>
+                <a:cs typeface="Courier New" panose="02070309020205020404" pitchFamily="49" charset="0"/>
+              </a:rPr>
+              <a:t> </a:t>
             </a:r>
             <a:r>
               <a:rPr lang="nl-NL" sz="1400" dirty="0">
@@ -21919,6 +22263,9 @@
             </a:r>
             <a:r>
               <a:rPr lang="nl-NL" sz="1400" dirty="0" err="1">
+                <a:solidFill>
+                  <a:srgbClr val="7030A0"/>
+                </a:solidFill>
                 <a:latin typeface="Courier New" panose="02070309020205020404" pitchFamily="49" charset="0"/>
                 <a:cs typeface="Courier New" panose="02070309020205020404" pitchFamily="49" charset="0"/>
               </a:rPr>
@@ -21976,7 +22323,24 @@
                 <a:latin typeface="Courier New" panose="02070309020205020404" pitchFamily="49" charset="0"/>
                 <a:cs typeface="Courier New" panose="02070309020205020404" pitchFamily="49" charset="0"/>
               </a:rPr>
-              <a:t>    return </a:t>
+              <a:t>    </a:t>
+            </a:r>
+            <a:r>
+              <a:rPr lang="nl-NL" sz="1400" dirty="0">
+                <a:solidFill>
+                  <a:srgbClr val="7030A0"/>
+                </a:solidFill>
+                <a:latin typeface="Courier New" panose="02070309020205020404" pitchFamily="49" charset="0"/>
+                <a:cs typeface="Courier New" panose="02070309020205020404" pitchFamily="49" charset="0"/>
+              </a:rPr>
+              <a:t>return</a:t>
+            </a:r>
+            <a:r>
+              <a:rPr lang="nl-NL" sz="1400" dirty="0">
+                <a:latin typeface="Courier New" panose="02070309020205020404" pitchFamily="49" charset="0"/>
+                <a:cs typeface="Courier New" panose="02070309020205020404" pitchFamily="49" charset="0"/>
+              </a:rPr>
+              <a:t> </a:t>
             </a:r>
             <a:r>
               <a:rPr lang="nl-NL" sz="1400" dirty="0" err="1">
@@ -22210,11 +22574,11 @@
             </a:pPr>
             <a:r>
               <a:rPr lang="nl-NL" sz="2000" noProof="0" dirty="0"/>
-              <a:t>Blauwdruk, definieert </a:t>
+              <a:t>Blauwdruk met definities van </a:t>
             </a:r>
             <a:r>
               <a:rPr lang="nl-NL" sz="2000" dirty="0"/>
-              <a:t>eigenschappen en methodes.</a:t>
+              <a:t>attributen en methodes.</a:t>
             </a:r>
           </a:p>
           <a:p>
@@ -22246,14 +22610,8 @@
             </a:pPr>
             <a:r>
               <a:rPr lang="nl-NL" sz="2000" dirty="0"/>
-              <a:t>Afdruk van de blauwdruk, eigen unieke kopie. Initialiseren; class aanroepen.</a:t>
-            </a:r>
-          </a:p>
-          <a:p>
-            <a:pPr marL="0" indent="0">
-              <a:buNone/>
-            </a:pPr>
-            <a:endParaRPr lang="nl-NL" sz="2000" noProof="0" dirty="0"/>
+              <a:t>Afdruk van de blauwdruk, initialiseren door class aan te roepen.</a:t>
+            </a:r>
           </a:p>
           <a:p>
             <a:pPr marL="0" indent="0">
@@ -22269,6 +22627,12 @@
               <a:rPr lang="nl-NL" sz="2000" noProof="0" dirty="0"/>
               <a:t>Unieke objecten, maar…</a:t>
             </a:r>
+          </a:p>
+          <a:p>
+            <a:pPr marL="0" indent="0">
+              <a:buNone/>
+            </a:pPr>
+            <a:endParaRPr lang="nl-NL" sz="2000" noProof="0" dirty="0"/>
           </a:p>
           <a:p>
             <a:pPr marL="0" indent="0">
@@ -22509,10 +22873,20 @@
             </a:pPr>
             <a:r>
               <a:rPr lang="en-US" sz="1400" b="1" dirty="0">
-                <a:latin typeface="Courier New" panose="02070309020205020404" pitchFamily="49" charset="0"/>
-                <a:cs typeface="Courier New" panose="02070309020205020404" pitchFamily="49" charset="0"/>
-              </a:rPr>
-              <a:t>class Person:</a:t>
+                <a:solidFill>
+                  <a:srgbClr val="7030A0"/>
+                </a:solidFill>
+                <a:latin typeface="Courier New" panose="02070309020205020404" pitchFamily="49" charset="0"/>
+                <a:cs typeface="Courier New" panose="02070309020205020404" pitchFamily="49" charset="0"/>
+              </a:rPr>
+              <a:t>class</a:t>
+            </a:r>
+            <a:r>
+              <a:rPr lang="en-US" sz="1400" b="1" dirty="0">
+                <a:latin typeface="Courier New" panose="02070309020205020404" pitchFamily="49" charset="0"/>
+                <a:cs typeface="Courier New" panose="02070309020205020404" pitchFamily="49" charset="0"/>
+              </a:rPr>
+              <a:t> Person:</a:t>
             </a:r>
           </a:p>
           <a:p>
@@ -22903,7 +23277,7 @@
                 <a:latin typeface="Courier New" panose="02070309020205020404" pitchFamily="49" charset="0"/>
                 <a:cs typeface="Courier New" panose="02070309020205020404" pitchFamily="49" charset="0"/>
               </a:rPr>
-              <a:t># Sharing the same attribute values.</a:t>
+              <a:t># Attributes are the same...</a:t>
             </a:r>
           </a:p>
           <a:p>
@@ -23072,15 +23446,7 @@
             </a:pPr>
             <a:r>
               <a:rPr lang="nl-NL" sz="2000" b="1" noProof="0" dirty="0"/>
-              <a:t>Double </a:t>
-            </a:r>
-            <a:r>
-              <a:rPr lang="nl-NL" sz="2000" b="1" noProof="0" dirty="0" err="1"/>
-              <a:t>underscore</a:t>
-            </a:r>
-            <a:r>
-              <a:rPr lang="nl-NL" sz="2000" b="1" noProof="0" dirty="0"/>
-              <a:t> </a:t>
+              <a:t>Double underscore </a:t>
             </a:r>
             <a:r>
               <a:rPr lang="nl-NL" sz="2000" b="1" noProof="0" dirty="0" err="1"/>
@@ -23408,10 +23774,20 @@
             </a:pPr>
             <a:r>
               <a:rPr lang="en-US" sz="1400" b="1" dirty="0">
-                <a:latin typeface="Courier New" panose="02070309020205020404" pitchFamily="49" charset="0"/>
-                <a:cs typeface="Courier New" panose="02070309020205020404" pitchFamily="49" charset="0"/>
-              </a:rPr>
-              <a:t>class Person:</a:t>
+                <a:solidFill>
+                  <a:srgbClr val="7030A0"/>
+                </a:solidFill>
+                <a:latin typeface="Courier New" panose="02070309020205020404" pitchFamily="49" charset="0"/>
+                <a:cs typeface="Courier New" panose="02070309020205020404" pitchFamily="49" charset="0"/>
+              </a:rPr>
+              <a:t>class</a:t>
+            </a:r>
+            <a:r>
+              <a:rPr lang="en-US" sz="1400" b="1" dirty="0">
+                <a:latin typeface="Courier New" panose="02070309020205020404" pitchFamily="49" charset="0"/>
+                <a:cs typeface="Courier New" panose="02070309020205020404" pitchFamily="49" charset="0"/>
+              </a:rPr>
+              <a:t> Person:</a:t>
             </a:r>
           </a:p>
           <a:p>
@@ -23446,7 +23822,24 @@
                 <a:latin typeface="Courier New" panose="02070309020205020404" pitchFamily="49" charset="0"/>
                 <a:cs typeface="Courier New" panose="02070309020205020404" pitchFamily="49" charset="0"/>
               </a:rPr>
-              <a:t>  def </a:t>
+              <a:t>  </a:t>
+            </a:r>
+            <a:r>
+              <a:rPr lang="en-US" sz="1400" dirty="0">
+                <a:solidFill>
+                  <a:srgbClr val="7030A0"/>
+                </a:solidFill>
+                <a:latin typeface="Courier New" panose="02070309020205020404" pitchFamily="49" charset="0"/>
+                <a:cs typeface="Courier New" panose="02070309020205020404" pitchFamily="49" charset="0"/>
+              </a:rPr>
+              <a:t>def</a:t>
+            </a:r>
+            <a:r>
+              <a:rPr lang="en-US" sz="1400" dirty="0">
+                <a:latin typeface="Courier New" panose="02070309020205020404" pitchFamily="49" charset="0"/>
+                <a:cs typeface="Courier New" panose="02070309020205020404" pitchFamily="49" charset="0"/>
+              </a:rPr>
+              <a:t> </a:t>
             </a:r>
             <a:r>
               <a:rPr lang="en-US" sz="1400" b="1" dirty="0">
@@ -23610,7 +24003,24 @@
                 <a:latin typeface="Courier New" panose="02070309020205020404" pitchFamily="49" charset="0"/>
                 <a:cs typeface="Courier New" panose="02070309020205020404" pitchFamily="49" charset="0"/>
               </a:rPr>
-              <a:t>  def </a:t>
+              <a:t>  </a:t>
+            </a:r>
+            <a:r>
+              <a:rPr lang="en-US" sz="1400" dirty="0">
+                <a:solidFill>
+                  <a:srgbClr val="7030A0"/>
+                </a:solidFill>
+                <a:latin typeface="Courier New" panose="02070309020205020404" pitchFamily="49" charset="0"/>
+                <a:cs typeface="Courier New" panose="02070309020205020404" pitchFamily="49" charset="0"/>
+              </a:rPr>
+              <a:t>def</a:t>
+            </a:r>
+            <a:r>
+              <a:rPr lang="en-US" sz="1400" dirty="0">
+                <a:latin typeface="Courier New" panose="02070309020205020404" pitchFamily="49" charset="0"/>
+                <a:cs typeface="Courier New" panose="02070309020205020404" pitchFamily="49" charset="0"/>
+              </a:rPr>
+              <a:t> </a:t>
             </a:r>
             <a:r>
               <a:rPr lang="en-US" sz="1400" b="1" dirty="0">
@@ -23667,7 +24077,24 @@
                 <a:latin typeface="Courier New" panose="02070309020205020404" pitchFamily="49" charset="0"/>
                 <a:cs typeface="Courier New" panose="02070309020205020404" pitchFamily="49" charset="0"/>
               </a:rPr>
-              <a:t>    return </a:t>
+              <a:t>    </a:t>
+            </a:r>
+            <a:r>
+              <a:rPr lang="en-US" sz="1400" dirty="0">
+                <a:solidFill>
+                  <a:srgbClr val="7030A0"/>
+                </a:solidFill>
+                <a:latin typeface="Courier New" panose="02070309020205020404" pitchFamily="49" charset="0"/>
+                <a:cs typeface="Courier New" panose="02070309020205020404" pitchFamily="49" charset="0"/>
+              </a:rPr>
+              <a:t>return</a:t>
+            </a:r>
+            <a:r>
+              <a:rPr lang="en-US" sz="1400" dirty="0">
+                <a:latin typeface="Courier New" panose="02070309020205020404" pitchFamily="49" charset="0"/>
+                <a:cs typeface="Courier New" panose="02070309020205020404" pitchFamily="49" charset="0"/>
+              </a:rPr>
+              <a:t> </a:t>
             </a:r>
             <a:r>
               <a:rPr lang="en-US" sz="1400" dirty="0">
@@ -24015,10 +24442,20 @@
             </a:pPr>
             <a:r>
               <a:rPr lang="en-US" sz="1400" dirty="0">
-                <a:latin typeface="Courier New" panose="02070309020205020404" pitchFamily="49" charset="0"/>
-                <a:cs typeface="Courier New" panose="02070309020205020404" pitchFamily="49" charset="0"/>
-              </a:rPr>
-              <a:t>print(</a:t>
+                <a:solidFill>
+                  <a:srgbClr val="7030A0"/>
+                </a:solidFill>
+                <a:latin typeface="Courier New" panose="02070309020205020404" pitchFamily="49" charset="0"/>
+                <a:cs typeface="Courier New" panose="02070309020205020404" pitchFamily="49" charset="0"/>
+              </a:rPr>
+              <a:t>print</a:t>
+            </a:r>
+            <a:r>
+              <a:rPr lang="en-US" sz="1400" dirty="0">
+                <a:latin typeface="Courier New" panose="02070309020205020404" pitchFamily="49" charset="0"/>
+                <a:cs typeface="Courier New" panose="02070309020205020404" pitchFamily="49" charset="0"/>
+              </a:rPr>
+              <a:t>(</a:t>
             </a:r>
             <a:r>
               <a:rPr lang="en-US" sz="1400" dirty="0" err="1">
@@ -24134,15 +24571,19 @@
           <a:lstStyle/>
           <a:p>
             <a:r>
-              <a:rPr lang="nl-NL" sz="3600" noProof="0" dirty="0" err="1"/>
-              <a:t>Dunder</a:t>
-            </a:r>
-            <a:r>
-              <a:rPr lang="nl-NL" sz="3600" noProof="0" dirty="0"/>
+              <a:rPr lang="nl-NL" sz="3600" dirty="0"/>
+              <a:t>Meer </a:t>
+            </a:r>
+            <a:r>
+              <a:rPr lang="nl-NL" sz="3600" dirty="0" err="1"/>
+              <a:t>dunder</a:t>
+            </a:r>
+            <a:r>
+              <a:rPr lang="nl-NL" sz="3600" dirty="0"/>
               <a:t> </a:t>
             </a:r>
             <a:r>
-              <a:rPr lang="nl-NL" sz="3600" noProof="0" dirty="0" err="1"/>
+              <a:rPr lang="nl-NL" sz="3600" dirty="0" err="1"/>
               <a:t>methods</a:t>
             </a:r>
             <a:endParaRPr lang="nl-NL" sz="3600" noProof="0" dirty="0"/>
@@ -24181,12 +24622,100 @@
               <a:buNone/>
             </a:pPr>
             <a:r>
+              <a:rPr lang="nl-NL" sz="2000" b="1" noProof="0" dirty="0">
+                <a:latin typeface="Courier New" panose="02070309020205020404" pitchFamily="49" charset="0"/>
+                <a:cs typeface="Courier New" panose="02070309020205020404" pitchFamily="49" charset="0"/>
+              </a:rPr>
+              <a:t>__</a:t>
+            </a:r>
+            <a:r>
+              <a:rPr lang="nl-NL" sz="2000" b="1" noProof="0" dirty="0" err="1">
+                <a:latin typeface="Courier New" panose="02070309020205020404" pitchFamily="49" charset="0"/>
+                <a:cs typeface="Courier New" panose="02070309020205020404" pitchFamily="49" charset="0"/>
+              </a:rPr>
+              <a:t>add</a:t>
+            </a:r>
+            <a:r>
+              <a:rPr lang="nl-NL" sz="2000" b="1" noProof="0" dirty="0">
+                <a:latin typeface="Courier New" panose="02070309020205020404" pitchFamily="49" charset="0"/>
+                <a:cs typeface="Courier New" panose="02070309020205020404" pitchFamily="49" charset="0"/>
+              </a:rPr>
+              <a:t>__</a:t>
+            </a:r>
+          </a:p>
+          <a:p>
+            <a:pPr marL="0" indent="0">
+              <a:buNone/>
+            </a:pPr>
+            <a:r>
+              <a:rPr lang="nl-NL" sz="2000" dirty="0">
+                <a:cs typeface="Courier New" panose="02070309020205020404" pitchFamily="49" charset="0"/>
+              </a:rPr>
+              <a:t>Aangeroepen door de </a:t>
+            </a:r>
+            <a:r>
+              <a:rPr lang="nl-NL" sz="2000" dirty="0">
+                <a:latin typeface="Courier New" panose="02070309020205020404" pitchFamily="49" charset="0"/>
+                <a:cs typeface="Courier New" panose="02070309020205020404" pitchFamily="49" charset="0"/>
+              </a:rPr>
+              <a:t>+</a:t>
+            </a:r>
+            <a:r>
+              <a:rPr lang="nl-NL" sz="2000" dirty="0">
+                <a:cs typeface="Courier New" panose="02070309020205020404" pitchFamily="49" charset="0"/>
+              </a:rPr>
+              <a:t> operator.</a:t>
+            </a:r>
+          </a:p>
+          <a:p>
+            <a:pPr marL="0" indent="0">
+              <a:buNone/>
+            </a:pPr>
+            <a:endParaRPr lang="nl-NL" sz="2000" dirty="0">
+              <a:cs typeface="Courier New" panose="02070309020205020404" pitchFamily="49" charset="0"/>
+            </a:endParaRPr>
+          </a:p>
+          <a:p>
+            <a:pPr marL="0" indent="0">
+              <a:buNone/>
+            </a:pPr>
+            <a:endParaRPr lang="nl-NL" sz="2000" dirty="0"/>
+          </a:p>
+          <a:p>
+            <a:pPr marL="0" indent="0">
+              <a:buNone/>
+            </a:pPr>
+            <a:endParaRPr lang="nl-NL" sz="2000" dirty="0"/>
+          </a:p>
+          <a:p>
+            <a:pPr marL="0" indent="0">
+              <a:buNone/>
+            </a:pPr>
+            <a:endParaRPr lang="nl-NL" sz="2000" dirty="0"/>
+          </a:p>
+          <a:p>
+            <a:pPr marL="0" indent="0">
+              <a:buNone/>
+            </a:pPr>
+            <a:r>
+              <a:rPr lang="nl-NL" sz="2000" dirty="0"/>
+              <a:t>Data model met alle </a:t>
+            </a:r>
+            <a:r>
               <a:rPr lang="nl-NL" sz="2000" dirty="0" err="1"/>
-              <a:t>Iterable</a:t>
+              <a:t>dunder</a:t>
             </a:r>
             <a:r>
               <a:rPr lang="nl-NL" sz="2000" dirty="0"/>
-              <a:t>: een object waar je overheen kunt loop-en.</a:t>
+              <a:t> </a:t>
+            </a:r>
+            <a:r>
+              <a:rPr lang="nl-NL" sz="2000" dirty="0" err="1"/>
+              <a:t>methods</a:t>
+            </a:r>
+            <a:r>
+              <a:rPr lang="nl-NL" sz="2000" dirty="0"/>
+              <a:t>:</a:t>
             </a:r>
             <a:endParaRPr lang="nl-NL" sz="2000" noProof="0" dirty="0"/>
           </a:p>
@@ -24194,79 +24723,37 @@
             <a:pPr marL="0" indent="0">
               <a:buNone/>
             </a:pPr>
+            <a:r>
+              <a:rPr lang="nl-NL" sz="2000" dirty="0">
+                <a:hlinkClick r:id="rId3"/>
+              </a:rPr>
+              <a:t>https://docs.python.org/3/reference/datamodel.html#special-method-names</a:t>
+            </a:r>
+            <a:endParaRPr lang="nl-NL" sz="2000" noProof="0" dirty="0"/>
+          </a:p>
+          <a:p>
+            <a:pPr marL="0" indent="0">
+              <a:buNone/>
+            </a:pPr>
             <a:endParaRPr lang="nl-NL" sz="2000" dirty="0"/>
           </a:p>
           <a:p>
             <a:pPr marL="0" indent="0">
               <a:buNone/>
             </a:pPr>
-            <a:r>
-              <a:rPr lang="nl-NL" sz="2000" b="1" noProof="0" dirty="0">
-                <a:latin typeface="Courier New" panose="02070309020205020404" pitchFamily="49" charset="0"/>
-                <a:cs typeface="Courier New" panose="02070309020205020404" pitchFamily="49" charset="0"/>
-              </a:rPr>
-              <a:t>__</a:t>
-            </a:r>
-            <a:r>
-              <a:rPr lang="nl-NL" sz="2000" b="1" noProof="0" dirty="0" err="1">
-                <a:latin typeface="Courier New" panose="02070309020205020404" pitchFamily="49" charset="0"/>
-                <a:cs typeface="Courier New" panose="02070309020205020404" pitchFamily="49" charset="0"/>
-              </a:rPr>
-              <a:t>iter</a:t>
-            </a:r>
-            <a:r>
-              <a:rPr lang="nl-NL" sz="2000" b="1" noProof="0" dirty="0">
-                <a:latin typeface="Courier New" panose="02070309020205020404" pitchFamily="49" charset="0"/>
-                <a:cs typeface="Courier New" panose="02070309020205020404" pitchFamily="49" charset="0"/>
-              </a:rPr>
-              <a:t>__</a:t>
-            </a:r>
-            <a:endParaRPr lang="nl-NL" sz="2000" b="1" noProof="0" dirty="0"/>
-          </a:p>
-          <a:p>
-            <a:pPr marL="0" indent="0">
-              <a:buNone/>
-            </a:pPr>
-            <a:r>
-              <a:rPr lang="nl-NL" sz="2000" noProof="0" dirty="0"/>
-              <a:t>Aangeroepen als itereren begint, geeft object zelf terug.</a:t>
-            </a:r>
-          </a:p>
-          <a:p>
-            <a:pPr marL="0" indent="0">
-              <a:buNone/>
-            </a:pPr>
             <a:endParaRPr lang="nl-NL" sz="2000" dirty="0"/>
           </a:p>
           <a:p>
             <a:pPr marL="0" indent="0">
               <a:buNone/>
             </a:pPr>
-            <a:r>
-              <a:rPr lang="nl-NL" sz="2000" b="1" noProof="0" dirty="0">
-                <a:latin typeface="Courier New" panose="02070309020205020404" pitchFamily="49" charset="0"/>
-                <a:cs typeface="Courier New" panose="02070309020205020404" pitchFamily="49" charset="0"/>
-              </a:rPr>
-              <a:t>__next__</a:t>
-            </a:r>
-            <a:endParaRPr lang="nl-NL" sz="2000" b="1" noProof="0" dirty="0"/>
-          </a:p>
-          <a:p>
-            <a:pPr marL="0" indent="0">
-              <a:buNone/>
-            </a:pPr>
-            <a:r>
-              <a:rPr lang="nl-NL" sz="2000" dirty="0"/>
-              <a:t>Geeft het volgende item terug of </a:t>
-            </a:r>
-            <a:r>
-              <a:rPr lang="nl-NL" sz="2000" dirty="0" err="1"/>
-              <a:t>StopIteration</a:t>
-            </a:r>
-            <a:r>
-              <a:rPr lang="nl-NL" sz="2000" dirty="0"/>
-              <a:t> als de items op zijn.</a:t>
-            </a:r>
+            <a:endParaRPr lang="nl-NL" sz="2000" dirty="0"/>
+          </a:p>
+          <a:p>
+            <a:pPr marL="0" indent="0">
+              <a:buNone/>
+            </a:pPr>
+            <a:endParaRPr lang="nl-NL" sz="2000" dirty="0"/>
           </a:p>
         </p:txBody>
       </p:sp>
@@ -24286,8 +24773,8 @@
         </p:nvSpPr>
         <p:spPr>
           <a:xfrm>
-            <a:off x="6095999" y="1456267"/>
-            <a:ext cx="5063067" cy="4720696"/>
+            <a:off x="6096000" y="1456267"/>
+            <a:ext cx="5327651" cy="4720696"/>
           </a:xfrm>
           <a:prstGeom prst="rect">
             <a:avLst/>
@@ -24295,7 +24782,7 @@
         </p:spPr>
         <p:txBody>
           <a:bodyPr vert="horz" lIns="91440" tIns="45720" rIns="91440" bIns="45720" rtlCol="0">
-            <a:normAutofit/>
+            <a:normAutofit fontScale="92500" lnSpcReduction="10000"/>
           </a:bodyPr>
           <a:lstStyle>
             <a:lvl1pPr marL="228600" indent="-228600" algn="l" defTabSz="914400" rtl="0" eaLnBrk="1" latinLnBrk="0" hangingPunct="1">
@@ -24464,7 +24951,7 @@
           <a:p>
             <a:pPr marL="0" indent="0">
               <a:lnSpc>
-                <a:spcPct val="100000"/>
+                <a:spcPct val="120000"/>
               </a:lnSpc>
               <a:spcBef>
                 <a:spcPts val="0"/>
@@ -24473,31 +24960,27 @@
               <a:buNone/>
             </a:pPr>
             <a:r>
-              <a:rPr lang="en-US" sz="1200" b="1" dirty="0">
-                <a:latin typeface="Courier New" panose="02070309020205020404" pitchFamily="49" charset="0"/>
-                <a:cs typeface="Courier New" panose="02070309020205020404" pitchFamily="49" charset="0"/>
-              </a:rPr>
-              <a:t>class </a:t>
-            </a:r>
-            <a:r>
-              <a:rPr lang="en-US" sz="1200" b="1" dirty="0" err="1">
-                <a:latin typeface="Courier New" panose="02070309020205020404" pitchFamily="49" charset="0"/>
-                <a:cs typeface="Courier New" panose="02070309020205020404" pitchFamily="49" charset="0"/>
-              </a:rPr>
-              <a:t>RandomLetters</a:t>
-            </a:r>
-            <a:r>
-              <a:rPr lang="en-US" sz="1200" b="1" dirty="0">
-                <a:latin typeface="Courier New" panose="02070309020205020404" pitchFamily="49" charset="0"/>
-                <a:cs typeface="Courier New" panose="02070309020205020404" pitchFamily="49" charset="0"/>
-              </a:rPr>
-              <a:t>:</a:t>
-            </a:r>
-          </a:p>
-          <a:p>
-            <a:pPr marL="0" indent="0">
-              <a:lnSpc>
-                <a:spcPct val="100000"/>
+              <a:rPr lang="en-US" sz="1300" b="1" dirty="0">
+                <a:solidFill>
+                  <a:srgbClr val="7030A0"/>
+                </a:solidFill>
+                <a:latin typeface="Courier New" panose="02070309020205020404" pitchFamily="49" charset="0"/>
+                <a:cs typeface="Courier New" panose="02070309020205020404" pitchFamily="49" charset="0"/>
+              </a:rPr>
+              <a:t>class</a:t>
+            </a:r>
+            <a:r>
+              <a:rPr lang="en-US" sz="1300" b="1" dirty="0">
+                <a:latin typeface="Courier New" panose="02070309020205020404" pitchFamily="49" charset="0"/>
+                <a:cs typeface="Courier New" panose="02070309020205020404" pitchFamily="49" charset="0"/>
+              </a:rPr>
+              <a:t> Vector2D:</a:t>
+            </a:r>
+          </a:p>
+          <a:p>
+            <a:pPr marL="0" indent="0">
+              <a:lnSpc>
+                <a:spcPct val="120000"/>
               </a:lnSpc>
               <a:spcBef>
                 <a:spcPts val="0"/>
@@ -24505,7 +24988,7 @@
               <a:buFont typeface="Arial" panose="020B0604020202020204" pitchFamily="34" charset="0"/>
               <a:buNone/>
             </a:pPr>
-            <a:endParaRPr lang="en-US" sz="1200" dirty="0">
+            <a:endParaRPr lang="en-US" sz="1300" b="1" dirty="0">
               <a:latin typeface="Courier New" panose="02070309020205020404" pitchFamily="49" charset="0"/>
               <a:cs typeface="Courier New" panose="02070309020205020404" pitchFamily="49" charset="0"/>
             </a:endParaRPr>
@@ -24513,7 +24996,7 @@
           <a:p>
             <a:pPr marL="0" indent="0">
               <a:lnSpc>
-                <a:spcPct val="100000"/>
+                <a:spcPct val="120000"/>
               </a:lnSpc>
               <a:spcBef>
                 <a:spcPts val="0"/>
@@ -24522,45 +25005,62 @@
               <a:buNone/>
             </a:pPr>
             <a:r>
-              <a:rPr lang="en-US" sz="1200" dirty="0">
-                <a:latin typeface="Courier New" panose="02070309020205020404" pitchFamily="49" charset="0"/>
-                <a:cs typeface="Courier New" panose="02070309020205020404" pitchFamily="49" charset="0"/>
-              </a:rPr>
-              <a:t>  def </a:t>
-            </a:r>
-            <a:r>
-              <a:rPr lang="en-US" sz="1200" b="1" dirty="0">
-                <a:latin typeface="Courier New" panose="02070309020205020404" pitchFamily="49" charset="0"/>
-                <a:cs typeface="Courier New" panose="02070309020205020404" pitchFamily="49" charset="0"/>
-              </a:rPr>
-              <a:t>__</a:t>
-            </a:r>
-            <a:r>
-              <a:rPr lang="en-US" sz="1200" b="1" dirty="0" err="1">
+              <a:rPr lang="en-US" sz="1300" dirty="0">
+                <a:latin typeface="Courier New" panose="02070309020205020404" pitchFamily="49" charset="0"/>
+                <a:cs typeface="Courier New" panose="02070309020205020404" pitchFamily="49" charset="0"/>
+              </a:rPr>
+              <a:t>  </a:t>
+            </a:r>
+            <a:r>
+              <a:rPr lang="en-US" sz="1300" dirty="0">
+                <a:solidFill>
+                  <a:srgbClr val="7030A0"/>
+                </a:solidFill>
+                <a:latin typeface="Courier New" panose="02070309020205020404" pitchFamily="49" charset="0"/>
+                <a:cs typeface="Courier New" panose="02070309020205020404" pitchFamily="49" charset="0"/>
+              </a:rPr>
+              <a:t>def</a:t>
+            </a:r>
+            <a:r>
+              <a:rPr lang="en-US" sz="1300" dirty="0">
+                <a:latin typeface="Courier New" panose="02070309020205020404" pitchFamily="49" charset="0"/>
+                <a:cs typeface="Courier New" panose="02070309020205020404" pitchFamily="49" charset="0"/>
+              </a:rPr>
+              <a:t> __</a:t>
+            </a:r>
+            <a:r>
+              <a:rPr lang="en-US" sz="1300" dirty="0" err="1">
                 <a:latin typeface="Courier New" panose="02070309020205020404" pitchFamily="49" charset="0"/>
                 <a:cs typeface="Courier New" panose="02070309020205020404" pitchFamily="49" charset="0"/>
               </a:rPr>
               <a:t>init</a:t>
             </a:r>
             <a:r>
-              <a:rPr lang="en-US" sz="1200" b="1" dirty="0">
-                <a:latin typeface="Courier New" panose="02070309020205020404" pitchFamily="49" charset="0"/>
-                <a:cs typeface="Courier New" panose="02070309020205020404" pitchFamily="49" charset="0"/>
-              </a:rPr>
-              <a:t>__</a:t>
-            </a:r>
-            <a:r>
-              <a:rPr lang="en-US" sz="1200" dirty="0">
-                <a:latin typeface="Courier New" panose="02070309020205020404" pitchFamily="49" charset="0"/>
-                <a:cs typeface="Courier New" panose="02070309020205020404" pitchFamily="49" charset="0"/>
-              </a:rPr>
-              <a:t>(self, n): </a:t>
-            </a:r>
-          </a:p>
-          <a:p>
-            <a:pPr marL="0" indent="0">
-              <a:lnSpc>
-                <a:spcPct val="100000"/>
+              <a:rPr lang="en-US" sz="1300" dirty="0">
+                <a:latin typeface="Courier New" panose="02070309020205020404" pitchFamily="49" charset="0"/>
+                <a:cs typeface="Courier New" panose="02070309020205020404" pitchFamily="49" charset="0"/>
+              </a:rPr>
+              <a:t>__(self, dx, </a:t>
+            </a:r>
+            <a:r>
+              <a:rPr lang="en-US" sz="1300" dirty="0" err="1">
+                <a:latin typeface="Courier New" panose="02070309020205020404" pitchFamily="49" charset="0"/>
+                <a:cs typeface="Courier New" panose="02070309020205020404" pitchFamily="49" charset="0"/>
+              </a:rPr>
+              <a:t>dy</a:t>
+            </a:r>
+            <a:r>
+              <a:rPr lang="en-US" sz="1300" dirty="0">
+                <a:latin typeface="Courier New" panose="02070309020205020404" pitchFamily="49" charset="0"/>
+                <a:cs typeface="Courier New" panose="02070309020205020404" pitchFamily="49" charset="0"/>
+              </a:rPr>
+              <a:t>): </a:t>
+            </a:r>
+          </a:p>
+          <a:p>
+            <a:pPr marL="0" indent="0">
+              <a:lnSpc>
+                <a:spcPct val="120000"/>
               </a:lnSpc>
               <a:spcBef>
                 <a:spcPts val="0"/>
@@ -24569,31 +25069,31 @@
               <a:buNone/>
             </a:pPr>
             <a:r>
-              <a:rPr lang="en-US" sz="1200" dirty="0">
+              <a:rPr lang="en-US" sz="1300" dirty="0">
                 <a:latin typeface="Courier New" panose="02070309020205020404" pitchFamily="49" charset="0"/>
                 <a:cs typeface="Courier New" panose="02070309020205020404" pitchFamily="49" charset="0"/>
               </a:rPr>
               <a:t>    </a:t>
             </a:r>
             <a:r>
-              <a:rPr lang="en-US" sz="1200" dirty="0" err="1">
-                <a:latin typeface="Courier New" panose="02070309020205020404" pitchFamily="49" charset="0"/>
-                <a:cs typeface="Courier New" panose="02070309020205020404" pitchFamily="49" charset="0"/>
-              </a:rPr>
-              <a:t>self.n</a:t>
-            </a:r>
-            <a:r>
-              <a:rPr lang="en-US" sz="1200" dirty="0">
-                <a:latin typeface="Courier New" panose="02070309020205020404" pitchFamily="49" charset="0"/>
-                <a:cs typeface="Courier New" panose="02070309020205020404" pitchFamily="49" charset="0"/>
-              </a:rPr>
-              <a:t> = n</a:t>
-            </a:r>
-          </a:p>
-          <a:p>
-            <a:pPr marL="0" indent="0">
-              <a:lnSpc>
-                <a:spcPct val="100000"/>
+              <a:rPr lang="en-US" sz="1300" dirty="0" err="1">
+                <a:latin typeface="Courier New" panose="02070309020205020404" pitchFamily="49" charset="0"/>
+                <a:cs typeface="Courier New" panose="02070309020205020404" pitchFamily="49" charset="0"/>
+              </a:rPr>
+              <a:t>self.dx</a:t>
+            </a:r>
+            <a:r>
+              <a:rPr lang="en-US" sz="1300" dirty="0">
+                <a:latin typeface="Courier New" panose="02070309020205020404" pitchFamily="49" charset="0"/>
+                <a:cs typeface="Courier New" panose="02070309020205020404" pitchFamily="49" charset="0"/>
+              </a:rPr>
+              <a:t> = dx</a:t>
+            </a:r>
+          </a:p>
+          <a:p>
+            <a:pPr marL="0" indent="0">
+              <a:lnSpc>
+                <a:spcPct val="120000"/>
               </a:lnSpc>
               <a:spcBef>
                 <a:spcPts val="0"/>
@@ -24601,7 +25101,35 @@
               <a:buFont typeface="Arial" panose="020B0604020202020204" pitchFamily="34" charset="0"/>
               <a:buNone/>
             </a:pPr>
-            <a:endParaRPr lang="en-US" sz="1200" b="1" dirty="0">
+            <a:r>
+              <a:rPr lang="en-US" sz="1300" dirty="0">
+                <a:latin typeface="Courier New" panose="02070309020205020404" pitchFamily="49" charset="0"/>
+                <a:cs typeface="Courier New" panose="02070309020205020404" pitchFamily="49" charset="0"/>
+              </a:rPr>
+              <a:t>    </a:t>
+            </a:r>
+            <a:r>
+              <a:rPr lang="en-US" sz="1300" dirty="0" err="1">
+                <a:latin typeface="Courier New" panose="02070309020205020404" pitchFamily="49" charset="0"/>
+                <a:cs typeface="Courier New" panose="02070309020205020404" pitchFamily="49" charset="0"/>
+              </a:rPr>
+              <a:t>self.dy</a:t>
+            </a:r>
+            <a:r>
+              <a:rPr lang="en-US" sz="1300" dirty="0">
+                <a:latin typeface="Courier New" panose="02070309020205020404" pitchFamily="49" charset="0"/>
+                <a:cs typeface="Courier New" panose="02070309020205020404" pitchFamily="49" charset="0"/>
+              </a:rPr>
+              <a:t> = </a:t>
+            </a:r>
+            <a:r>
+              <a:rPr lang="en-US" sz="1300" dirty="0" err="1">
+                <a:latin typeface="Courier New" panose="02070309020205020404" pitchFamily="49" charset="0"/>
+                <a:cs typeface="Courier New" panose="02070309020205020404" pitchFamily="49" charset="0"/>
+              </a:rPr>
+              <a:t>dy</a:t>
+            </a:r>
+            <a:endParaRPr lang="en-US" sz="1300" dirty="0">
               <a:latin typeface="Courier New" panose="02070309020205020404" pitchFamily="49" charset="0"/>
               <a:cs typeface="Courier New" panose="02070309020205020404" pitchFamily="49" charset="0"/>
             </a:endParaRPr>
@@ -24609,7 +25137,7 @@
           <a:p>
             <a:pPr marL="0" indent="0">
               <a:lnSpc>
-                <a:spcPct val="100000"/>
+                <a:spcPct val="120000"/>
               </a:lnSpc>
               <a:spcBef>
                 <a:spcPts val="0"/>
@@ -24617,7 +25145,7 @@
               <a:buFont typeface="Arial" panose="020B0604020202020204" pitchFamily="34" charset="0"/>
               <a:buNone/>
             </a:pPr>
-            <a:endParaRPr lang="en-US" sz="1200" b="1" dirty="0">
+            <a:endParaRPr lang="en-US" sz="1300" dirty="0">
               <a:latin typeface="Courier New" panose="02070309020205020404" pitchFamily="49" charset="0"/>
               <a:cs typeface="Courier New" panose="02070309020205020404" pitchFamily="49" charset="0"/>
             </a:endParaRPr>
@@ -24625,7 +25153,7 @@
           <a:p>
             <a:pPr marL="0" indent="0">
               <a:lnSpc>
-                <a:spcPct val="100000"/>
+                <a:spcPct val="120000"/>
               </a:lnSpc>
               <a:spcBef>
                 <a:spcPts val="0"/>
@@ -24634,45 +25162,34 @@
               <a:buNone/>
             </a:pPr>
             <a:r>
-              <a:rPr lang="en-US" sz="1200" dirty="0">
-                <a:latin typeface="Courier New" panose="02070309020205020404" pitchFamily="49" charset="0"/>
-                <a:cs typeface="Courier New" panose="02070309020205020404" pitchFamily="49" charset="0"/>
-              </a:rPr>
-              <a:t>  def </a:t>
-            </a:r>
-            <a:r>
-              <a:rPr lang="en-US" sz="1200" b="1" dirty="0">
-                <a:latin typeface="Courier New" panose="02070309020205020404" pitchFamily="49" charset="0"/>
-                <a:cs typeface="Courier New" panose="02070309020205020404" pitchFamily="49" charset="0"/>
-              </a:rPr>
-              <a:t>__</a:t>
-            </a:r>
-            <a:r>
-              <a:rPr lang="en-US" sz="1200" b="1" dirty="0" err="1">
-                <a:latin typeface="Courier New" panose="02070309020205020404" pitchFamily="49" charset="0"/>
-                <a:cs typeface="Courier New" panose="02070309020205020404" pitchFamily="49" charset="0"/>
-              </a:rPr>
-              <a:t>iter</a:t>
-            </a:r>
-            <a:r>
-              <a:rPr lang="en-US" sz="1200" b="1" dirty="0">
-                <a:latin typeface="Courier New" panose="02070309020205020404" pitchFamily="49" charset="0"/>
-                <a:cs typeface="Courier New" panose="02070309020205020404" pitchFamily="49" charset="0"/>
-              </a:rPr>
-              <a:t>__</a:t>
-            </a:r>
-            <a:r>
-              <a:rPr lang="en-US" sz="1200" dirty="0">
-                <a:latin typeface="Courier New" panose="02070309020205020404" pitchFamily="49" charset="0"/>
-                <a:cs typeface="Courier New" panose="02070309020205020404" pitchFamily="49" charset="0"/>
-              </a:rPr>
-              <a:t>(self):</a:t>
-            </a:r>
-          </a:p>
-          <a:p>
-            <a:pPr marL="0" indent="0">
-              <a:lnSpc>
-                <a:spcPct val="100000"/>
+              <a:rPr lang="en-US" sz="1300" dirty="0">
+                <a:latin typeface="Courier New" panose="02070309020205020404" pitchFamily="49" charset="0"/>
+                <a:cs typeface="Courier New" panose="02070309020205020404" pitchFamily="49" charset="0"/>
+              </a:rPr>
+              <a:t>  </a:t>
+            </a:r>
+            <a:r>
+              <a:rPr lang="en-US" sz="1300" dirty="0">
+                <a:solidFill>
+                  <a:srgbClr val="7030A0"/>
+                </a:solidFill>
+                <a:latin typeface="Courier New" panose="02070309020205020404" pitchFamily="49" charset="0"/>
+                <a:cs typeface="Courier New" panose="02070309020205020404" pitchFamily="49" charset="0"/>
+              </a:rPr>
+              <a:t>def</a:t>
+            </a:r>
+            <a:r>
+              <a:rPr lang="en-US" sz="1300" dirty="0">
+                <a:latin typeface="Courier New" panose="02070309020205020404" pitchFamily="49" charset="0"/>
+                <a:cs typeface="Courier New" panose="02070309020205020404" pitchFamily="49" charset="0"/>
+              </a:rPr>
+              <a:t> __str__(self):</a:t>
+            </a:r>
+          </a:p>
+          <a:p>
+            <a:pPr marL="0" indent="0">
+              <a:lnSpc>
+                <a:spcPct val="120000"/>
               </a:lnSpc>
               <a:spcBef>
                 <a:spcPts val="0"/>
@@ -24681,7 +25198,31 @@
               <a:buNone/>
             </a:pPr>
             <a:r>
-              <a:rPr lang="en-US" sz="1200" dirty="0">
+              <a:rPr lang="en-US" sz="1300" dirty="0">
+                <a:latin typeface="Courier New" panose="02070309020205020404" pitchFamily="49" charset="0"/>
+                <a:cs typeface="Courier New" panose="02070309020205020404" pitchFamily="49" charset="0"/>
+              </a:rPr>
+              <a:t>    </a:t>
+            </a:r>
+            <a:r>
+              <a:rPr lang="en-US" sz="1300" dirty="0">
+                <a:solidFill>
+                  <a:srgbClr val="7030A0"/>
+                </a:solidFill>
+                <a:latin typeface="Courier New" panose="02070309020205020404" pitchFamily="49" charset="0"/>
+                <a:cs typeface="Courier New" panose="02070309020205020404" pitchFamily="49" charset="0"/>
+              </a:rPr>
+              <a:t>return</a:t>
+            </a:r>
+            <a:r>
+              <a:rPr lang="en-US" sz="1300" dirty="0">
+                <a:latin typeface="Courier New" panose="02070309020205020404" pitchFamily="49" charset="0"/>
+                <a:cs typeface="Courier New" panose="02070309020205020404" pitchFamily="49" charset="0"/>
+              </a:rPr>
+              <a:t> f</a:t>
+            </a:r>
+            <a:r>
+              <a:rPr lang="en-US" sz="1300" dirty="0">
                 <a:solidFill>
                   <a:schemeClr val="accent2">
                     <a:lumMod val="75000"/>
@@ -24690,13 +25231,104 @@
                 <a:latin typeface="Courier New" panose="02070309020205020404" pitchFamily="49" charset="0"/>
                 <a:cs typeface="Courier New" panose="02070309020205020404" pitchFamily="49" charset="0"/>
               </a:rPr>
-              <a:t>    """Draw random letters."""</a:t>
-            </a:r>
-          </a:p>
-          <a:p>
-            <a:pPr marL="0" indent="0">
-              <a:lnSpc>
-                <a:spcPct val="100000"/>
+              <a:t>"(</a:t>
+            </a:r>
+            <a:r>
+              <a:rPr lang="en-US" sz="1300" dirty="0">
+                <a:solidFill>
+                  <a:schemeClr val="accent1">
+                    <a:lumMod val="75000"/>
+                  </a:schemeClr>
+                </a:solidFill>
+                <a:latin typeface="Courier New" panose="02070309020205020404" pitchFamily="49" charset="0"/>
+                <a:cs typeface="Courier New" panose="02070309020205020404" pitchFamily="49" charset="0"/>
+              </a:rPr>
+              <a:t>{</a:t>
+            </a:r>
+            <a:r>
+              <a:rPr lang="en-US" sz="1300" dirty="0" err="1">
+                <a:solidFill>
+                  <a:schemeClr val="accent1">
+                    <a:lumMod val="75000"/>
+                  </a:schemeClr>
+                </a:solidFill>
+                <a:latin typeface="Courier New" panose="02070309020205020404" pitchFamily="49" charset="0"/>
+                <a:cs typeface="Courier New" panose="02070309020205020404" pitchFamily="49" charset="0"/>
+              </a:rPr>
+              <a:t>self.dx</a:t>
+            </a:r>
+            <a:r>
+              <a:rPr lang="en-US" sz="1300" dirty="0">
+                <a:solidFill>
+                  <a:schemeClr val="accent1">
+                    <a:lumMod val="75000"/>
+                  </a:schemeClr>
+                </a:solidFill>
+                <a:latin typeface="Courier New" panose="02070309020205020404" pitchFamily="49" charset="0"/>
+                <a:cs typeface="Courier New" panose="02070309020205020404" pitchFamily="49" charset="0"/>
+              </a:rPr>
+              <a:t>}</a:t>
+            </a:r>
+            <a:r>
+              <a:rPr lang="en-US" sz="1300" dirty="0">
+                <a:latin typeface="Courier New" panose="02070309020205020404" pitchFamily="49" charset="0"/>
+                <a:cs typeface="Courier New" panose="02070309020205020404" pitchFamily="49" charset="0"/>
+              </a:rPr>
+              <a:t>, </a:t>
+            </a:r>
+            <a:r>
+              <a:rPr lang="en-US" sz="1300" dirty="0">
+                <a:solidFill>
+                  <a:schemeClr val="accent1">
+                    <a:lumMod val="75000"/>
+                  </a:schemeClr>
+                </a:solidFill>
+                <a:latin typeface="Courier New" panose="02070309020205020404" pitchFamily="49" charset="0"/>
+                <a:cs typeface="Courier New" panose="02070309020205020404" pitchFamily="49" charset="0"/>
+              </a:rPr>
+              <a:t>{</a:t>
+            </a:r>
+            <a:r>
+              <a:rPr lang="en-US" sz="1300" dirty="0" err="1">
+                <a:solidFill>
+                  <a:schemeClr val="accent1">
+                    <a:lumMod val="75000"/>
+                  </a:schemeClr>
+                </a:solidFill>
+                <a:latin typeface="Courier New" panose="02070309020205020404" pitchFamily="49" charset="0"/>
+                <a:cs typeface="Courier New" panose="02070309020205020404" pitchFamily="49" charset="0"/>
+              </a:rPr>
+              <a:t>self.dy</a:t>
+            </a:r>
+            <a:r>
+              <a:rPr lang="en-US" sz="1300" dirty="0">
+                <a:solidFill>
+                  <a:schemeClr val="accent1">
+                    <a:lumMod val="75000"/>
+                  </a:schemeClr>
+                </a:solidFill>
+                <a:latin typeface="Courier New" panose="02070309020205020404" pitchFamily="49" charset="0"/>
+                <a:cs typeface="Courier New" panose="02070309020205020404" pitchFamily="49" charset="0"/>
+              </a:rPr>
+              <a:t>}</a:t>
+            </a:r>
+            <a:r>
+              <a:rPr lang="en-US" sz="1300" dirty="0">
+                <a:solidFill>
+                  <a:schemeClr val="accent2">
+                    <a:lumMod val="75000"/>
+                  </a:schemeClr>
+                </a:solidFill>
+                <a:latin typeface="Courier New" panose="02070309020205020404" pitchFamily="49" charset="0"/>
+                <a:cs typeface="Courier New" panose="02070309020205020404" pitchFamily="49" charset="0"/>
+              </a:rPr>
+              <a:t>)"</a:t>
+            </a:r>
+          </a:p>
+          <a:p>
+            <a:pPr marL="0" indent="0">
+              <a:lnSpc>
+                <a:spcPct val="120000"/>
               </a:lnSpc>
               <a:spcBef>
                 <a:spcPts val="0"/>
@@ -24705,45 +25337,103 @@
               <a:buNone/>
             </a:pPr>
             <a:r>
-              <a:rPr lang="en-US" sz="1200" dirty="0">
+              <a:rPr lang="en-US" sz="1300" dirty="0">
+                <a:latin typeface="Courier New" panose="02070309020205020404" pitchFamily="49" charset="0"/>
+                <a:cs typeface="Courier New" panose="02070309020205020404" pitchFamily="49" charset="0"/>
+              </a:rPr>
+              <a:t>  </a:t>
+            </a:r>
+          </a:p>
+          <a:p>
+            <a:pPr marL="0" indent="0">
+              <a:lnSpc>
+                <a:spcPct val="120000"/>
+              </a:lnSpc>
+              <a:spcBef>
+                <a:spcPts val="0"/>
+              </a:spcBef>
+              <a:buFont typeface="Arial" panose="020B0604020202020204" pitchFamily="34" charset="0"/>
+              <a:buNone/>
+            </a:pPr>
+            <a:r>
+              <a:rPr lang="en-US" sz="1300" b="1" dirty="0">
+                <a:latin typeface="Courier New" panose="02070309020205020404" pitchFamily="49" charset="0"/>
+                <a:cs typeface="Courier New" panose="02070309020205020404" pitchFamily="49" charset="0"/>
+              </a:rPr>
+              <a:t>  </a:t>
+            </a:r>
+            <a:r>
+              <a:rPr lang="en-US" sz="1300" dirty="0">
+                <a:solidFill>
+                  <a:srgbClr val="7030A0"/>
+                </a:solidFill>
+                <a:latin typeface="Courier New" panose="02070309020205020404" pitchFamily="49" charset="0"/>
+                <a:cs typeface="Courier New" panose="02070309020205020404" pitchFamily="49" charset="0"/>
+              </a:rPr>
+              <a:t>def</a:t>
+            </a:r>
+            <a:r>
+              <a:rPr lang="en-US" sz="1300" dirty="0">
+                <a:latin typeface="Courier New" panose="02070309020205020404" pitchFamily="49" charset="0"/>
+                <a:cs typeface="Courier New" panose="02070309020205020404" pitchFamily="49" charset="0"/>
+              </a:rPr>
+              <a:t> </a:t>
+            </a:r>
+            <a:r>
+              <a:rPr lang="en-US" sz="1300" b="1" dirty="0">
+                <a:latin typeface="Courier New" panose="02070309020205020404" pitchFamily="49" charset="0"/>
+                <a:cs typeface="Courier New" panose="02070309020205020404" pitchFamily="49" charset="0"/>
+              </a:rPr>
+              <a:t>__add__</a:t>
+            </a:r>
+            <a:r>
+              <a:rPr lang="en-US" sz="1300" dirty="0">
+                <a:latin typeface="Courier New" panose="02070309020205020404" pitchFamily="49" charset="0"/>
+                <a:cs typeface="Courier New" panose="02070309020205020404" pitchFamily="49" charset="0"/>
+              </a:rPr>
+              <a:t>(self, other): </a:t>
+            </a:r>
+          </a:p>
+          <a:p>
+            <a:pPr marL="0" indent="0">
+              <a:lnSpc>
+                <a:spcPct val="120000"/>
+              </a:lnSpc>
+              <a:spcBef>
+                <a:spcPts val="0"/>
+              </a:spcBef>
+              <a:buFont typeface="Arial" panose="020B0604020202020204" pitchFamily="34" charset="0"/>
+              <a:buNone/>
+            </a:pPr>
+            <a:r>
+              <a:rPr lang="en-US" sz="1300" dirty="0">
                 <a:latin typeface="Courier New" panose="02070309020205020404" pitchFamily="49" charset="0"/>
                 <a:cs typeface="Courier New" panose="02070309020205020404" pitchFamily="49" charset="0"/>
               </a:rPr>
               <a:t>    </a:t>
             </a:r>
             <a:r>
-              <a:rPr lang="en-US" sz="1200" dirty="0" err="1">
-                <a:latin typeface="Courier New" panose="02070309020205020404" pitchFamily="49" charset="0"/>
-                <a:cs typeface="Courier New" panose="02070309020205020404" pitchFamily="49" charset="0"/>
-              </a:rPr>
-              <a:t>self.letters</a:t>
-            </a:r>
-            <a:r>
-              <a:rPr lang="en-US" sz="1200" dirty="0">
-                <a:latin typeface="Courier New" panose="02070309020205020404" pitchFamily="49" charset="0"/>
-                <a:cs typeface="Courier New" panose="02070309020205020404" pitchFamily="49" charset="0"/>
-              </a:rPr>
-              <a:t> = </a:t>
-            </a:r>
-            <a:r>
-              <a:rPr lang="en-US" sz="1200" dirty="0" err="1">
-                <a:latin typeface="Courier New" panose="02070309020205020404" pitchFamily="49" charset="0"/>
-                <a:cs typeface="Courier New" panose="02070309020205020404" pitchFamily="49" charset="0"/>
-              </a:rPr>
-              <a:t>random.sample</a:t>
-            </a:r>
-            <a:r>
-              <a:rPr lang="en-US" sz="1200" dirty="0">
-                <a:latin typeface="Courier New" panose="02070309020205020404" pitchFamily="49" charset="0"/>
-                <a:cs typeface="Courier New" panose="02070309020205020404" pitchFamily="49" charset="0"/>
-              </a:rPr>
-              <a:t>(</a:t>
-            </a:r>
-          </a:p>
-          <a:p>
-            <a:pPr marL="0" indent="0">
-              <a:lnSpc>
-                <a:spcPct val="100000"/>
+              <a:rPr lang="en-US" sz="1300" dirty="0">
+                <a:solidFill>
+                  <a:srgbClr val="7030A0"/>
+                </a:solidFill>
+                <a:latin typeface="Courier New" panose="02070309020205020404" pitchFamily="49" charset="0"/>
+                <a:cs typeface="Courier New" panose="02070309020205020404" pitchFamily="49" charset="0"/>
+              </a:rPr>
+              <a:t>return</a:t>
+            </a:r>
+            <a:r>
+              <a:rPr lang="en-US" sz="1300" dirty="0">
+                <a:latin typeface="Courier New" panose="02070309020205020404" pitchFamily="49" charset="0"/>
+                <a:cs typeface="Courier New" panose="02070309020205020404" pitchFamily="49" charset="0"/>
+              </a:rPr>
+              <a:t> Vector2D(</a:t>
+            </a:r>
+          </a:p>
+          <a:p>
+            <a:pPr marL="0" indent="0">
+              <a:lnSpc>
+                <a:spcPct val="120000"/>
               </a:lnSpc>
               <a:spcBef>
                 <a:spcPts val="0"/>
@@ -24752,34 +25442,81 @@
               <a:buNone/>
             </a:pPr>
             <a:r>
-              <a:rPr lang="en-US" sz="1200" dirty="0">
+              <a:rPr lang="en-US" sz="1300" dirty="0">
                 <a:latin typeface="Courier New" panose="02070309020205020404" pitchFamily="49" charset="0"/>
                 <a:cs typeface="Courier New" panose="02070309020205020404" pitchFamily="49" charset="0"/>
               </a:rPr>
               <a:t>      </a:t>
             </a:r>
             <a:r>
-              <a:rPr lang="en-US" sz="1200" dirty="0" err="1">
-                <a:latin typeface="Courier New" panose="02070309020205020404" pitchFamily="49" charset="0"/>
-                <a:cs typeface="Courier New" panose="02070309020205020404" pitchFamily="49" charset="0"/>
-              </a:rPr>
-              <a:t>string.ascii_uppercase</a:t>
-            </a:r>
-            <a:r>
-              <a:rPr lang="en-US" sz="1200" dirty="0">
-                <a:latin typeface="Courier New" panose="02070309020205020404" pitchFamily="49" charset="0"/>
-                <a:cs typeface="Courier New" panose="02070309020205020404" pitchFamily="49" charset="0"/>
-              </a:rPr>
-              <a:t>, </a:t>
-            </a:r>
-            <a:r>
-              <a:rPr lang="en-US" sz="1200" dirty="0" err="1">
-                <a:latin typeface="Courier New" panose="02070309020205020404" pitchFamily="49" charset="0"/>
-                <a:cs typeface="Courier New" panose="02070309020205020404" pitchFamily="49" charset="0"/>
-              </a:rPr>
-              <a:t>self.n</a:t>
-            </a:r>
-            <a:endParaRPr lang="en-US" sz="1200" dirty="0">
+              <a:rPr lang="en-US" sz="1300" dirty="0" err="1">
+                <a:latin typeface="Courier New" panose="02070309020205020404" pitchFamily="49" charset="0"/>
+                <a:cs typeface="Courier New" panose="02070309020205020404" pitchFamily="49" charset="0"/>
+              </a:rPr>
+              <a:t>self.dx</a:t>
+            </a:r>
+            <a:r>
+              <a:rPr lang="en-US" sz="1300" dirty="0">
+                <a:latin typeface="Courier New" panose="02070309020205020404" pitchFamily="49" charset="0"/>
+                <a:cs typeface="Courier New" panose="02070309020205020404" pitchFamily="49" charset="0"/>
+              </a:rPr>
+              <a:t> + </a:t>
+            </a:r>
+            <a:r>
+              <a:rPr lang="en-US" sz="1300" dirty="0" err="1">
+                <a:latin typeface="Courier New" panose="02070309020205020404" pitchFamily="49" charset="0"/>
+                <a:cs typeface="Courier New" panose="02070309020205020404" pitchFamily="49" charset="0"/>
+              </a:rPr>
+              <a:t>other.dx</a:t>
+            </a:r>
+            <a:r>
+              <a:rPr lang="en-US" sz="1300" dirty="0">
+                <a:latin typeface="Courier New" panose="02070309020205020404" pitchFamily="49" charset="0"/>
+                <a:cs typeface="Courier New" panose="02070309020205020404" pitchFamily="49" charset="0"/>
+              </a:rPr>
+              <a:t>,</a:t>
+            </a:r>
+          </a:p>
+          <a:p>
+            <a:pPr marL="0" indent="0">
+              <a:lnSpc>
+                <a:spcPct val="120000"/>
+              </a:lnSpc>
+              <a:spcBef>
+                <a:spcPts val="0"/>
+              </a:spcBef>
+              <a:buFont typeface="Arial" panose="020B0604020202020204" pitchFamily="34" charset="0"/>
+              <a:buNone/>
+            </a:pPr>
+            <a:r>
+              <a:rPr lang="en-US" sz="1300" dirty="0">
+                <a:latin typeface="Courier New" panose="02070309020205020404" pitchFamily="49" charset="0"/>
+                <a:cs typeface="Courier New" panose="02070309020205020404" pitchFamily="49" charset="0"/>
+              </a:rPr>
+              <a:t>      </a:t>
+            </a:r>
+            <a:r>
+              <a:rPr lang="en-US" sz="1300" dirty="0" err="1">
+                <a:latin typeface="Courier New" panose="02070309020205020404" pitchFamily="49" charset="0"/>
+                <a:cs typeface="Courier New" panose="02070309020205020404" pitchFamily="49" charset="0"/>
+              </a:rPr>
+              <a:t>self.dy</a:t>
+            </a:r>
+            <a:r>
+              <a:rPr lang="en-US" sz="1300" dirty="0">
+                <a:latin typeface="Courier New" panose="02070309020205020404" pitchFamily="49" charset="0"/>
+                <a:cs typeface="Courier New" panose="02070309020205020404" pitchFamily="49" charset="0"/>
+              </a:rPr>
+              <a:t> + </a:t>
+            </a:r>
+            <a:r>
+              <a:rPr lang="en-US" sz="1300" dirty="0" err="1">
+                <a:latin typeface="Courier New" panose="02070309020205020404" pitchFamily="49" charset="0"/>
+                <a:cs typeface="Courier New" panose="02070309020205020404" pitchFamily="49" charset="0"/>
+              </a:rPr>
+              <a:t>other.dy</a:t>
+            </a:r>
+            <a:endParaRPr lang="en-US" sz="1300" dirty="0">
               <a:latin typeface="Courier New" panose="02070309020205020404" pitchFamily="49" charset="0"/>
               <a:cs typeface="Courier New" panose="02070309020205020404" pitchFamily="49" charset="0"/>
             </a:endParaRPr>
@@ -24787,7 +25524,7 @@
           <a:p>
             <a:pPr marL="0" indent="0">
               <a:lnSpc>
-                <a:spcPct val="100000"/>
+                <a:spcPct val="120000"/>
               </a:lnSpc>
               <a:spcBef>
                 <a:spcPts val="0"/>
@@ -24796,7 +25533,7 @@
               <a:buNone/>
             </a:pPr>
             <a:r>
-              <a:rPr lang="en-US" sz="1200" dirty="0">
+              <a:rPr lang="en-US" sz="1300" dirty="0">
                 <a:latin typeface="Courier New" panose="02070309020205020404" pitchFamily="49" charset="0"/>
                 <a:cs typeface="Courier New" panose="02070309020205020404" pitchFamily="49" charset="0"/>
               </a:rPr>
@@ -24806,7 +25543,7 @@
           <a:p>
             <a:pPr marL="0" indent="0">
               <a:lnSpc>
-                <a:spcPct val="100000"/>
+                <a:spcPct val="120000"/>
               </a:lnSpc>
               <a:spcBef>
                 <a:spcPts val="0"/>
@@ -24814,25 +25551,15 @@
               <a:buFont typeface="Arial" panose="020B0604020202020204" pitchFamily="34" charset="0"/>
               <a:buNone/>
             </a:pPr>
-            <a:r>
-              <a:rPr lang="en-US" sz="1200" dirty="0">
-                <a:latin typeface="Courier New" panose="02070309020205020404" pitchFamily="49" charset="0"/>
-                <a:cs typeface="Courier New" panose="02070309020205020404" pitchFamily="49" charset="0"/>
-              </a:rPr>
-              <a:t>    </a:t>
-            </a:r>
-            <a:r>
-              <a:rPr lang="en-US" sz="1200" b="1" dirty="0">
-                <a:latin typeface="Courier New" panose="02070309020205020404" pitchFamily="49" charset="0"/>
-                <a:cs typeface="Courier New" panose="02070309020205020404" pitchFamily="49" charset="0"/>
-              </a:rPr>
-              <a:t>return self</a:t>
-            </a:r>
-          </a:p>
-          <a:p>
-            <a:pPr marL="0" indent="0">
-              <a:lnSpc>
-                <a:spcPct val="100000"/>
+            <a:endParaRPr lang="en-US" sz="1300" b="1" dirty="0">
+              <a:latin typeface="Courier New" panose="02070309020205020404" pitchFamily="49" charset="0"/>
+              <a:cs typeface="Courier New" panose="02070309020205020404" pitchFamily="49" charset="0"/>
+            </a:endParaRPr>
+          </a:p>
+          <a:p>
+            <a:pPr marL="0" indent="0">
+              <a:lnSpc>
+                <a:spcPct val="120000"/>
               </a:lnSpc>
               <a:spcBef>
                 <a:spcPts val="0"/>
@@ -24840,7 +25567,7 @@
               <a:buFont typeface="Arial" panose="020B0604020202020204" pitchFamily="34" charset="0"/>
               <a:buNone/>
             </a:pPr>
-            <a:endParaRPr lang="en-US" sz="1200" dirty="0">
+            <a:endParaRPr lang="en-US" sz="1300" b="1" dirty="0">
               <a:solidFill>
                 <a:schemeClr val="accent6">
                   <a:lumMod val="75000"/>
@@ -24853,7 +25580,7 @@
           <a:p>
             <a:pPr marL="0" indent="0">
               <a:lnSpc>
-                <a:spcPct val="100000"/>
+                <a:spcPct val="120000"/>
               </a:lnSpc>
               <a:spcBef>
                 <a:spcPts val="0"/>
@@ -24861,7 +25588,97 @@
               <a:buFont typeface="Arial" panose="020B0604020202020204" pitchFamily="34" charset="0"/>
               <a:buNone/>
             </a:pPr>
-            <a:endParaRPr lang="en-US" sz="1200" dirty="0">
+            <a:r>
+              <a:rPr lang="en-US" sz="1300" dirty="0">
+                <a:solidFill>
+                  <a:schemeClr val="accent6">
+                    <a:lumMod val="75000"/>
+                  </a:schemeClr>
+                </a:solidFill>
+                <a:latin typeface="Courier New" panose="02070309020205020404" pitchFamily="49" charset="0"/>
+                <a:cs typeface="Courier New" panose="02070309020205020404" pitchFamily="49" charset="0"/>
+              </a:rPr>
+              <a:t># Construct two vectors.</a:t>
+            </a:r>
+          </a:p>
+          <a:p>
+            <a:pPr marL="0" indent="0">
+              <a:lnSpc>
+                <a:spcPct val="120000"/>
+              </a:lnSpc>
+              <a:spcBef>
+                <a:spcPts val="0"/>
+              </a:spcBef>
+              <a:buFont typeface="Arial" panose="020B0604020202020204" pitchFamily="34" charset="0"/>
+              <a:buNone/>
+            </a:pPr>
+            <a:r>
+              <a:rPr lang="en-US" sz="1300" dirty="0">
+                <a:latin typeface="Courier New" panose="02070309020205020404" pitchFamily="49" charset="0"/>
+                <a:cs typeface="Courier New" panose="02070309020205020404" pitchFamily="49" charset="0"/>
+              </a:rPr>
+              <a:t>v1 = </a:t>
+            </a:r>
+            <a:r>
+              <a:rPr lang="en-US" sz="1300" b="1" dirty="0">
+                <a:latin typeface="Courier New" panose="02070309020205020404" pitchFamily="49" charset="0"/>
+                <a:cs typeface="Courier New" panose="02070309020205020404" pitchFamily="49" charset="0"/>
+              </a:rPr>
+              <a:t>Vector2D</a:t>
+            </a:r>
+            <a:r>
+              <a:rPr lang="en-US" sz="1300" dirty="0">
+                <a:latin typeface="Courier New" panose="02070309020205020404" pitchFamily="49" charset="0"/>
+                <a:cs typeface="Courier New" panose="02070309020205020404" pitchFamily="49" charset="0"/>
+              </a:rPr>
+              <a:t>(4, 5)</a:t>
+            </a:r>
+          </a:p>
+          <a:p>
+            <a:pPr marL="0" indent="0">
+              <a:lnSpc>
+                <a:spcPct val="120000"/>
+              </a:lnSpc>
+              <a:spcBef>
+                <a:spcPts val="0"/>
+              </a:spcBef>
+              <a:buFont typeface="Arial" panose="020B0604020202020204" pitchFamily="34" charset="0"/>
+              <a:buNone/>
+            </a:pPr>
+            <a:r>
+              <a:rPr lang="en-US" sz="1300" dirty="0">
+                <a:latin typeface="Courier New" panose="02070309020205020404" pitchFamily="49" charset="0"/>
+                <a:cs typeface="Courier New" panose="02070309020205020404" pitchFamily="49" charset="0"/>
+              </a:rPr>
+              <a:t>v2 = </a:t>
+            </a:r>
+            <a:r>
+              <a:rPr lang="en-US" sz="1300" b="1" dirty="0">
+                <a:latin typeface="Courier New" panose="02070309020205020404" pitchFamily="49" charset="0"/>
+                <a:cs typeface="Courier New" panose="02070309020205020404" pitchFamily="49" charset="0"/>
+              </a:rPr>
+              <a:t>Vector2D</a:t>
+            </a:r>
+            <a:r>
+              <a:rPr lang="en-US" sz="1300" dirty="0">
+                <a:latin typeface="Courier New" panose="02070309020205020404" pitchFamily="49" charset="0"/>
+                <a:cs typeface="Courier New" panose="02070309020205020404" pitchFamily="49" charset="0"/>
+              </a:rPr>
+              <a:t>(2, 4)</a:t>
+            </a:r>
+          </a:p>
+          <a:p>
+            <a:pPr marL="0" indent="0">
+              <a:lnSpc>
+                <a:spcPct val="120000"/>
+              </a:lnSpc>
+              <a:spcBef>
+                <a:spcPts val="0"/>
+              </a:spcBef>
+              <a:buFont typeface="Arial" panose="020B0604020202020204" pitchFamily="34" charset="0"/>
+              <a:buNone/>
+            </a:pPr>
+            <a:endParaRPr lang="en-US" sz="1300" dirty="0">
               <a:latin typeface="Courier New" panose="02070309020205020404" pitchFamily="49" charset="0"/>
               <a:cs typeface="Courier New" panose="02070309020205020404" pitchFamily="49" charset="0"/>
             </a:endParaRPr>
@@ -24869,7 +25686,7 @@
           <a:p>
             <a:pPr marL="0" indent="0">
               <a:lnSpc>
-                <a:spcPct val="100000"/>
+                <a:spcPct val="120000"/>
               </a:lnSpc>
               <a:spcBef>
                 <a:spcPts val="0"/>
@@ -24878,55 +25695,22 @@
               <a:buNone/>
             </a:pPr>
             <a:r>
-              <a:rPr lang="en-US" sz="1200" dirty="0">
-                <a:latin typeface="Courier New" panose="02070309020205020404" pitchFamily="49" charset="0"/>
-                <a:cs typeface="Courier New" panose="02070309020205020404" pitchFamily="49" charset="0"/>
-              </a:rPr>
-              <a:t>  def </a:t>
-            </a:r>
-            <a:r>
-              <a:rPr lang="en-US" sz="1200" b="1" dirty="0">
-                <a:latin typeface="Courier New" panose="02070309020205020404" pitchFamily="49" charset="0"/>
-                <a:cs typeface="Courier New" panose="02070309020205020404" pitchFamily="49" charset="0"/>
-              </a:rPr>
-              <a:t>__next__</a:t>
-            </a:r>
-            <a:r>
-              <a:rPr lang="en-US" sz="1200" dirty="0">
-                <a:latin typeface="Courier New" panose="02070309020205020404" pitchFamily="49" charset="0"/>
-                <a:cs typeface="Courier New" panose="02070309020205020404" pitchFamily="49" charset="0"/>
-              </a:rPr>
-              <a:t>(self):</a:t>
-            </a:r>
-          </a:p>
-          <a:p>
-            <a:pPr marL="0" indent="0">
-              <a:lnSpc>
-                <a:spcPct val="100000"/>
-              </a:lnSpc>
-              <a:spcBef>
-                <a:spcPts val="0"/>
-              </a:spcBef>
-              <a:buFont typeface="Arial" panose="020B0604020202020204" pitchFamily="34" charset="0"/>
-              <a:buNone/>
-            </a:pPr>
-            <a:r>
-              <a:rPr lang="en-US" sz="1200" dirty="0">
-                <a:solidFill>
-                  <a:schemeClr val="accent2">
+              <a:rPr lang="en-US" sz="1300" dirty="0">
+                <a:solidFill>
+                  <a:schemeClr val="accent6">
                     <a:lumMod val="75000"/>
                   </a:schemeClr>
                 </a:solidFill>
                 <a:latin typeface="Courier New" panose="02070309020205020404" pitchFamily="49" charset="0"/>
                 <a:cs typeface="Courier New" panose="02070309020205020404" pitchFamily="49" charset="0"/>
               </a:rPr>
-              <a:t>    """Return next letter."""</a:t>
-            </a:r>
-          </a:p>
-          <a:p>
-            <a:pPr marL="0" indent="0">
-              <a:lnSpc>
-                <a:spcPct val="100000"/>
+              <a:t># Add them together; prints (6, 9).</a:t>
+            </a:r>
+          </a:p>
+          <a:p>
+            <a:pPr marL="0" indent="0">
+              <a:lnSpc>
+                <a:spcPct val="120000"/>
               </a:lnSpc>
               <a:spcBef>
                 <a:spcPts val="0"/>
@@ -24935,109 +25719,13 @@
               <a:buNone/>
             </a:pPr>
             <a:r>
-              <a:rPr lang="en-US" sz="1200" dirty="0">
-                <a:latin typeface="Courier New" panose="02070309020205020404" pitchFamily="49" charset="0"/>
-                <a:cs typeface="Courier New" panose="02070309020205020404" pitchFamily="49" charset="0"/>
-              </a:rPr>
-              <a:t>    if not </a:t>
-            </a:r>
-            <a:r>
-              <a:rPr lang="en-US" sz="1200" dirty="0" err="1">
-                <a:latin typeface="Courier New" panose="02070309020205020404" pitchFamily="49" charset="0"/>
-                <a:cs typeface="Courier New" panose="02070309020205020404" pitchFamily="49" charset="0"/>
-              </a:rPr>
-              <a:t>self.letters</a:t>
-            </a:r>
-            <a:r>
-              <a:rPr lang="en-US" sz="1200" dirty="0">
-                <a:latin typeface="Courier New" panose="02070309020205020404" pitchFamily="49" charset="0"/>
-                <a:cs typeface="Courier New" panose="02070309020205020404" pitchFamily="49" charset="0"/>
-              </a:rPr>
-              <a:t>:</a:t>
-            </a:r>
-          </a:p>
-          <a:p>
-            <a:pPr marL="0" indent="0">
-              <a:lnSpc>
-                <a:spcPct val="100000"/>
-              </a:lnSpc>
-              <a:spcBef>
-                <a:spcPts val="0"/>
-              </a:spcBef>
-              <a:buFont typeface="Arial" panose="020B0604020202020204" pitchFamily="34" charset="0"/>
-              <a:buNone/>
-            </a:pPr>
-            <a:r>
-              <a:rPr lang="en-US" sz="1200" b="1" dirty="0">
-                <a:latin typeface="Courier New" panose="02070309020205020404" pitchFamily="49" charset="0"/>
-                <a:cs typeface="Courier New" panose="02070309020205020404" pitchFamily="49" charset="0"/>
-              </a:rPr>
-              <a:t>        raise </a:t>
-            </a:r>
-            <a:r>
-              <a:rPr lang="en-US" sz="1200" b="1" dirty="0" err="1">
-                <a:latin typeface="Courier New" panose="02070309020205020404" pitchFamily="49" charset="0"/>
-                <a:cs typeface="Courier New" panose="02070309020205020404" pitchFamily="49" charset="0"/>
-              </a:rPr>
-              <a:t>StopIteration</a:t>
-            </a:r>
-            <a:endParaRPr lang="en-US" sz="1200" dirty="0">
-              <a:latin typeface="Courier New" panose="02070309020205020404" pitchFamily="49" charset="0"/>
-              <a:cs typeface="Courier New" panose="02070309020205020404" pitchFamily="49" charset="0"/>
-            </a:endParaRPr>
-          </a:p>
-          <a:p>
-            <a:pPr marL="0" indent="0">
-              <a:lnSpc>
-                <a:spcPct val="100000"/>
-              </a:lnSpc>
-              <a:spcBef>
-                <a:spcPts val="0"/>
-              </a:spcBef>
-              <a:buFont typeface="Arial" panose="020B0604020202020204" pitchFamily="34" charset="0"/>
-              <a:buNone/>
-            </a:pPr>
-            <a:r>
-              <a:rPr lang="en-US" sz="1200" dirty="0">
-                <a:latin typeface="Courier New" panose="02070309020205020404" pitchFamily="49" charset="0"/>
-                <a:cs typeface="Courier New" panose="02070309020205020404" pitchFamily="49" charset="0"/>
-              </a:rPr>
-              <a:t>    </a:t>
-            </a:r>
-            <a:r>
-              <a:rPr lang="en-US" sz="1200" b="1" dirty="0">
-                <a:latin typeface="Courier New" panose="02070309020205020404" pitchFamily="49" charset="0"/>
-                <a:cs typeface="Courier New" panose="02070309020205020404" pitchFamily="49" charset="0"/>
-              </a:rPr>
-              <a:t>return </a:t>
-            </a:r>
-            <a:r>
-              <a:rPr lang="en-US" sz="1200" b="1" dirty="0" err="1">
-                <a:latin typeface="Courier New" panose="02070309020205020404" pitchFamily="49" charset="0"/>
-                <a:cs typeface="Courier New" panose="02070309020205020404" pitchFamily="49" charset="0"/>
-              </a:rPr>
-              <a:t>self.letters.pop</a:t>
-            </a:r>
-            <a:r>
-              <a:rPr lang="en-US" sz="1200" b="1" dirty="0">
-                <a:latin typeface="Courier New" panose="02070309020205020404" pitchFamily="49" charset="0"/>
-                <a:cs typeface="Courier New" panose="02070309020205020404" pitchFamily="49" charset="0"/>
-              </a:rPr>
-              <a:t>()</a:t>
-            </a:r>
-          </a:p>
-          <a:p>
-            <a:pPr marL="0" indent="0">
-              <a:lnSpc>
-                <a:spcPct val="100000"/>
-              </a:lnSpc>
-              <a:spcBef>
-                <a:spcPts val="0"/>
-              </a:spcBef>
-              <a:buFont typeface="Arial" panose="020B0604020202020204" pitchFamily="34" charset="0"/>
-              <a:buNone/>
-            </a:pPr>
-            <a:endParaRPr lang="en-US" sz="1200" dirty="0">
+              <a:rPr lang="en-US" sz="1300" dirty="0">
+                <a:latin typeface="Courier New" panose="02070309020205020404" pitchFamily="49" charset="0"/>
+                <a:cs typeface="Courier New" panose="02070309020205020404" pitchFamily="49" charset="0"/>
+              </a:rPr>
+              <a:t>print(v1 + v2)</a:t>
+            </a:r>
+            <a:endParaRPr lang="en-US" sz="1300" dirty="0">
               <a:solidFill>
                 <a:schemeClr val="accent6">
                   <a:lumMod val="75000"/>
@@ -25046,175 +25734,6 @@
               <a:latin typeface="Courier New" panose="02070309020205020404" pitchFamily="49" charset="0"/>
               <a:cs typeface="Courier New" panose="02070309020205020404" pitchFamily="49" charset="0"/>
             </a:endParaRPr>
-          </a:p>
-          <a:p>
-            <a:pPr marL="0" indent="0">
-              <a:lnSpc>
-                <a:spcPct val="100000"/>
-              </a:lnSpc>
-              <a:spcBef>
-                <a:spcPts val="0"/>
-              </a:spcBef>
-              <a:buFont typeface="Arial" panose="020B0604020202020204" pitchFamily="34" charset="0"/>
-              <a:buNone/>
-            </a:pPr>
-            <a:endParaRPr lang="en-US" sz="1200" dirty="0">
-              <a:solidFill>
-                <a:schemeClr val="accent6">
-                  <a:lumMod val="75000"/>
-                </a:schemeClr>
-              </a:solidFill>
-              <a:latin typeface="Courier New" panose="02070309020205020404" pitchFamily="49" charset="0"/>
-              <a:cs typeface="Courier New" panose="02070309020205020404" pitchFamily="49" charset="0"/>
-            </a:endParaRPr>
-          </a:p>
-          <a:p>
-            <a:pPr marL="0" indent="0">
-              <a:lnSpc>
-                <a:spcPct val="100000"/>
-              </a:lnSpc>
-              <a:spcBef>
-                <a:spcPts val="0"/>
-              </a:spcBef>
-              <a:buFont typeface="Arial" panose="020B0604020202020204" pitchFamily="34" charset="0"/>
-              <a:buNone/>
-            </a:pPr>
-            <a:r>
-              <a:rPr lang="en-US" sz="1200" dirty="0">
-                <a:solidFill>
-                  <a:schemeClr val="accent6">
-                    <a:lumMod val="75000"/>
-                  </a:schemeClr>
-                </a:solidFill>
-                <a:latin typeface="Courier New" panose="02070309020205020404" pitchFamily="49" charset="0"/>
-                <a:cs typeface="Courier New" panose="02070309020205020404" pitchFamily="49" charset="0"/>
-              </a:rPr>
-              <a:t># Loop through random letters.</a:t>
-            </a:r>
-          </a:p>
-          <a:p>
-            <a:pPr marL="0" indent="0">
-              <a:lnSpc>
-                <a:spcPct val="100000"/>
-              </a:lnSpc>
-              <a:spcBef>
-                <a:spcPts val="0"/>
-              </a:spcBef>
-              <a:buFont typeface="Arial" panose="020B0604020202020204" pitchFamily="34" charset="0"/>
-              <a:buNone/>
-            </a:pPr>
-            <a:r>
-              <a:rPr lang="en-US" sz="1200" dirty="0">
-                <a:solidFill>
-                  <a:schemeClr val="accent6">
-                    <a:lumMod val="75000"/>
-                  </a:schemeClr>
-                </a:solidFill>
-                <a:latin typeface="Courier New" panose="02070309020205020404" pitchFamily="49" charset="0"/>
-                <a:cs typeface="Courier New" panose="02070309020205020404" pitchFamily="49" charset="0"/>
-              </a:rPr>
-              <a:t># Calls __</a:t>
-            </a:r>
-            <a:r>
-              <a:rPr lang="en-US" sz="1200" dirty="0" err="1">
-                <a:solidFill>
-                  <a:schemeClr val="accent6">
-                    <a:lumMod val="75000"/>
-                  </a:schemeClr>
-                </a:solidFill>
-                <a:latin typeface="Courier New" panose="02070309020205020404" pitchFamily="49" charset="0"/>
-                <a:cs typeface="Courier New" panose="02070309020205020404" pitchFamily="49" charset="0"/>
-              </a:rPr>
-              <a:t>init</a:t>
-            </a:r>
-            <a:r>
-              <a:rPr lang="en-US" sz="1200" dirty="0">
-                <a:solidFill>
-                  <a:schemeClr val="accent6">
-                    <a:lumMod val="75000"/>
-                  </a:schemeClr>
-                </a:solidFill>
-                <a:latin typeface="Courier New" panose="02070309020205020404" pitchFamily="49" charset="0"/>
-                <a:cs typeface="Courier New" panose="02070309020205020404" pitchFamily="49" charset="0"/>
-              </a:rPr>
-              <a:t>__ =&gt; __</a:t>
-            </a:r>
-            <a:r>
-              <a:rPr lang="en-US" sz="1200" dirty="0" err="1">
-                <a:solidFill>
-                  <a:schemeClr val="accent6">
-                    <a:lumMod val="75000"/>
-                  </a:schemeClr>
-                </a:solidFill>
-                <a:latin typeface="Courier New" panose="02070309020205020404" pitchFamily="49" charset="0"/>
-                <a:cs typeface="Courier New" panose="02070309020205020404" pitchFamily="49" charset="0"/>
-              </a:rPr>
-              <a:t>iter</a:t>
-            </a:r>
-            <a:r>
-              <a:rPr lang="en-US" sz="1200" dirty="0">
-                <a:solidFill>
-                  <a:schemeClr val="accent6">
-                    <a:lumMod val="75000"/>
-                  </a:schemeClr>
-                </a:solidFill>
-                <a:latin typeface="Courier New" panose="02070309020205020404" pitchFamily="49" charset="0"/>
-                <a:cs typeface="Courier New" panose="02070309020205020404" pitchFamily="49" charset="0"/>
-              </a:rPr>
-              <a:t>__ =&gt; __next__</a:t>
-            </a:r>
-          </a:p>
-          <a:p>
-            <a:pPr marL="0" indent="0">
-              <a:lnSpc>
-                <a:spcPct val="100000"/>
-              </a:lnSpc>
-              <a:spcBef>
-                <a:spcPts val="0"/>
-              </a:spcBef>
-              <a:buFont typeface="Arial" panose="020B0604020202020204" pitchFamily="34" charset="0"/>
-              <a:buNone/>
-            </a:pPr>
-            <a:r>
-              <a:rPr lang="en-US" sz="1200" dirty="0">
-                <a:latin typeface="Courier New" panose="02070309020205020404" pitchFamily="49" charset="0"/>
-                <a:cs typeface="Courier New" panose="02070309020205020404" pitchFamily="49" charset="0"/>
-              </a:rPr>
-              <a:t>for letter in </a:t>
-            </a:r>
-            <a:r>
-              <a:rPr lang="en-US" sz="1200" b="1" dirty="0" err="1">
-                <a:latin typeface="Courier New" panose="02070309020205020404" pitchFamily="49" charset="0"/>
-                <a:cs typeface="Courier New" panose="02070309020205020404" pitchFamily="49" charset="0"/>
-              </a:rPr>
-              <a:t>RandomLetters</a:t>
-            </a:r>
-            <a:r>
-              <a:rPr lang="en-US" sz="1200" dirty="0">
-                <a:latin typeface="Courier New" panose="02070309020205020404" pitchFamily="49" charset="0"/>
-                <a:cs typeface="Courier New" panose="02070309020205020404" pitchFamily="49" charset="0"/>
-              </a:rPr>
-              <a:t>(10):</a:t>
-            </a:r>
-          </a:p>
-          <a:p>
-            <a:pPr marL="0" indent="0">
-              <a:lnSpc>
-                <a:spcPct val="100000"/>
-              </a:lnSpc>
-              <a:spcBef>
-                <a:spcPts val="0"/>
-              </a:spcBef>
-              <a:buFont typeface="Arial" panose="020B0604020202020204" pitchFamily="34" charset="0"/>
-              <a:buNone/>
-            </a:pPr>
-            <a:r>
-              <a:rPr lang="en-US" sz="1200" dirty="0">
-                <a:latin typeface="Courier New" panose="02070309020205020404" pitchFamily="49" charset="0"/>
-                <a:cs typeface="Courier New" panose="02070309020205020404" pitchFamily="49" charset="0"/>
-              </a:rPr>
-              <a:t>  print(letter)</a:t>
-            </a:r>
           </a:p>
         </p:txBody>
       </p:sp>
@@ -25259,7 +25778,7 @@
     </p:spTree>
     <p:extLst>
       <p:ext uri="{BB962C8B-B14F-4D97-AF65-F5344CB8AC3E}">
-        <p14:creationId xmlns:p14="http://schemas.microsoft.com/office/powerpoint/2010/main" val="713754194"/>
+        <p14:creationId xmlns:p14="http://schemas.microsoft.com/office/powerpoint/2010/main" val="1057875604"/>
       </p:ext>
     </p:extLst>
   </p:cSld>
@@ -26865,22 +27384,9 @@
           <a:lstStyle/>
           <a:p>
             <a:r>
-              <a:rPr lang="nl-NL" sz="3600" dirty="0"/>
-              <a:t>Meer </a:t>
-            </a:r>
-            <a:r>
-              <a:rPr lang="nl-NL" sz="3600" dirty="0" err="1"/>
-              <a:t>dunder</a:t>
-            </a:r>
-            <a:r>
-              <a:rPr lang="nl-NL" sz="3600" dirty="0"/>
-              <a:t> </a:t>
-            </a:r>
-            <a:r>
-              <a:rPr lang="nl-NL" sz="3600" dirty="0" err="1"/>
-              <a:t>methods</a:t>
-            </a:r>
-            <a:endParaRPr lang="nl-NL" sz="3600" noProof="0" dirty="0"/>
+              <a:rPr lang="nl-NL" sz="3600" noProof="0" dirty="0"/>
+              <a:t>Oefeningen IV</a:t>
+            </a:r>
           </a:p>
         </p:txBody>
       </p:sp>
@@ -26903,7 +27409,7 @@
         <p:spPr>
           <a:xfrm>
             <a:off x="838200" y="1456267"/>
-            <a:ext cx="4571999" cy="4720696"/>
+            <a:ext cx="10375900" cy="4720696"/>
           </a:xfrm>
         </p:spPr>
         <p:txBody>
@@ -26912,92 +27418,54 @@
           </a:bodyPr>
           <a:lstStyle/>
           <a:p>
-            <a:pPr marL="0" indent="0">
-              <a:buNone/>
-            </a:pPr>
-            <a:r>
-              <a:rPr lang="nl-NL" sz="2000" b="1" noProof="0" dirty="0">
-                <a:latin typeface="Courier New" panose="02070309020205020404" pitchFamily="49" charset="0"/>
-                <a:cs typeface="Courier New" panose="02070309020205020404" pitchFamily="49" charset="0"/>
-              </a:rPr>
-              <a:t>__</a:t>
-            </a:r>
-            <a:r>
-              <a:rPr lang="nl-NL" sz="2000" b="1" noProof="0" dirty="0" err="1">
-                <a:latin typeface="Courier New" panose="02070309020205020404" pitchFamily="49" charset="0"/>
-                <a:cs typeface="Courier New" panose="02070309020205020404" pitchFamily="49" charset="0"/>
-              </a:rPr>
-              <a:t>add</a:t>
-            </a:r>
-            <a:r>
-              <a:rPr lang="nl-NL" sz="2000" b="1" noProof="0" dirty="0">
-                <a:latin typeface="Courier New" panose="02070309020205020404" pitchFamily="49" charset="0"/>
-                <a:cs typeface="Courier New" panose="02070309020205020404" pitchFamily="49" charset="0"/>
-              </a:rPr>
-              <a:t>__</a:t>
-            </a:r>
-          </a:p>
-          <a:p>
-            <a:pPr marL="0" indent="0">
-              <a:buNone/>
-            </a:pPr>
+            <a:pPr marL="457200" indent="-457200">
+              <a:buFont typeface="Arial" panose="020B0604020202020204" pitchFamily="34" charset="0"/>
+              <a:buAutoNum type="arabicPeriod"/>
+            </a:pPr>
+            <a:r>
+              <a:rPr lang="nl-NL" sz="2000" dirty="0"/>
+              <a:t>Open Notebook </a:t>
+            </a:r>
+            <a:r>
+              <a:rPr lang="nl-NL" sz="2000" dirty="0" err="1">
+                <a:latin typeface="Courier New" panose="02070309020205020404" pitchFamily="49" charset="0"/>
+                <a:cs typeface="Courier New" panose="02070309020205020404" pitchFamily="49" charset="0"/>
+              </a:rPr>
+              <a:t>exercises</a:t>
+            </a:r>
             <a:r>
               <a:rPr lang="nl-NL" sz="2000" dirty="0">
-                <a:cs typeface="Courier New" panose="02070309020205020404" pitchFamily="49" charset="0"/>
-              </a:rPr>
-              <a:t>Aangeroepen door de </a:t>
+                <a:latin typeface="Courier New" panose="02070309020205020404" pitchFamily="49" charset="0"/>
+                <a:cs typeface="Courier New" panose="02070309020205020404" pitchFamily="49" charset="0"/>
+              </a:rPr>
+              <a:t>/4_fuzzy_dict.ipynb</a:t>
+            </a:r>
+          </a:p>
+          <a:p>
+            <a:pPr marL="457200" indent="-457200">
+              <a:buFont typeface="Arial" panose="020B0604020202020204" pitchFamily="34" charset="0"/>
+              <a:buAutoNum type="arabicPeriod"/>
+            </a:pPr>
+            <a:endParaRPr lang="nl-NL" sz="2000" dirty="0"/>
+          </a:p>
+          <a:p>
+            <a:pPr marL="457200" indent="-457200">
+              <a:buFont typeface="Arial" panose="020B0604020202020204" pitchFamily="34" charset="0"/>
+              <a:buAutoNum type="arabicPeriod"/>
+            </a:pPr>
+            <a:r>
+              <a:rPr lang="nl-NL" sz="2000" dirty="0" err="1">
+                <a:latin typeface="Courier New" panose="02070309020205020404" pitchFamily="49" charset="0"/>
+                <a:cs typeface="Courier New" panose="02070309020205020404" pitchFamily="49" charset="0"/>
+              </a:rPr>
+              <a:t>FuzzyDict</a:t>
             </a:r>
             <a:r>
               <a:rPr lang="nl-NL" sz="2000" dirty="0">
                 <a:latin typeface="Courier New" panose="02070309020205020404" pitchFamily="49" charset="0"/>
                 <a:cs typeface="Courier New" panose="02070309020205020404" pitchFamily="49" charset="0"/>
               </a:rPr>
-              <a:t>+</a:t>
-            </a:r>
-            <a:r>
-              <a:rPr lang="nl-NL" sz="2000" dirty="0">
-                <a:cs typeface="Courier New" panose="02070309020205020404" pitchFamily="49" charset="0"/>
-              </a:rPr>
-              <a:t> operator.</a:t>
-            </a:r>
-          </a:p>
-          <a:p>
-            <a:pPr marL="0" indent="0">
-              <a:buNone/>
-            </a:pPr>
-            <a:endParaRPr lang="nl-NL" sz="2000" dirty="0">
-              <a:cs typeface="Courier New" panose="02070309020205020404" pitchFamily="49" charset="0"/>
-            </a:endParaRPr>
-          </a:p>
-          <a:p>
-            <a:pPr marL="0" indent="0">
-              <a:buNone/>
-            </a:pPr>
-            <a:endParaRPr lang="nl-NL" sz="2000" dirty="0"/>
-          </a:p>
-          <a:p>
-            <a:pPr marL="0" indent="0">
-              <a:buNone/>
-            </a:pPr>
-            <a:endParaRPr lang="nl-NL" sz="2000" dirty="0"/>
-          </a:p>
-          <a:p>
-            <a:pPr marL="0" indent="0">
-              <a:buNone/>
-            </a:pPr>
-            <a:endParaRPr lang="nl-NL" sz="2000" dirty="0"/>
-          </a:p>
-          <a:p>
-            <a:pPr marL="0" indent="0">
-              <a:buNone/>
-            </a:pPr>
-            <a:r>
-              <a:rPr lang="nl-NL" sz="2000" dirty="0"/>
-              <a:t>Data model met alle </a:t>
-            </a:r>
-            <a:r>
-              <a:rPr lang="nl-NL" sz="2000" dirty="0" err="1"/>
-              <a:t>dunder</a:t>
+              <a:t>;</a:t>
             </a:r>
             <a:r>
               <a:rPr lang="nl-NL" sz="2000" dirty="0"/>
@@ -27005,457 +27473,31 @@
             </a:r>
             <a:r>
               <a:rPr lang="nl-NL" sz="2000" dirty="0" err="1"/>
-              <a:t>methods</a:t>
+              <a:t>dict</a:t>
             </a:r>
             <a:r>
               <a:rPr lang="nl-NL" sz="2000" dirty="0"/>
-              <a:t>:</a:t>
-            </a:r>
-            <a:endParaRPr lang="nl-NL" sz="2000" noProof="0" dirty="0"/>
-          </a:p>
-          <a:p>
-            <a:pPr marL="0" indent="0">
-              <a:buNone/>
-            </a:pPr>
+              <a:t> dat niet hoofdlettergevoelig is:</a:t>
+            </a:r>
+          </a:p>
+          <a:p>
+            <a:pPr lvl="1"/>
+            <a:r>
+              <a:rPr lang="nl-NL" sz="2000" dirty="0" err="1">
+                <a:latin typeface="Courier New" panose="02070309020205020404" pitchFamily="49" charset="0"/>
+                <a:cs typeface="Courier New" panose="02070309020205020404" pitchFamily="49" charset="0"/>
+              </a:rPr>
+              <a:t>FuzzyDict</a:t>
+            </a:r>
             <a:r>
               <a:rPr lang="nl-NL" sz="2000" dirty="0">
-                <a:hlinkClick r:id="rId2"/>
-              </a:rPr>
-              <a:t>https://docs.python.org/3/reference/datamodel.html#special-method-names</a:t>
-            </a:r>
-            <a:endParaRPr lang="nl-NL" sz="2000" noProof="0" dirty="0"/>
-          </a:p>
-          <a:p>
-            <a:pPr marL="0" indent="0">
-              <a:buNone/>
-            </a:pPr>
-            <a:endParaRPr lang="nl-NL" sz="2000" dirty="0"/>
-          </a:p>
-          <a:p>
-            <a:pPr marL="0" indent="0">
-              <a:buNone/>
-            </a:pPr>
-            <a:endParaRPr lang="nl-NL" sz="2000" dirty="0"/>
-          </a:p>
-          <a:p>
-            <a:pPr marL="0" indent="0">
-              <a:buNone/>
-            </a:pPr>
-            <a:endParaRPr lang="nl-NL" sz="2000" dirty="0"/>
-          </a:p>
-          <a:p>
-            <a:pPr marL="0" indent="0">
-              <a:buNone/>
-            </a:pPr>
-            <a:endParaRPr lang="nl-NL" sz="2000" dirty="0"/>
-          </a:p>
-        </p:txBody>
-      </p:sp>
-      <p:sp>
-        <p:nvSpPr>
-          <p:cNvPr id="4" name="Content Placeholder 2">
-            <a:extLst>
-              <a:ext uri="{FF2B5EF4-FFF2-40B4-BE49-F238E27FC236}">
-                <a16:creationId xmlns:a16="http://schemas.microsoft.com/office/drawing/2014/main" id="{98EFE1E9-4D56-5081-678F-F94DE9C3DCC6}"/>
-              </a:ext>
-            </a:extLst>
-          </p:cNvPr>
-          <p:cNvSpPr txBox="1">
-            <a:spLocks/>
-          </p:cNvSpPr>
-          <p:nvPr/>
-        </p:nvSpPr>
-        <p:spPr>
-          <a:xfrm>
-            <a:off x="6096000" y="1456267"/>
-            <a:ext cx="5327651" cy="4720696"/>
-          </a:xfrm>
-          <a:prstGeom prst="rect">
-            <a:avLst/>
-          </a:prstGeom>
-        </p:spPr>
-        <p:txBody>
-          <a:bodyPr vert="horz" lIns="91440" tIns="45720" rIns="91440" bIns="45720" rtlCol="0">
-            <a:normAutofit fontScale="92500" lnSpcReduction="10000"/>
-          </a:bodyPr>
-          <a:lstStyle>
-            <a:lvl1pPr marL="228600" indent="-228600" algn="l" defTabSz="914400" rtl="0" eaLnBrk="1" latinLnBrk="0" hangingPunct="1">
-              <a:lnSpc>
-                <a:spcPct val="90000"/>
-              </a:lnSpc>
-              <a:spcBef>
-                <a:spcPts val="1000"/>
-              </a:spcBef>
-              <a:buFont typeface="Arial" panose="020B0604020202020204" pitchFamily="34" charset="0"/>
-              <a:buChar char="•"/>
-              <a:defRPr sz="2800" kern="1200">
-                <a:solidFill>
-                  <a:schemeClr val="tx1"/>
-                </a:solidFill>
-                <a:latin typeface="+mn-lt"/>
-                <a:ea typeface="+mn-ea"/>
-                <a:cs typeface="+mn-cs"/>
-              </a:defRPr>
-            </a:lvl1pPr>
-            <a:lvl2pPr marL="685800" indent="-228600" algn="l" defTabSz="914400" rtl="0" eaLnBrk="1" latinLnBrk="0" hangingPunct="1">
-              <a:lnSpc>
-                <a:spcPct val="90000"/>
-              </a:lnSpc>
-              <a:spcBef>
-                <a:spcPts val="500"/>
-              </a:spcBef>
-              <a:buFont typeface="Arial" panose="020B0604020202020204" pitchFamily="34" charset="0"/>
-              <a:buChar char="•"/>
-              <a:defRPr sz="2400" kern="1200">
-                <a:solidFill>
-                  <a:schemeClr val="tx1"/>
-                </a:solidFill>
-                <a:latin typeface="+mn-lt"/>
-                <a:ea typeface="+mn-ea"/>
-                <a:cs typeface="+mn-cs"/>
-              </a:defRPr>
-            </a:lvl2pPr>
-            <a:lvl3pPr marL="1143000" indent="-228600" algn="l" defTabSz="914400" rtl="0" eaLnBrk="1" latinLnBrk="0" hangingPunct="1">
-              <a:lnSpc>
-                <a:spcPct val="90000"/>
-              </a:lnSpc>
-              <a:spcBef>
-                <a:spcPts val="500"/>
-              </a:spcBef>
-              <a:buFont typeface="Arial" panose="020B0604020202020204" pitchFamily="34" charset="0"/>
-              <a:buChar char="•"/>
-              <a:defRPr sz="2000" kern="1200">
-                <a:solidFill>
-                  <a:schemeClr val="tx1"/>
-                </a:solidFill>
-                <a:latin typeface="+mn-lt"/>
-                <a:ea typeface="+mn-ea"/>
-                <a:cs typeface="+mn-cs"/>
-              </a:defRPr>
-            </a:lvl3pPr>
-            <a:lvl4pPr marL="1600200" indent="-228600" algn="l" defTabSz="914400" rtl="0" eaLnBrk="1" latinLnBrk="0" hangingPunct="1">
-              <a:lnSpc>
-                <a:spcPct val="90000"/>
-              </a:lnSpc>
-              <a:spcBef>
-                <a:spcPts val="500"/>
-              </a:spcBef>
-              <a:buFont typeface="Arial" panose="020B0604020202020204" pitchFamily="34" charset="0"/>
-              <a:buChar char="•"/>
-              <a:defRPr sz="1800" kern="1200">
-                <a:solidFill>
-                  <a:schemeClr val="tx1"/>
-                </a:solidFill>
-                <a:latin typeface="+mn-lt"/>
-                <a:ea typeface="+mn-ea"/>
-                <a:cs typeface="+mn-cs"/>
-              </a:defRPr>
-            </a:lvl4pPr>
-            <a:lvl5pPr marL="2057400" indent="-228600" algn="l" defTabSz="914400" rtl="0" eaLnBrk="1" latinLnBrk="0" hangingPunct="1">
-              <a:lnSpc>
-                <a:spcPct val="90000"/>
-              </a:lnSpc>
-              <a:spcBef>
-                <a:spcPts val="500"/>
-              </a:spcBef>
-              <a:buFont typeface="Arial" panose="020B0604020202020204" pitchFamily="34" charset="0"/>
-              <a:buChar char="•"/>
-              <a:defRPr sz="1800" kern="1200">
-                <a:solidFill>
-                  <a:schemeClr val="tx1"/>
-                </a:solidFill>
-                <a:latin typeface="+mn-lt"/>
-                <a:ea typeface="+mn-ea"/>
-                <a:cs typeface="+mn-cs"/>
-              </a:defRPr>
-            </a:lvl5pPr>
-            <a:lvl6pPr marL="2514600" indent="-228600" algn="l" defTabSz="914400" rtl="0" eaLnBrk="1" latinLnBrk="0" hangingPunct="1">
-              <a:lnSpc>
-                <a:spcPct val="90000"/>
-              </a:lnSpc>
-              <a:spcBef>
-                <a:spcPts val="500"/>
-              </a:spcBef>
-              <a:buFont typeface="Arial" panose="020B0604020202020204" pitchFamily="34" charset="0"/>
-              <a:buChar char="•"/>
-              <a:defRPr sz="1800" kern="1200">
-                <a:solidFill>
-                  <a:schemeClr val="tx1"/>
-                </a:solidFill>
-                <a:latin typeface="+mn-lt"/>
-                <a:ea typeface="+mn-ea"/>
-                <a:cs typeface="+mn-cs"/>
-              </a:defRPr>
-            </a:lvl6pPr>
-            <a:lvl7pPr marL="2971800" indent="-228600" algn="l" defTabSz="914400" rtl="0" eaLnBrk="1" latinLnBrk="0" hangingPunct="1">
-              <a:lnSpc>
-                <a:spcPct val="90000"/>
-              </a:lnSpc>
-              <a:spcBef>
-                <a:spcPts val="500"/>
-              </a:spcBef>
-              <a:buFont typeface="Arial" panose="020B0604020202020204" pitchFamily="34" charset="0"/>
-              <a:buChar char="•"/>
-              <a:defRPr sz="1800" kern="1200">
-                <a:solidFill>
-                  <a:schemeClr val="tx1"/>
-                </a:solidFill>
-                <a:latin typeface="+mn-lt"/>
-                <a:ea typeface="+mn-ea"/>
-                <a:cs typeface="+mn-cs"/>
-              </a:defRPr>
-            </a:lvl7pPr>
-            <a:lvl8pPr marL="3429000" indent="-228600" algn="l" defTabSz="914400" rtl="0" eaLnBrk="1" latinLnBrk="0" hangingPunct="1">
-              <a:lnSpc>
-                <a:spcPct val="90000"/>
-              </a:lnSpc>
-              <a:spcBef>
-                <a:spcPts val="500"/>
-              </a:spcBef>
-              <a:buFont typeface="Arial" panose="020B0604020202020204" pitchFamily="34" charset="0"/>
-              <a:buChar char="•"/>
-              <a:defRPr sz="1800" kern="1200">
-                <a:solidFill>
-                  <a:schemeClr val="tx1"/>
-                </a:solidFill>
-                <a:latin typeface="+mn-lt"/>
-                <a:ea typeface="+mn-ea"/>
-                <a:cs typeface="+mn-cs"/>
-              </a:defRPr>
-            </a:lvl8pPr>
-            <a:lvl9pPr marL="3886200" indent="-228600" algn="l" defTabSz="914400" rtl="0" eaLnBrk="1" latinLnBrk="0" hangingPunct="1">
-              <a:lnSpc>
-                <a:spcPct val="90000"/>
-              </a:lnSpc>
-              <a:spcBef>
-                <a:spcPts val="500"/>
-              </a:spcBef>
-              <a:buFont typeface="Arial" panose="020B0604020202020204" pitchFamily="34" charset="0"/>
-              <a:buChar char="•"/>
-              <a:defRPr sz="1800" kern="1200">
-                <a:solidFill>
-                  <a:schemeClr val="tx1"/>
-                </a:solidFill>
-                <a:latin typeface="+mn-lt"/>
-                <a:ea typeface="+mn-ea"/>
-                <a:cs typeface="+mn-cs"/>
-              </a:defRPr>
-            </a:lvl9pPr>
-          </a:lstStyle>
-          <a:p>
-            <a:pPr marL="0" indent="0">
-              <a:lnSpc>
-                <a:spcPct val="120000"/>
-              </a:lnSpc>
-              <a:spcBef>
-                <a:spcPts val="0"/>
-              </a:spcBef>
-              <a:buFont typeface="Arial" panose="020B0604020202020204" pitchFamily="34" charset="0"/>
-              <a:buNone/>
-            </a:pPr>
-            <a:r>
-              <a:rPr lang="en-US" sz="1300" b="1" dirty="0">
-                <a:latin typeface="Courier New" panose="02070309020205020404" pitchFamily="49" charset="0"/>
-                <a:cs typeface="Courier New" panose="02070309020205020404" pitchFamily="49" charset="0"/>
-              </a:rPr>
-              <a:t>class Vector2D:</a:t>
-            </a:r>
-          </a:p>
-          <a:p>
-            <a:pPr marL="0" indent="0">
-              <a:lnSpc>
-                <a:spcPct val="120000"/>
-              </a:lnSpc>
-              <a:spcBef>
-                <a:spcPts val="0"/>
-              </a:spcBef>
-              <a:buFont typeface="Arial" panose="020B0604020202020204" pitchFamily="34" charset="0"/>
-              <a:buNone/>
-            </a:pPr>
-            <a:endParaRPr lang="en-US" sz="1300" b="1" dirty="0">
-              <a:latin typeface="Courier New" panose="02070309020205020404" pitchFamily="49" charset="0"/>
-              <a:cs typeface="Courier New" panose="02070309020205020404" pitchFamily="49" charset="0"/>
-            </a:endParaRPr>
-          </a:p>
-          <a:p>
-            <a:pPr marL="0" indent="0">
-              <a:lnSpc>
-                <a:spcPct val="120000"/>
-              </a:lnSpc>
-              <a:spcBef>
-                <a:spcPts val="0"/>
-              </a:spcBef>
-              <a:buFont typeface="Arial" panose="020B0604020202020204" pitchFamily="34" charset="0"/>
-              <a:buNone/>
-            </a:pPr>
-            <a:r>
-              <a:rPr lang="en-US" sz="1300" dirty="0">
-                <a:latin typeface="Courier New" panose="02070309020205020404" pitchFamily="49" charset="0"/>
-                <a:cs typeface="Courier New" panose="02070309020205020404" pitchFamily="49" charset="0"/>
-              </a:rPr>
-              <a:t>  def __</a:t>
-            </a:r>
-            <a:r>
-              <a:rPr lang="en-US" sz="1300" dirty="0" err="1">
-                <a:latin typeface="Courier New" panose="02070309020205020404" pitchFamily="49" charset="0"/>
-                <a:cs typeface="Courier New" panose="02070309020205020404" pitchFamily="49" charset="0"/>
-              </a:rPr>
-              <a:t>init</a:t>
-            </a:r>
-            <a:r>
-              <a:rPr lang="en-US" sz="1300" dirty="0">
-                <a:latin typeface="Courier New" panose="02070309020205020404" pitchFamily="49" charset="0"/>
-                <a:cs typeface="Courier New" panose="02070309020205020404" pitchFamily="49" charset="0"/>
-              </a:rPr>
-              <a:t>__(self, dx, </a:t>
-            </a:r>
-            <a:r>
-              <a:rPr lang="en-US" sz="1300" dirty="0" err="1">
-                <a:latin typeface="Courier New" panose="02070309020205020404" pitchFamily="49" charset="0"/>
-                <a:cs typeface="Courier New" panose="02070309020205020404" pitchFamily="49" charset="0"/>
-              </a:rPr>
-              <a:t>dy</a:t>
-            </a:r>
-            <a:r>
-              <a:rPr lang="en-US" sz="1300" dirty="0">
-                <a:latin typeface="Courier New" panose="02070309020205020404" pitchFamily="49" charset="0"/>
-                <a:cs typeface="Courier New" panose="02070309020205020404" pitchFamily="49" charset="0"/>
-              </a:rPr>
-              <a:t>): </a:t>
-            </a:r>
-          </a:p>
-          <a:p>
-            <a:pPr marL="0" indent="0">
-              <a:lnSpc>
-                <a:spcPct val="120000"/>
-              </a:lnSpc>
-              <a:spcBef>
-                <a:spcPts val="0"/>
-              </a:spcBef>
-              <a:buFont typeface="Arial" panose="020B0604020202020204" pitchFamily="34" charset="0"/>
-              <a:buNone/>
-            </a:pPr>
-            <a:r>
-              <a:rPr lang="en-US" sz="1300" dirty="0">
-                <a:latin typeface="Courier New" panose="02070309020205020404" pitchFamily="49" charset="0"/>
-                <a:cs typeface="Courier New" panose="02070309020205020404" pitchFamily="49" charset="0"/>
-              </a:rPr>
-              <a:t>    </a:t>
-            </a:r>
-            <a:r>
-              <a:rPr lang="en-US" sz="1300" dirty="0" err="1">
-                <a:latin typeface="Courier New" panose="02070309020205020404" pitchFamily="49" charset="0"/>
-                <a:cs typeface="Courier New" panose="02070309020205020404" pitchFamily="49" charset="0"/>
-              </a:rPr>
-              <a:t>self.dx</a:t>
-            </a:r>
-            <a:r>
-              <a:rPr lang="en-US" sz="1300" dirty="0">
-                <a:latin typeface="Courier New" panose="02070309020205020404" pitchFamily="49" charset="0"/>
-                <a:cs typeface="Courier New" panose="02070309020205020404" pitchFamily="49" charset="0"/>
-              </a:rPr>
-              <a:t> = dx</a:t>
-            </a:r>
-          </a:p>
-          <a:p>
-            <a:pPr marL="0" indent="0">
-              <a:lnSpc>
-                <a:spcPct val="120000"/>
-              </a:lnSpc>
-              <a:spcBef>
-                <a:spcPts val="0"/>
-              </a:spcBef>
-              <a:buFont typeface="Arial" panose="020B0604020202020204" pitchFamily="34" charset="0"/>
-              <a:buNone/>
-            </a:pPr>
-            <a:r>
-              <a:rPr lang="en-US" sz="1300" dirty="0">
-                <a:latin typeface="Courier New" panose="02070309020205020404" pitchFamily="49" charset="0"/>
-                <a:cs typeface="Courier New" panose="02070309020205020404" pitchFamily="49" charset="0"/>
-              </a:rPr>
-              <a:t>    </a:t>
-            </a:r>
-            <a:r>
-              <a:rPr lang="en-US" sz="1300" dirty="0" err="1">
-                <a:latin typeface="Courier New" panose="02070309020205020404" pitchFamily="49" charset="0"/>
-                <a:cs typeface="Courier New" panose="02070309020205020404" pitchFamily="49" charset="0"/>
-              </a:rPr>
-              <a:t>self.dy</a:t>
-            </a:r>
-            <a:r>
-              <a:rPr lang="en-US" sz="1300" dirty="0">
-                <a:latin typeface="Courier New" panose="02070309020205020404" pitchFamily="49" charset="0"/>
-                <a:cs typeface="Courier New" panose="02070309020205020404" pitchFamily="49" charset="0"/>
-              </a:rPr>
-              <a:t> = </a:t>
-            </a:r>
-            <a:r>
-              <a:rPr lang="en-US" sz="1300" dirty="0" err="1">
-                <a:latin typeface="Courier New" panose="02070309020205020404" pitchFamily="49" charset="0"/>
-                <a:cs typeface="Courier New" panose="02070309020205020404" pitchFamily="49" charset="0"/>
-              </a:rPr>
-              <a:t>dy</a:t>
-            </a:r>
-            <a:endParaRPr lang="en-US" sz="1300" dirty="0">
-              <a:latin typeface="Courier New" panose="02070309020205020404" pitchFamily="49" charset="0"/>
-              <a:cs typeface="Courier New" panose="02070309020205020404" pitchFamily="49" charset="0"/>
-            </a:endParaRPr>
-          </a:p>
-          <a:p>
-            <a:pPr marL="0" indent="0">
-              <a:lnSpc>
-                <a:spcPct val="120000"/>
-              </a:lnSpc>
-              <a:spcBef>
-                <a:spcPts val="0"/>
-              </a:spcBef>
-              <a:buFont typeface="Arial" panose="020B0604020202020204" pitchFamily="34" charset="0"/>
-              <a:buNone/>
-            </a:pPr>
-            <a:endParaRPr lang="en-US" sz="1300" dirty="0">
-              <a:latin typeface="Courier New" panose="02070309020205020404" pitchFamily="49" charset="0"/>
-              <a:cs typeface="Courier New" panose="02070309020205020404" pitchFamily="49" charset="0"/>
-            </a:endParaRPr>
-          </a:p>
-          <a:p>
-            <a:pPr marL="0" indent="0">
-              <a:lnSpc>
-                <a:spcPct val="120000"/>
-              </a:lnSpc>
-              <a:spcBef>
-                <a:spcPts val="0"/>
-              </a:spcBef>
-              <a:buFont typeface="Arial" panose="020B0604020202020204" pitchFamily="34" charset="0"/>
-              <a:buNone/>
-            </a:pPr>
-            <a:r>
-              <a:rPr lang="en-US" sz="1300" dirty="0">
-                <a:latin typeface="Courier New" panose="02070309020205020404" pitchFamily="49" charset="0"/>
-                <a:cs typeface="Courier New" panose="02070309020205020404" pitchFamily="49" charset="0"/>
-              </a:rPr>
-              <a:t>  def __str__(self):</a:t>
-            </a:r>
-          </a:p>
-          <a:p>
-            <a:pPr marL="0" indent="0">
-              <a:lnSpc>
-                <a:spcPct val="120000"/>
-              </a:lnSpc>
-              <a:spcBef>
-                <a:spcPts val="0"/>
-              </a:spcBef>
-              <a:buFont typeface="Arial" panose="020B0604020202020204" pitchFamily="34" charset="0"/>
-              <a:buNone/>
-            </a:pPr>
-            <a:r>
-              <a:rPr lang="en-US" sz="1300" dirty="0">
-                <a:latin typeface="Courier New" panose="02070309020205020404" pitchFamily="49" charset="0"/>
-                <a:cs typeface="Courier New" panose="02070309020205020404" pitchFamily="49" charset="0"/>
-              </a:rPr>
-              <a:t>    return f</a:t>
-            </a:r>
-            <a:r>
-              <a:rPr lang="en-US" sz="1300" dirty="0">
+                <a:latin typeface="Courier New" panose="02070309020205020404" pitchFamily="49" charset="0"/>
+                <a:cs typeface="Courier New" panose="02070309020205020404" pitchFamily="49" charset="0"/>
+              </a:rPr>
+              <a:t>[</a:t>
+            </a:r>
+            <a:r>
+              <a:rPr lang="nl-NL" sz="2000" dirty="0">
                 <a:solidFill>
                   <a:schemeClr val="accent2">
                     <a:lumMod val="75000"/>
@@ -27464,89 +27506,35 @@
                 <a:latin typeface="Courier New" panose="02070309020205020404" pitchFamily="49" charset="0"/>
                 <a:cs typeface="Courier New" panose="02070309020205020404" pitchFamily="49" charset="0"/>
               </a:rPr>
-              <a:t>"(</a:t>
-            </a:r>
-            <a:r>
-              <a:rPr lang="en-US" sz="1300" dirty="0">
-                <a:solidFill>
-                  <a:schemeClr val="accent1">
-                    <a:lumMod val="75000"/>
-                  </a:schemeClr>
-                </a:solidFill>
-                <a:latin typeface="Courier New" panose="02070309020205020404" pitchFamily="49" charset="0"/>
-                <a:cs typeface="Courier New" panose="02070309020205020404" pitchFamily="49" charset="0"/>
-              </a:rPr>
-              <a:t>{</a:t>
-            </a:r>
-            <a:r>
-              <a:rPr lang="en-US" sz="1300" dirty="0" err="1">
-                <a:solidFill>
-                  <a:schemeClr val="accent1">
-                    <a:lumMod val="75000"/>
-                  </a:schemeClr>
-                </a:solidFill>
-                <a:latin typeface="Courier New" panose="02070309020205020404" pitchFamily="49" charset="0"/>
-                <a:cs typeface="Courier New" panose="02070309020205020404" pitchFamily="49" charset="0"/>
-              </a:rPr>
-              <a:t>self.dx</a:t>
-            </a:r>
-            <a:r>
-              <a:rPr lang="en-US" sz="1300" dirty="0">
-                <a:solidFill>
-                  <a:schemeClr val="accent1">
-                    <a:lumMod val="75000"/>
-                  </a:schemeClr>
-                </a:solidFill>
-                <a:latin typeface="Courier New" panose="02070309020205020404" pitchFamily="49" charset="0"/>
-                <a:cs typeface="Courier New" panose="02070309020205020404" pitchFamily="49" charset="0"/>
-              </a:rPr>
-              <a:t>}</a:t>
-            </a:r>
-            <a:r>
-              <a:rPr lang="en-US" sz="1300" dirty="0">
-                <a:latin typeface="Courier New" panose="02070309020205020404" pitchFamily="49" charset="0"/>
-                <a:cs typeface="Courier New" panose="02070309020205020404" pitchFamily="49" charset="0"/>
-              </a:rPr>
-              <a:t>, </a:t>
-            </a:r>
-            <a:r>
-              <a:rPr lang="en-US" sz="1300" dirty="0">
-                <a:solidFill>
-                  <a:schemeClr val="accent1">
-                    <a:lumMod val="75000"/>
-                  </a:schemeClr>
-                </a:solidFill>
-                <a:latin typeface="Courier New" panose="02070309020205020404" pitchFamily="49" charset="0"/>
-                <a:cs typeface="Courier New" panose="02070309020205020404" pitchFamily="49" charset="0"/>
-              </a:rPr>
-              <a:t>{</a:t>
-            </a:r>
-            <a:r>
-              <a:rPr lang="en-US" sz="1300" dirty="0" err="1">
-                <a:solidFill>
-                  <a:schemeClr val="accent1">
-                    <a:lumMod val="75000"/>
-                  </a:schemeClr>
-                </a:solidFill>
-                <a:latin typeface="Courier New" panose="02070309020205020404" pitchFamily="49" charset="0"/>
-                <a:cs typeface="Courier New" panose="02070309020205020404" pitchFamily="49" charset="0"/>
-              </a:rPr>
-              <a:t>self.dy</a:t>
-            </a:r>
-            <a:r>
-              <a:rPr lang="en-US" sz="1300" dirty="0">
-                <a:solidFill>
-                  <a:schemeClr val="accent1">
-                    <a:lumMod val="75000"/>
-                  </a:schemeClr>
-                </a:solidFill>
-                <a:latin typeface="Courier New" panose="02070309020205020404" pitchFamily="49" charset="0"/>
-                <a:cs typeface="Courier New" panose="02070309020205020404" pitchFamily="49" charset="0"/>
-              </a:rPr>
-              <a:t>}</a:t>
-            </a:r>
-            <a:r>
-              <a:rPr lang="en-US" sz="1300" dirty="0">
+              <a:t>"NAAM"</a:t>
+            </a:r>
+            <a:r>
+              <a:rPr lang="nl-NL" sz="2000" dirty="0">
+                <a:latin typeface="Courier New" panose="02070309020205020404" pitchFamily="49" charset="0"/>
+                <a:cs typeface="Courier New" panose="02070309020205020404" pitchFamily="49" charset="0"/>
+              </a:rPr>
+              <a:t>]</a:t>
+            </a:r>
+            <a:r>
+              <a:rPr lang="nl-NL" sz="2000" dirty="0"/>
+              <a:t> is gelijk aan </a:t>
+            </a:r>
+            <a:r>
+              <a:rPr lang="nl-NL" sz="2000" dirty="0" err="1">
+                <a:latin typeface="Courier New" panose="02070309020205020404" pitchFamily="49" charset="0"/>
+                <a:cs typeface="Courier New" panose="02070309020205020404" pitchFamily="49" charset="0"/>
+              </a:rPr>
+              <a:t>FuzzyDict</a:t>
+            </a:r>
+            <a:r>
+              <a:rPr lang="nl-NL" sz="2000" dirty="0">
+                <a:latin typeface="Courier New" panose="02070309020205020404" pitchFamily="49" charset="0"/>
+                <a:cs typeface="Courier New" panose="02070309020205020404" pitchFamily="49" charset="0"/>
+              </a:rPr>
+              <a:t>[</a:t>
+            </a:r>
+            <a:r>
+              <a:rPr lang="nl-NL" sz="2000" dirty="0">
                 <a:solidFill>
                   <a:schemeClr val="accent2">
                     <a:lumMod val="75000"/>
@@ -27555,436 +27543,213 @@
                 <a:latin typeface="Courier New" panose="02070309020205020404" pitchFamily="49" charset="0"/>
                 <a:cs typeface="Courier New" panose="02070309020205020404" pitchFamily="49" charset="0"/>
               </a:rPr>
-              <a:t>)"</a:t>
-            </a:r>
-          </a:p>
-          <a:p>
-            <a:pPr marL="0" indent="0">
-              <a:lnSpc>
-                <a:spcPct val="120000"/>
-              </a:lnSpc>
-              <a:spcBef>
-                <a:spcPts val="0"/>
-              </a:spcBef>
-              <a:buFont typeface="Arial" panose="020B0604020202020204" pitchFamily="34" charset="0"/>
-              <a:buNone/>
-            </a:pPr>
-            <a:r>
-              <a:rPr lang="en-US" sz="1300" dirty="0">
-                <a:latin typeface="Courier New" panose="02070309020205020404" pitchFamily="49" charset="0"/>
-                <a:cs typeface="Courier New" panose="02070309020205020404" pitchFamily="49" charset="0"/>
-              </a:rPr>
-              <a:t>  </a:t>
-            </a:r>
-          </a:p>
-          <a:p>
-            <a:pPr marL="0" indent="0">
-              <a:lnSpc>
-                <a:spcPct val="120000"/>
-              </a:lnSpc>
-              <a:spcBef>
-                <a:spcPts val="0"/>
-              </a:spcBef>
-              <a:buFont typeface="Arial" panose="020B0604020202020204" pitchFamily="34" charset="0"/>
-              <a:buNone/>
-            </a:pPr>
-            <a:r>
-              <a:rPr lang="en-US" sz="1300" b="1" dirty="0">
-                <a:latin typeface="Courier New" panose="02070309020205020404" pitchFamily="49" charset="0"/>
-                <a:cs typeface="Courier New" panose="02070309020205020404" pitchFamily="49" charset="0"/>
-              </a:rPr>
-              <a:t>  </a:t>
-            </a:r>
-            <a:r>
-              <a:rPr lang="en-US" sz="1300" dirty="0">
-                <a:latin typeface="Courier New" panose="02070309020205020404" pitchFamily="49" charset="0"/>
-                <a:cs typeface="Courier New" panose="02070309020205020404" pitchFamily="49" charset="0"/>
-              </a:rPr>
-              <a:t>def </a:t>
-            </a:r>
-            <a:r>
-              <a:rPr lang="en-US" sz="1300" b="1" dirty="0">
-                <a:latin typeface="Courier New" panose="02070309020205020404" pitchFamily="49" charset="0"/>
-                <a:cs typeface="Courier New" panose="02070309020205020404" pitchFamily="49" charset="0"/>
-              </a:rPr>
-              <a:t>__add__</a:t>
-            </a:r>
-            <a:r>
-              <a:rPr lang="en-US" sz="1300" dirty="0">
-                <a:latin typeface="Courier New" panose="02070309020205020404" pitchFamily="49" charset="0"/>
-                <a:cs typeface="Courier New" panose="02070309020205020404" pitchFamily="49" charset="0"/>
-              </a:rPr>
-              <a:t>(self, other): </a:t>
-            </a:r>
-          </a:p>
-          <a:p>
-            <a:pPr marL="0" indent="0">
-              <a:lnSpc>
-                <a:spcPct val="120000"/>
-              </a:lnSpc>
-              <a:spcBef>
-                <a:spcPts val="0"/>
-              </a:spcBef>
-              <a:buFont typeface="Arial" panose="020B0604020202020204" pitchFamily="34" charset="0"/>
-              <a:buNone/>
-            </a:pPr>
-            <a:r>
-              <a:rPr lang="en-US" sz="1300" dirty="0">
-                <a:latin typeface="Courier New" panose="02070309020205020404" pitchFamily="49" charset="0"/>
-                <a:cs typeface="Courier New" panose="02070309020205020404" pitchFamily="49" charset="0"/>
-              </a:rPr>
-              <a:t>    return Vector2D(</a:t>
-            </a:r>
-          </a:p>
-          <a:p>
-            <a:pPr marL="0" indent="0">
-              <a:lnSpc>
-                <a:spcPct val="120000"/>
-              </a:lnSpc>
-              <a:spcBef>
-                <a:spcPts val="0"/>
-              </a:spcBef>
-              <a:buFont typeface="Arial" panose="020B0604020202020204" pitchFamily="34" charset="0"/>
-              <a:buNone/>
-            </a:pPr>
-            <a:r>
-              <a:rPr lang="en-US" sz="1300" dirty="0">
-                <a:latin typeface="Courier New" panose="02070309020205020404" pitchFamily="49" charset="0"/>
-                <a:cs typeface="Courier New" panose="02070309020205020404" pitchFamily="49" charset="0"/>
-              </a:rPr>
-              <a:t>      </a:t>
-            </a:r>
-            <a:r>
-              <a:rPr lang="en-US" sz="1300" dirty="0" err="1">
-                <a:latin typeface="Courier New" panose="02070309020205020404" pitchFamily="49" charset="0"/>
-                <a:cs typeface="Courier New" panose="02070309020205020404" pitchFamily="49" charset="0"/>
-              </a:rPr>
-              <a:t>self.dx</a:t>
-            </a:r>
-            <a:r>
-              <a:rPr lang="en-US" sz="1300" dirty="0">
-                <a:latin typeface="Courier New" panose="02070309020205020404" pitchFamily="49" charset="0"/>
-                <a:cs typeface="Courier New" panose="02070309020205020404" pitchFamily="49" charset="0"/>
-              </a:rPr>
-              <a:t> + </a:t>
-            </a:r>
-            <a:r>
-              <a:rPr lang="en-US" sz="1300" dirty="0" err="1">
-                <a:latin typeface="Courier New" panose="02070309020205020404" pitchFamily="49" charset="0"/>
-                <a:cs typeface="Courier New" panose="02070309020205020404" pitchFamily="49" charset="0"/>
-              </a:rPr>
-              <a:t>other.dx</a:t>
-            </a:r>
-            <a:r>
-              <a:rPr lang="en-US" sz="1300" dirty="0">
-                <a:latin typeface="Courier New" panose="02070309020205020404" pitchFamily="49" charset="0"/>
-                <a:cs typeface="Courier New" panose="02070309020205020404" pitchFamily="49" charset="0"/>
-              </a:rPr>
-              <a:t>,</a:t>
-            </a:r>
-          </a:p>
-          <a:p>
-            <a:pPr marL="0" indent="0">
-              <a:lnSpc>
-                <a:spcPct val="120000"/>
-              </a:lnSpc>
-              <a:spcBef>
-                <a:spcPts val="0"/>
-              </a:spcBef>
-              <a:buFont typeface="Arial" panose="020B0604020202020204" pitchFamily="34" charset="0"/>
-              <a:buNone/>
-            </a:pPr>
-            <a:r>
-              <a:rPr lang="en-US" sz="1300" dirty="0">
-                <a:latin typeface="Courier New" panose="02070309020205020404" pitchFamily="49" charset="0"/>
-                <a:cs typeface="Courier New" panose="02070309020205020404" pitchFamily="49" charset="0"/>
-              </a:rPr>
-              <a:t>      </a:t>
-            </a:r>
-            <a:r>
-              <a:rPr lang="en-US" sz="1300" dirty="0" err="1">
-                <a:latin typeface="Courier New" panose="02070309020205020404" pitchFamily="49" charset="0"/>
-                <a:cs typeface="Courier New" panose="02070309020205020404" pitchFamily="49" charset="0"/>
-              </a:rPr>
-              <a:t>self.dy</a:t>
-            </a:r>
-            <a:r>
-              <a:rPr lang="en-US" sz="1300" dirty="0">
-                <a:latin typeface="Courier New" panose="02070309020205020404" pitchFamily="49" charset="0"/>
-                <a:cs typeface="Courier New" panose="02070309020205020404" pitchFamily="49" charset="0"/>
-              </a:rPr>
-              <a:t> + </a:t>
-            </a:r>
-            <a:r>
-              <a:rPr lang="en-US" sz="1300" dirty="0" err="1">
-                <a:latin typeface="Courier New" panose="02070309020205020404" pitchFamily="49" charset="0"/>
-                <a:cs typeface="Courier New" panose="02070309020205020404" pitchFamily="49" charset="0"/>
-              </a:rPr>
-              <a:t>other.dy</a:t>
-            </a:r>
-            <a:endParaRPr lang="en-US" sz="1300" dirty="0">
-              <a:latin typeface="Courier New" panose="02070309020205020404" pitchFamily="49" charset="0"/>
-              <a:cs typeface="Courier New" panose="02070309020205020404" pitchFamily="49" charset="0"/>
-            </a:endParaRPr>
-          </a:p>
-          <a:p>
-            <a:pPr marL="0" indent="0">
-              <a:lnSpc>
-                <a:spcPct val="120000"/>
-              </a:lnSpc>
-              <a:spcBef>
-                <a:spcPts val="0"/>
-              </a:spcBef>
-              <a:buFont typeface="Arial" panose="020B0604020202020204" pitchFamily="34" charset="0"/>
-              <a:buNone/>
-            </a:pPr>
-            <a:r>
-              <a:rPr lang="en-US" sz="1300" dirty="0">
-                <a:latin typeface="Courier New" panose="02070309020205020404" pitchFamily="49" charset="0"/>
-                <a:cs typeface="Courier New" panose="02070309020205020404" pitchFamily="49" charset="0"/>
-              </a:rPr>
-              <a:t>    )</a:t>
-            </a:r>
-          </a:p>
-          <a:p>
-            <a:pPr marL="0" indent="0">
-              <a:lnSpc>
-                <a:spcPct val="120000"/>
-              </a:lnSpc>
-              <a:spcBef>
-                <a:spcPts val="0"/>
-              </a:spcBef>
-              <a:buFont typeface="Arial" panose="020B0604020202020204" pitchFamily="34" charset="0"/>
-              <a:buNone/>
-            </a:pPr>
-            <a:endParaRPr lang="en-US" sz="1300" b="1" dirty="0">
-              <a:latin typeface="Courier New" panose="02070309020205020404" pitchFamily="49" charset="0"/>
-              <a:cs typeface="Courier New" panose="02070309020205020404" pitchFamily="49" charset="0"/>
-            </a:endParaRPr>
-          </a:p>
-          <a:p>
-            <a:pPr marL="0" indent="0">
-              <a:lnSpc>
-                <a:spcPct val="120000"/>
-              </a:lnSpc>
-              <a:spcBef>
-                <a:spcPts val="0"/>
-              </a:spcBef>
-              <a:buFont typeface="Arial" panose="020B0604020202020204" pitchFamily="34" charset="0"/>
-              <a:buNone/>
-            </a:pPr>
-            <a:endParaRPr lang="en-US" sz="1300" b="1" dirty="0">
-              <a:solidFill>
-                <a:schemeClr val="accent6">
-                  <a:lumMod val="75000"/>
-                </a:schemeClr>
-              </a:solidFill>
-              <a:latin typeface="Courier New" panose="02070309020205020404" pitchFamily="49" charset="0"/>
-              <a:cs typeface="Courier New" panose="02070309020205020404" pitchFamily="49" charset="0"/>
-            </a:endParaRPr>
-          </a:p>
-          <a:p>
-            <a:pPr marL="0" indent="0">
-              <a:lnSpc>
-                <a:spcPct val="120000"/>
-              </a:lnSpc>
-              <a:spcBef>
-                <a:spcPts val="0"/>
-              </a:spcBef>
-              <a:buFont typeface="Arial" panose="020B0604020202020204" pitchFamily="34" charset="0"/>
-              <a:buNone/>
-            </a:pPr>
-            <a:r>
-              <a:rPr lang="en-US" sz="1300" dirty="0">
-                <a:solidFill>
-                  <a:schemeClr val="accent6">
-                    <a:lumMod val="75000"/>
-                  </a:schemeClr>
-                </a:solidFill>
-                <a:latin typeface="Courier New" panose="02070309020205020404" pitchFamily="49" charset="0"/>
-                <a:cs typeface="Courier New" panose="02070309020205020404" pitchFamily="49" charset="0"/>
-              </a:rPr>
-              <a:t># Construct two vectors.</a:t>
-            </a:r>
-          </a:p>
-          <a:p>
-            <a:pPr marL="0" indent="0">
-              <a:lnSpc>
-                <a:spcPct val="120000"/>
-              </a:lnSpc>
-              <a:spcBef>
-                <a:spcPts val="0"/>
-              </a:spcBef>
-              <a:buFont typeface="Arial" panose="020B0604020202020204" pitchFamily="34" charset="0"/>
-              <a:buNone/>
-            </a:pPr>
-            <a:r>
-              <a:rPr lang="en-US" sz="1300" dirty="0">
-                <a:latin typeface="Courier New" panose="02070309020205020404" pitchFamily="49" charset="0"/>
-                <a:cs typeface="Courier New" panose="02070309020205020404" pitchFamily="49" charset="0"/>
-              </a:rPr>
-              <a:t>v1 = </a:t>
-            </a:r>
-            <a:r>
-              <a:rPr lang="en-US" sz="1300" b="1" dirty="0">
-                <a:latin typeface="Courier New" panose="02070309020205020404" pitchFamily="49" charset="0"/>
-                <a:cs typeface="Courier New" panose="02070309020205020404" pitchFamily="49" charset="0"/>
-              </a:rPr>
-              <a:t>Vector2D</a:t>
-            </a:r>
-            <a:r>
-              <a:rPr lang="en-US" sz="1300" dirty="0">
-                <a:latin typeface="Courier New" panose="02070309020205020404" pitchFamily="49" charset="0"/>
-                <a:cs typeface="Courier New" panose="02070309020205020404" pitchFamily="49" charset="0"/>
-              </a:rPr>
-              <a:t>(4, 5)</a:t>
-            </a:r>
-          </a:p>
-          <a:p>
-            <a:pPr marL="0" indent="0">
-              <a:lnSpc>
-                <a:spcPct val="120000"/>
-              </a:lnSpc>
-              <a:spcBef>
-                <a:spcPts val="0"/>
-              </a:spcBef>
-              <a:buFont typeface="Arial" panose="020B0604020202020204" pitchFamily="34" charset="0"/>
-              <a:buNone/>
-            </a:pPr>
-            <a:r>
-              <a:rPr lang="en-US" sz="1300" dirty="0">
-                <a:latin typeface="Courier New" panose="02070309020205020404" pitchFamily="49" charset="0"/>
-                <a:cs typeface="Courier New" panose="02070309020205020404" pitchFamily="49" charset="0"/>
-              </a:rPr>
-              <a:t>v2 = </a:t>
-            </a:r>
-            <a:r>
-              <a:rPr lang="en-US" sz="1300" b="1" dirty="0">
-                <a:latin typeface="Courier New" panose="02070309020205020404" pitchFamily="49" charset="0"/>
-                <a:cs typeface="Courier New" panose="02070309020205020404" pitchFamily="49" charset="0"/>
-              </a:rPr>
-              <a:t>Vector2D</a:t>
-            </a:r>
-            <a:r>
-              <a:rPr lang="en-US" sz="1300" dirty="0">
-                <a:latin typeface="Courier New" panose="02070309020205020404" pitchFamily="49" charset="0"/>
-                <a:cs typeface="Courier New" panose="02070309020205020404" pitchFamily="49" charset="0"/>
-              </a:rPr>
-              <a:t>(2, 4)</a:t>
-            </a:r>
-          </a:p>
-          <a:p>
-            <a:pPr marL="0" indent="0">
-              <a:lnSpc>
-                <a:spcPct val="120000"/>
-              </a:lnSpc>
-              <a:spcBef>
-                <a:spcPts val="0"/>
-              </a:spcBef>
-              <a:buFont typeface="Arial" panose="020B0604020202020204" pitchFamily="34" charset="0"/>
-              <a:buNone/>
-            </a:pPr>
-            <a:endParaRPr lang="en-US" sz="1300" dirty="0">
-              <a:latin typeface="Courier New" panose="02070309020205020404" pitchFamily="49" charset="0"/>
-              <a:cs typeface="Courier New" panose="02070309020205020404" pitchFamily="49" charset="0"/>
-            </a:endParaRPr>
-          </a:p>
-          <a:p>
-            <a:pPr marL="0" indent="0">
-              <a:lnSpc>
-                <a:spcPct val="120000"/>
-              </a:lnSpc>
-              <a:spcBef>
-                <a:spcPts val="0"/>
-              </a:spcBef>
-              <a:buFont typeface="Arial" panose="020B0604020202020204" pitchFamily="34" charset="0"/>
-              <a:buNone/>
-            </a:pPr>
-            <a:r>
-              <a:rPr lang="en-US" sz="1300" dirty="0">
-                <a:solidFill>
-                  <a:schemeClr val="accent6">
-                    <a:lumMod val="75000"/>
-                  </a:schemeClr>
-                </a:solidFill>
-                <a:latin typeface="Courier New" panose="02070309020205020404" pitchFamily="49" charset="0"/>
-                <a:cs typeface="Courier New" panose="02070309020205020404" pitchFamily="49" charset="0"/>
-              </a:rPr>
-              <a:t># Add them together; prints (6, 9).</a:t>
-            </a:r>
-          </a:p>
-          <a:p>
-            <a:pPr marL="0" indent="0">
-              <a:lnSpc>
-                <a:spcPct val="120000"/>
-              </a:lnSpc>
-              <a:spcBef>
-                <a:spcPts val="0"/>
-              </a:spcBef>
-              <a:buFont typeface="Arial" panose="020B0604020202020204" pitchFamily="34" charset="0"/>
-              <a:buNone/>
-            </a:pPr>
-            <a:r>
-              <a:rPr lang="en-US" sz="1300" dirty="0">
-                <a:latin typeface="Courier New" panose="02070309020205020404" pitchFamily="49" charset="0"/>
-                <a:cs typeface="Courier New" panose="02070309020205020404" pitchFamily="49" charset="0"/>
-              </a:rPr>
-              <a:t>print(v1 + v2)</a:t>
-            </a:r>
-            <a:endParaRPr lang="en-US" sz="1300" dirty="0">
-              <a:solidFill>
-                <a:schemeClr val="accent6">
-                  <a:lumMod val="75000"/>
-                </a:schemeClr>
-              </a:solidFill>
-              <a:latin typeface="Courier New" panose="02070309020205020404" pitchFamily="49" charset="0"/>
-              <a:cs typeface="Courier New" panose="02070309020205020404" pitchFamily="49" charset="0"/>
-            </a:endParaRPr>
+              <a:t>"naam"</a:t>
+            </a:r>
+            <a:r>
+              <a:rPr lang="nl-NL" sz="2000" dirty="0">
+                <a:latin typeface="Courier New" panose="02070309020205020404" pitchFamily="49" charset="0"/>
+                <a:cs typeface="Courier New" panose="02070309020205020404" pitchFamily="49" charset="0"/>
+              </a:rPr>
+              <a:t>]</a:t>
+            </a:r>
+            <a:r>
+              <a:rPr lang="nl-NL" sz="2000" dirty="0">
+                <a:cs typeface="Courier New" panose="02070309020205020404" pitchFamily="49" charset="0"/>
+              </a:rPr>
+              <a:t>.</a:t>
+            </a:r>
+            <a:endParaRPr lang="nl-NL" sz="2000" dirty="0"/>
+          </a:p>
+          <a:p>
+            <a:pPr lvl="1"/>
+            <a:r>
+              <a:rPr lang="nl-NL" sz="2000" dirty="0">
+                <a:cs typeface="Courier New" panose="02070309020205020404" pitchFamily="49" charset="0"/>
+              </a:rPr>
+              <a:t>Zowel bij ophalen als wegschrijven van waardes.</a:t>
+            </a:r>
+            <a:endParaRPr lang="nl-NL" sz="2000" dirty="0"/>
+          </a:p>
+          <a:p>
+            <a:pPr marL="457200" indent="-457200">
+              <a:buFont typeface="Arial" panose="020B0604020202020204" pitchFamily="34" charset="0"/>
+              <a:buAutoNum type="arabicPeriod"/>
+            </a:pPr>
+            <a:endParaRPr lang="nl-NL" sz="2000" dirty="0"/>
+          </a:p>
+          <a:p>
+            <a:pPr marL="457200" indent="-457200">
+              <a:buFont typeface="Arial" panose="020B0604020202020204" pitchFamily="34" charset="0"/>
+              <a:buAutoNum type="arabicPeriod"/>
+            </a:pPr>
+            <a:r>
+              <a:rPr lang="nl-NL" sz="2000" dirty="0"/>
+              <a:t>Gebruik:</a:t>
+            </a:r>
+          </a:p>
+          <a:p>
+            <a:pPr marL="0" indent="0">
+              <a:buNone/>
+            </a:pPr>
+            <a:r>
+              <a:rPr lang="nl-NL" sz="2000" dirty="0">
+                <a:latin typeface="Courier New" panose="02070309020205020404" pitchFamily="49" charset="0"/>
+                <a:cs typeface="Courier New" panose="02070309020205020404" pitchFamily="49" charset="0"/>
+              </a:rPr>
+              <a:t>   __</a:t>
+            </a:r>
+            <a:r>
+              <a:rPr lang="nl-NL" sz="2000" dirty="0" err="1">
+                <a:latin typeface="Courier New" panose="02070309020205020404" pitchFamily="49" charset="0"/>
+                <a:cs typeface="Courier New" panose="02070309020205020404" pitchFamily="49" charset="0"/>
+              </a:rPr>
+              <a:t>getitem</a:t>
+            </a:r>
+            <a:r>
+              <a:rPr lang="nl-NL" sz="2000" dirty="0">
+                <a:latin typeface="Courier New" panose="02070309020205020404" pitchFamily="49" charset="0"/>
+                <a:cs typeface="Courier New" panose="02070309020205020404" pitchFamily="49" charset="0"/>
+              </a:rPr>
+              <a:t>__</a:t>
+            </a:r>
+            <a:r>
+              <a:rPr lang="nl-NL" sz="2000" dirty="0"/>
+              <a:t> om waardes op te halen.</a:t>
+            </a:r>
+          </a:p>
+          <a:p>
+            <a:pPr marL="0" indent="0">
+              <a:buNone/>
+            </a:pPr>
+            <a:r>
+              <a:rPr lang="nl-NL" sz="2000" dirty="0">
+                <a:latin typeface="Courier New" panose="02070309020205020404" pitchFamily="49" charset="0"/>
+                <a:cs typeface="Courier New" panose="02070309020205020404" pitchFamily="49" charset="0"/>
+              </a:rPr>
+              <a:t>   __</a:t>
+            </a:r>
+            <a:r>
+              <a:rPr lang="nl-NL" sz="2000" dirty="0" err="1">
+                <a:latin typeface="Courier New" panose="02070309020205020404" pitchFamily="49" charset="0"/>
+                <a:cs typeface="Courier New" panose="02070309020205020404" pitchFamily="49" charset="0"/>
+              </a:rPr>
+              <a:t>setitem</a:t>
+            </a:r>
+            <a:r>
+              <a:rPr lang="nl-NL" sz="2000" dirty="0">
+                <a:latin typeface="Courier New" panose="02070309020205020404" pitchFamily="49" charset="0"/>
+                <a:cs typeface="Courier New" panose="02070309020205020404" pitchFamily="49" charset="0"/>
+              </a:rPr>
+              <a:t>__</a:t>
+            </a:r>
+            <a:r>
+              <a:rPr lang="nl-NL" sz="2000" dirty="0"/>
+              <a:t> om waardes op te slaan.</a:t>
+            </a:r>
+          </a:p>
+          <a:p>
+            <a:pPr marL="0" indent="0">
+              <a:buNone/>
+            </a:pPr>
+            <a:endParaRPr lang="nl-NL" sz="2000" dirty="0"/>
+          </a:p>
+          <a:p>
+            <a:pPr marL="457200" indent="-457200">
+              <a:buAutoNum type="arabicPeriod" startAt="4"/>
+            </a:pPr>
+            <a:r>
+              <a:rPr lang="nl-NL" sz="2000" dirty="0"/>
+              <a:t>Bonus voor implementeren van methodes:</a:t>
+            </a:r>
+          </a:p>
+          <a:p>
+            <a:pPr marL="0" indent="0">
+              <a:buNone/>
+            </a:pPr>
+            <a:r>
+              <a:rPr lang="nl-NL" sz="2000" dirty="0">
+                <a:latin typeface="Courier New" panose="02070309020205020404" pitchFamily="49" charset="0"/>
+                <a:cs typeface="Courier New" panose="02070309020205020404" pitchFamily="49" charset="0"/>
+              </a:rPr>
+              <a:t>   __</a:t>
+            </a:r>
+            <a:r>
+              <a:rPr lang="nl-NL" sz="2000" dirty="0" err="1">
+                <a:latin typeface="Courier New" panose="02070309020205020404" pitchFamily="49" charset="0"/>
+                <a:cs typeface="Courier New" panose="02070309020205020404" pitchFamily="49" charset="0"/>
+              </a:rPr>
+              <a:t>str</a:t>
+            </a:r>
+            <a:r>
+              <a:rPr lang="nl-NL" sz="2000" dirty="0">
+                <a:latin typeface="Courier New" panose="02070309020205020404" pitchFamily="49" charset="0"/>
+                <a:cs typeface="Courier New" panose="02070309020205020404" pitchFamily="49" charset="0"/>
+              </a:rPr>
+              <a:t>__, __</a:t>
+            </a:r>
+            <a:r>
+              <a:rPr lang="nl-NL" sz="2000" dirty="0" err="1">
+                <a:latin typeface="Courier New" panose="02070309020205020404" pitchFamily="49" charset="0"/>
+                <a:cs typeface="Courier New" panose="02070309020205020404" pitchFamily="49" charset="0"/>
+              </a:rPr>
+              <a:t>repr</a:t>
+            </a:r>
+            <a:r>
+              <a:rPr lang="nl-NL" sz="2000" dirty="0">
+                <a:latin typeface="Courier New" panose="02070309020205020404" pitchFamily="49" charset="0"/>
+                <a:cs typeface="Courier New" panose="02070309020205020404" pitchFamily="49" charset="0"/>
+              </a:rPr>
+              <a:t>__, __</a:t>
+            </a:r>
+            <a:r>
+              <a:rPr lang="nl-NL" sz="2000" dirty="0" err="1">
+                <a:latin typeface="Courier New" panose="02070309020205020404" pitchFamily="49" charset="0"/>
+                <a:cs typeface="Courier New" panose="02070309020205020404" pitchFamily="49" charset="0"/>
+              </a:rPr>
+              <a:t>len</a:t>
+            </a:r>
+            <a:r>
+              <a:rPr lang="nl-NL" sz="2000" dirty="0">
+                <a:latin typeface="Courier New" panose="02070309020205020404" pitchFamily="49" charset="0"/>
+                <a:cs typeface="Courier New" panose="02070309020205020404" pitchFamily="49" charset="0"/>
+              </a:rPr>
+              <a:t>__, </a:t>
+            </a:r>
+            <a:r>
+              <a:rPr lang="nl-NL" sz="2000" dirty="0" err="1">
+                <a:latin typeface="Courier New" panose="02070309020205020404" pitchFamily="49" charset="0"/>
+                <a:cs typeface="Courier New" panose="02070309020205020404" pitchFamily="49" charset="0"/>
+              </a:rPr>
+              <a:t>keys</a:t>
+            </a:r>
+            <a:r>
+              <a:rPr lang="nl-NL" sz="2000" dirty="0">
+                <a:latin typeface="Courier New" panose="02070309020205020404" pitchFamily="49" charset="0"/>
+                <a:cs typeface="Courier New" panose="02070309020205020404" pitchFamily="49" charset="0"/>
+              </a:rPr>
+              <a:t>, </a:t>
+            </a:r>
+            <a:r>
+              <a:rPr lang="nl-NL" sz="2000" dirty="0" err="1">
+                <a:latin typeface="Courier New" panose="02070309020205020404" pitchFamily="49" charset="0"/>
+                <a:cs typeface="Courier New" panose="02070309020205020404" pitchFamily="49" charset="0"/>
+              </a:rPr>
+              <a:t>values</a:t>
+            </a:r>
+            <a:r>
+              <a:rPr lang="nl-NL" sz="2000" dirty="0">
+                <a:latin typeface="Courier New" panose="02070309020205020404" pitchFamily="49" charset="0"/>
+                <a:cs typeface="Courier New" panose="02070309020205020404" pitchFamily="49" charset="0"/>
+              </a:rPr>
+              <a:t>, items</a:t>
+            </a:r>
           </a:p>
         </p:txBody>
       </p:sp>
-      <p:cxnSp>
-        <p:nvCxnSpPr>
-          <p:cNvPr id="6" name="Straight Connector 5">
-            <a:extLst>
-              <a:ext uri="{FF2B5EF4-FFF2-40B4-BE49-F238E27FC236}">
-                <a16:creationId xmlns:a16="http://schemas.microsoft.com/office/drawing/2014/main" id="{7F162173-AD9E-1ED9-F92B-186066229DD6}"/>
-              </a:ext>
-            </a:extLst>
-          </p:cNvPr>
-          <p:cNvCxnSpPr>
-            <a:cxnSpLocks/>
-          </p:cNvCxnSpPr>
-          <p:nvPr/>
-        </p:nvCxnSpPr>
-        <p:spPr>
-          <a:xfrm>
-            <a:off x="5655733" y="1456267"/>
-            <a:ext cx="0" cy="4809066"/>
-          </a:xfrm>
-          <a:prstGeom prst="line">
-            <a:avLst/>
-          </a:prstGeom>
-        </p:spPr>
-        <p:style>
-          <a:lnRef idx="3">
-            <a:schemeClr val="dk1"/>
-          </a:lnRef>
-          <a:fillRef idx="0">
-            <a:schemeClr val="dk1"/>
-          </a:fillRef>
-          <a:effectRef idx="2">
-            <a:schemeClr val="dk1"/>
-          </a:effectRef>
-          <a:fontRef idx="minor">
-            <a:schemeClr val="tx1"/>
-          </a:fontRef>
-        </p:style>
-      </p:cxnSp>
     </p:spTree>
     <p:extLst>
       <p:ext uri="{BB962C8B-B14F-4D97-AF65-F5344CB8AC3E}">
-        <p14:creationId xmlns:p14="http://schemas.microsoft.com/office/powerpoint/2010/main" val="1057875604"/>
+        <p14:creationId xmlns:p14="http://schemas.microsoft.com/office/powerpoint/2010/main" val="4287688984"/>
       </p:ext>
     </p:extLst>
   </p:cSld>
@@ -28094,15 +27859,7 @@
             </a:pPr>
             <a:r>
               <a:rPr lang="nl-NL" sz="1800" dirty="0"/>
-              <a:t>Beginnen met een enkele </a:t>
-            </a:r>
-            <a:r>
-              <a:rPr lang="nl-NL" sz="1800" dirty="0" err="1"/>
-              <a:t>underscore</a:t>
-            </a:r>
-            <a:r>
-              <a:rPr lang="nl-NL" sz="1800" dirty="0"/>
-              <a:t>.</a:t>
+              <a:t>Beginnen met enkele underscore.</a:t>
             </a:r>
           </a:p>
           <a:p>
@@ -28112,7 +27869,7 @@
             </a:pPr>
             <a:r>
               <a:rPr lang="nl-NL" sz="1800" dirty="0"/>
-              <a:t>Worden intern gebruikt door de class.</a:t>
+              <a:t>Bedoeld voor gebruik binnen de class.</a:t>
             </a:r>
           </a:p>
           <a:p>
@@ -28122,7 +27879,7 @@
             </a:pPr>
             <a:r>
               <a:rPr lang="nl-NL" sz="1800" dirty="0"/>
-              <a:t>Conventie: niet extern aanroepen, want kunnen wijzigen.</a:t>
+              <a:t>Conventie: niet gebruiken buiten de class, implementatie kan wijzigen.</a:t>
             </a:r>
           </a:p>
           <a:p>
@@ -28153,15 +27910,7 @@
             </a:pPr>
             <a:r>
               <a:rPr lang="nl-NL" sz="1800" dirty="0"/>
-              <a:t>Beginnen met dubbele </a:t>
-            </a:r>
-            <a:r>
-              <a:rPr lang="nl-NL" sz="1800" dirty="0" err="1"/>
-              <a:t>underscore</a:t>
-            </a:r>
-            <a:r>
-              <a:rPr lang="nl-NL" sz="1800" dirty="0"/>
-              <a:t>.</a:t>
+              <a:t>Beginnen met dubbele underscore.</a:t>
             </a:r>
           </a:p>
           <a:p>
@@ -28171,7 +27920,7 @@
             </a:pPr>
             <a:r>
               <a:rPr lang="nl-NL" sz="1800" dirty="0"/>
-              <a:t>Niet (direct) extern aan te roepen.</a:t>
+              <a:t>Niet buiten de class aan te roepen.</a:t>
             </a:r>
           </a:p>
           <a:p>
@@ -28387,10 +28136,20 @@
             </a:pPr>
             <a:r>
               <a:rPr lang="en-US" sz="1200" b="1" dirty="0">
-                <a:latin typeface="Courier New" panose="02070309020205020404" pitchFamily="49" charset="0"/>
-                <a:cs typeface="Courier New" panose="02070309020205020404" pitchFamily="49" charset="0"/>
-              </a:rPr>
-              <a:t>class Example:</a:t>
+                <a:solidFill>
+                  <a:srgbClr val="7030A0"/>
+                </a:solidFill>
+                <a:latin typeface="Courier New" panose="02070309020205020404" pitchFamily="49" charset="0"/>
+                <a:cs typeface="Courier New" panose="02070309020205020404" pitchFamily="49" charset="0"/>
+              </a:rPr>
+              <a:t>class</a:t>
+            </a:r>
+            <a:r>
+              <a:rPr lang="en-US" sz="1200" b="1" dirty="0">
+                <a:latin typeface="Courier New" panose="02070309020205020404" pitchFamily="49" charset="0"/>
+                <a:cs typeface="Courier New" panose="02070309020205020404" pitchFamily="49" charset="0"/>
+              </a:rPr>
+              <a:t> Example:</a:t>
             </a:r>
           </a:p>
           <a:p>
@@ -28432,10 +28191,20 @@
             </a:r>
             <a:r>
               <a:rPr lang="en-US" sz="1200" dirty="0">
-                <a:latin typeface="Courier New" panose="02070309020205020404" pitchFamily="49" charset="0"/>
-                <a:cs typeface="Courier New" panose="02070309020205020404" pitchFamily="49" charset="0"/>
-              </a:rPr>
-              <a:t>def </a:t>
+                <a:solidFill>
+                  <a:srgbClr val="7030A0"/>
+                </a:solidFill>
+                <a:latin typeface="Courier New" panose="02070309020205020404" pitchFamily="49" charset="0"/>
+                <a:cs typeface="Courier New" panose="02070309020205020404" pitchFamily="49" charset="0"/>
+              </a:rPr>
+              <a:t>def</a:t>
+            </a:r>
+            <a:r>
+              <a:rPr lang="en-US" sz="1200" dirty="0">
+                <a:latin typeface="Courier New" panose="02070309020205020404" pitchFamily="49" charset="0"/>
+                <a:cs typeface="Courier New" panose="02070309020205020404" pitchFamily="49" charset="0"/>
+              </a:rPr>
+              <a:t> </a:t>
             </a:r>
             <a:r>
               <a:rPr lang="en-US" sz="1200" b="1" dirty="0">
@@ -28522,7 +28291,24 @@
                 <a:latin typeface="Courier New" panose="02070309020205020404" pitchFamily="49" charset="0"/>
                 <a:cs typeface="Courier New" panose="02070309020205020404" pitchFamily="49" charset="0"/>
               </a:rPr>
-              <a:t>  def </a:t>
+              <a:t>  </a:t>
+            </a:r>
+            <a:r>
+              <a:rPr lang="en-US" sz="1200" dirty="0">
+                <a:solidFill>
+                  <a:srgbClr val="7030A0"/>
+                </a:solidFill>
+                <a:latin typeface="Courier New" panose="02070309020205020404" pitchFamily="49" charset="0"/>
+                <a:cs typeface="Courier New" panose="02070309020205020404" pitchFamily="49" charset="0"/>
+              </a:rPr>
+              <a:t>def</a:t>
+            </a:r>
+            <a:r>
+              <a:rPr lang="en-US" sz="1200" dirty="0">
+                <a:latin typeface="Courier New" panose="02070309020205020404" pitchFamily="49" charset="0"/>
+                <a:cs typeface="Courier New" panose="02070309020205020404" pitchFamily="49" charset="0"/>
+              </a:rPr>
+              <a:t> </a:t>
             </a:r>
             <a:r>
               <a:rPr lang="en-US" sz="1200" b="1" dirty="0">
@@ -28609,7 +28395,24 @@
                 <a:latin typeface="Courier New" panose="02070309020205020404" pitchFamily="49" charset="0"/>
                 <a:cs typeface="Courier New" panose="02070309020205020404" pitchFamily="49" charset="0"/>
               </a:rPr>
-              <a:t>  def </a:t>
+              <a:t>  </a:t>
+            </a:r>
+            <a:r>
+              <a:rPr lang="en-US" sz="1200" dirty="0">
+                <a:solidFill>
+                  <a:srgbClr val="7030A0"/>
+                </a:solidFill>
+                <a:latin typeface="Courier New" panose="02070309020205020404" pitchFamily="49" charset="0"/>
+                <a:cs typeface="Courier New" panose="02070309020205020404" pitchFamily="49" charset="0"/>
+              </a:rPr>
+              <a:t>def</a:t>
+            </a:r>
+            <a:r>
+              <a:rPr lang="en-US" sz="1200" dirty="0">
+                <a:latin typeface="Courier New" panose="02070309020205020404" pitchFamily="49" charset="0"/>
+                <a:cs typeface="Courier New" panose="02070309020205020404" pitchFamily="49" charset="0"/>
+              </a:rPr>
+              <a:t> </a:t>
             </a:r>
             <a:r>
               <a:rPr lang="en-US" sz="1200" b="1" dirty="0">
@@ -29423,49 +29226,50 @@
               <a:t>  </a:t>
             </a:r>
             <a:r>
+              <a:rPr lang="nl-NL" sz="1400" b="1" dirty="0">
+                <a:solidFill>
+                  <a:srgbClr val="7030A0"/>
+                </a:solidFill>
+                <a:latin typeface="Courier New" panose="02070309020205020404" pitchFamily="49" charset="0"/>
+                <a:cs typeface="Courier New" panose="02070309020205020404" pitchFamily="49" charset="0"/>
+              </a:rPr>
+              <a:t>@staticmethod</a:t>
+            </a:r>
+          </a:p>
+          <a:p>
+            <a:pPr marL="0" indent="0">
+              <a:lnSpc>
+                <a:spcPct val="100000"/>
+              </a:lnSpc>
+              <a:spcBef>
+                <a:spcPts val="0"/>
+              </a:spcBef>
+              <a:buFont typeface="Arial" panose="020B0604020202020204" pitchFamily="34" charset="0"/>
+              <a:buNone/>
+            </a:pPr>
+            <a:r>
               <a:rPr lang="nl-NL" sz="1400" dirty="0">
-                <a:solidFill>
-                  <a:schemeClr val="accent5">
-                    <a:lumMod val="75000"/>
-                  </a:schemeClr>
-                </a:solidFill>
-                <a:latin typeface="Courier New" panose="02070309020205020404" pitchFamily="49" charset="0"/>
-                <a:cs typeface="Courier New" panose="02070309020205020404" pitchFamily="49" charset="0"/>
-              </a:rPr>
-              <a:t>@staticmethod</a:t>
-            </a:r>
-          </a:p>
-          <a:p>
-            <a:pPr marL="0" indent="0">
-              <a:lnSpc>
-                <a:spcPct val="100000"/>
-              </a:lnSpc>
-              <a:spcBef>
-                <a:spcPts val="0"/>
-              </a:spcBef>
-              <a:buFont typeface="Arial" panose="020B0604020202020204" pitchFamily="34" charset="0"/>
-              <a:buNone/>
-            </a:pPr>
+                <a:latin typeface="Courier New" panose="02070309020205020404" pitchFamily="49" charset="0"/>
+                <a:cs typeface="Courier New" panose="02070309020205020404" pitchFamily="49" charset="0"/>
+              </a:rPr>
+              <a:t>  </a:t>
+            </a:r>
+            <a:r>
+              <a:rPr lang="nl-NL" sz="1400" dirty="0" err="1">
+                <a:solidFill>
+                  <a:srgbClr val="7030A0"/>
+                </a:solidFill>
+                <a:latin typeface="Courier New" panose="02070309020205020404" pitchFamily="49" charset="0"/>
+                <a:cs typeface="Courier New" panose="02070309020205020404" pitchFamily="49" charset="0"/>
+              </a:rPr>
+              <a:t>def</a:t>
+            </a:r>
             <a:r>
               <a:rPr lang="nl-NL" sz="1400" dirty="0">
                 <a:latin typeface="Courier New" panose="02070309020205020404" pitchFamily="49" charset="0"/>
                 <a:cs typeface="Courier New" panose="02070309020205020404" pitchFamily="49" charset="0"/>
               </a:rPr>
-              <a:t>  </a:t>
-            </a:r>
-            <a:r>
-              <a:rPr lang="nl-NL" sz="1400" dirty="0" err="1">
-                <a:latin typeface="Courier New" panose="02070309020205020404" pitchFamily="49" charset="0"/>
-                <a:cs typeface="Courier New" panose="02070309020205020404" pitchFamily="49" charset="0"/>
-              </a:rPr>
-              <a:t>def</a:t>
-            </a:r>
-            <a:r>
-              <a:rPr lang="nl-NL" sz="1400" dirty="0">
-                <a:latin typeface="Courier New" panose="02070309020205020404" pitchFamily="49" charset="0"/>
-                <a:cs typeface="Courier New" panose="02070309020205020404" pitchFamily="49" charset="0"/>
-              </a:rPr>
-              <a:t> _</a:t>
+              <a:t> </a:t>
             </a:r>
             <a:r>
               <a:rPr lang="nl-NL" sz="1400" dirty="0" err="1">
@@ -29576,31 +29380,29 @@
               <a:t>  </a:t>
             </a:r>
             <a:r>
+              <a:rPr lang="nl-NL" sz="1400" b="1" dirty="0">
+                <a:solidFill>
+                  <a:srgbClr val="7030A0"/>
+                </a:solidFill>
+                <a:latin typeface="Courier New" panose="02070309020205020404" pitchFamily="49" charset="0"/>
+                <a:cs typeface="Courier New" panose="02070309020205020404" pitchFamily="49" charset="0"/>
+              </a:rPr>
+              <a:t>@classmethod</a:t>
+            </a:r>
+          </a:p>
+          <a:p>
+            <a:pPr marL="0" indent="0">
+              <a:lnSpc>
+                <a:spcPct val="100000"/>
+              </a:lnSpc>
+              <a:spcBef>
+                <a:spcPts val="0"/>
+              </a:spcBef>
+              <a:buFont typeface="Arial" panose="020B0604020202020204" pitchFamily="34" charset="0"/>
+              <a:buNone/>
+            </a:pPr>
+            <a:r>
               <a:rPr lang="nl-NL" sz="1400" dirty="0">
-                <a:solidFill>
-                  <a:schemeClr val="accent5">
-                    <a:lumMod val="75000"/>
-                  </a:schemeClr>
-                </a:solidFill>
-                <a:latin typeface="Courier New" panose="02070309020205020404" pitchFamily="49" charset="0"/>
-                <a:cs typeface="Courier New" panose="02070309020205020404" pitchFamily="49" charset="0"/>
-              </a:rPr>
-              <a:t>@classmethod</a:t>
-            </a:r>
-          </a:p>
-          <a:p>
-            <a:pPr marL="0" indent="0">
-              <a:lnSpc>
-                <a:spcPct val="100000"/>
-              </a:lnSpc>
-              <a:spcBef>
-                <a:spcPts val="0"/>
-              </a:spcBef>
-              <a:buFont typeface="Arial" panose="020B0604020202020204" pitchFamily="34" charset="0"/>
-              <a:buNone/>
-            </a:pPr>
-            <a:r>
-              <a:rPr lang="nl-NL" sz="1400" dirty="0">
                 <a:latin typeface="Courier New" panose="02070309020205020404" pitchFamily="49" charset="0"/>
                 <a:cs typeface="Courier New" panose="02070309020205020404" pitchFamily="49" charset="0"/>
               </a:rPr>
@@ -29608,6 +29410,9 @@
             </a:r>
             <a:r>
               <a:rPr lang="nl-NL" sz="1400" dirty="0" err="1">
+                <a:solidFill>
+                  <a:srgbClr val="7030A0"/>
+                </a:solidFill>
                 <a:latin typeface="Courier New" panose="02070309020205020404" pitchFamily="49" charset="0"/>
                 <a:cs typeface="Courier New" panose="02070309020205020404" pitchFamily="49" charset="0"/>
               </a:rPr>
@@ -30037,7 +29842,13 @@
   <p:cSld>
     <p:spTree>
       <p:nvGrpSpPr>
-        <p:cNvPr id="1" name=""/>
+        <p:cNvPr id="1" name="">
+          <a:extLst>
+            <a:ext uri="{FF2B5EF4-FFF2-40B4-BE49-F238E27FC236}">
+              <a16:creationId xmlns:a16="http://schemas.microsoft.com/office/drawing/2014/main" id="{FFAC5714-87F9-A8C0-7D26-0F9B5703069F}"/>
+            </a:ext>
+          </a:extLst>
+        </p:cNvPr>
         <p:cNvGrpSpPr/>
         <p:nvPr/>
       </p:nvGrpSpPr>
@@ -30051,10 +29862,10 @@
       </p:grpSpPr>
       <p:sp>
         <p:nvSpPr>
-          <p:cNvPr id="2" name="Title 1">
+          <p:cNvPr id="4" name="Title 3">
             <a:extLst>
               <a:ext uri="{FF2B5EF4-FFF2-40B4-BE49-F238E27FC236}">
-                <a16:creationId xmlns:a16="http://schemas.microsoft.com/office/drawing/2014/main" id="{39A1D606-8DD1-369C-5C09-471CDD551AD5}"/>
+                <a16:creationId xmlns:a16="http://schemas.microsoft.com/office/drawing/2014/main" id="{0A4F0824-4F4E-06ED-65CD-5B4F6BA2D531}"/>
               </a:ext>
             </a:extLst>
           </p:cNvPr>
@@ -30065,31 +29876,25 @@
             <p:ph type="title"/>
           </p:nvPr>
         </p:nvSpPr>
-        <p:spPr>
-          <a:xfrm>
-            <a:off x="838200" y="365126"/>
-            <a:ext cx="10515600" cy="718608"/>
-          </a:xfrm>
-        </p:spPr>
+        <p:spPr/>
         <p:txBody>
-          <a:bodyPr>
-            <a:normAutofit/>
-          </a:bodyPr>
+          <a:bodyPr/>
           <a:lstStyle/>
           <a:p>
             <a:r>
-              <a:rPr lang="nl-NL" sz="3600" noProof="0" dirty="0"/>
-              <a:t>Oefeningen IV</a:t>
-            </a:r>
+              <a:rPr lang="nl-NL" dirty="0" err="1"/>
+              <a:t>Inheritance</a:t>
+            </a:r>
+            <a:endParaRPr lang="nl-NL" noProof="0" dirty="0"/>
           </a:p>
         </p:txBody>
       </p:sp>
       <p:sp>
         <p:nvSpPr>
-          <p:cNvPr id="3" name="Content Placeholder 2">
+          <p:cNvPr id="5" name="Text Placeholder 4">
             <a:extLst>
               <a:ext uri="{FF2B5EF4-FFF2-40B4-BE49-F238E27FC236}">
-                <a16:creationId xmlns:a16="http://schemas.microsoft.com/office/drawing/2014/main" id="{F4C2D286-E049-0AAB-1360-B7157E11AD7E}"/>
+                <a16:creationId xmlns:a16="http://schemas.microsoft.com/office/drawing/2014/main" id="{5C312E24-90B2-EC96-32E5-F9A0E9B2888E}"/>
               </a:ext>
             </a:extLst>
           </p:cNvPr>
@@ -30097,353 +29902,22 @@
             <a:spLocks noGrp="1"/>
           </p:cNvSpPr>
           <p:nvPr>
-            <p:ph idx="1"/>
+            <p:ph type="body" idx="1"/>
           </p:nvPr>
         </p:nvSpPr>
-        <p:spPr>
-          <a:xfrm>
-            <a:off x="838200" y="1456267"/>
-            <a:ext cx="10375900" cy="4720696"/>
-          </a:xfrm>
-        </p:spPr>
+        <p:spPr/>
         <p:txBody>
-          <a:bodyPr>
-            <a:normAutofit/>
-          </a:bodyPr>
+          <a:bodyPr/>
           <a:lstStyle/>
           <a:p>
-            <a:pPr marL="457200" indent="-457200">
-              <a:buFont typeface="Arial" panose="020B0604020202020204" pitchFamily="34" charset="0"/>
-              <a:buAutoNum type="arabicPeriod"/>
-            </a:pPr>
-            <a:r>
-              <a:rPr lang="nl-NL" sz="2000" dirty="0"/>
-              <a:t>Open Notebook </a:t>
-            </a:r>
-            <a:r>
-              <a:rPr lang="nl-NL" sz="2000" dirty="0" err="1">
-                <a:latin typeface="Courier New" panose="02070309020205020404" pitchFamily="49" charset="0"/>
-                <a:cs typeface="Courier New" panose="02070309020205020404" pitchFamily="49" charset="0"/>
-              </a:rPr>
-              <a:t>exercises</a:t>
-            </a:r>
-            <a:r>
-              <a:rPr lang="nl-NL" sz="2000" dirty="0">
-                <a:latin typeface="Courier New" panose="02070309020205020404" pitchFamily="49" charset="0"/>
-                <a:cs typeface="Courier New" panose="02070309020205020404" pitchFamily="49" charset="0"/>
-              </a:rPr>
-              <a:t>/4_fuzzy_dict.ipynb</a:t>
-            </a:r>
-          </a:p>
-          <a:p>
-            <a:pPr marL="457200" indent="-457200">
-              <a:buFont typeface="Arial" panose="020B0604020202020204" pitchFamily="34" charset="0"/>
-              <a:buAutoNum type="arabicPeriod"/>
-            </a:pPr>
-            <a:endParaRPr lang="nl-NL" sz="2000" dirty="0"/>
-          </a:p>
-          <a:p>
-            <a:pPr marL="457200" indent="-457200">
-              <a:buFont typeface="Arial" panose="020B0604020202020204" pitchFamily="34" charset="0"/>
-              <a:buAutoNum type="arabicPeriod"/>
-            </a:pPr>
-            <a:r>
-              <a:rPr lang="nl-NL" sz="2000" dirty="0" err="1">
-                <a:latin typeface="Courier New" panose="02070309020205020404" pitchFamily="49" charset="0"/>
-                <a:cs typeface="Courier New" panose="02070309020205020404" pitchFamily="49" charset="0"/>
-              </a:rPr>
-              <a:t>FuzzyDict</a:t>
-            </a:r>
-            <a:r>
-              <a:rPr lang="nl-NL" sz="2000" dirty="0">
-                <a:latin typeface="Courier New" panose="02070309020205020404" pitchFamily="49" charset="0"/>
-                <a:cs typeface="Courier New" panose="02070309020205020404" pitchFamily="49" charset="0"/>
-              </a:rPr>
-              <a:t>;</a:t>
-            </a:r>
-            <a:r>
-              <a:rPr lang="nl-NL" sz="2000" dirty="0"/>
-              <a:t> </a:t>
-            </a:r>
-            <a:r>
-              <a:rPr lang="nl-NL" sz="2000" dirty="0" err="1"/>
-              <a:t>dict</a:t>
-            </a:r>
-            <a:r>
-              <a:rPr lang="nl-NL" sz="2000" dirty="0"/>
-              <a:t> dat niet hoofdlettergevoelig is:</a:t>
-            </a:r>
-          </a:p>
-          <a:p>
-            <a:pPr lvl="1"/>
-            <a:r>
-              <a:rPr lang="nl-NL" sz="2000" dirty="0" err="1">
-                <a:latin typeface="Courier New" panose="02070309020205020404" pitchFamily="49" charset="0"/>
-                <a:cs typeface="Courier New" panose="02070309020205020404" pitchFamily="49" charset="0"/>
-              </a:rPr>
-              <a:t>fuzzydict</a:t>
-            </a:r>
-            <a:r>
-              <a:rPr lang="nl-NL" sz="2000" dirty="0">
-                <a:latin typeface="Courier New" panose="02070309020205020404" pitchFamily="49" charset="0"/>
-                <a:cs typeface="Courier New" panose="02070309020205020404" pitchFamily="49" charset="0"/>
-              </a:rPr>
-              <a:t>[</a:t>
-            </a:r>
-            <a:r>
-              <a:rPr lang="nl-NL" sz="2000" dirty="0">
-                <a:solidFill>
-                  <a:schemeClr val="accent2">
-                    <a:lumMod val="75000"/>
-                  </a:schemeClr>
-                </a:solidFill>
-                <a:latin typeface="Courier New" panose="02070309020205020404" pitchFamily="49" charset="0"/>
-                <a:cs typeface="Courier New" panose="02070309020205020404" pitchFamily="49" charset="0"/>
-              </a:rPr>
-              <a:t>"NAAM"</a:t>
-            </a:r>
-            <a:r>
-              <a:rPr lang="nl-NL" sz="2000" dirty="0">
-                <a:latin typeface="Courier New" panose="02070309020205020404" pitchFamily="49" charset="0"/>
-                <a:cs typeface="Courier New" panose="02070309020205020404" pitchFamily="49" charset="0"/>
-              </a:rPr>
-              <a:t>]</a:t>
-            </a:r>
-            <a:r>
-              <a:rPr lang="nl-NL" sz="2000" dirty="0"/>
-              <a:t> is gelijk aan </a:t>
-            </a:r>
-            <a:r>
-              <a:rPr lang="nl-NL" sz="2000" dirty="0" err="1">
-                <a:latin typeface="Courier New" panose="02070309020205020404" pitchFamily="49" charset="0"/>
-                <a:cs typeface="Courier New" panose="02070309020205020404" pitchFamily="49" charset="0"/>
-              </a:rPr>
-              <a:t>fuzzydict</a:t>
-            </a:r>
-            <a:r>
-              <a:rPr lang="nl-NL" sz="2000" dirty="0">
-                <a:latin typeface="Courier New" panose="02070309020205020404" pitchFamily="49" charset="0"/>
-                <a:cs typeface="Courier New" panose="02070309020205020404" pitchFamily="49" charset="0"/>
-              </a:rPr>
-              <a:t>[</a:t>
-            </a:r>
-            <a:r>
-              <a:rPr lang="nl-NL" sz="2000" dirty="0">
-                <a:solidFill>
-                  <a:schemeClr val="accent2">
-                    <a:lumMod val="75000"/>
-                  </a:schemeClr>
-                </a:solidFill>
-                <a:latin typeface="Courier New" panose="02070309020205020404" pitchFamily="49" charset="0"/>
-                <a:cs typeface="Courier New" panose="02070309020205020404" pitchFamily="49" charset="0"/>
-              </a:rPr>
-              <a:t>"naam"</a:t>
-            </a:r>
-            <a:r>
-              <a:rPr lang="nl-NL" sz="2000" dirty="0">
-                <a:latin typeface="Courier New" panose="02070309020205020404" pitchFamily="49" charset="0"/>
-                <a:cs typeface="Courier New" panose="02070309020205020404" pitchFamily="49" charset="0"/>
-              </a:rPr>
-              <a:t>]</a:t>
-            </a:r>
-            <a:r>
-              <a:rPr lang="nl-NL" sz="2000" dirty="0">
-                <a:cs typeface="Courier New" panose="02070309020205020404" pitchFamily="49" charset="0"/>
-              </a:rPr>
-              <a:t>.</a:t>
-            </a:r>
-            <a:endParaRPr lang="nl-NL" sz="2000" dirty="0"/>
-          </a:p>
-          <a:p>
-            <a:pPr lvl="1"/>
-            <a:r>
-              <a:rPr lang="nl-NL" sz="2000" dirty="0">
-                <a:cs typeface="Courier New" panose="02070309020205020404" pitchFamily="49" charset="0"/>
-              </a:rPr>
-              <a:t>Zowel bij ophalen als wegschrijven van waardes.</a:t>
-            </a:r>
-            <a:endParaRPr lang="nl-NL" sz="2000" dirty="0"/>
-          </a:p>
-          <a:p>
-            <a:pPr marL="457200" indent="-457200">
-              <a:buFont typeface="Arial" panose="020B0604020202020204" pitchFamily="34" charset="0"/>
-              <a:buAutoNum type="arabicPeriod"/>
-            </a:pPr>
-            <a:endParaRPr lang="nl-NL" sz="2000" dirty="0"/>
-          </a:p>
-          <a:p>
-            <a:pPr marL="457200" indent="-457200">
-              <a:buFont typeface="Arial" panose="020B0604020202020204" pitchFamily="34" charset="0"/>
-              <a:buAutoNum type="arabicPeriod"/>
-            </a:pPr>
-            <a:r>
-              <a:rPr lang="nl-NL" sz="2000" dirty="0"/>
-              <a:t>Gebruik:</a:t>
-            </a:r>
-          </a:p>
-          <a:p>
-            <a:pPr marL="0" indent="0">
-              <a:buNone/>
-            </a:pPr>
-            <a:r>
-              <a:rPr lang="nl-NL" sz="2000" dirty="0">
-                <a:latin typeface="Courier New" panose="02070309020205020404" pitchFamily="49" charset="0"/>
-                <a:cs typeface="Courier New" panose="02070309020205020404" pitchFamily="49" charset="0"/>
-              </a:rPr>
-              <a:t>   __</a:t>
-            </a:r>
-            <a:r>
-              <a:rPr lang="nl-NL" sz="2000" dirty="0" err="1">
-                <a:latin typeface="Courier New" panose="02070309020205020404" pitchFamily="49" charset="0"/>
-                <a:cs typeface="Courier New" panose="02070309020205020404" pitchFamily="49" charset="0"/>
-              </a:rPr>
-              <a:t>getitem</a:t>
-            </a:r>
-            <a:r>
-              <a:rPr lang="nl-NL" sz="2000" dirty="0">
-                <a:latin typeface="Courier New" panose="02070309020205020404" pitchFamily="49" charset="0"/>
-                <a:cs typeface="Courier New" panose="02070309020205020404" pitchFamily="49" charset="0"/>
-              </a:rPr>
-              <a:t>__</a:t>
-            </a:r>
-            <a:r>
-              <a:rPr lang="nl-NL" sz="2000" dirty="0"/>
-              <a:t> om waardes op te halen.</a:t>
-            </a:r>
-          </a:p>
-          <a:p>
-            <a:pPr marL="0" indent="0">
-              <a:buNone/>
-            </a:pPr>
-            <a:r>
-              <a:rPr lang="nl-NL" sz="2000" dirty="0">
-                <a:latin typeface="Courier New" panose="02070309020205020404" pitchFamily="49" charset="0"/>
-                <a:cs typeface="Courier New" panose="02070309020205020404" pitchFamily="49" charset="0"/>
-              </a:rPr>
-              <a:t>   __</a:t>
-            </a:r>
-            <a:r>
-              <a:rPr lang="nl-NL" sz="2000" dirty="0" err="1">
-                <a:latin typeface="Courier New" panose="02070309020205020404" pitchFamily="49" charset="0"/>
-                <a:cs typeface="Courier New" panose="02070309020205020404" pitchFamily="49" charset="0"/>
-              </a:rPr>
-              <a:t>setitem</a:t>
-            </a:r>
-            <a:r>
-              <a:rPr lang="nl-NL" sz="2000" dirty="0">
-                <a:latin typeface="Courier New" panose="02070309020205020404" pitchFamily="49" charset="0"/>
-                <a:cs typeface="Courier New" panose="02070309020205020404" pitchFamily="49" charset="0"/>
-              </a:rPr>
-              <a:t>__</a:t>
-            </a:r>
-            <a:r>
-              <a:rPr lang="nl-NL" sz="2000" dirty="0"/>
-              <a:t> om waardes op te slaan.</a:t>
-            </a:r>
-          </a:p>
-          <a:p>
-            <a:pPr marL="0" indent="0">
-              <a:buNone/>
-            </a:pPr>
-            <a:endParaRPr lang="nl-NL" sz="2000" dirty="0"/>
-          </a:p>
-          <a:p>
-            <a:pPr marL="457200" indent="-457200">
-              <a:buAutoNum type="arabicPeriod" startAt="4"/>
-            </a:pPr>
-            <a:r>
-              <a:rPr lang="nl-NL" sz="2000" dirty="0"/>
-              <a:t>Bonus voor implementeren van methodes:</a:t>
-            </a:r>
-          </a:p>
-          <a:p>
-            <a:pPr marL="0" indent="0">
-              <a:buNone/>
-            </a:pPr>
-            <a:r>
-              <a:rPr lang="nl-NL" sz="2000" dirty="0">
-                <a:latin typeface="Courier New" panose="02070309020205020404" pitchFamily="49" charset="0"/>
-                <a:cs typeface="Courier New" panose="02070309020205020404" pitchFamily="49" charset="0"/>
-              </a:rPr>
-              <a:t>   __</a:t>
-            </a:r>
-            <a:r>
-              <a:rPr lang="nl-NL" sz="2000" dirty="0" err="1">
-                <a:latin typeface="Courier New" panose="02070309020205020404" pitchFamily="49" charset="0"/>
-                <a:cs typeface="Courier New" panose="02070309020205020404" pitchFamily="49" charset="0"/>
-              </a:rPr>
-              <a:t>str</a:t>
-            </a:r>
-            <a:r>
-              <a:rPr lang="nl-NL" sz="2000" dirty="0">
-                <a:latin typeface="Courier New" panose="02070309020205020404" pitchFamily="49" charset="0"/>
-                <a:cs typeface="Courier New" panose="02070309020205020404" pitchFamily="49" charset="0"/>
-              </a:rPr>
-              <a:t>__, __</a:t>
-            </a:r>
-            <a:r>
-              <a:rPr lang="nl-NL" sz="2000" dirty="0" err="1">
-                <a:latin typeface="Courier New" panose="02070309020205020404" pitchFamily="49" charset="0"/>
-                <a:cs typeface="Courier New" panose="02070309020205020404" pitchFamily="49" charset="0"/>
-              </a:rPr>
-              <a:t>repr</a:t>
-            </a:r>
-            <a:r>
-              <a:rPr lang="nl-NL" sz="2000" dirty="0">
-                <a:latin typeface="Courier New" panose="02070309020205020404" pitchFamily="49" charset="0"/>
-                <a:cs typeface="Courier New" panose="02070309020205020404" pitchFamily="49" charset="0"/>
-              </a:rPr>
-              <a:t>__, __</a:t>
-            </a:r>
-            <a:r>
-              <a:rPr lang="nl-NL" sz="2000" dirty="0" err="1">
-                <a:latin typeface="Courier New" panose="02070309020205020404" pitchFamily="49" charset="0"/>
-                <a:cs typeface="Courier New" panose="02070309020205020404" pitchFamily="49" charset="0"/>
-              </a:rPr>
-              <a:t>len</a:t>
-            </a:r>
-            <a:r>
-              <a:rPr lang="nl-NL" sz="2000" dirty="0">
-                <a:latin typeface="Courier New" panose="02070309020205020404" pitchFamily="49" charset="0"/>
-                <a:cs typeface="Courier New" panose="02070309020205020404" pitchFamily="49" charset="0"/>
-              </a:rPr>
-              <a:t>__, </a:t>
-            </a:r>
-            <a:r>
-              <a:rPr lang="nl-NL" sz="2000" dirty="0" err="1">
-                <a:latin typeface="Courier New" panose="02070309020205020404" pitchFamily="49" charset="0"/>
-                <a:cs typeface="Courier New" panose="02070309020205020404" pitchFamily="49" charset="0"/>
-              </a:rPr>
-              <a:t>keys</a:t>
-            </a:r>
-            <a:r>
-              <a:rPr lang="nl-NL" sz="2000" dirty="0">
-                <a:latin typeface="Courier New" panose="02070309020205020404" pitchFamily="49" charset="0"/>
-                <a:cs typeface="Courier New" panose="02070309020205020404" pitchFamily="49" charset="0"/>
-              </a:rPr>
-              <a:t>, </a:t>
-            </a:r>
-            <a:r>
-              <a:rPr lang="nl-NL" sz="2000" dirty="0" err="1">
-                <a:latin typeface="Courier New" panose="02070309020205020404" pitchFamily="49" charset="0"/>
-                <a:cs typeface="Courier New" panose="02070309020205020404" pitchFamily="49" charset="0"/>
-              </a:rPr>
-              <a:t>values</a:t>
-            </a:r>
-            <a:r>
-              <a:rPr lang="nl-NL" sz="2000" dirty="0">
-                <a:latin typeface="Courier New" panose="02070309020205020404" pitchFamily="49" charset="0"/>
-                <a:cs typeface="Courier New" panose="02070309020205020404" pitchFamily="49" charset="0"/>
-              </a:rPr>
-              <a:t>, items</a:t>
-            </a:r>
+            <a:endParaRPr lang="en-NL"/>
           </a:p>
         </p:txBody>
       </p:sp>
     </p:spTree>
     <p:extLst>
       <p:ext uri="{BB962C8B-B14F-4D97-AF65-F5344CB8AC3E}">
-        <p14:creationId xmlns:p14="http://schemas.microsoft.com/office/powerpoint/2010/main" val="4287688984"/>
+        <p14:creationId xmlns:p14="http://schemas.microsoft.com/office/powerpoint/2010/main" val="3458244836"/>
       </p:ext>
     </p:extLst>
   </p:cSld>
@@ -31560,7 +31034,7 @@
                 <a:latin typeface="Courier New" panose="02070309020205020404" pitchFamily="49" charset="0"/>
                 <a:cs typeface="Courier New" panose="02070309020205020404" pitchFamily="49" charset="0"/>
               </a:rPr>
-              <a:t>- separator</a:t>
+              <a:t>- _separator</a:t>
             </a:r>
           </a:p>
           <a:p>
@@ -31569,7 +31043,7 @@
                 <a:latin typeface="Courier New" panose="02070309020205020404" pitchFamily="49" charset="0"/>
                 <a:cs typeface="Courier New" panose="02070309020205020404" pitchFamily="49" charset="0"/>
               </a:rPr>
-              <a:t>- </a:t>
+              <a:t>- _</a:t>
             </a:r>
             <a:r>
               <a:rPr lang="nl-NL" sz="1400" b="1" dirty="0" err="1">
@@ -31727,7 +31201,7 @@
             </a:r>
             <a:r>
               <a:rPr lang="nl-NL" sz="1800" noProof="0" dirty="0"/>
-              <a:t> kan eigenschappen toevoegen zoals </a:t>
+              <a:t> kan eigenschappen toevoegen zoals _</a:t>
             </a:r>
             <a:r>
               <a:rPr lang="nl-NL" sz="1800" noProof="0" dirty="0">
@@ -31738,7 +31212,7 @@
             </a:r>
             <a:r>
               <a:rPr lang="nl-NL" sz="1800" noProof="0" dirty="0"/>
-              <a:t> en </a:t>
+              <a:t> en _</a:t>
             </a:r>
             <a:r>
               <a:rPr lang="nl-NL" sz="1800" noProof="0" dirty="0" err="1">
@@ -32168,7 +31642,7 @@
                 <a:latin typeface="Courier New" panose="02070309020205020404" pitchFamily="49" charset="0"/>
                 <a:cs typeface="Courier New" panose="02070309020205020404" pitchFamily="49" charset="0"/>
               </a:rPr>
-              <a:t>- separator</a:t>
+              <a:t>- _separator</a:t>
             </a:r>
           </a:p>
           <a:p>
@@ -32177,7 +31651,7 @@
                 <a:latin typeface="Courier New" panose="02070309020205020404" pitchFamily="49" charset="0"/>
                 <a:cs typeface="Courier New" panose="02070309020205020404" pitchFamily="49" charset="0"/>
               </a:rPr>
-              <a:t>- </a:t>
+              <a:t>- _</a:t>
             </a:r>
             <a:r>
               <a:rPr lang="nl-NL" sz="1400" dirty="0" err="1">
@@ -32358,7 +31832,7 @@
             </a:r>
             <a:r>
               <a:rPr lang="nl-NL" sz="1800" noProof="0" dirty="0"/>
-              <a:t> kan eigenschappen toevoegen zoals </a:t>
+              <a:t> kan eigenschappen toevoegen zoals _</a:t>
             </a:r>
             <a:r>
               <a:rPr lang="nl-NL" sz="1800" noProof="0" dirty="0">
@@ -32369,7 +31843,7 @@
             </a:r>
             <a:r>
               <a:rPr lang="nl-NL" sz="1800" noProof="0" dirty="0"/>
-              <a:t> en </a:t>
+              <a:t> en _</a:t>
             </a:r>
             <a:r>
               <a:rPr lang="nl-NL" sz="1800" noProof="0" dirty="0" err="1">
@@ -32766,8 +32240,42 @@
               <a:buNone/>
             </a:pPr>
             <a:r>
+              <a:rPr lang="nl-NL" sz="1800" dirty="0"/>
+              <a:t>Overschreven:</a:t>
+            </a:r>
+            <a:r>
+              <a:rPr lang="nl-NL" sz="1800" dirty="0">
+                <a:latin typeface="Courier New" panose="02070309020205020404" pitchFamily="49" charset="0"/>
+                <a:cs typeface="Courier New" panose="02070309020205020404" pitchFamily="49" charset="0"/>
+              </a:rPr>
+              <a:t>	</a:t>
+            </a:r>
+            <a:r>
+              <a:rPr lang="nl-NL" sz="1800" dirty="0" err="1">
+                <a:latin typeface="Courier New" panose="02070309020205020404" pitchFamily="49" charset="0"/>
+                <a:cs typeface="Courier New" panose="02070309020205020404" pitchFamily="49" charset="0"/>
+              </a:rPr>
+              <a:t>read</a:t>
+            </a:r>
+            <a:r>
+              <a:rPr lang="nl-NL" sz="1800" dirty="0">
+                <a:latin typeface="Courier New" panose="02070309020205020404" pitchFamily="49" charset="0"/>
+                <a:cs typeface="Courier New" panose="02070309020205020404" pitchFamily="49" charset="0"/>
+              </a:rPr>
+              <a:t>()</a:t>
+            </a:r>
+            <a:endParaRPr lang="nl-NL" sz="1800" noProof="0" dirty="0">
+              <a:latin typeface="Courier New" panose="02070309020205020404" pitchFamily="49" charset="0"/>
+              <a:cs typeface="Courier New" panose="02070309020205020404" pitchFamily="49" charset="0"/>
+            </a:endParaRPr>
+          </a:p>
+          <a:p>
+            <a:pPr marL="0" indent="0">
+              <a:buNone/>
+            </a:pPr>
+            <a:r>
               <a:rPr lang="nl-NL" sz="1800" noProof="0" dirty="0"/>
-              <a:t>Nieuw:		</a:t>
+              <a:t>Extra:		_</a:t>
             </a:r>
             <a:r>
               <a:rPr lang="nl-NL" sz="1800" noProof="0" dirty="0">
@@ -32786,7 +32294,7 @@
                 <a:latin typeface="Courier New" panose="02070309020205020404" pitchFamily="49" charset="0"/>
                 <a:cs typeface="Courier New" panose="02070309020205020404" pitchFamily="49" charset="0"/>
               </a:rPr>
-              <a:t>		</a:t>
+              <a:t>		_</a:t>
             </a:r>
             <a:r>
               <a:rPr lang="nl-NL" sz="1800" noProof="0" dirty="0" err="1">
@@ -32802,37 +32310,6 @@
               </a:rPr>
               <a:t>()</a:t>
             </a:r>
-          </a:p>
-          <a:p>
-            <a:pPr marL="0" indent="0">
-              <a:buNone/>
-            </a:pPr>
-            <a:r>
-              <a:rPr lang="nl-NL" sz="1800" noProof="0" dirty="0"/>
-              <a:t>Overschreven:</a:t>
-            </a:r>
-            <a:r>
-              <a:rPr lang="nl-NL" sz="1800" dirty="0">
-                <a:latin typeface="Courier New" panose="02070309020205020404" pitchFamily="49" charset="0"/>
-                <a:cs typeface="Courier New" panose="02070309020205020404" pitchFamily="49" charset="0"/>
-              </a:rPr>
-              <a:t>	</a:t>
-            </a:r>
-            <a:r>
-              <a:rPr lang="nl-NL" sz="1800" noProof="0" dirty="0" err="1">
-                <a:latin typeface="Courier New" panose="02070309020205020404" pitchFamily="49" charset="0"/>
-                <a:cs typeface="Courier New" panose="02070309020205020404" pitchFamily="49" charset="0"/>
-              </a:rPr>
-              <a:t>read</a:t>
-            </a:r>
-            <a:r>
-              <a:rPr lang="nl-NL" sz="1800" noProof="0" dirty="0">
-                <a:latin typeface="Courier New" panose="02070309020205020404" pitchFamily="49" charset="0"/>
-                <a:cs typeface="Courier New" panose="02070309020205020404" pitchFamily="49" charset="0"/>
-              </a:rPr>
-              <a:t>()</a:t>
-            </a:r>
-            <a:endParaRPr lang="nl-NL" sz="1800" noProof="0" dirty="0"/>
           </a:p>
         </p:txBody>
       </p:sp>
@@ -33040,10 +32517,20 @@
             </a:pPr>
             <a:r>
               <a:rPr lang="en-US" sz="1100" b="1" dirty="0">
-                <a:latin typeface="Courier New" panose="02070309020205020404" pitchFamily="49" charset="0"/>
-                <a:cs typeface="Courier New" panose="02070309020205020404" pitchFamily="49" charset="0"/>
-              </a:rPr>
-              <a:t>class </a:t>
+                <a:solidFill>
+                  <a:srgbClr val="7030A0"/>
+                </a:solidFill>
+                <a:latin typeface="Courier New" panose="02070309020205020404" pitchFamily="49" charset="0"/>
+                <a:cs typeface="Courier New" panose="02070309020205020404" pitchFamily="49" charset="0"/>
+              </a:rPr>
+              <a:t>class</a:t>
+            </a:r>
+            <a:r>
+              <a:rPr lang="en-US" sz="1100" b="1" dirty="0">
+                <a:latin typeface="Courier New" panose="02070309020205020404" pitchFamily="49" charset="0"/>
+                <a:cs typeface="Courier New" panose="02070309020205020404" pitchFamily="49" charset="0"/>
+              </a:rPr>
+              <a:t> </a:t>
             </a:r>
             <a:r>
               <a:rPr lang="en-US" sz="1100" b="1" dirty="0" err="1">
@@ -33126,7 +32613,24 @@
                 <a:latin typeface="Courier New" panose="02070309020205020404" pitchFamily="49" charset="0"/>
                 <a:cs typeface="Courier New" panose="02070309020205020404" pitchFamily="49" charset="0"/>
               </a:rPr>
-              <a:t>  def __</a:t>
+              <a:t>  </a:t>
+            </a:r>
+            <a:r>
+              <a:rPr lang="en-US" sz="1100" b="1" dirty="0">
+                <a:solidFill>
+                  <a:srgbClr val="7030A0"/>
+                </a:solidFill>
+                <a:latin typeface="Courier New" panose="02070309020205020404" pitchFamily="49" charset="0"/>
+                <a:cs typeface="Courier New" panose="02070309020205020404" pitchFamily="49" charset="0"/>
+              </a:rPr>
+              <a:t>def</a:t>
+            </a:r>
+            <a:r>
+              <a:rPr lang="en-US" sz="1100" b="1" dirty="0">
+                <a:latin typeface="Courier New" panose="02070309020205020404" pitchFamily="49" charset="0"/>
+                <a:cs typeface="Courier New" panose="02070309020205020404" pitchFamily="49" charset="0"/>
+              </a:rPr>
+              <a:t> __</a:t>
             </a:r>
             <a:r>
               <a:rPr lang="en-US" sz="1100" b="1" dirty="0" err="1">
@@ -33233,7 +32737,24 @@
                 <a:latin typeface="Courier New" panose="02070309020205020404" pitchFamily="49" charset="0"/>
                 <a:cs typeface="Courier New" panose="02070309020205020404" pitchFamily="49" charset="0"/>
               </a:rPr>
-              <a:t>  def read(self):</a:t>
+              <a:t>  </a:t>
+            </a:r>
+            <a:r>
+              <a:rPr lang="en-US" sz="1100" b="1" dirty="0">
+                <a:solidFill>
+                  <a:srgbClr val="7030A0"/>
+                </a:solidFill>
+                <a:latin typeface="Courier New" panose="02070309020205020404" pitchFamily="49" charset="0"/>
+                <a:cs typeface="Courier New" panose="02070309020205020404" pitchFamily="49" charset="0"/>
+              </a:rPr>
+              <a:t>def</a:t>
+            </a:r>
+            <a:r>
+              <a:rPr lang="en-US" sz="1100" b="1" dirty="0">
+                <a:latin typeface="Courier New" panose="02070309020205020404" pitchFamily="49" charset="0"/>
+                <a:cs typeface="Courier New" panose="02070309020205020404" pitchFamily="49" charset="0"/>
+              </a:rPr>
+              <a:t> read(self):</a:t>
             </a:r>
           </a:p>
           <a:p>
@@ -33252,7 +32773,24 @@
                 <a:latin typeface="Courier New" panose="02070309020205020404" pitchFamily="49" charset="0"/>
                 <a:cs typeface="Courier New" panose="02070309020205020404" pitchFamily="49" charset="0"/>
               </a:rPr>
-              <a:t>    with open(</a:t>
+              <a:t>    </a:t>
+            </a:r>
+            <a:r>
+              <a:rPr lang="en-US" sz="1100" dirty="0">
+                <a:solidFill>
+                  <a:srgbClr val="7030A0"/>
+                </a:solidFill>
+                <a:latin typeface="Courier New" panose="02070309020205020404" pitchFamily="49" charset="0"/>
+                <a:cs typeface="Courier New" panose="02070309020205020404" pitchFamily="49" charset="0"/>
+              </a:rPr>
+              <a:t>with open</a:t>
+            </a:r>
+            <a:r>
+              <a:rPr lang="en-US" sz="1100" dirty="0">
+                <a:latin typeface="Courier New" panose="02070309020205020404" pitchFamily="49" charset="0"/>
+                <a:cs typeface="Courier New" panose="02070309020205020404" pitchFamily="49" charset="0"/>
+              </a:rPr>
+              <a:t>(</a:t>
             </a:r>
             <a:r>
               <a:rPr lang="en-US" sz="1100" dirty="0" err="1">
@@ -33285,7 +32823,24 @@
                 <a:latin typeface="Courier New" panose="02070309020205020404" pitchFamily="49" charset="0"/>
                 <a:cs typeface="Courier New" panose="02070309020205020404" pitchFamily="49" charset="0"/>
               </a:rPr>
-              <a:t>) as </a:t>
+              <a:t>) </a:t>
+            </a:r>
+            <a:r>
+              <a:rPr lang="en-US" sz="1100" dirty="0">
+                <a:solidFill>
+                  <a:srgbClr val="7030A0"/>
+                </a:solidFill>
+                <a:latin typeface="Courier New" panose="02070309020205020404" pitchFamily="49" charset="0"/>
+                <a:cs typeface="Courier New" panose="02070309020205020404" pitchFamily="49" charset="0"/>
+              </a:rPr>
+              <a:t>as</a:t>
+            </a:r>
+            <a:r>
+              <a:rPr lang="en-US" sz="1100" dirty="0">
+                <a:latin typeface="Courier New" panose="02070309020205020404" pitchFamily="49" charset="0"/>
+                <a:cs typeface="Courier New" panose="02070309020205020404" pitchFamily="49" charset="0"/>
+              </a:rPr>
+              <a:t> </a:t>
             </a:r>
             <a:r>
               <a:rPr lang="en-US" sz="1100" dirty="0" err="1">
@@ -33318,7 +32873,24 @@
                 <a:latin typeface="Courier New" panose="02070309020205020404" pitchFamily="49" charset="0"/>
                 <a:cs typeface="Courier New" panose="02070309020205020404" pitchFamily="49" charset="0"/>
               </a:rPr>
-              <a:t>      return [</a:t>
+              <a:t>      </a:t>
+            </a:r>
+            <a:r>
+              <a:rPr lang="en-US" sz="1100" dirty="0">
+                <a:solidFill>
+                  <a:srgbClr val="7030A0"/>
+                </a:solidFill>
+                <a:latin typeface="Courier New" panose="02070309020205020404" pitchFamily="49" charset="0"/>
+                <a:cs typeface="Courier New" panose="02070309020205020404" pitchFamily="49" charset="0"/>
+              </a:rPr>
+              <a:t>return</a:t>
+            </a:r>
+            <a:r>
+              <a:rPr lang="en-US" sz="1100" dirty="0">
+                <a:latin typeface="Courier New" panose="02070309020205020404" pitchFamily="49" charset="0"/>
+                <a:cs typeface="Courier New" panose="02070309020205020404" pitchFamily="49" charset="0"/>
+              </a:rPr>
+              <a:t> [</a:t>
             </a:r>
             <a:r>
               <a:rPr lang="en-US" sz="1100" dirty="0" err="1">
@@ -33332,7 +32904,41 @@
                 <a:latin typeface="Courier New" panose="02070309020205020404" pitchFamily="49" charset="0"/>
                 <a:cs typeface="Courier New" panose="02070309020205020404" pitchFamily="49" charset="0"/>
               </a:rPr>
-              <a:t>() for line in </a:t>
+              <a:t>() </a:t>
+            </a:r>
+            <a:r>
+              <a:rPr lang="en-US" sz="1100" dirty="0">
+                <a:solidFill>
+                  <a:srgbClr val="7030A0"/>
+                </a:solidFill>
+                <a:latin typeface="Courier New" panose="02070309020205020404" pitchFamily="49" charset="0"/>
+                <a:cs typeface="Courier New" panose="02070309020205020404" pitchFamily="49" charset="0"/>
+              </a:rPr>
+              <a:t>for</a:t>
+            </a:r>
+            <a:r>
+              <a:rPr lang="en-US" sz="1100" dirty="0">
+                <a:latin typeface="Courier New" panose="02070309020205020404" pitchFamily="49" charset="0"/>
+                <a:cs typeface="Courier New" panose="02070309020205020404" pitchFamily="49" charset="0"/>
+              </a:rPr>
+              <a:t> line </a:t>
+            </a:r>
+            <a:r>
+              <a:rPr lang="en-US" sz="1100" dirty="0">
+                <a:solidFill>
+                  <a:srgbClr val="7030A0"/>
+                </a:solidFill>
+                <a:latin typeface="Courier New" panose="02070309020205020404" pitchFamily="49" charset="0"/>
+                <a:cs typeface="Courier New" panose="02070309020205020404" pitchFamily="49" charset="0"/>
+              </a:rPr>
+              <a:t>in</a:t>
+            </a:r>
+            <a:r>
+              <a:rPr lang="en-US" sz="1100" dirty="0">
+                <a:latin typeface="Courier New" panose="02070309020205020404" pitchFamily="49" charset="0"/>
+                <a:cs typeface="Courier New" panose="02070309020205020404" pitchFamily="49" charset="0"/>
+              </a:rPr>
+              <a:t> </a:t>
             </a:r>
             <a:r>
               <a:rPr lang="en-US" sz="1100" dirty="0" err="1">
@@ -33507,7 +33113,7 @@
                 <a:latin typeface="Courier New" panose="02070309020205020404" pitchFamily="49" charset="0"/>
                 <a:cs typeface="Courier New" panose="02070309020205020404" pitchFamily="49" charset="0"/>
               </a:rPr>
-              <a:t>  separator = </a:t>
+              <a:t>  _separator = </a:t>
             </a:r>
             <a:r>
               <a:rPr lang="en-US" sz="1100" dirty="0">
@@ -33557,7 +33163,24 @@
                 <a:latin typeface="Courier New" panose="02070309020205020404" pitchFamily="49" charset="0"/>
                 <a:cs typeface="Courier New" panose="02070309020205020404" pitchFamily="49" charset="0"/>
               </a:rPr>
-              <a:t>  def _</a:t>
+              <a:t>  </a:t>
+            </a:r>
+            <a:r>
+              <a:rPr lang="en-US" sz="1100" b="1" dirty="0">
+                <a:solidFill>
+                  <a:srgbClr val="7030A0"/>
+                </a:solidFill>
+                <a:latin typeface="Courier New" panose="02070309020205020404" pitchFamily="49" charset="0"/>
+                <a:cs typeface="Courier New" panose="02070309020205020404" pitchFamily="49" charset="0"/>
+              </a:rPr>
+              <a:t>def</a:t>
+            </a:r>
+            <a:r>
+              <a:rPr lang="en-US" sz="1100" b="1" dirty="0">
+                <a:latin typeface="Courier New" panose="02070309020205020404" pitchFamily="49" charset="0"/>
+                <a:cs typeface="Courier New" panose="02070309020205020404" pitchFamily="49" charset="0"/>
+              </a:rPr>
+              <a:t> _</a:t>
             </a:r>
             <a:r>
               <a:rPr lang="en-US" sz="1100" b="1" dirty="0" err="1">
@@ -33590,7 +33213,24 @@
                 <a:latin typeface="Courier New" panose="02070309020205020404" pitchFamily="49" charset="0"/>
                 <a:cs typeface="Courier New" panose="02070309020205020404" pitchFamily="49" charset="0"/>
               </a:rPr>
-              <a:t>    return </a:t>
+              <a:t>    </a:t>
+            </a:r>
+            <a:r>
+              <a:rPr lang="en-US" sz="1100" dirty="0">
+                <a:solidFill>
+                  <a:srgbClr val="7030A0"/>
+                </a:solidFill>
+                <a:latin typeface="Courier New" panose="02070309020205020404" pitchFamily="49" charset="0"/>
+                <a:cs typeface="Courier New" panose="02070309020205020404" pitchFamily="49" charset="0"/>
+              </a:rPr>
+              <a:t>return</a:t>
+            </a:r>
+            <a:r>
+              <a:rPr lang="en-US" sz="1100" dirty="0">
+                <a:latin typeface="Courier New" panose="02070309020205020404" pitchFamily="49" charset="0"/>
+                <a:cs typeface="Courier New" panose="02070309020205020404" pitchFamily="49" charset="0"/>
+              </a:rPr>
+              <a:t> </a:t>
             </a:r>
             <a:r>
               <a:rPr lang="en-US" sz="1100" dirty="0" err="1">
@@ -33672,7 +33312,24 @@
                 <a:latin typeface="Courier New" panose="02070309020205020404" pitchFamily="49" charset="0"/>
                 <a:cs typeface="Courier New" panose="02070309020205020404" pitchFamily="49" charset="0"/>
               </a:rPr>
-              <a:t>    with open(</a:t>
+              <a:t>    </a:t>
+            </a:r>
+            <a:r>
+              <a:rPr lang="en-US" sz="1100" dirty="0">
+                <a:solidFill>
+                  <a:srgbClr val="7030A0"/>
+                </a:solidFill>
+                <a:latin typeface="Courier New" panose="02070309020205020404" pitchFamily="49" charset="0"/>
+                <a:cs typeface="Courier New" panose="02070309020205020404" pitchFamily="49" charset="0"/>
+              </a:rPr>
+              <a:t>with open</a:t>
+            </a:r>
+            <a:r>
+              <a:rPr lang="en-US" sz="1100" dirty="0">
+                <a:latin typeface="Courier New" panose="02070309020205020404" pitchFamily="49" charset="0"/>
+                <a:cs typeface="Courier New" panose="02070309020205020404" pitchFamily="49" charset="0"/>
+              </a:rPr>
+              <a:t>(</a:t>
             </a:r>
             <a:r>
               <a:rPr lang="en-US" sz="1100" dirty="0" err="1">
@@ -33705,7 +33362,24 @@
                 <a:latin typeface="Courier New" panose="02070309020205020404" pitchFamily="49" charset="0"/>
                 <a:cs typeface="Courier New" panose="02070309020205020404" pitchFamily="49" charset="0"/>
               </a:rPr>
-              <a:t>) as </a:t>
+              <a:t>) </a:t>
+            </a:r>
+            <a:r>
+              <a:rPr lang="en-US" sz="1100" dirty="0">
+                <a:solidFill>
+                  <a:srgbClr val="7030A0"/>
+                </a:solidFill>
+                <a:latin typeface="Courier New" panose="02070309020205020404" pitchFamily="49" charset="0"/>
+                <a:cs typeface="Courier New" panose="02070309020205020404" pitchFamily="49" charset="0"/>
+              </a:rPr>
+              <a:t>as</a:t>
+            </a:r>
+            <a:r>
+              <a:rPr lang="en-US" sz="1100" dirty="0">
+                <a:latin typeface="Courier New" panose="02070309020205020404" pitchFamily="49" charset="0"/>
+                <a:cs typeface="Courier New" panose="02070309020205020404" pitchFamily="49" charset="0"/>
+              </a:rPr>
+              <a:t> </a:t>
             </a:r>
             <a:r>
               <a:rPr lang="en-US" sz="1100" dirty="0" err="1">
@@ -33738,7 +33412,24 @@
                 <a:latin typeface="Courier New" panose="02070309020205020404" pitchFamily="49" charset="0"/>
                 <a:cs typeface="Courier New" panose="02070309020205020404" pitchFamily="49" charset="0"/>
               </a:rPr>
-              <a:t>      return [</a:t>
+              <a:t>      </a:t>
+            </a:r>
+            <a:r>
+              <a:rPr lang="en-US" sz="1100" dirty="0">
+                <a:solidFill>
+                  <a:srgbClr val="7030A0"/>
+                </a:solidFill>
+                <a:latin typeface="Courier New" panose="02070309020205020404" pitchFamily="49" charset="0"/>
+                <a:cs typeface="Courier New" panose="02070309020205020404" pitchFamily="49" charset="0"/>
+              </a:rPr>
+              <a:t>return</a:t>
+            </a:r>
+            <a:r>
+              <a:rPr lang="en-US" sz="1100" dirty="0">
+                <a:latin typeface="Courier New" panose="02070309020205020404" pitchFamily="49" charset="0"/>
+                <a:cs typeface="Courier New" panose="02070309020205020404" pitchFamily="49" charset="0"/>
+              </a:rPr>
+              <a:t> [</a:t>
             </a:r>
           </a:p>
           <a:p>
@@ -33804,7 +33495,41 @@
                 <a:latin typeface="Courier New" panose="02070309020205020404" pitchFamily="49" charset="0"/>
                 <a:cs typeface="Courier New" panose="02070309020205020404" pitchFamily="49" charset="0"/>
               </a:rPr>
-              <a:t>        for line in </a:t>
+              <a:t>        </a:t>
+            </a:r>
+            <a:r>
+              <a:rPr lang="en-US" sz="1100" dirty="0">
+                <a:solidFill>
+                  <a:srgbClr val="7030A0"/>
+                </a:solidFill>
+                <a:latin typeface="Courier New" panose="02070309020205020404" pitchFamily="49" charset="0"/>
+                <a:cs typeface="Courier New" panose="02070309020205020404" pitchFamily="49" charset="0"/>
+              </a:rPr>
+              <a:t>for</a:t>
+            </a:r>
+            <a:r>
+              <a:rPr lang="en-US" sz="1100" dirty="0">
+                <a:latin typeface="Courier New" panose="02070309020205020404" pitchFamily="49" charset="0"/>
+                <a:cs typeface="Courier New" panose="02070309020205020404" pitchFamily="49" charset="0"/>
+              </a:rPr>
+              <a:t> line </a:t>
+            </a:r>
+            <a:r>
+              <a:rPr lang="en-US" sz="1100" dirty="0">
+                <a:solidFill>
+                  <a:srgbClr val="7030A0"/>
+                </a:solidFill>
+                <a:latin typeface="Courier New" panose="02070309020205020404" pitchFamily="49" charset="0"/>
+                <a:cs typeface="Courier New" panose="02070309020205020404" pitchFamily="49" charset="0"/>
+              </a:rPr>
+              <a:t>in</a:t>
+            </a:r>
+            <a:r>
+              <a:rPr lang="en-US" sz="1100" dirty="0">
+                <a:latin typeface="Courier New" panose="02070309020205020404" pitchFamily="49" charset="0"/>
+                <a:cs typeface="Courier New" panose="02070309020205020404" pitchFamily="49" charset="0"/>
+              </a:rPr>
+              <a:t> </a:t>
             </a:r>
             <a:r>
               <a:rPr lang="en-US" sz="1100" dirty="0" err="1">
@@ -34003,7 +33728,7 @@
             </a:pPr>
             <a:r>
               <a:rPr lang="nl-NL" sz="1800" noProof="0" dirty="0"/>
-              <a:t>Via </a:t>
+              <a:t>Met </a:t>
             </a:r>
             <a:r>
               <a:rPr lang="nl-NL" sz="1800" noProof="0" dirty="0">
@@ -34014,7 +33739,7 @@
             </a:r>
             <a:r>
               <a:rPr lang="nl-NL" sz="1800" noProof="0" dirty="0"/>
-              <a:t> krijg je toegang tot de basis class.</a:t>
+              <a:t> heb je toegang tot de basis class.</a:t>
             </a:r>
           </a:p>
           <a:p>
@@ -34245,15 +33970,24 @@
               <a:spcBef>
                 <a:spcPts val="0"/>
               </a:spcBef>
-              <a:buFont typeface="Arial" panose="020B0604020202020204" pitchFamily="34" charset="0"/>
               <a:buNone/>
             </a:pPr>
             <a:r>
               <a:rPr lang="en-US" sz="1100" b="1" dirty="0">
-                <a:latin typeface="Courier New" panose="02070309020205020404" pitchFamily="49" charset="0"/>
-                <a:cs typeface="Courier New" panose="02070309020205020404" pitchFamily="49" charset="0"/>
-              </a:rPr>
-              <a:t>class </a:t>
+                <a:solidFill>
+                  <a:srgbClr val="7030A0"/>
+                </a:solidFill>
+                <a:latin typeface="Courier New" panose="02070309020205020404" pitchFamily="49" charset="0"/>
+                <a:cs typeface="Courier New" panose="02070309020205020404" pitchFamily="49" charset="0"/>
+              </a:rPr>
+              <a:t>class</a:t>
+            </a:r>
+            <a:r>
+              <a:rPr lang="en-US" sz="1100" b="1" dirty="0">
+                <a:latin typeface="Courier New" panose="02070309020205020404" pitchFamily="49" charset="0"/>
+                <a:cs typeface="Courier New" panose="02070309020205020404" pitchFamily="49" charset="0"/>
+              </a:rPr>
+              <a:t> </a:t>
             </a:r>
             <a:r>
               <a:rPr lang="en-US" sz="1100" b="1" dirty="0" err="1">
@@ -34278,7 +34012,6 @@
               <a:spcBef>
                 <a:spcPts val="0"/>
               </a:spcBef>
-              <a:buFont typeface="Arial" panose="020B0604020202020204" pitchFamily="34" charset="0"/>
               <a:buNone/>
             </a:pPr>
             <a:r>
@@ -34309,7 +34042,6 @@
               <a:spcBef>
                 <a:spcPts val="0"/>
               </a:spcBef>
-              <a:buFont typeface="Arial" panose="020B0604020202020204" pitchFamily="34" charset="0"/>
               <a:buNone/>
             </a:pPr>
             <a:r>
@@ -34328,7 +34060,6 @@
               <a:spcBef>
                 <a:spcPts val="0"/>
               </a:spcBef>
-              <a:buFont typeface="Arial" panose="020B0604020202020204" pitchFamily="34" charset="0"/>
               <a:buNone/>
             </a:pPr>
             <a:r>
@@ -34336,7 +34067,24 @@
                 <a:latin typeface="Courier New" panose="02070309020205020404" pitchFamily="49" charset="0"/>
                 <a:cs typeface="Courier New" panose="02070309020205020404" pitchFamily="49" charset="0"/>
               </a:rPr>
-              <a:t>  def __</a:t>
+              <a:t>  </a:t>
+            </a:r>
+            <a:r>
+              <a:rPr lang="en-US" sz="1100" b="1" dirty="0">
+                <a:solidFill>
+                  <a:srgbClr val="7030A0"/>
+                </a:solidFill>
+                <a:latin typeface="Courier New" panose="02070309020205020404" pitchFamily="49" charset="0"/>
+                <a:cs typeface="Courier New" panose="02070309020205020404" pitchFamily="49" charset="0"/>
+              </a:rPr>
+              <a:t>def</a:t>
+            </a:r>
+            <a:r>
+              <a:rPr lang="en-US" sz="1100" b="1" dirty="0">
+                <a:latin typeface="Courier New" panose="02070309020205020404" pitchFamily="49" charset="0"/>
+                <a:cs typeface="Courier New" panose="02070309020205020404" pitchFamily="49" charset="0"/>
+              </a:rPr>
+              <a:t> __</a:t>
             </a:r>
             <a:r>
               <a:rPr lang="en-US" sz="1100" b="1" dirty="0" err="1">
@@ -34375,7 +34123,6 @@
               <a:spcBef>
                 <a:spcPts val="0"/>
               </a:spcBef>
-              <a:buFont typeface="Arial" panose="020B0604020202020204" pitchFamily="34" charset="0"/>
               <a:buNone/>
             </a:pPr>
             <a:r>
@@ -34419,7 +34166,6 @@
               <a:spcBef>
                 <a:spcPts val="0"/>
               </a:spcBef>
-              <a:buFont typeface="Arial" panose="020B0604020202020204" pitchFamily="34" charset="0"/>
               <a:buNone/>
             </a:pPr>
             <a:endParaRPr lang="en-US" sz="1100" dirty="0">
@@ -34435,7 +34181,6 @@
               <a:spcBef>
                 <a:spcPts val="0"/>
               </a:spcBef>
-              <a:buFont typeface="Arial" panose="020B0604020202020204" pitchFamily="34" charset="0"/>
               <a:buNone/>
             </a:pPr>
             <a:r>
@@ -34443,7 +34188,24 @@
                 <a:latin typeface="Courier New" panose="02070309020205020404" pitchFamily="49" charset="0"/>
                 <a:cs typeface="Courier New" panose="02070309020205020404" pitchFamily="49" charset="0"/>
               </a:rPr>
-              <a:t>  def read(self):</a:t>
+              <a:t>  </a:t>
+            </a:r>
+            <a:r>
+              <a:rPr lang="en-US" sz="1100" b="1" dirty="0">
+                <a:solidFill>
+                  <a:srgbClr val="7030A0"/>
+                </a:solidFill>
+                <a:latin typeface="Courier New" panose="02070309020205020404" pitchFamily="49" charset="0"/>
+                <a:cs typeface="Courier New" panose="02070309020205020404" pitchFamily="49" charset="0"/>
+              </a:rPr>
+              <a:t>def</a:t>
+            </a:r>
+            <a:r>
+              <a:rPr lang="en-US" sz="1100" b="1" dirty="0">
+                <a:latin typeface="Courier New" panose="02070309020205020404" pitchFamily="49" charset="0"/>
+                <a:cs typeface="Courier New" panose="02070309020205020404" pitchFamily="49" charset="0"/>
+              </a:rPr>
+              <a:t> read(self):</a:t>
             </a:r>
           </a:p>
           <a:p>
@@ -34454,7 +34216,6 @@
               <a:spcBef>
                 <a:spcPts val="0"/>
               </a:spcBef>
-              <a:buFont typeface="Arial" panose="020B0604020202020204" pitchFamily="34" charset="0"/>
               <a:buNone/>
             </a:pPr>
             <a:r>
@@ -34462,7 +34223,24 @@
                 <a:latin typeface="Courier New" panose="02070309020205020404" pitchFamily="49" charset="0"/>
                 <a:cs typeface="Courier New" panose="02070309020205020404" pitchFamily="49" charset="0"/>
               </a:rPr>
-              <a:t>    with open(</a:t>
+              <a:t>    </a:t>
+            </a:r>
+            <a:r>
+              <a:rPr lang="en-US" sz="1100" dirty="0">
+                <a:solidFill>
+                  <a:srgbClr val="7030A0"/>
+                </a:solidFill>
+                <a:latin typeface="Courier New" panose="02070309020205020404" pitchFamily="49" charset="0"/>
+                <a:cs typeface="Courier New" panose="02070309020205020404" pitchFamily="49" charset="0"/>
+              </a:rPr>
+              <a:t>with open</a:t>
+            </a:r>
+            <a:r>
+              <a:rPr lang="en-US" sz="1100" dirty="0">
+                <a:latin typeface="Courier New" panose="02070309020205020404" pitchFamily="49" charset="0"/>
+                <a:cs typeface="Courier New" panose="02070309020205020404" pitchFamily="49" charset="0"/>
+              </a:rPr>
+              <a:t>(</a:t>
             </a:r>
             <a:r>
               <a:rPr lang="en-US" sz="1100" dirty="0" err="1">
@@ -34495,7 +34273,24 @@
                 <a:latin typeface="Courier New" panose="02070309020205020404" pitchFamily="49" charset="0"/>
                 <a:cs typeface="Courier New" panose="02070309020205020404" pitchFamily="49" charset="0"/>
               </a:rPr>
-              <a:t>) as </a:t>
+              <a:t>) </a:t>
+            </a:r>
+            <a:r>
+              <a:rPr lang="en-US" sz="1100" dirty="0">
+                <a:solidFill>
+                  <a:srgbClr val="7030A0"/>
+                </a:solidFill>
+                <a:latin typeface="Courier New" panose="02070309020205020404" pitchFamily="49" charset="0"/>
+                <a:cs typeface="Courier New" panose="02070309020205020404" pitchFamily="49" charset="0"/>
+              </a:rPr>
+              <a:t>as</a:t>
+            </a:r>
+            <a:r>
+              <a:rPr lang="en-US" sz="1100" dirty="0">
+                <a:latin typeface="Courier New" panose="02070309020205020404" pitchFamily="49" charset="0"/>
+                <a:cs typeface="Courier New" panose="02070309020205020404" pitchFamily="49" charset="0"/>
+              </a:rPr>
+              <a:t> </a:t>
             </a:r>
             <a:r>
               <a:rPr lang="en-US" sz="1100" dirty="0" err="1">
@@ -34520,7 +34315,6 @@
               <a:spcBef>
                 <a:spcPts val="0"/>
               </a:spcBef>
-              <a:buFont typeface="Arial" panose="020B0604020202020204" pitchFamily="34" charset="0"/>
               <a:buNone/>
             </a:pPr>
             <a:r>
@@ -34528,7 +34322,24 @@
                 <a:latin typeface="Courier New" panose="02070309020205020404" pitchFamily="49" charset="0"/>
                 <a:cs typeface="Courier New" panose="02070309020205020404" pitchFamily="49" charset="0"/>
               </a:rPr>
-              <a:t>      return [</a:t>
+              <a:t>      </a:t>
+            </a:r>
+            <a:r>
+              <a:rPr lang="en-US" sz="1100" dirty="0">
+                <a:solidFill>
+                  <a:srgbClr val="7030A0"/>
+                </a:solidFill>
+                <a:latin typeface="Courier New" panose="02070309020205020404" pitchFamily="49" charset="0"/>
+                <a:cs typeface="Courier New" panose="02070309020205020404" pitchFamily="49" charset="0"/>
+              </a:rPr>
+              <a:t>return</a:t>
+            </a:r>
+            <a:r>
+              <a:rPr lang="en-US" sz="1100" dirty="0">
+                <a:latin typeface="Courier New" panose="02070309020205020404" pitchFamily="49" charset="0"/>
+                <a:cs typeface="Courier New" panose="02070309020205020404" pitchFamily="49" charset="0"/>
+              </a:rPr>
+              <a:t> [</a:t>
             </a:r>
             <a:r>
               <a:rPr lang="en-US" sz="1100" dirty="0" err="1">
@@ -34542,7 +34353,41 @@
                 <a:latin typeface="Courier New" panose="02070309020205020404" pitchFamily="49" charset="0"/>
                 <a:cs typeface="Courier New" panose="02070309020205020404" pitchFamily="49" charset="0"/>
               </a:rPr>
-              <a:t>() for line in </a:t>
+              <a:t>() </a:t>
+            </a:r>
+            <a:r>
+              <a:rPr lang="en-US" sz="1100" dirty="0">
+                <a:solidFill>
+                  <a:srgbClr val="7030A0"/>
+                </a:solidFill>
+                <a:latin typeface="Courier New" panose="02070309020205020404" pitchFamily="49" charset="0"/>
+                <a:cs typeface="Courier New" panose="02070309020205020404" pitchFamily="49" charset="0"/>
+              </a:rPr>
+              <a:t>for</a:t>
+            </a:r>
+            <a:r>
+              <a:rPr lang="en-US" sz="1100" dirty="0">
+                <a:latin typeface="Courier New" panose="02070309020205020404" pitchFamily="49" charset="0"/>
+                <a:cs typeface="Courier New" panose="02070309020205020404" pitchFamily="49" charset="0"/>
+              </a:rPr>
+              <a:t> line </a:t>
+            </a:r>
+            <a:r>
+              <a:rPr lang="en-US" sz="1100" dirty="0">
+                <a:solidFill>
+                  <a:srgbClr val="7030A0"/>
+                </a:solidFill>
+                <a:latin typeface="Courier New" panose="02070309020205020404" pitchFamily="49" charset="0"/>
+                <a:cs typeface="Courier New" panose="02070309020205020404" pitchFamily="49" charset="0"/>
+              </a:rPr>
+              <a:t>in</a:t>
+            </a:r>
+            <a:r>
+              <a:rPr lang="en-US" sz="1100" dirty="0">
+                <a:latin typeface="Courier New" panose="02070309020205020404" pitchFamily="49" charset="0"/>
+                <a:cs typeface="Courier New" panose="02070309020205020404" pitchFamily="49" charset="0"/>
+              </a:rPr>
+              <a:t> </a:t>
             </a:r>
             <a:r>
               <a:rPr lang="en-US" sz="1100" dirty="0" err="1">
@@ -34567,7 +34412,6 @@
               <a:spcBef>
                 <a:spcPts val="0"/>
               </a:spcBef>
-              <a:buFont typeface="Arial" panose="020B0604020202020204" pitchFamily="34" charset="0"/>
               <a:buNone/>
             </a:pPr>
             <a:endParaRPr lang="en-US" sz="1100" dirty="0">
@@ -34583,7 +34427,6 @@
               <a:spcBef>
                 <a:spcPts val="0"/>
               </a:spcBef>
-              <a:buFont typeface="Arial" panose="020B0604020202020204" pitchFamily="34" charset="0"/>
               <a:buNone/>
             </a:pPr>
             <a:endParaRPr lang="en-US" sz="1100" dirty="0">
@@ -34599,7 +34442,6 @@
               <a:spcBef>
                 <a:spcPts val="0"/>
               </a:spcBef>
-              <a:buFont typeface="Arial" panose="020B0604020202020204" pitchFamily="34" charset="0"/>
               <a:buNone/>
             </a:pPr>
             <a:endParaRPr lang="en-US" sz="1100" dirty="0">
@@ -34615,7 +34457,6 @@
               <a:spcBef>
                 <a:spcPts val="0"/>
               </a:spcBef>
-              <a:buFont typeface="Arial" panose="020B0604020202020204" pitchFamily="34" charset="0"/>
               <a:buNone/>
             </a:pPr>
             <a:r>
@@ -34662,7 +34503,6 @@
               <a:spcBef>
                 <a:spcPts val="0"/>
               </a:spcBef>
-              <a:buFont typeface="Arial" panose="020B0604020202020204" pitchFamily="34" charset="0"/>
               <a:buNone/>
             </a:pPr>
             <a:r>
@@ -34717,7 +34557,24 @@
                 <a:latin typeface="Courier New" panose="02070309020205020404" pitchFamily="49" charset="0"/>
                 <a:cs typeface="Courier New" panose="02070309020205020404" pitchFamily="49" charset="0"/>
               </a:rPr>
-              <a:t>  def __</a:t>
+              <a:t>  </a:t>
+            </a:r>
+            <a:r>
+              <a:rPr lang="en-US" sz="1100" b="1" dirty="0">
+                <a:solidFill>
+                  <a:srgbClr val="7030A0"/>
+                </a:solidFill>
+                <a:latin typeface="Courier New" panose="02070309020205020404" pitchFamily="49" charset="0"/>
+                <a:cs typeface="Courier New" panose="02070309020205020404" pitchFamily="49" charset="0"/>
+              </a:rPr>
+              <a:t>def</a:t>
+            </a:r>
+            <a:r>
+              <a:rPr lang="en-US" sz="1100" b="1" dirty="0">
+                <a:latin typeface="Courier New" panose="02070309020205020404" pitchFamily="49" charset="0"/>
+                <a:cs typeface="Courier New" panose="02070309020205020404" pitchFamily="49" charset="0"/>
+              </a:rPr>
+              <a:t> __</a:t>
             </a:r>
             <a:r>
               <a:rPr lang="en-US" sz="1100" b="1" dirty="0" err="1">
@@ -34751,6 +34608,16 @@
                 <a:cs typeface="Courier New" panose="02070309020205020404" pitchFamily="49" charset="0"/>
               </a:rPr>
               <a:t>    </a:t>
+            </a:r>
+            <a:r>
+              <a:rPr lang="en-US" sz="1100" b="1" dirty="0">
+                <a:solidFill>
+                  <a:srgbClr val="7030A0"/>
+                </a:solidFill>
+                <a:latin typeface="Courier New" panose="02070309020205020404" pitchFamily="49" charset="0"/>
+                <a:cs typeface="Courier New" panose="02070309020205020404" pitchFamily="49" charset="0"/>
+              </a:rPr>
+              <a:t>super</a:t>
             </a:r>
             <a:r>
               <a:rPr lang="en-US" sz="1100" b="1" dirty="0">
@@ -34762,7 +34629,7 @@
                 <a:latin typeface="Courier New" panose="02070309020205020404" pitchFamily="49" charset="0"/>
                 <a:cs typeface="Courier New" panose="02070309020205020404" pitchFamily="49" charset="0"/>
               </a:rPr>
-              <a:t>super().__</a:t>
+              <a:t>().__</a:t>
             </a:r>
             <a:r>
               <a:rPr lang="en-US" sz="1100" b="1" dirty="0" err="1">
@@ -34812,7 +34679,7 @@
                 <a:latin typeface="Courier New" panose="02070309020205020404" pitchFamily="49" charset="0"/>
                 <a:cs typeface="Courier New" panose="02070309020205020404" pitchFamily="49" charset="0"/>
               </a:rPr>
-              <a:t>self.separator</a:t>
+              <a:t>self._separator</a:t>
             </a:r>
             <a:r>
               <a:rPr lang="en-US" sz="1100" dirty="0">
@@ -34857,7 +34724,24 @@
                 <a:latin typeface="Courier New" panose="02070309020205020404" pitchFamily="49" charset="0"/>
                 <a:cs typeface="Courier New" panose="02070309020205020404" pitchFamily="49" charset="0"/>
               </a:rPr>
-              <a:t>  def _</a:t>
+              <a:t>  </a:t>
+            </a:r>
+            <a:r>
+              <a:rPr lang="en-US" sz="1100" b="1" dirty="0">
+                <a:solidFill>
+                  <a:srgbClr val="7030A0"/>
+                </a:solidFill>
+                <a:latin typeface="Courier New" panose="02070309020205020404" pitchFamily="49" charset="0"/>
+                <a:cs typeface="Courier New" panose="02070309020205020404" pitchFamily="49" charset="0"/>
+              </a:rPr>
+              <a:t>def</a:t>
+            </a:r>
+            <a:r>
+              <a:rPr lang="en-US" sz="1100" b="1" dirty="0">
+                <a:latin typeface="Courier New" panose="02070309020205020404" pitchFamily="49" charset="0"/>
+                <a:cs typeface="Courier New" panose="02070309020205020404" pitchFamily="49" charset="0"/>
+              </a:rPr>
+              <a:t> _</a:t>
             </a:r>
             <a:r>
               <a:rPr lang="en-US" sz="1100" b="1" dirty="0" err="1">
@@ -34890,7 +34774,24 @@
                 <a:latin typeface="Courier New" panose="02070309020205020404" pitchFamily="49" charset="0"/>
                 <a:cs typeface="Courier New" panose="02070309020205020404" pitchFamily="49" charset="0"/>
               </a:rPr>
-              <a:t>    return </a:t>
+              <a:t>    </a:t>
+            </a:r>
+            <a:r>
+              <a:rPr lang="en-US" sz="1100" dirty="0">
+                <a:solidFill>
+                  <a:srgbClr val="7030A0"/>
+                </a:solidFill>
+                <a:latin typeface="Courier New" panose="02070309020205020404" pitchFamily="49" charset="0"/>
+                <a:cs typeface="Courier New" panose="02070309020205020404" pitchFamily="49" charset="0"/>
+              </a:rPr>
+              <a:t>return</a:t>
+            </a:r>
+            <a:r>
+              <a:rPr lang="en-US" sz="1100" dirty="0">
+                <a:latin typeface="Courier New" panose="02070309020205020404" pitchFamily="49" charset="0"/>
+                <a:cs typeface="Courier New" panose="02070309020205020404" pitchFamily="49" charset="0"/>
+              </a:rPr>
+              <a:t> </a:t>
             </a:r>
             <a:r>
               <a:rPr lang="en-US" sz="1100" dirty="0" err="1">
@@ -34911,7 +34812,7 @@
                 <a:latin typeface="Courier New" panose="02070309020205020404" pitchFamily="49" charset="0"/>
                 <a:cs typeface="Courier New" panose="02070309020205020404" pitchFamily="49" charset="0"/>
               </a:rPr>
-              <a:t>self.separator</a:t>
+              <a:t>self._separator</a:t>
             </a:r>
             <a:r>
               <a:rPr lang="en-US" sz="1100" dirty="0">
@@ -34953,7 +34854,24 @@
                 <a:latin typeface="Courier New" panose="02070309020205020404" pitchFamily="49" charset="0"/>
                 <a:cs typeface="Courier New" panose="02070309020205020404" pitchFamily="49" charset="0"/>
               </a:rPr>
-              <a:t>  def read(self):</a:t>
+              <a:t>  </a:t>
+            </a:r>
+            <a:r>
+              <a:rPr lang="en-US" sz="1100" b="1" dirty="0">
+                <a:solidFill>
+                  <a:srgbClr val="7030A0"/>
+                </a:solidFill>
+                <a:latin typeface="Courier New" panose="02070309020205020404" pitchFamily="49" charset="0"/>
+                <a:cs typeface="Courier New" panose="02070309020205020404" pitchFamily="49" charset="0"/>
+              </a:rPr>
+              <a:t>def</a:t>
+            </a:r>
+            <a:r>
+              <a:rPr lang="en-US" sz="1100" b="1" dirty="0">
+                <a:latin typeface="Courier New" panose="02070309020205020404" pitchFamily="49" charset="0"/>
+                <a:cs typeface="Courier New" panose="02070309020205020404" pitchFamily="49" charset="0"/>
+              </a:rPr>
+              <a:t> read(self):</a:t>
             </a:r>
           </a:p>
           <a:p>
@@ -34972,7 +34890,24 @@
                 <a:latin typeface="Courier New" panose="02070309020205020404" pitchFamily="49" charset="0"/>
                 <a:cs typeface="Courier New" panose="02070309020205020404" pitchFamily="49" charset="0"/>
               </a:rPr>
-              <a:t>    return [</a:t>
+              <a:t>    </a:t>
+            </a:r>
+            <a:r>
+              <a:rPr lang="en-US" sz="1100" dirty="0">
+                <a:solidFill>
+                  <a:srgbClr val="7030A0"/>
+                </a:solidFill>
+                <a:latin typeface="Courier New" panose="02070309020205020404" pitchFamily="49" charset="0"/>
+                <a:cs typeface="Courier New" panose="02070309020205020404" pitchFamily="49" charset="0"/>
+              </a:rPr>
+              <a:t>return</a:t>
+            </a:r>
+            <a:r>
+              <a:rPr lang="en-US" sz="1100" dirty="0">
+                <a:latin typeface="Courier New" panose="02070309020205020404" pitchFamily="49" charset="0"/>
+                <a:cs typeface="Courier New" panose="02070309020205020404" pitchFamily="49" charset="0"/>
+              </a:rPr>
+              <a:t> [</a:t>
             </a:r>
           </a:p>
           <a:p>
@@ -35024,7 +34959,41 @@
                 <a:latin typeface="Courier New" panose="02070309020205020404" pitchFamily="49" charset="0"/>
                 <a:cs typeface="Courier New" panose="02070309020205020404" pitchFamily="49" charset="0"/>
               </a:rPr>
-              <a:t>      for line in </a:t>
+              <a:t>      </a:t>
+            </a:r>
+            <a:r>
+              <a:rPr lang="en-US" sz="1100" dirty="0">
+                <a:solidFill>
+                  <a:srgbClr val="7030A0"/>
+                </a:solidFill>
+                <a:latin typeface="Courier New" panose="02070309020205020404" pitchFamily="49" charset="0"/>
+                <a:cs typeface="Courier New" panose="02070309020205020404" pitchFamily="49" charset="0"/>
+              </a:rPr>
+              <a:t>for</a:t>
+            </a:r>
+            <a:r>
+              <a:rPr lang="en-US" sz="1100" dirty="0">
+                <a:latin typeface="Courier New" panose="02070309020205020404" pitchFamily="49" charset="0"/>
+                <a:cs typeface="Courier New" panose="02070309020205020404" pitchFamily="49" charset="0"/>
+              </a:rPr>
+              <a:t> line </a:t>
+            </a:r>
+            <a:r>
+              <a:rPr lang="en-US" sz="1100" dirty="0">
+                <a:solidFill>
+                  <a:srgbClr val="7030A0"/>
+                </a:solidFill>
+                <a:latin typeface="Courier New" panose="02070309020205020404" pitchFamily="49" charset="0"/>
+                <a:cs typeface="Courier New" panose="02070309020205020404" pitchFamily="49" charset="0"/>
+              </a:rPr>
+              <a:t>in</a:t>
+            </a:r>
+            <a:r>
+              <a:rPr lang="en-US" sz="1100" dirty="0">
+                <a:latin typeface="Courier New" panose="02070309020205020404" pitchFamily="49" charset="0"/>
+                <a:cs typeface="Courier New" panose="02070309020205020404" pitchFamily="49" charset="0"/>
+              </a:rPr>
+              <a:t> </a:t>
             </a:r>
             <a:r>
               <a:rPr lang="en-US" sz="1100" b="1" dirty="0">
@@ -36117,3401 +36086,6 @@
     <p:extLst>
       <p:ext uri="{BB962C8B-B14F-4D97-AF65-F5344CB8AC3E}">
         <p14:creationId xmlns:p14="http://schemas.microsoft.com/office/powerpoint/2010/main" val="4213291432"/>
-      </p:ext>
-    </p:extLst>
-  </p:cSld>
-  <p:clrMapOvr>
-    <a:masterClrMapping/>
-  </p:clrMapOvr>
-</p:sld>
-</file>
-
-<file path=ppt/slides/slide51.xml><?xml version="1.0" encoding="utf-8"?>
-<p:sld xmlns:a="http://schemas.openxmlformats.org/drawingml/2006/main" xmlns:r="http://schemas.openxmlformats.org/officeDocument/2006/relationships" xmlns:p="http://schemas.openxmlformats.org/presentationml/2006/main" show="0">
-  <p:cSld>
-    <p:spTree>
-      <p:nvGrpSpPr>
-        <p:cNvPr id="1" name=""/>
-        <p:cNvGrpSpPr/>
-        <p:nvPr/>
-      </p:nvGrpSpPr>
-      <p:grpSpPr>
-        <a:xfrm>
-          <a:off x="0" y="0"/>
-          <a:ext cx="0" cy="0"/>
-          <a:chOff x="0" y="0"/>
-          <a:chExt cx="0" cy="0"/>
-        </a:xfrm>
-      </p:grpSpPr>
-      <p:sp>
-        <p:nvSpPr>
-          <p:cNvPr id="2" name="Title 1">
-            <a:extLst>
-              <a:ext uri="{FF2B5EF4-FFF2-40B4-BE49-F238E27FC236}">
-                <a16:creationId xmlns:a16="http://schemas.microsoft.com/office/drawing/2014/main" id="{39A1D606-8DD1-369C-5C09-471CDD551AD5}"/>
-              </a:ext>
-            </a:extLst>
-          </p:cNvPr>
-          <p:cNvSpPr>
-            <a:spLocks noGrp="1"/>
-          </p:cNvSpPr>
-          <p:nvPr>
-            <p:ph type="title"/>
-          </p:nvPr>
-        </p:nvSpPr>
-        <p:spPr>
-          <a:xfrm>
-            <a:off x="838200" y="365126"/>
-            <a:ext cx="10515600" cy="718608"/>
-          </a:xfrm>
-        </p:spPr>
-        <p:txBody>
-          <a:bodyPr>
-            <a:normAutofit/>
-          </a:bodyPr>
-          <a:lstStyle/>
-          <a:p>
-            <a:r>
-              <a:rPr lang="nl-NL" sz="3600" noProof="0" dirty="0"/>
-              <a:t>Overerving van meerdere classes</a:t>
-            </a:r>
-          </a:p>
-        </p:txBody>
-      </p:sp>
-      <p:graphicFrame>
-        <p:nvGraphicFramePr>
-          <p:cNvPr id="13" name="Table 13">
-            <a:extLst>
-              <a:ext uri="{FF2B5EF4-FFF2-40B4-BE49-F238E27FC236}">
-                <a16:creationId xmlns:a16="http://schemas.microsoft.com/office/drawing/2014/main" id="{B27AE4E2-70D6-7A0D-E69B-B672CD55466D}"/>
-              </a:ext>
-            </a:extLst>
-          </p:cNvPr>
-          <p:cNvGraphicFramePr>
-            <a:graphicFrameLocks noGrp="1"/>
-          </p:cNvGraphicFramePr>
-          <p:nvPr>
-            <p:extLst>
-              <p:ext uri="{D42A27DB-BD31-4B8C-83A1-F6EECF244321}">
-                <p14:modId xmlns:p14="http://schemas.microsoft.com/office/powerpoint/2010/main" val="2942716467"/>
-              </p:ext>
-            </p:extLst>
-          </p:nvPr>
-        </p:nvGraphicFramePr>
-        <p:xfrm>
-          <a:off x="838200" y="2199429"/>
-          <a:ext cx="4787901" cy="736600"/>
-        </p:xfrm>
-        <a:graphic>
-          <a:graphicData uri="http://schemas.openxmlformats.org/drawingml/2006/table">
-            <a:tbl>
-              <a:tblPr firstRow="1" bandRow="1">
-                <a:tableStyleId>{21E4AEA4-8DFA-4A89-87EB-49C32662AFE0}</a:tableStyleId>
-              </a:tblPr>
-              <a:tblGrid>
-                <a:gridCol w="1595967">
-                  <a:extLst>
-                    <a:ext uri="{9D8B030D-6E8A-4147-A177-3AD203B41FA5}">
-                      <a16:colId xmlns:a16="http://schemas.microsoft.com/office/drawing/2014/main" val="3073575854"/>
-                    </a:ext>
-                  </a:extLst>
-                </a:gridCol>
-                <a:gridCol w="1595967">
-                  <a:extLst>
-                    <a:ext uri="{9D8B030D-6E8A-4147-A177-3AD203B41FA5}">
-                      <a16:colId xmlns:a16="http://schemas.microsoft.com/office/drawing/2014/main" val="1785459708"/>
-                    </a:ext>
-                  </a:extLst>
-                </a:gridCol>
-                <a:gridCol w="1595967">
-                  <a:extLst>
-                    <a:ext uri="{9D8B030D-6E8A-4147-A177-3AD203B41FA5}">
-                      <a16:colId xmlns:a16="http://schemas.microsoft.com/office/drawing/2014/main" val="3617932867"/>
-                    </a:ext>
-                  </a:extLst>
-                </a:gridCol>
-              </a:tblGrid>
-              <a:tr h="0">
-                <a:tc gridSpan="3">
-                  <a:txBody>
-                    <a:bodyPr/>
-                    <a:lstStyle/>
-                    <a:p>
-                      <a:pPr algn="ctr"/>
-                      <a:r>
-                        <a:rPr lang="en-US" dirty="0">
-                          <a:latin typeface="Courier New" panose="02070309020205020404" pitchFamily="49" charset="0"/>
-                          <a:cs typeface="Courier New" panose="02070309020205020404" pitchFamily="49" charset="0"/>
-                        </a:rPr>
-                        <a:t>class C(B)</a:t>
-                      </a:r>
-                      <a:endParaRPr lang="en-NL" dirty="0">
-                        <a:latin typeface="Courier New" panose="02070309020205020404" pitchFamily="49" charset="0"/>
-                        <a:cs typeface="Courier New" panose="02070309020205020404" pitchFamily="49" charset="0"/>
-                      </a:endParaRPr>
-                    </a:p>
-                  </a:txBody>
-                  <a:tcPr/>
-                </a:tc>
-                <a:tc hMerge="1">
-                  <a:txBody>
-                    <a:bodyPr/>
-                    <a:lstStyle/>
-                    <a:p>
-                      <a:endParaRPr lang="en-NL" dirty="0"/>
-                    </a:p>
-                  </a:txBody>
-                  <a:tcPr/>
-                </a:tc>
-                <a:tc hMerge="1">
-                  <a:txBody>
-                    <a:bodyPr/>
-                    <a:lstStyle/>
-                    <a:p>
-                      <a:endParaRPr lang="en-NL" dirty="0"/>
-                    </a:p>
-                  </a:txBody>
-                  <a:tcPr/>
-                </a:tc>
-                <a:extLst>
-                  <a:ext uri="{0D108BD9-81ED-4DB2-BD59-A6C34878D82A}">
-                    <a16:rowId xmlns:a16="http://schemas.microsoft.com/office/drawing/2014/main" val="2290352773"/>
-                  </a:ext>
-                </a:extLst>
-              </a:tr>
-              <a:tr h="370840">
-                <a:tc>
-                  <a:txBody>
-                    <a:bodyPr/>
-                    <a:lstStyle/>
-                    <a:p>
-                      <a:pPr algn="ctr"/>
-                      <a:r>
-                        <a:rPr lang="en-US" b="1" dirty="0">
-                          <a:solidFill>
-                            <a:schemeClr val="accent6">
-                              <a:lumMod val="75000"/>
-                            </a:schemeClr>
-                          </a:solidFill>
-                          <a:latin typeface="Courier New" panose="02070309020205020404" pitchFamily="49" charset="0"/>
-                          <a:cs typeface="Courier New" panose="02070309020205020404" pitchFamily="49" charset="0"/>
-                        </a:rPr>
-                        <a:t>x</a:t>
-                      </a:r>
-                      <a:endParaRPr lang="en-NL" b="1" dirty="0">
-                        <a:solidFill>
-                          <a:schemeClr val="accent6">
-                            <a:lumMod val="75000"/>
-                          </a:schemeClr>
-                        </a:solidFill>
-                        <a:latin typeface="Courier New" panose="02070309020205020404" pitchFamily="49" charset="0"/>
-                        <a:cs typeface="Courier New" panose="02070309020205020404" pitchFamily="49" charset="0"/>
-                      </a:endParaRPr>
-                    </a:p>
-                  </a:txBody>
-                  <a:tcPr/>
-                </a:tc>
-                <a:tc>
-                  <a:txBody>
-                    <a:bodyPr/>
-                    <a:lstStyle/>
-                    <a:p>
-                      <a:pPr algn="ctr"/>
-                      <a:r>
-                        <a:rPr lang="en-US" b="1" dirty="0">
-                          <a:solidFill>
-                            <a:schemeClr val="accent5">
-                              <a:lumMod val="75000"/>
-                            </a:schemeClr>
-                          </a:solidFill>
-                          <a:latin typeface="Courier New" panose="02070309020205020404" pitchFamily="49" charset="0"/>
-                          <a:cs typeface="Courier New" panose="02070309020205020404" pitchFamily="49" charset="0"/>
-                        </a:rPr>
-                        <a:t>y</a:t>
-                      </a:r>
-                      <a:endParaRPr lang="en-NL" b="1" dirty="0">
-                        <a:solidFill>
-                          <a:schemeClr val="accent5">
-                            <a:lumMod val="75000"/>
-                          </a:schemeClr>
-                        </a:solidFill>
-                        <a:latin typeface="Courier New" panose="02070309020205020404" pitchFamily="49" charset="0"/>
-                        <a:cs typeface="Courier New" panose="02070309020205020404" pitchFamily="49" charset="0"/>
-                      </a:endParaRPr>
-                    </a:p>
-                  </a:txBody>
-                  <a:tcPr/>
-                </a:tc>
-                <a:tc>
-                  <a:txBody>
-                    <a:bodyPr/>
-                    <a:lstStyle/>
-                    <a:p>
-                      <a:pPr algn="ctr"/>
-                      <a:r>
-                        <a:rPr lang="en-US" b="1" dirty="0">
-                          <a:solidFill>
-                            <a:schemeClr val="accent2">
-                              <a:lumMod val="75000"/>
-                            </a:schemeClr>
-                          </a:solidFill>
-                          <a:latin typeface="Courier New" panose="02070309020205020404" pitchFamily="49" charset="0"/>
-                          <a:cs typeface="Courier New" panose="02070309020205020404" pitchFamily="49" charset="0"/>
-                        </a:rPr>
-                        <a:t>def z</a:t>
-                      </a:r>
-                      <a:endParaRPr lang="en-NL" b="1" dirty="0">
-                        <a:solidFill>
-                          <a:schemeClr val="accent2">
-                            <a:lumMod val="75000"/>
-                          </a:schemeClr>
-                        </a:solidFill>
-                        <a:latin typeface="Courier New" panose="02070309020205020404" pitchFamily="49" charset="0"/>
-                        <a:cs typeface="Courier New" panose="02070309020205020404" pitchFamily="49" charset="0"/>
-                      </a:endParaRPr>
-                    </a:p>
-                  </a:txBody>
-                  <a:tcPr/>
-                </a:tc>
-                <a:extLst>
-                  <a:ext uri="{0D108BD9-81ED-4DB2-BD59-A6C34878D82A}">
-                    <a16:rowId xmlns:a16="http://schemas.microsoft.com/office/drawing/2014/main" val="785041814"/>
-                  </a:ext>
-                </a:extLst>
-              </a:tr>
-            </a:tbl>
-          </a:graphicData>
-        </a:graphic>
-      </p:graphicFrame>
-      <p:graphicFrame>
-        <p:nvGraphicFramePr>
-          <p:cNvPr id="14" name="Table 13">
-            <a:extLst>
-              <a:ext uri="{FF2B5EF4-FFF2-40B4-BE49-F238E27FC236}">
-                <a16:creationId xmlns:a16="http://schemas.microsoft.com/office/drawing/2014/main" id="{D1E6095E-7DAB-1E45-97B7-08734FD4069A}"/>
-              </a:ext>
-            </a:extLst>
-          </p:cNvPr>
-          <p:cNvGraphicFramePr>
-            <a:graphicFrameLocks noGrp="1"/>
-          </p:cNvGraphicFramePr>
-          <p:nvPr>
-            <p:extLst>
-              <p:ext uri="{D42A27DB-BD31-4B8C-83A1-F6EECF244321}">
-                <p14:modId xmlns:p14="http://schemas.microsoft.com/office/powerpoint/2010/main" val="3222805855"/>
-              </p:ext>
-            </p:extLst>
-          </p:nvPr>
-        </p:nvGraphicFramePr>
-        <p:xfrm>
-          <a:off x="838199" y="3444665"/>
-          <a:ext cx="3191924" cy="736600"/>
-        </p:xfrm>
-        <a:graphic>
-          <a:graphicData uri="http://schemas.openxmlformats.org/drawingml/2006/table">
-            <a:tbl>
-              <a:tblPr firstRow="1" bandRow="1">
-                <a:tableStyleId>{93296810-A885-4BE3-A3E7-6D5BEEA58F35}</a:tableStyleId>
-              </a:tblPr>
-              <a:tblGrid>
-                <a:gridCol w="1595962">
-                  <a:extLst>
-                    <a:ext uri="{9D8B030D-6E8A-4147-A177-3AD203B41FA5}">
-                      <a16:colId xmlns:a16="http://schemas.microsoft.com/office/drawing/2014/main" val="3073575854"/>
-                    </a:ext>
-                  </a:extLst>
-                </a:gridCol>
-                <a:gridCol w="1595962">
-                  <a:extLst>
-                    <a:ext uri="{9D8B030D-6E8A-4147-A177-3AD203B41FA5}">
-                      <a16:colId xmlns:a16="http://schemas.microsoft.com/office/drawing/2014/main" val="4251551100"/>
-                    </a:ext>
-                  </a:extLst>
-                </a:gridCol>
-              </a:tblGrid>
-              <a:tr h="0">
-                <a:tc gridSpan="2">
-                  <a:txBody>
-                    <a:bodyPr/>
-                    <a:lstStyle/>
-                    <a:p>
-                      <a:pPr algn="ctr"/>
-                      <a:r>
-                        <a:rPr lang="en-US" dirty="0">
-                          <a:latin typeface="Courier New" panose="02070309020205020404" pitchFamily="49" charset="0"/>
-                          <a:cs typeface="Courier New" panose="02070309020205020404" pitchFamily="49" charset="0"/>
-                        </a:rPr>
-                        <a:t>class B(A)</a:t>
-                      </a:r>
-                      <a:endParaRPr lang="en-NL" dirty="0">
-                        <a:latin typeface="Courier New" panose="02070309020205020404" pitchFamily="49" charset="0"/>
-                        <a:cs typeface="Courier New" panose="02070309020205020404" pitchFamily="49" charset="0"/>
-                      </a:endParaRPr>
-                    </a:p>
-                  </a:txBody>
-                  <a:tcPr/>
-                </a:tc>
-                <a:tc hMerge="1">
-                  <a:txBody>
-                    <a:bodyPr/>
-                    <a:lstStyle/>
-                    <a:p>
-                      <a:pPr algn="ctr"/>
-                      <a:endParaRPr lang="en-NL" dirty="0">
-                        <a:latin typeface="Courier New" panose="02070309020205020404" pitchFamily="49" charset="0"/>
-                        <a:cs typeface="Courier New" panose="02070309020205020404" pitchFamily="49" charset="0"/>
-                      </a:endParaRPr>
-                    </a:p>
-                  </a:txBody>
-                  <a:tcPr/>
-                </a:tc>
-                <a:extLst>
-                  <a:ext uri="{0D108BD9-81ED-4DB2-BD59-A6C34878D82A}">
-                    <a16:rowId xmlns:a16="http://schemas.microsoft.com/office/drawing/2014/main" val="2290352773"/>
-                  </a:ext>
-                </a:extLst>
-              </a:tr>
-              <a:tr h="370840">
-                <a:tc>
-                  <a:txBody>
-                    <a:bodyPr/>
-                    <a:lstStyle/>
-                    <a:p>
-                      <a:pPr algn="ctr"/>
-                      <a:r>
-                        <a:rPr lang="en-US" b="1" dirty="0">
-                          <a:solidFill>
-                            <a:schemeClr val="accent6">
-                              <a:lumMod val="75000"/>
-                            </a:schemeClr>
-                          </a:solidFill>
-                          <a:latin typeface="Courier New" panose="02070309020205020404" pitchFamily="49" charset="0"/>
-                          <a:cs typeface="Courier New" panose="02070309020205020404" pitchFamily="49" charset="0"/>
-                        </a:rPr>
-                        <a:t>def x</a:t>
-                      </a:r>
-                      <a:endParaRPr lang="en-NL" b="1" dirty="0">
-                        <a:solidFill>
-                          <a:schemeClr val="accent6">
-                            <a:lumMod val="75000"/>
-                          </a:schemeClr>
-                        </a:solidFill>
-                        <a:latin typeface="Courier New" panose="02070309020205020404" pitchFamily="49" charset="0"/>
-                        <a:cs typeface="Courier New" panose="02070309020205020404" pitchFamily="49" charset="0"/>
-                      </a:endParaRPr>
-                    </a:p>
-                  </a:txBody>
-                  <a:tcPr/>
-                </a:tc>
-                <a:tc>
-                  <a:txBody>
-                    <a:bodyPr/>
-                    <a:lstStyle/>
-                    <a:p>
-                      <a:pPr marL="0" marR="0" lvl="0" indent="0" algn="ctr" defTabSz="914400" rtl="0" eaLnBrk="1" fontAlgn="auto" latinLnBrk="0" hangingPunct="1">
-                        <a:lnSpc>
-                          <a:spcPct val="100000"/>
-                        </a:lnSpc>
-                        <a:spcBef>
-                          <a:spcPts val="0"/>
-                        </a:spcBef>
-                        <a:spcAft>
-                          <a:spcPts val="0"/>
-                        </a:spcAft>
-                        <a:buClrTx/>
-                        <a:buSzTx/>
-                        <a:buFontTx/>
-                        <a:buNone/>
-                        <a:tabLst/>
-                        <a:defRPr/>
-                      </a:pPr>
-                      <a:r>
-                        <a:rPr lang="en-US" b="1" dirty="0">
-                          <a:solidFill>
-                            <a:schemeClr val="accent5">
-                              <a:lumMod val="75000"/>
-                            </a:schemeClr>
-                          </a:solidFill>
-                          <a:latin typeface="Courier New" panose="02070309020205020404" pitchFamily="49" charset="0"/>
-                          <a:cs typeface="Courier New" panose="02070309020205020404" pitchFamily="49" charset="0"/>
-                        </a:rPr>
-                        <a:t>y</a:t>
-                      </a:r>
-                      <a:endParaRPr lang="en-NL" b="1" dirty="0">
-                        <a:solidFill>
-                          <a:schemeClr val="accent5">
-                            <a:lumMod val="75000"/>
-                          </a:schemeClr>
-                        </a:solidFill>
-                        <a:latin typeface="Courier New" panose="02070309020205020404" pitchFamily="49" charset="0"/>
-                        <a:cs typeface="Courier New" panose="02070309020205020404" pitchFamily="49" charset="0"/>
-                      </a:endParaRPr>
-                    </a:p>
-                  </a:txBody>
-                  <a:tcPr/>
-                </a:tc>
-                <a:extLst>
-                  <a:ext uri="{0D108BD9-81ED-4DB2-BD59-A6C34878D82A}">
-                    <a16:rowId xmlns:a16="http://schemas.microsoft.com/office/drawing/2014/main" val="785041814"/>
-                  </a:ext>
-                </a:extLst>
-              </a:tr>
-            </a:tbl>
-          </a:graphicData>
-        </a:graphic>
-      </p:graphicFrame>
-      <p:graphicFrame>
-        <p:nvGraphicFramePr>
-          <p:cNvPr id="15" name="Table 13">
-            <a:extLst>
-              <a:ext uri="{FF2B5EF4-FFF2-40B4-BE49-F238E27FC236}">
-                <a16:creationId xmlns:a16="http://schemas.microsoft.com/office/drawing/2014/main" id="{4F2A733B-E4CD-912B-B22F-EF2CFBBB1DEE}"/>
-              </a:ext>
-            </a:extLst>
-          </p:cNvPr>
-          <p:cNvGraphicFramePr>
-            <a:graphicFrameLocks noGrp="1"/>
-          </p:cNvGraphicFramePr>
-          <p:nvPr>
-            <p:extLst>
-              <p:ext uri="{D42A27DB-BD31-4B8C-83A1-F6EECF244321}">
-                <p14:modId xmlns:p14="http://schemas.microsoft.com/office/powerpoint/2010/main" val="3297290865"/>
-              </p:ext>
-            </p:extLst>
-          </p:nvPr>
-        </p:nvGraphicFramePr>
-        <p:xfrm>
-          <a:off x="838200" y="4689901"/>
-          <a:ext cx="3191934" cy="736600"/>
-        </p:xfrm>
-        <a:graphic>
-          <a:graphicData uri="http://schemas.openxmlformats.org/drawingml/2006/table">
-            <a:tbl>
-              <a:tblPr firstRow="1" bandRow="1">
-                <a:tableStyleId>{5C22544A-7EE6-4342-B048-85BDC9FD1C3A}</a:tableStyleId>
-              </a:tblPr>
-              <a:tblGrid>
-                <a:gridCol w="1595967">
-                  <a:extLst>
-                    <a:ext uri="{9D8B030D-6E8A-4147-A177-3AD203B41FA5}">
-                      <a16:colId xmlns:a16="http://schemas.microsoft.com/office/drawing/2014/main" val="3073575854"/>
-                    </a:ext>
-                  </a:extLst>
-                </a:gridCol>
-                <a:gridCol w="1595967">
-                  <a:extLst>
-                    <a:ext uri="{9D8B030D-6E8A-4147-A177-3AD203B41FA5}">
-                      <a16:colId xmlns:a16="http://schemas.microsoft.com/office/drawing/2014/main" val="1785459708"/>
-                    </a:ext>
-                  </a:extLst>
-                </a:gridCol>
-              </a:tblGrid>
-              <a:tr h="0">
-                <a:tc gridSpan="2">
-                  <a:txBody>
-                    <a:bodyPr/>
-                    <a:lstStyle/>
-                    <a:p>
-                      <a:pPr algn="ctr"/>
-                      <a:r>
-                        <a:rPr lang="en-US" dirty="0">
-                          <a:latin typeface="Courier New" panose="02070309020205020404" pitchFamily="49" charset="0"/>
-                          <a:cs typeface="Courier New" panose="02070309020205020404" pitchFamily="49" charset="0"/>
-                        </a:rPr>
-                        <a:t>class A</a:t>
-                      </a:r>
-                      <a:endParaRPr lang="en-NL" dirty="0">
-                        <a:latin typeface="Courier New" panose="02070309020205020404" pitchFamily="49" charset="0"/>
-                        <a:cs typeface="Courier New" panose="02070309020205020404" pitchFamily="49" charset="0"/>
-                      </a:endParaRPr>
-                    </a:p>
-                  </a:txBody>
-                  <a:tcPr/>
-                </a:tc>
-                <a:tc hMerge="1">
-                  <a:txBody>
-                    <a:bodyPr/>
-                    <a:lstStyle/>
-                    <a:p>
-                      <a:endParaRPr lang="en-NL" dirty="0"/>
-                    </a:p>
-                  </a:txBody>
-                  <a:tcPr/>
-                </a:tc>
-                <a:extLst>
-                  <a:ext uri="{0D108BD9-81ED-4DB2-BD59-A6C34878D82A}">
-                    <a16:rowId xmlns:a16="http://schemas.microsoft.com/office/drawing/2014/main" val="2290352773"/>
-                  </a:ext>
-                </a:extLst>
-              </a:tr>
-              <a:tr h="370840">
-                <a:tc>
-                  <a:txBody>
-                    <a:bodyPr/>
-                    <a:lstStyle/>
-                    <a:p>
-                      <a:pPr algn="ctr"/>
-                      <a:r>
-                        <a:rPr lang="en-US" b="1" dirty="0">
-                          <a:solidFill>
-                            <a:schemeClr val="accent5">
-                              <a:lumMod val="75000"/>
-                            </a:schemeClr>
-                          </a:solidFill>
-                          <a:latin typeface="Courier New" panose="02070309020205020404" pitchFamily="49" charset="0"/>
-                          <a:cs typeface="Courier New" panose="02070309020205020404" pitchFamily="49" charset="0"/>
-                        </a:rPr>
-                        <a:t>def x</a:t>
-                      </a:r>
-                      <a:endParaRPr lang="en-NL" b="1" dirty="0">
-                        <a:solidFill>
-                          <a:schemeClr val="accent5">
-                            <a:lumMod val="75000"/>
-                          </a:schemeClr>
-                        </a:solidFill>
-                        <a:latin typeface="Courier New" panose="02070309020205020404" pitchFamily="49" charset="0"/>
-                        <a:cs typeface="Courier New" panose="02070309020205020404" pitchFamily="49" charset="0"/>
-                      </a:endParaRPr>
-                    </a:p>
-                  </a:txBody>
-                  <a:tcPr/>
-                </a:tc>
-                <a:tc>
-                  <a:txBody>
-                    <a:bodyPr/>
-                    <a:lstStyle/>
-                    <a:p>
-                      <a:pPr algn="ctr"/>
-                      <a:r>
-                        <a:rPr lang="en-US" b="1" dirty="0">
-                          <a:solidFill>
-                            <a:schemeClr val="accent5">
-                              <a:lumMod val="75000"/>
-                            </a:schemeClr>
-                          </a:solidFill>
-                          <a:latin typeface="Courier New" panose="02070309020205020404" pitchFamily="49" charset="0"/>
-                          <a:cs typeface="Courier New" panose="02070309020205020404" pitchFamily="49" charset="0"/>
-                        </a:rPr>
-                        <a:t>def y</a:t>
-                      </a:r>
-                      <a:endParaRPr lang="en-NL" b="1" dirty="0">
-                        <a:solidFill>
-                          <a:schemeClr val="accent5">
-                            <a:lumMod val="75000"/>
-                          </a:schemeClr>
-                        </a:solidFill>
-                        <a:latin typeface="Courier New" panose="02070309020205020404" pitchFamily="49" charset="0"/>
-                        <a:cs typeface="Courier New" panose="02070309020205020404" pitchFamily="49" charset="0"/>
-                      </a:endParaRPr>
-                    </a:p>
-                  </a:txBody>
-                  <a:tcPr/>
-                </a:tc>
-                <a:extLst>
-                  <a:ext uri="{0D108BD9-81ED-4DB2-BD59-A6C34878D82A}">
-                    <a16:rowId xmlns:a16="http://schemas.microsoft.com/office/drawing/2014/main" val="785041814"/>
-                  </a:ext>
-                </a:extLst>
-              </a:tr>
-            </a:tbl>
-          </a:graphicData>
-        </a:graphic>
-      </p:graphicFrame>
-      <p:cxnSp>
-        <p:nvCxnSpPr>
-          <p:cNvPr id="20" name="Straight Arrow Connector 19">
-            <a:extLst>
-              <a:ext uri="{FF2B5EF4-FFF2-40B4-BE49-F238E27FC236}">
-                <a16:creationId xmlns:a16="http://schemas.microsoft.com/office/drawing/2014/main" id="{6E7AC5FE-664D-BC4D-2089-A98B1DA8332F}"/>
-              </a:ext>
-            </a:extLst>
-          </p:cNvPr>
-          <p:cNvCxnSpPr/>
-          <p:nvPr/>
-        </p:nvCxnSpPr>
-        <p:spPr>
-          <a:xfrm flipV="1">
-            <a:off x="1636183" y="2936029"/>
-            <a:ext cx="0" cy="508636"/>
-          </a:xfrm>
-          <a:prstGeom prst="straightConnector1">
-            <a:avLst/>
-          </a:prstGeom>
-          <a:ln>
-            <a:tailEnd type="triangle"/>
-          </a:ln>
-        </p:spPr>
-        <p:style>
-          <a:lnRef idx="3">
-            <a:schemeClr val="accent6"/>
-          </a:lnRef>
-          <a:fillRef idx="0">
-            <a:schemeClr val="accent6"/>
-          </a:fillRef>
-          <a:effectRef idx="2">
-            <a:schemeClr val="accent6"/>
-          </a:effectRef>
-          <a:fontRef idx="minor">
-            <a:schemeClr val="tx1"/>
-          </a:fontRef>
-        </p:style>
-      </p:cxnSp>
-      <p:sp>
-        <p:nvSpPr>
-          <p:cNvPr id="25" name="TextBox 24">
-            <a:extLst>
-              <a:ext uri="{FF2B5EF4-FFF2-40B4-BE49-F238E27FC236}">
-                <a16:creationId xmlns:a16="http://schemas.microsoft.com/office/drawing/2014/main" id="{7E29C54E-8E31-8697-5A5D-3133381BC0DD}"/>
-              </a:ext>
-            </a:extLst>
-          </p:cNvPr>
-          <p:cNvSpPr txBox="1"/>
-          <p:nvPr/>
-        </p:nvSpPr>
-        <p:spPr>
-          <a:xfrm>
-            <a:off x="838199" y="1407704"/>
-            <a:ext cx="4787901" cy="369332"/>
-          </a:xfrm>
-          <a:prstGeom prst="rect">
-            <a:avLst/>
-          </a:prstGeom>
-          <a:noFill/>
-        </p:spPr>
-        <p:txBody>
-          <a:bodyPr wrap="square" rtlCol="0">
-            <a:spAutoFit/>
-          </a:bodyPr>
-          <a:lstStyle/>
-          <a:p>
-            <a:r>
-              <a:rPr lang="en-US" dirty="0" err="1"/>
-              <a:t>Gestapelde</a:t>
-            </a:r>
-            <a:r>
-              <a:rPr lang="en-US" dirty="0"/>
-              <a:t> basis classes:</a:t>
-            </a:r>
-            <a:endParaRPr lang="en-NL" dirty="0"/>
-          </a:p>
-        </p:txBody>
-      </p:sp>
-      <p:cxnSp>
-        <p:nvCxnSpPr>
-          <p:cNvPr id="35" name="Straight Arrow Connector 34">
-            <a:extLst>
-              <a:ext uri="{FF2B5EF4-FFF2-40B4-BE49-F238E27FC236}">
-                <a16:creationId xmlns:a16="http://schemas.microsoft.com/office/drawing/2014/main" id="{077064D2-0639-4331-F791-351BE7441628}"/>
-              </a:ext>
-            </a:extLst>
-          </p:cNvPr>
-          <p:cNvCxnSpPr>
-            <a:cxnSpLocks/>
-            <a:endCxn id="36" idx="2"/>
-          </p:cNvCxnSpPr>
-          <p:nvPr/>
-        </p:nvCxnSpPr>
-        <p:spPr>
-          <a:xfrm flipV="1">
-            <a:off x="8959849" y="2936029"/>
-            <a:ext cx="0" cy="1753872"/>
-          </a:xfrm>
-          <a:prstGeom prst="straightConnector1">
-            <a:avLst/>
-          </a:prstGeom>
-          <a:ln>
-            <a:tailEnd type="triangle"/>
-          </a:ln>
-        </p:spPr>
-        <p:style>
-          <a:lnRef idx="3">
-            <a:schemeClr val="accent1"/>
-          </a:lnRef>
-          <a:fillRef idx="0">
-            <a:schemeClr val="accent1"/>
-          </a:fillRef>
-          <a:effectRef idx="2">
-            <a:schemeClr val="accent1"/>
-          </a:effectRef>
-          <a:fontRef idx="minor">
-            <a:schemeClr val="tx1"/>
-          </a:fontRef>
-        </p:style>
-      </p:cxnSp>
-      <p:graphicFrame>
-        <p:nvGraphicFramePr>
-          <p:cNvPr id="36" name="Table 13">
-            <a:extLst>
-              <a:ext uri="{FF2B5EF4-FFF2-40B4-BE49-F238E27FC236}">
-                <a16:creationId xmlns:a16="http://schemas.microsoft.com/office/drawing/2014/main" id="{65F8BC86-C019-6DFA-8B7D-D2524383A76D}"/>
-              </a:ext>
-            </a:extLst>
-          </p:cNvPr>
-          <p:cNvGraphicFramePr>
-            <a:graphicFrameLocks noGrp="1"/>
-          </p:cNvGraphicFramePr>
-          <p:nvPr>
-            <p:extLst>
-              <p:ext uri="{D42A27DB-BD31-4B8C-83A1-F6EECF244321}">
-                <p14:modId xmlns:p14="http://schemas.microsoft.com/office/powerpoint/2010/main" val="4076376609"/>
-              </p:ext>
-            </p:extLst>
-          </p:nvPr>
-        </p:nvGraphicFramePr>
-        <p:xfrm>
-          <a:off x="6565899" y="2199429"/>
-          <a:ext cx="4787901" cy="736600"/>
-        </p:xfrm>
-        <a:graphic>
-          <a:graphicData uri="http://schemas.openxmlformats.org/drawingml/2006/table">
-            <a:tbl>
-              <a:tblPr firstRow="1" bandRow="1">
-                <a:tableStyleId>{21E4AEA4-8DFA-4A89-87EB-49C32662AFE0}</a:tableStyleId>
-              </a:tblPr>
-              <a:tblGrid>
-                <a:gridCol w="1595967">
-                  <a:extLst>
-                    <a:ext uri="{9D8B030D-6E8A-4147-A177-3AD203B41FA5}">
-                      <a16:colId xmlns:a16="http://schemas.microsoft.com/office/drawing/2014/main" val="3073575854"/>
-                    </a:ext>
-                  </a:extLst>
-                </a:gridCol>
-                <a:gridCol w="1595967">
-                  <a:extLst>
-                    <a:ext uri="{9D8B030D-6E8A-4147-A177-3AD203B41FA5}">
-                      <a16:colId xmlns:a16="http://schemas.microsoft.com/office/drawing/2014/main" val="1785459708"/>
-                    </a:ext>
-                  </a:extLst>
-                </a:gridCol>
-                <a:gridCol w="1595967">
-                  <a:extLst>
-                    <a:ext uri="{9D8B030D-6E8A-4147-A177-3AD203B41FA5}">
-                      <a16:colId xmlns:a16="http://schemas.microsoft.com/office/drawing/2014/main" val="3617932867"/>
-                    </a:ext>
-                  </a:extLst>
-                </a:gridCol>
-              </a:tblGrid>
-              <a:tr h="0">
-                <a:tc gridSpan="3">
-                  <a:txBody>
-                    <a:bodyPr/>
-                    <a:lstStyle/>
-                    <a:p>
-                      <a:pPr algn="ctr"/>
-                      <a:r>
-                        <a:rPr lang="en-US" dirty="0">
-                          <a:latin typeface="Courier New" panose="02070309020205020404" pitchFamily="49" charset="0"/>
-                          <a:cs typeface="Courier New" panose="02070309020205020404" pitchFamily="49" charset="0"/>
-                        </a:rPr>
-                        <a:t>class C(B, A)</a:t>
-                      </a:r>
-                      <a:endParaRPr lang="en-NL" dirty="0">
-                        <a:latin typeface="Courier New" panose="02070309020205020404" pitchFamily="49" charset="0"/>
-                        <a:cs typeface="Courier New" panose="02070309020205020404" pitchFamily="49" charset="0"/>
-                      </a:endParaRPr>
-                    </a:p>
-                  </a:txBody>
-                  <a:tcPr/>
-                </a:tc>
-                <a:tc hMerge="1">
-                  <a:txBody>
-                    <a:bodyPr/>
-                    <a:lstStyle/>
-                    <a:p>
-                      <a:endParaRPr lang="en-NL" dirty="0"/>
-                    </a:p>
-                  </a:txBody>
-                  <a:tcPr/>
-                </a:tc>
-                <a:tc hMerge="1">
-                  <a:txBody>
-                    <a:bodyPr/>
-                    <a:lstStyle/>
-                    <a:p>
-                      <a:endParaRPr lang="en-NL" dirty="0"/>
-                    </a:p>
-                  </a:txBody>
-                  <a:tcPr/>
-                </a:tc>
-                <a:extLst>
-                  <a:ext uri="{0D108BD9-81ED-4DB2-BD59-A6C34878D82A}">
-                    <a16:rowId xmlns:a16="http://schemas.microsoft.com/office/drawing/2014/main" val="2290352773"/>
-                  </a:ext>
-                </a:extLst>
-              </a:tr>
-              <a:tr h="370840">
-                <a:tc>
-                  <a:txBody>
-                    <a:bodyPr/>
-                    <a:lstStyle/>
-                    <a:p>
-                      <a:pPr algn="ctr"/>
-                      <a:r>
-                        <a:rPr lang="en-US" b="1" dirty="0">
-                          <a:solidFill>
-                            <a:schemeClr val="accent6">
-                              <a:lumMod val="75000"/>
-                            </a:schemeClr>
-                          </a:solidFill>
-                          <a:latin typeface="Courier New" panose="02070309020205020404" pitchFamily="49" charset="0"/>
-                          <a:cs typeface="Courier New" panose="02070309020205020404" pitchFamily="49" charset="0"/>
-                        </a:rPr>
-                        <a:t>x</a:t>
-                      </a:r>
-                      <a:endParaRPr lang="en-NL" b="1" dirty="0">
-                        <a:solidFill>
-                          <a:schemeClr val="accent6">
-                            <a:lumMod val="75000"/>
-                          </a:schemeClr>
-                        </a:solidFill>
-                        <a:latin typeface="Courier New" panose="02070309020205020404" pitchFamily="49" charset="0"/>
-                        <a:cs typeface="Courier New" panose="02070309020205020404" pitchFamily="49" charset="0"/>
-                      </a:endParaRPr>
-                    </a:p>
-                  </a:txBody>
-                  <a:tcPr/>
-                </a:tc>
-                <a:tc>
-                  <a:txBody>
-                    <a:bodyPr/>
-                    <a:lstStyle/>
-                    <a:p>
-                      <a:pPr algn="ctr"/>
-                      <a:r>
-                        <a:rPr lang="en-US" b="1" dirty="0">
-                          <a:solidFill>
-                            <a:schemeClr val="accent5">
-                              <a:lumMod val="75000"/>
-                            </a:schemeClr>
-                          </a:solidFill>
-                          <a:latin typeface="Courier New" panose="02070309020205020404" pitchFamily="49" charset="0"/>
-                          <a:cs typeface="Courier New" panose="02070309020205020404" pitchFamily="49" charset="0"/>
-                        </a:rPr>
-                        <a:t>y</a:t>
-                      </a:r>
-                      <a:endParaRPr lang="en-NL" b="1" dirty="0">
-                        <a:solidFill>
-                          <a:schemeClr val="accent5">
-                            <a:lumMod val="75000"/>
-                          </a:schemeClr>
-                        </a:solidFill>
-                        <a:latin typeface="Courier New" panose="02070309020205020404" pitchFamily="49" charset="0"/>
-                        <a:cs typeface="Courier New" panose="02070309020205020404" pitchFamily="49" charset="0"/>
-                      </a:endParaRPr>
-                    </a:p>
-                  </a:txBody>
-                  <a:tcPr/>
-                </a:tc>
-                <a:tc>
-                  <a:txBody>
-                    <a:bodyPr/>
-                    <a:lstStyle/>
-                    <a:p>
-                      <a:pPr algn="ctr"/>
-                      <a:r>
-                        <a:rPr lang="en-US" b="1" dirty="0">
-                          <a:solidFill>
-                            <a:schemeClr val="accent2">
-                              <a:lumMod val="75000"/>
-                            </a:schemeClr>
-                          </a:solidFill>
-                          <a:latin typeface="Courier New" panose="02070309020205020404" pitchFamily="49" charset="0"/>
-                          <a:cs typeface="Courier New" panose="02070309020205020404" pitchFamily="49" charset="0"/>
-                        </a:rPr>
-                        <a:t>def z</a:t>
-                      </a:r>
-                      <a:endParaRPr lang="en-NL" b="1" dirty="0">
-                        <a:solidFill>
-                          <a:schemeClr val="accent2">
-                            <a:lumMod val="75000"/>
-                          </a:schemeClr>
-                        </a:solidFill>
-                        <a:latin typeface="Courier New" panose="02070309020205020404" pitchFamily="49" charset="0"/>
-                        <a:cs typeface="Courier New" panose="02070309020205020404" pitchFamily="49" charset="0"/>
-                      </a:endParaRPr>
-                    </a:p>
-                  </a:txBody>
-                  <a:tcPr/>
-                </a:tc>
-                <a:extLst>
-                  <a:ext uri="{0D108BD9-81ED-4DB2-BD59-A6C34878D82A}">
-                    <a16:rowId xmlns:a16="http://schemas.microsoft.com/office/drawing/2014/main" val="785041814"/>
-                  </a:ext>
-                </a:extLst>
-              </a:tr>
-            </a:tbl>
-          </a:graphicData>
-        </a:graphic>
-      </p:graphicFrame>
-      <p:graphicFrame>
-        <p:nvGraphicFramePr>
-          <p:cNvPr id="37" name="Table 36">
-            <a:extLst>
-              <a:ext uri="{FF2B5EF4-FFF2-40B4-BE49-F238E27FC236}">
-                <a16:creationId xmlns:a16="http://schemas.microsoft.com/office/drawing/2014/main" id="{F78B0BB4-C1B5-70FA-1D00-756DCF22428E}"/>
-              </a:ext>
-            </a:extLst>
-          </p:cNvPr>
-          <p:cNvGraphicFramePr>
-            <a:graphicFrameLocks noGrp="1"/>
-          </p:cNvGraphicFramePr>
-          <p:nvPr>
-            <p:extLst>
-              <p:ext uri="{D42A27DB-BD31-4B8C-83A1-F6EECF244321}">
-                <p14:modId xmlns:p14="http://schemas.microsoft.com/office/powerpoint/2010/main" val="94119683"/>
-              </p:ext>
-            </p:extLst>
-          </p:nvPr>
-        </p:nvGraphicFramePr>
-        <p:xfrm>
-          <a:off x="6565898" y="3444665"/>
-          <a:ext cx="1595962" cy="736600"/>
-        </p:xfrm>
-        <a:graphic>
-          <a:graphicData uri="http://schemas.openxmlformats.org/drawingml/2006/table">
-            <a:tbl>
-              <a:tblPr firstRow="1" bandRow="1">
-                <a:tableStyleId>{93296810-A885-4BE3-A3E7-6D5BEEA58F35}</a:tableStyleId>
-              </a:tblPr>
-              <a:tblGrid>
-                <a:gridCol w="1595962">
-                  <a:extLst>
-                    <a:ext uri="{9D8B030D-6E8A-4147-A177-3AD203B41FA5}">
-                      <a16:colId xmlns:a16="http://schemas.microsoft.com/office/drawing/2014/main" val="3073575854"/>
-                    </a:ext>
-                  </a:extLst>
-                </a:gridCol>
-              </a:tblGrid>
-              <a:tr h="0">
-                <a:tc>
-                  <a:txBody>
-                    <a:bodyPr/>
-                    <a:lstStyle/>
-                    <a:p>
-                      <a:pPr algn="ctr"/>
-                      <a:r>
-                        <a:rPr lang="en-US" dirty="0">
-                          <a:latin typeface="Courier New" panose="02070309020205020404" pitchFamily="49" charset="0"/>
-                          <a:cs typeface="Courier New" panose="02070309020205020404" pitchFamily="49" charset="0"/>
-                        </a:rPr>
-                        <a:t>class B</a:t>
-                      </a:r>
-                      <a:endParaRPr lang="en-NL" dirty="0">
-                        <a:latin typeface="Courier New" panose="02070309020205020404" pitchFamily="49" charset="0"/>
-                        <a:cs typeface="Courier New" panose="02070309020205020404" pitchFamily="49" charset="0"/>
-                      </a:endParaRPr>
-                    </a:p>
-                  </a:txBody>
-                  <a:tcPr/>
-                </a:tc>
-                <a:extLst>
-                  <a:ext uri="{0D108BD9-81ED-4DB2-BD59-A6C34878D82A}">
-                    <a16:rowId xmlns:a16="http://schemas.microsoft.com/office/drawing/2014/main" val="2290352773"/>
-                  </a:ext>
-                </a:extLst>
-              </a:tr>
-              <a:tr h="370840">
-                <a:tc>
-                  <a:txBody>
-                    <a:bodyPr/>
-                    <a:lstStyle/>
-                    <a:p>
-                      <a:pPr algn="ctr"/>
-                      <a:r>
-                        <a:rPr lang="en-US" b="1" dirty="0">
-                          <a:solidFill>
-                            <a:schemeClr val="accent6">
-                              <a:lumMod val="75000"/>
-                            </a:schemeClr>
-                          </a:solidFill>
-                          <a:latin typeface="Courier New" panose="02070309020205020404" pitchFamily="49" charset="0"/>
-                          <a:cs typeface="Courier New" panose="02070309020205020404" pitchFamily="49" charset="0"/>
-                        </a:rPr>
-                        <a:t>def x</a:t>
-                      </a:r>
-                      <a:endParaRPr lang="en-NL" b="1" dirty="0">
-                        <a:solidFill>
-                          <a:schemeClr val="accent6">
-                            <a:lumMod val="75000"/>
-                          </a:schemeClr>
-                        </a:solidFill>
-                        <a:latin typeface="Courier New" panose="02070309020205020404" pitchFamily="49" charset="0"/>
-                        <a:cs typeface="Courier New" panose="02070309020205020404" pitchFamily="49" charset="0"/>
-                      </a:endParaRPr>
-                    </a:p>
-                  </a:txBody>
-                  <a:tcPr/>
-                </a:tc>
-                <a:extLst>
-                  <a:ext uri="{0D108BD9-81ED-4DB2-BD59-A6C34878D82A}">
-                    <a16:rowId xmlns:a16="http://schemas.microsoft.com/office/drawing/2014/main" val="785041814"/>
-                  </a:ext>
-                </a:extLst>
-              </a:tr>
-            </a:tbl>
-          </a:graphicData>
-        </a:graphic>
-      </p:graphicFrame>
-      <p:graphicFrame>
-        <p:nvGraphicFramePr>
-          <p:cNvPr id="40" name="Table 13">
-            <a:extLst>
-              <a:ext uri="{FF2B5EF4-FFF2-40B4-BE49-F238E27FC236}">
-                <a16:creationId xmlns:a16="http://schemas.microsoft.com/office/drawing/2014/main" id="{B3D6C019-4EB3-9634-3803-1CF3FF3B0DCF}"/>
-              </a:ext>
-            </a:extLst>
-          </p:cNvPr>
-          <p:cNvGraphicFramePr>
-            <a:graphicFrameLocks noGrp="1"/>
-          </p:cNvGraphicFramePr>
-          <p:nvPr>
-            <p:extLst>
-              <p:ext uri="{D42A27DB-BD31-4B8C-83A1-F6EECF244321}">
-                <p14:modId xmlns:p14="http://schemas.microsoft.com/office/powerpoint/2010/main" val="1539121039"/>
-              </p:ext>
-            </p:extLst>
-          </p:nvPr>
-        </p:nvGraphicFramePr>
-        <p:xfrm>
-          <a:off x="6565899" y="4689901"/>
-          <a:ext cx="3191934" cy="736600"/>
-        </p:xfrm>
-        <a:graphic>
-          <a:graphicData uri="http://schemas.openxmlformats.org/drawingml/2006/table">
-            <a:tbl>
-              <a:tblPr firstRow="1" bandRow="1">
-                <a:tableStyleId>{5C22544A-7EE6-4342-B048-85BDC9FD1C3A}</a:tableStyleId>
-              </a:tblPr>
-              <a:tblGrid>
-                <a:gridCol w="1595967">
-                  <a:extLst>
-                    <a:ext uri="{9D8B030D-6E8A-4147-A177-3AD203B41FA5}">
-                      <a16:colId xmlns:a16="http://schemas.microsoft.com/office/drawing/2014/main" val="3073575854"/>
-                    </a:ext>
-                  </a:extLst>
-                </a:gridCol>
-                <a:gridCol w="1595967">
-                  <a:extLst>
-                    <a:ext uri="{9D8B030D-6E8A-4147-A177-3AD203B41FA5}">
-                      <a16:colId xmlns:a16="http://schemas.microsoft.com/office/drawing/2014/main" val="1785459708"/>
-                    </a:ext>
-                  </a:extLst>
-                </a:gridCol>
-              </a:tblGrid>
-              <a:tr h="0">
-                <a:tc gridSpan="2">
-                  <a:txBody>
-                    <a:bodyPr/>
-                    <a:lstStyle/>
-                    <a:p>
-                      <a:pPr algn="ctr"/>
-                      <a:r>
-                        <a:rPr lang="en-US" dirty="0">
-                          <a:latin typeface="Courier New" panose="02070309020205020404" pitchFamily="49" charset="0"/>
-                          <a:cs typeface="Courier New" panose="02070309020205020404" pitchFamily="49" charset="0"/>
-                        </a:rPr>
-                        <a:t>class A</a:t>
-                      </a:r>
-                      <a:endParaRPr lang="en-NL" dirty="0">
-                        <a:latin typeface="Courier New" panose="02070309020205020404" pitchFamily="49" charset="0"/>
-                        <a:cs typeface="Courier New" panose="02070309020205020404" pitchFamily="49" charset="0"/>
-                      </a:endParaRPr>
-                    </a:p>
-                  </a:txBody>
-                  <a:tcPr/>
-                </a:tc>
-                <a:tc hMerge="1">
-                  <a:txBody>
-                    <a:bodyPr/>
-                    <a:lstStyle/>
-                    <a:p>
-                      <a:endParaRPr lang="en-NL" dirty="0"/>
-                    </a:p>
-                  </a:txBody>
-                  <a:tcPr/>
-                </a:tc>
-                <a:extLst>
-                  <a:ext uri="{0D108BD9-81ED-4DB2-BD59-A6C34878D82A}">
-                    <a16:rowId xmlns:a16="http://schemas.microsoft.com/office/drawing/2014/main" val="2290352773"/>
-                  </a:ext>
-                </a:extLst>
-              </a:tr>
-              <a:tr h="370840">
-                <a:tc>
-                  <a:txBody>
-                    <a:bodyPr/>
-                    <a:lstStyle/>
-                    <a:p>
-                      <a:pPr algn="ctr"/>
-                      <a:r>
-                        <a:rPr lang="en-US" b="1" dirty="0">
-                          <a:solidFill>
-                            <a:schemeClr val="accent5">
-                              <a:lumMod val="75000"/>
-                            </a:schemeClr>
-                          </a:solidFill>
-                          <a:latin typeface="Courier New" panose="02070309020205020404" pitchFamily="49" charset="0"/>
-                          <a:cs typeface="Courier New" panose="02070309020205020404" pitchFamily="49" charset="0"/>
-                        </a:rPr>
-                        <a:t>def x</a:t>
-                      </a:r>
-                      <a:endParaRPr lang="en-NL" b="1" dirty="0">
-                        <a:solidFill>
-                          <a:schemeClr val="accent5">
-                            <a:lumMod val="75000"/>
-                          </a:schemeClr>
-                        </a:solidFill>
-                        <a:latin typeface="Courier New" panose="02070309020205020404" pitchFamily="49" charset="0"/>
-                        <a:cs typeface="Courier New" panose="02070309020205020404" pitchFamily="49" charset="0"/>
-                      </a:endParaRPr>
-                    </a:p>
-                  </a:txBody>
-                  <a:tcPr/>
-                </a:tc>
-                <a:tc>
-                  <a:txBody>
-                    <a:bodyPr/>
-                    <a:lstStyle/>
-                    <a:p>
-                      <a:pPr algn="ctr"/>
-                      <a:r>
-                        <a:rPr lang="en-US" b="1" dirty="0">
-                          <a:solidFill>
-                            <a:schemeClr val="accent5">
-                              <a:lumMod val="75000"/>
-                            </a:schemeClr>
-                          </a:solidFill>
-                          <a:latin typeface="Courier New" panose="02070309020205020404" pitchFamily="49" charset="0"/>
-                          <a:cs typeface="Courier New" panose="02070309020205020404" pitchFamily="49" charset="0"/>
-                        </a:rPr>
-                        <a:t>def y</a:t>
-                      </a:r>
-                      <a:endParaRPr lang="en-NL" b="1" dirty="0">
-                        <a:solidFill>
-                          <a:schemeClr val="accent5">
-                            <a:lumMod val="75000"/>
-                          </a:schemeClr>
-                        </a:solidFill>
-                        <a:latin typeface="Courier New" panose="02070309020205020404" pitchFamily="49" charset="0"/>
-                        <a:cs typeface="Courier New" panose="02070309020205020404" pitchFamily="49" charset="0"/>
-                      </a:endParaRPr>
-                    </a:p>
-                  </a:txBody>
-                  <a:tcPr/>
-                </a:tc>
-                <a:extLst>
-                  <a:ext uri="{0D108BD9-81ED-4DB2-BD59-A6C34878D82A}">
-                    <a16:rowId xmlns:a16="http://schemas.microsoft.com/office/drawing/2014/main" val="785041814"/>
-                  </a:ext>
-                </a:extLst>
-              </a:tr>
-            </a:tbl>
-          </a:graphicData>
-        </a:graphic>
-      </p:graphicFrame>
-      <p:cxnSp>
-        <p:nvCxnSpPr>
-          <p:cNvPr id="41" name="Straight Arrow Connector 40">
-            <a:extLst>
-              <a:ext uri="{FF2B5EF4-FFF2-40B4-BE49-F238E27FC236}">
-                <a16:creationId xmlns:a16="http://schemas.microsoft.com/office/drawing/2014/main" id="{46EFC27A-93C4-8674-F8BC-E8B8D394A8F4}"/>
-              </a:ext>
-            </a:extLst>
-          </p:cNvPr>
-          <p:cNvCxnSpPr/>
-          <p:nvPr/>
-        </p:nvCxnSpPr>
-        <p:spPr>
-          <a:xfrm flipV="1">
-            <a:off x="7363882" y="2936029"/>
-            <a:ext cx="0" cy="508636"/>
-          </a:xfrm>
-          <a:prstGeom prst="straightConnector1">
-            <a:avLst/>
-          </a:prstGeom>
-          <a:ln>
-            <a:tailEnd type="triangle"/>
-          </a:ln>
-        </p:spPr>
-        <p:style>
-          <a:lnRef idx="3">
-            <a:schemeClr val="accent6"/>
-          </a:lnRef>
-          <a:fillRef idx="0">
-            <a:schemeClr val="accent6"/>
-          </a:fillRef>
-          <a:effectRef idx="2">
-            <a:schemeClr val="accent6"/>
-          </a:effectRef>
-          <a:fontRef idx="minor">
-            <a:schemeClr val="tx1"/>
-          </a:fontRef>
-        </p:style>
-      </p:cxnSp>
-      <p:sp>
-        <p:nvSpPr>
-          <p:cNvPr id="42" name="TextBox 41">
-            <a:extLst>
-              <a:ext uri="{FF2B5EF4-FFF2-40B4-BE49-F238E27FC236}">
-                <a16:creationId xmlns:a16="http://schemas.microsoft.com/office/drawing/2014/main" id="{660B0507-D999-C8F2-7321-B2A621FB3901}"/>
-              </a:ext>
-            </a:extLst>
-          </p:cNvPr>
-          <p:cNvSpPr txBox="1"/>
-          <p:nvPr/>
-        </p:nvSpPr>
-        <p:spPr>
-          <a:xfrm>
-            <a:off x="6565898" y="1406521"/>
-            <a:ext cx="4787901" cy="369332"/>
-          </a:xfrm>
-          <a:prstGeom prst="rect">
-            <a:avLst/>
-          </a:prstGeom>
-          <a:noFill/>
-        </p:spPr>
-        <p:txBody>
-          <a:bodyPr wrap="square" rtlCol="0">
-            <a:spAutoFit/>
-          </a:bodyPr>
-          <a:lstStyle/>
-          <a:p>
-            <a:r>
-              <a:rPr lang="en-US" dirty="0" err="1"/>
-              <a:t>Meerdere</a:t>
-            </a:r>
-            <a:r>
-              <a:rPr lang="en-US" dirty="0"/>
-              <a:t> basis classes:</a:t>
-            </a:r>
-            <a:endParaRPr lang="en-NL" dirty="0"/>
-          </a:p>
-        </p:txBody>
-      </p:sp>
-      <p:grpSp>
-        <p:nvGrpSpPr>
-          <p:cNvPr id="46" name="Group 45">
-            <a:extLst>
-              <a:ext uri="{FF2B5EF4-FFF2-40B4-BE49-F238E27FC236}">
-                <a16:creationId xmlns:a16="http://schemas.microsoft.com/office/drawing/2014/main" id="{43E25EED-092A-E1CB-7DBB-299AF75B9D41}"/>
-              </a:ext>
-            </a:extLst>
-          </p:cNvPr>
-          <p:cNvGrpSpPr/>
-          <p:nvPr/>
-        </p:nvGrpSpPr>
-        <p:grpSpPr>
-          <a:xfrm>
-            <a:off x="1532464" y="4181265"/>
-            <a:ext cx="207428" cy="508636"/>
-            <a:chOff x="1532464" y="4181265"/>
-            <a:chExt cx="207428" cy="508636"/>
-          </a:xfrm>
-        </p:grpSpPr>
-        <p:cxnSp>
-          <p:nvCxnSpPr>
-            <p:cNvPr id="43" name="Straight Arrow Connector 42">
-              <a:extLst>
-                <a:ext uri="{FF2B5EF4-FFF2-40B4-BE49-F238E27FC236}">
-                  <a16:creationId xmlns:a16="http://schemas.microsoft.com/office/drawing/2014/main" id="{EFD692D0-5F50-9D82-5201-ABC0A469DCFD}"/>
-                </a:ext>
-              </a:extLst>
-            </p:cNvPr>
-            <p:cNvCxnSpPr>
-              <a:cxnSpLocks/>
-            </p:cNvCxnSpPr>
-            <p:nvPr/>
-          </p:nvCxnSpPr>
-          <p:spPr>
-            <a:xfrm flipV="1">
-              <a:off x="1636183" y="4181265"/>
-              <a:ext cx="0" cy="508636"/>
-            </a:xfrm>
-            <a:prstGeom prst="straightConnector1">
-              <a:avLst/>
-            </a:prstGeom>
-            <a:ln>
-              <a:tailEnd type="triangle"/>
-            </a:ln>
-          </p:spPr>
-          <p:style>
-            <a:lnRef idx="3">
-              <a:schemeClr val="accent1"/>
-            </a:lnRef>
-            <a:fillRef idx="0">
-              <a:schemeClr val="accent1"/>
-            </a:fillRef>
-            <a:effectRef idx="2">
-              <a:schemeClr val="accent1"/>
-            </a:effectRef>
-            <a:fontRef idx="minor">
-              <a:schemeClr val="tx1"/>
-            </a:fontRef>
-          </p:style>
-        </p:cxnSp>
-        <p:sp>
-          <p:nvSpPr>
-            <p:cNvPr id="45" name="&quot;Not Allowed&quot; Symbol 44">
-              <a:extLst>
-                <a:ext uri="{FF2B5EF4-FFF2-40B4-BE49-F238E27FC236}">
-                  <a16:creationId xmlns:a16="http://schemas.microsoft.com/office/drawing/2014/main" id="{590B82F8-58DB-52DE-6F22-8243E36770A4}"/>
-                </a:ext>
-              </a:extLst>
-            </p:cNvPr>
-            <p:cNvSpPr/>
-            <p:nvPr/>
-          </p:nvSpPr>
-          <p:spPr>
-            <a:xfrm>
-              <a:off x="1532464" y="4340379"/>
-              <a:ext cx="207428" cy="190408"/>
-            </a:xfrm>
-            <a:prstGeom prst="noSmoking">
-              <a:avLst/>
-            </a:prstGeom>
-            <a:solidFill>
-              <a:srgbClr val="FF0000"/>
-            </a:solidFill>
-          </p:spPr>
-          <p:style>
-            <a:lnRef idx="2">
-              <a:schemeClr val="accent1">
-                <a:shade val="50000"/>
-              </a:schemeClr>
-            </a:lnRef>
-            <a:fillRef idx="1">
-              <a:schemeClr val="accent1"/>
-            </a:fillRef>
-            <a:effectRef idx="0">
-              <a:schemeClr val="accent1"/>
-            </a:effectRef>
-            <a:fontRef idx="minor">
-              <a:schemeClr val="lt1"/>
-            </a:fontRef>
-          </p:style>
-          <p:txBody>
-            <a:bodyPr rtlCol="0" anchor="ctr"/>
-            <a:lstStyle/>
-            <a:p>
-              <a:pPr algn="ctr"/>
-              <a:endParaRPr lang="en-NL">
-                <a:solidFill>
-                  <a:schemeClr val="tx1"/>
-                </a:solidFill>
-              </a:endParaRPr>
-            </a:p>
-          </p:txBody>
-        </p:sp>
-      </p:grpSp>
-      <p:grpSp>
-        <p:nvGrpSpPr>
-          <p:cNvPr id="47" name="Group 46">
-            <a:extLst>
-              <a:ext uri="{FF2B5EF4-FFF2-40B4-BE49-F238E27FC236}">
-                <a16:creationId xmlns:a16="http://schemas.microsoft.com/office/drawing/2014/main" id="{4A2A4214-1E82-59D6-6101-490CD4892C88}"/>
-              </a:ext>
-            </a:extLst>
-          </p:cNvPr>
-          <p:cNvGrpSpPr/>
-          <p:nvPr/>
-        </p:nvGrpSpPr>
-        <p:grpSpPr>
-          <a:xfrm>
-            <a:off x="7254868" y="4184548"/>
-            <a:ext cx="207428" cy="508636"/>
-            <a:chOff x="1532464" y="4181265"/>
-            <a:chExt cx="207428" cy="508636"/>
-          </a:xfrm>
-        </p:grpSpPr>
-        <p:cxnSp>
-          <p:nvCxnSpPr>
-            <p:cNvPr id="48" name="Straight Arrow Connector 47">
-              <a:extLst>
-                <a:ext uri="{FF2B5EF4-FFF2-40B4-BE49-F238E27FC236}">
-                  <a16:creationId xmlns:a16="http://schemas.microsoft.com/office/drawing/2014/main" id="{78DC037C-6F9C-5881-0C1F-EB92DCB2AE3D}"/>
-                </a:ext>
-              </a:extLst>
-            </p:cNvPr>
-            <p:cNvCxnSpPr>
-              <a:cxnSpLocks/>
-            </p:cNvCxnSpPr>
-            <p:nvPr/>
-          </p:nvCxnSpPr>
-          <p:spPr>
-            <a:xfrm flipV="1">
-              <a:off x="1636183" y="4181265"/>
-              <a:ext cx="0" cy="508636"/>
-            </a:xfrm>
-            <a:prstGeom prst="straightConnector1">
-              <a:avLst/>
-            </a:prstGeom>
-            <a:ln>
-              <a:tailEnd type="triangle"/>
-            </a:ln>
-          </p:spPr>
-          <p:style>
-            <a:lnRef idx="3">
-              <a:schemeClr val="accent1"/>
-            </a:lnRef>
-            <a:fillRef idx="0">
-              <a:schemeClr val="accent1"/>
-            </a:fillRef>
-            <a:effectRef idx="2">
-              <a:schemeClr val="accent1"/>
-            </a:effectRef>
-            <a:fontRef idx="minor">
-              <a:schemeClr val="tx1"/>
-            </a:fontRef>
-          </p:style>
-        </p:cxnSp>
-        <p:sp>
-          <p:nvSpPr>
-            <p:cNvPr id="49" name="&quot;Not Allowed&quot; Symbol 48">
-              <a:extLst>
-                <a:ext uri="{FF2B5EF4-FFF2-40B4-BE49-F238E27FC236}">
-                  <a16:creationId xmlns:a16="http://schemas.microsoft.com/office/drawing/2014/main" id="{7B5D8BCB-8B94-0ADC-9919-3F68DEB0A34C}"/>
-                </a:ext>
-              </a:extLst>
-            </p:cNvPr>
-            <p:cNvSpPr/>
-            <p:nvPr/>
-          </p:nvSpPr>
-          <p:spPr>
-            <a:xfrm>
-              <a:off x="1532464" y="4340379"/>
-              <a:ext cx="207428" cy="190408"/>
-            </a:xfrm>
-            <a:prstGeom prst="noSmoking">
-              <a:avLst/>
-            </a:prstGeom>
-            <a:solidFill>
-              <a:srgbClr val="FF0000"/>
-            </a:solidFill>
-          </p:spPr>
-          <p:style>
-            <a:lnRef idx="2">
-              <a:schemeClr val="accent1">
-                <a:shade val="50000"/>
-              </a:schemeClr>
-            </a:lnRef>
-            <a:fillRef idx="1">
-              <a:schemeClr val="accent1"/>
-            </a:fillRef>
-            <a:effectRef idx="0">
-              <a:schemeClr val="accent1"/>
-            </a:effectRef>
-            <a:fontRef idx="minor">
-              <a:schemeClr val="lt1"/>
-            </a:fontRef>
-          </p:style>
-          <p:txBody>
-            <a:bodyPr rtlCol="0" anchor="ctr"/>
-            <a:lstStyle/>
-            <a:p>
-              <a:pPr algn="ctr"/>
-              <a:endParaRPr lang="en-NL" dirty="0">
-                <a:solidFill>
-                  <a:schemeClr val="tx1"/>
-                </a:solidFill>
-              </a:endParaRPr>
-            </a:p>
-          </p:txBody>
-        </p:sp>
-      </p:grpSp>
-      <p:cxnSp>
-        <p:nvCxnSpPr>
-          <p:cNvPr id="51" name="Straight Arrow Connector 50">
-            <a:extLst>
-              <a:ext uri="{FF2B5EF4-FFF2-40B4-BE49-F238E27FC236}">
-                <a16:creationId xmlns:a16="http://schemas.microsoft.com/office/drawing/2014/main" id="{5D3DDD5F-3374-0BC6-1C14-EB47F2BBACA9}"/>
-              </a:ext>
-            </a:extLst>
-          </p:cNvPr>
-          <p:cNvCxnSpPr>
-            <a:cxnSpLocks/>
-          </p:cNvCxnSpPr>
-          <p:nvPr/>
-        </p:nvCxnSpPr>
-        <p:spPr>
-          <a:xfrm flipV="1">
-            <a:off x="3232150" y="2936029"/>
-            <a:ext cx="0" cy="508636"/>
-          </a:xfrm>
-          <a:prstGeom prst="straightConnector1">
-            <a:avLst/>
-          </a:prstGeom>
-          <a:ln>
-            <a:tailEnd type="triangle"/>
-          </a:ln>
-        </p:spPr>
-        <p:style>
-          <a:lnRef idx="3">
-            <a:schemeClr val="accent1"/>
-          </a:lnRef>
-          <a:fillRef idx="0">
-            <a:schemeClr val="accent1"/>
-          </a:fillRef>
-          <a:effectRef idx="2">
-            <a:schemeClr val="accent1"/>
-          </a:effectRef>
-          <a:fontRef idx="minor">
-            <a:schemeClr val="tx1"/>
-          </a:fontRef>
-        </p:style>
-      </p:cxnSp>
-      <p:cxnSp>
-        <p:nvCxnSpPr>
-          <p:cNvPr id="53" name="Straight Arrow Connector 52">
-            <a:extLst>
-              <a:ext uri="{FF2B5EF4-FFF2-40B4-BE49-F238E27FC236}">
-                <a16:creationId xmlns:a16="http://schemas.microsoft.com/office/drawing/2014/main" id="{E7900520-4524-63D0-52CB-89C29C0978BB}"/>
-              </a:ext>
-            </a:extLst>
-          </p:cNvPr>
-          <p:cNvCxnSpPr>
-            <a:cxnSpLocks/>
-          </p:cNvCxnSpPr>
-          <p:nvPr/>
-        </p:nvCxnSpPr>
-        <p:spPr>
-          <a:xfrm flipV="1">
-            <a:off x="3232150" y="4181265"/>
-            <a:ext cx="0" cy="508636"/>
-          </a:xfrm>
-          <a:prstGeom prst="straightConnector1">
-            <a:avLst/>
-          </a:prstGeom>
-          <a:ln>
-            <a:tailEnd type="triangle"/>
-          </a:ln>
-        </p:spPr>
-        <p:style>
-          <a:lnRef idx="3">
-            <a:schemeClr val="accent1"/>
-          </a:lnRef>
-          <a:fillRef idx="0">
-            <a:schemeClr val="accent1"/>
-          </a:fillRef>
-          <a:effectRef idx="2">
-            <a:schemeClr val="accent1"/>
-          </a:effectRef>
-          <a:fontRef idx="minor">
-            <a:schemeClr val="tx1"/>
-          </a:fontRef>
-        </p:style>
-      </p:cxnSp>
-    </p:spTree>
-    <p:extLst>
-      <p:ext uri="{BB962C8B-B14F-4D97-AF65-F5344CB8AC3E}">
-        <p14:creationId xmlns:p14="http://schemas.microsoft.com/office/powerpoint/2010/main" val="2863989584"/>
-      </p:ext>
-    </p:extLst>
-  </p:cSld>
-  <p:clrMapOvr>
-    <a:masterClrMapping/>
-  </p:clrMapOvr>
-</p:sld>
-</file>
-
-<file path=ppt/slides/slide52.xml><?xml version="1.0" encoding="utf-8"?>
-<p:sld xmlns:a="http://schemas.openxmlformats.org/drawingml/2006/main" xmlns:r="http://schemas.openxmlformats.org/officeDocument/2006/relationships" xmlns:p="http://schemas.openxmlformats.org/presentationml/2006/main" show="0">
-  <p:cSld>
-    <p:spTree>
-      <p:nvGrpSpPr>
-        <p:cNvPr id="1" name=""/>
-        <p:cNvGrpSpPr/>
-        <p:nvPr/>
-      </p:nvGrpSpPr>
-      <p:grpSpPr>
-        <a:xfrm>
-          <a:off x="0" y="0"/>
-          <a:ext cx="0" cy="0"/>
-          <a:chOff x="0" y="0"/>
-          <a:chExt cx="0" cy="0"/>
-        </a:xfrm>
-      </p:grpSpPr>
-      <p:sp>
-        <p:nvSpPr>
-          <p:cNvPr id="2" name="Title 1">
-            <a:extLst>
-              <a:ext uri="{FF2B5EF4-FFF2-40B4-BE49-F238E27FC236}">
-                <a16:creationId xmlns:a16="http://schemas.microsoft.com/office/drawing/2014/main" id="{39A1D606-8DD1-369C-5C09-471CDD551AD5}"/>
-              </a:ext>
-            </a:extLst>
-          </p:cNvPr>
-          <p:cNvSpPr>
-            <a:spLocks noGrp="1"/>
-          </p:cNvSpPr>
-          <p:nvPr>
-            <p:ph type="title"/>
-          </p:nvPr>
-        </p:nvSpPr>
-        <p:spPr>
-          <a:xfrm>
-            <a:off x="838200" y="365126"/>
-            <a:ext cx="10515600" cy="718608"/>
-          </a:xfrm>
-        </p:spPr>
-        <p:txBody>
-          <a:bodyPr>
-            <a:normAutofit/>
-          </a:bodyPr>
-          <a:lstStyle/>
-          <a:p>
-            <a:r>
-              <a:rPr lang="nl-NL" sz="3600" noProof="0" dirty="0"/>
-              <a:t>Overerving van meerdere classes</a:t>
-            </a:r>
-          </a:p>
-        </p:txBody>
-      </p:sp>
-      <p:graphicFrame>
-        <p:nvGraphicFramePr>
-          <p:cNvPr id="13" name="Table 13">
-            <a:extLst>
-              <a:ext uri="{FF2B5EF4-FFF2-40B4-BE49-F238E27FC236}">
-                <a16:creationId xmlns:a16="http://schemas.microsoft.com/office/drawing/2014/main" id="{B27AE4E2-70D6-7A0D-E69B-B672CD55466D}"/>
-              </a:ext>
-            </a:extLst>
-          </p:cNvPr>
-          <p:cNvGraphicFramePr>
-            <a:graphicFrameLocks noGrp="1"/>
-          </p:cNvGraphicFramePr>
-          <p:nvPr/>
-        </p:nvGraphicFramePr>
-        <p:xfrm>
-          <a:off x="838200" y="2199429"/>
-          <a:ext cx="4787901" cy="736600"/>
-        </p:xfrm>
-        <a:graphic>
-          <a:graphicData uri="http://schemas.openxmlformats.org/drawingml/2006/table">
-            <a:tbl>
-              <a:tblPr firstRow="1" bandRow="1">
-                <a:tableStyleId>{21E4AEA4-8DFA-4A89-87EB-49C32662AFE0}</a:tableStyleId>
-              </a:tblPr>
-              <a:tblGrid>
-                <a:gridCol w="1595967">
-                  <a:extLst>
-                    <a:ext uri="{9D8B030D-6E8A-4147-A177-3AD203B41FA5}">
-                      <a16:colId xmlns:a16="http://schemas.microsoft.com/office/drawing/2014/main" val="3073575854"/>
-                    </a:ext>
-                  </a:extLst>
-                </a:gridCol>
-                <a:gridCol w="1595967">
-                  <a:extLst>
-                    <a:ext uri="{9D8B030D-6E8A-4147-A177-3AD203B41FA5}">
-                      <a16:colId xmlns:a16="http://schemas.microsoft.com/office/drawing/2014/main" val="1785459708"/>
-                    </a:ext>
-                  </a:extLst>
-                </a:gridCol>
-                <a:gridCol w="1595967">
-                  <a:extLst>
-                    <a:ext uri="{9D8B030D-6E8A-4147-A177-3AD203B41FA5}">
-                      <a16:colId xmlns:a16="http://schemas.microsoft.com/office/drawing/2014/main" val="3617932867"/>
-                    </a:ext>
-                  </a:extLst>
-                </a:gridCol>
-              </a:tblGrid>
-              <a:tr h="0">
-                <a:tc gridSpan="3">
-                  <a:txBody>
-                    <a:bodyPr/>
-                    <a:lstStyle/>
-                    <a:p>
-                      <a:pPr algn="ctr"/>
-                      <a:r>
-                        <a:rPr lang="en-US" dirty="0">
-                          <a:latin typeface="Courier New" panose="02070309020205020404" pitchFamily="49" charset="0"/>
-                          <a:cs typeface="Courier New" panose="02070309020205020404" pitchFamily="49" charset="0"/>
-                        </a:rPr>
-                        <a:t>class C(B)</a:t>
-                      </a:r>
-                      <a:endParaRPr lang="en-NL" dirty="0">
-                        <a:latin typeface="Courier New" panose="02070309020205020404" pitchFamily="49" charset="0"/>
-                        <a:cs typeface="Courier New" panose="02070309020205020404" pitchFamily="49" charset="0"/>
-                      </a:endParaRPr>
-                    </a:p>
-                  </a:txBody>
-                  <a:tcPr/>
-                </a:tc>
-                <a:tc hMerge="1">
-                  <a:txBody>
-                    <a:bodyPr/>
-                    <a:lstStyle/>
-                    <a:p>
-                      <a:endParaRPr lang="en-NL" dirty="0"/>
-                    </a:p>
-                  </a:txBody>
-                  <a:tcPr/>
-                </a:tc>
-                <a:tc hMerge="1">
-                  <a:txBody>
-                    <a:bodyPr/>
-                    <a:lstStyle/>
-                    <a:p>
-                      <a:endParaRPr lang="en-NL" dirty="0"/>
-                    </a:p>
-                  </a:txBody>
-                  <a:tcPr/>
-                </a:tc>
-                <a:extLst>
-                  <a:ext uri="{0D108BD9-81ED-4DB2-BD59-A6C34878D82A}">
-                    <a16:rowId xmlns:a16="http://schemas.microsoft.com/office/drawing/2014/main" val="2290352773"/>
-                  </a:ext>
-                </a:extLst>
-              </a:tr>
-              <a:tr h="370840">
-                <a:tc>
-                  <a:txBody>
-                    <a:bodyPr/>
-                    <a:lstStyle/>
-                    <a:p>
-                      <a:pPr algn="ctr"/>
-                      <a:r>
-                        <a:rPr lang="en-US" b="1" dirty="0">
-                          <a:solidFill>
-                            <a:schemeClr val="accent6">
-                              <a:lumMod val="75000"/>
-                            </a:schemeClr>
-                          </a:solidFill>
-                          <a:latin typeface="Courier New" panose="02070309020205020404" pitchFamily="49" charset="0"/>
-                          <a:cs typeface="Courier New" panose="02070309020205020404" pitchFamily="49" charset="0"/>
-                        </a:rPr>
-                        <a:t>x</a:t>
-                      </a:r>
-                      <a:endParaRPr lang="en-NL" b="1" dirty="0">
-                        <a:solidFill>
-                          <a:schemeClr val="accent6">
-                            <a:lumMod val="75000"/>
-                          </a:schemeClr>
-                        </a:solidFill>
-                        <a:latin typeface="Courier New" panose="02070309020205020404" pitchFamily="49" charset="0"/>
-                        <a:cs typeface="Courier New" panose="02070309020205020404" pitchFamily="49" charset="0"/>
-                      </a:endParaRPr>
-                    </a:p>
-                  </a:txBody>
-                  <a:tcPr/>
-                </a:tc>
-                <a:tc>
-                  <a:txBody>
-                    <a:bodyPr/>
-                    <a:lstStyle/>
-                    <a:p>
-                      <a:pPr algn="ctr"/>
-                      <a:r>
-                        <a:rPr lang="en-US" b="1" dirty="0">
-                          <a:solidFill>
-                            <a:schemeClr val="accent5">
-                              <a:lumMod val="75000"/>
-                            </a:schemeClr>
-                          </a:solidFill>
-                          <a:latin typeface="Courier New" panose="02070309020205020404" pitchFamily="49" charset="0"/>
-                          <a:cs typeface="Courier New" panose="02070309020205020404" pitchFamily="49" charset="0"/>
-                        </a:rPr>
-                        <a:t>y</a:t>
-                      </a:r>
-                      <a:endParaRPr lang="en-NL" b="1" dirty="0">
-                        <a:solidFill>
-                          <a:schemeClr val="accent5">
-                            <a:lumMod val="75000"/>
-                          </a:schemeClr>
-                        </a:solidFill>
-                        <a:latin typeface="Courier New" panose="02070309020205020404" pitchFamily="49" charset="0"/>
-                        <a:cs typeface="Courier New" panose="02070309020205020404" pitchFamily="49" charset="0"/>
-                      </a:endParaRPr>
-                    </a:p>
-                  </a:txBody>
-                  <a:tcPr/>
-                </a:tc>
-                <a:tc>
-                  <a:txBody>
-                    <a:bodyPr/>
-                    <a:lstStyle/>
-                    <a:p>
-                      <a:pPr algn="ctr"/>
-                      <a:r>
-                        <a:rPr lang="en-US" b="1" dirty="0">
-                          <a:solidFill>
-                            <a:schemeClr val="accent2">
-                              <a:lumMod val="75000"/>
-                            </a:schemeClr>
-                          </a:solidFill>
-                          <a:latin typeface="Courier New" panose="02070309020205020404" pitchFamily="49" charset="0"/>
-                          <a:cs typeface="Courier New" panose="02070309020205020404" pitchFamily="49" charset="0"/>
-                        </a:rPr>
-                        <a:t>def z</a:t>
-                      </a:r>
-                      <a:endParaRPr lang="en-NL" b="1" dirty="0">
-                        <a:solidFill>
-                          <a:schemeClr val="accent2">
-                            <a:lumMod val="75000"/>
-                          </a:schemeClr>
-                        </a:solidFill>
-                        <a:latin typeface="Courier New" panose="02070309020205020404" pitchFamily="49" charset="0"/>
-                        <a:cs typeface="Courier New" panose="02070309020205020404" pitchFamily="49" charset="0"/>
-                      </a:endParaRPr>
-                    </a:p>
-                  </a:txBody>
-                  <a:tcPr/>
-                </a:tc>
-                <a:extLst>
-                  <a:ext uri="{0D108BD9-81ED-4DB2-BD59-A6C34878D82A}">
-                    <a16:rowId xmlns:a16="http://schemas.microsoft.com/office/drawing/2014/main" val="785041814"/>
-                  </a:ext>
-                </a:extLst>
-              </a:tr>
-            </a:tbl>
-          </a:graphicData>
-        </a:graphic>
-      </p:graphicFrame>
-      <p:graphicFrame>
-        <p:nvGraphicFramePr>
-          <p:cNvPr id="14" name="Table 13">
-            <a:extLst>
-              <a:ext uri="{FF2B5EF4-FFF2-40B4-BE49-F238E27FC236}">
-                <a16:creationId xmlns:a16="http://schemas.microsoft.com/office/drawing/2014/main" id="{D1E6095E-7DAB-1E45-97B7-08734FD4069A}"/>
-              </a:ext>
-            </a:extLst>
-          </p:cNvPr>
-          <p:cNvGraphicFramePr>
-            <a:graphicFrameLocks noGrp="1"/>
-          </p:cNvGraphicFramePr>
-          <p:nvPr/>
-        </p:nvGraphicFramePr>
-        <p:xfrm>
-          <a:off x="838199" y="3444665"/>
-          <a:ext cx="3191924" cy="736600"/>
-        </p:xfrm>
-        <a:graphic>
-          <a:graphicData uri="http://schemas.openxmlformats.org/drawingml/2006/table">
-            <a:tbl>
-              <a:tblPr firstRow="1" bandRow="1">
-                <a:tableStyleId>{93296810-A885-4BE3-A3E7-6D5BEEA58F35}</a:tableStyleId>
-              </a:tblPr>
-              <a:tblGrid>
-                <a:gridCol w="1595962">
-                  <a:extLst>
-                    <a:ext uri="{9D8B030D-6E8A-4147-A177-3AD203B41FA5}">
-                      <a16:colId xmlns:a16="http://schemas.microsoft.com/office/drawing/2014/main" val="3073575854"/>
-                    </a:ext>
-                  </a:extLst>
-                </a:gridCol>
-                <a:gridCol w="1595962">
-                  <a:extLst>
-                    <a:ext uri="{9D8B030D-6E8A-4147-A177-3AD203B41FA5}">
-                      <a16:colId xmlns:a16="http://schemas.microsoft.com/office/drawing/2014/main" val="4251551100"/>
-                    </a:ext>
-                  </a:extLst>
-                </a:gridCol>
-              </a:tblGrid>
-              <a:tr h="0">
-                <a:tc gridSpan="2">
-                  <a:txBody>
-                    <a:bodyPr/>
-                    <a:lstStyle/>
-                    <a:p>
-                      <a:pPr algn="ctr"/>
-                      <a:r>
-                        <a:rPr lang="en-US" dirty="0">
-                          <a:latin typeface="Courier New" panose="02070309020205020404" pitchFamily="49" charset="0"/>
-                          <a:cs typeface="Courier New" panose="02070309020205020404" pitchFamily="49" charset="0"/>
-                        </a:rPr>
-                        <a:t>class B(A)</a:t>
-                      </a:r>
-                      <a:endParaRPr lang="en-NL" dirty="0">
-                        <a:latin typeface="Courier New" panose="02070309020205020404" pitchFamily="49" charset="0"/>
-                        <a:cs typeface="Courier New" panose="02070309020205020404" pitchFamily="49" charset="0"/>
-                      </a:endParaRPr>
-                    </a:p>
-                  </a:txBody>
-                  <a:tcPr/>
-                </a:tc>
-                <a:tc hMerge="1">
-                  <a:txBody>
-                    <a:bodyPr/>
-                    <a:lstStyle/>
-                    <a:p>
-                      <a:pPr algn="ctr"/>
-                      <a:endParaRPr lang="en-NL" dirty="0">
-                        <a:latin typeface="Courier New" panose="02070309020205020404" pitchFamily="49" charset="0"/>
-                        <a:cs typeface="Courier New" panose="02070309020205020404" pitchFamily="49" charset="0"/>
-                      </a:endParaRPr>
-                    </a:p>
-                  </a:txBody>
-                  <a:tcPr/>
-                </a:tc>
-                <a:extLst>
-                  <a:ext uri="{0D108BD9-81ED-4DB2-BD59-A6C34878D82A}">
-                    <a16:rowId xmlns:a16="http://schemas.microsoft.com/office/drawing/2014/main" val="2290352773"/>
-                  </a:ext>
-                </a:extLst>
-              </a:tr>
-              <a:tr h="370840">
-                <a:tc>
-                  <a:txBody>
-                    <a:bodyPr/>
-                    <a:lstStyle/>
-                    <a:p>
-                      <a:pPr algn="ctr"/>
-                      <a:r>
-                        <a:rPr lang="en-US" b="1" dirty="0">
-                          <a:solidFill>
-                            <a:schemeClr val="accent6">
-                              <a:lumMod val="75000"/>
-                            </a:schemeClr>
-                          </a:solidFill>
-                          <a:latin typeface="Courier New" panose="02070309020205020404" pitchFamily="49" charset="0"/>
-                          <a:cs typeface="Courier New" panose="02070309020205020404" pitchFamily="49" charset="0"/>
-                        </a:rPr>
-                        <a:t>def x</a:t>
-                      </a:r>
-                      <a:endParaRPr lang="en-NL" b="1" dirty="0">
-                        <a:solidFill>
-                          <a:schemeClr val="accent6">
-                            <a:lumMod val="75000"/>
-                          </a:schemeClr>
-                        </a:solidFill>
-                        <a:latin typeface="Courier New" panose="02070309020205020404" pitchFamily="49" charset="0"/>
-                        <a:cs typeface="Courier New" panose="02070309020205020404" pitchFamily="49" charset="0"/>
-                      </a:endParaRPr>
-                    </a:p>
-                  </a:txBody>
-                  <a:tcPr/>
-                </a:tc>
-                <a:tc>
-                  <a:txBody>
-                    <a:bodyPr/>
-                    <a:lstStyle/>
-                    <a:p>
-                      <a:pPr marL="0" marR="0" lvl="0" indent="0" algn="ctr" defTabSz="914400" rtl="0" eaLnBrk="1" fontAlgn="auto" latinLnBrk="0" hangingPunct="1">
-                        <a:lnSpc>
-                          <a:spcPct val="100000"/>
-                        </a:lnSpc>
-                        <a:spcBef>
-                          <a:spcPts val="0"/>
-                        </a:spcBef>
-                        <a:spcAft>
-                          <a:spcPts val="0"/>
-                        </a:spcAft>
-                        <a:buClrTx/>
-                        <a:buSzTx/>
-                        <a:buFontTx/>
-                        <a:buNone/>
-                        <a:tabLst/>
-                        <a:defRPr/>
-                      </a:pPr>
-                      <a:r>
-                        <a:rPr lang="en-US" b="1" dirty="0">
-                          <a:solidFill>
-                            <a:schemeClr val="accent5">
-                              <a:lumMod val="75000"/>
-                            </a:schemeClr>
-                          </a:solidFill>
-                          <a:latin typeface="Courier New" panose="02070309020205020404" pitchFamily="49" charset="0"/>
-                          <a:cs typeface="Courier New" panose="02070309020205020404" pitchFamily="49" charset="0"/>
-                        </a:rPr>
-                        <a:t>y</a:t>
-                      </a:r>
-                      <a:endParaRPr lang="en-NL" b="1" dirty="0">
-                        <a:solidFill>
-                          <a:schemeClr val="accent5">
-                            <a:lumMod val="75000"/>
-                          </a:schemeClr>
-                        </a:solidFill>
-                        <a:latin typeface="Courier New" panose="02070309020205020404" pitchFamily="49" charset="0"/>
-                        <a:cs typeface="Courier New" panose="02070309020205020404" pitchFamily="49" charset="0"/>
-                      </a:endParaRPr>
-                    </a:p>
-                  </a:txBody>
-                  <a:tcPr/>
-                </a:tc>
-                <a:extLst>
-                  <a:ext uri="{0D108BD9-81ED-4DB2-BD59-A6C34878D82A}">
-                    <a16:rowId xmlns:a16="http://schemas.microsoft.com/office/drawing/2014/main" val="785041814"/>
-                  </a:ext>
-                </a:extLst>
-              </a:tr>
-            </a:tbl>
-          </a:graphicData>
-        </a:graphic>
-      </p:graphicFrame>
-      <p:graphicFrame>
-        <p:nvGraphicFramePr>
-          <p:cNvPr id="15" name="Table 13">
-            <a:extLst>
-              <a:ext uri="{FF2B5EF4-FFF2-40B4-BE49-F238E27FC236}">
-                <a16:creationId xmlns:a16="http://schemas.microsoft.com/office/drawing/2014/main" id="{4F2A733B-E4CD-912B-B22F-EF2CFBBB1DEE}"/>
-              </a:ext>
-            </a:extLst>
-          </p:cNvPr>
-          <p:cNvGraphicFramePr>
-            <a:graphicFrameLocks noGrp="1"/>
-          </p:cNvGraphicFramePr>
-          <p:nvPr/>
-        </p:nvGraphicFramePr>
-        <p:xfrm>
-          <a:off x="838200" y="4689901"/>
-          <a:ext cx="3191934" cy="736600"/>
-        </p:xfrm>
-        <a:graphic>
-          <a:graphicData uri="http://schemas.openxmlformats.org/drawingml/2006/table">
-            <a:tbl>
-              <a:tblPr firstRow="1" bandRow="1">
-                <a:tableStyleId>{5C22544A-7EE6-4342-B048-85BDC9FD1C3A}</a:tableStyleId>
-              </a:tblPr>
-              <a:tblGrid>
-                <a:gridCol w="1595967">
-                  <a:extLst>
-                    <a:ext uri="{9D8B030D-6E8A-4147-A177-3AD203B41FA5}">
-                      <a16:colId xmlns:a16="http://schemas.microsoft.com/office/drawing/2014/main" val="3073575854"/>
-                    </a:ext>
-                  </a:extLst>
-                </a:gridCol>
-                <a:gridCol w="1595967">
-                  <a:extLst>
-                    <a:ext uri="{9D8B030D-6E8A-4147-A177-3AD203B41FA5}">
-                      <a16:colId xmlns:a16="http://schemas.microsoft.com/office/drawing/2014/main" val="1785459708"/>
-                    </a:ext>
-                  </a:extLst>
-                </a:gridCol>
-              </a:tblGrid>
-              <a:tr h="0">
-                <a:tc gridSpan="2">
-                  <a:txBody>
-                    <a:bodyPr/>
-                    <a:lstStyle/>
-                    <a:p>
-                      <a:pPr algn="ctr"/>
-                      <a:r>
-                        <a:rPr lang="en-US" dirty="0">
-                          <a:latin typeface="Courier New" panose="02070309020205020404" pitchFamily="49" charset="0"/>
-                          <a:cs typeface="Courier New" panose="02070309020205020404" pitchFamily="49" charset="0"/>
-                        </a:rPr>
-                        <a:t>class A</a:t>
-                      </a:r>
-                      <a:endParaRPr lang="en-NL" dirty="0">
-                        <a:latin typeface="Courier New" panose="02070309020205020404" pitchFamily="49" charset="0"/>
-                        <a:cs typeface="Courier New" panose="02070309020205020404" pitchFamily="49" charset="0"/>
-                      </a:endParaRPr>
-                    </a:p>
-                  </a:txBody>
-                  <a:tcPr/>
-                </a:tc>
-                <a:tc hMerge="1">
-                  <a:txBody>
-                    <a:bodyPr/>
-                    <a:lstStyle/>
-                    <a:p>
-                      <a:endParaRPr lang="en-NL" dirty="0"/>
-                    </a:p>
-                  </a:txBody>
-                  <a:tcPr/>
-                </a:tc>
-                <a:extLst>
-                  <a:ext uri="{0D108BD9-81ED-4DB2-BD59-A6C34878D82A}">
-                    <a16:rowId xmlns:a16="http://schemas.microsoft.com/office/drawing/2014/main" val="2290352773"/>
-                  </a:ext>
-                </a:extLst>
-              </a:tr>
-              <a:tr h="370840">
-                <a:tc>
-                  <a:txBody>
-                    <a:bodyPr/>
-                    <a:lstStyle/>
-                    <a:p>
-                      <a:pPr algn="ctr"/>
-                      <a:r>
-                        <a:rPr lang="en-US" b="1" dirty="0">
-                          <a:solidFill>
-                            <a:schemeClr val="accent5">
-                              <a:lumMod val="75000"/>
-                            </a:schemeClr>
-                          </a:solidFill>
-                          <a:latin typeface="Courier New" panose="02070309020205020404" pitchFamily="49" charset="0"/>
-                          <a:cs typeface="Courier New" panose="02070309020205020404" pitchFamily="49" charset="0"/>
-                        </a:rPr>
-                        <a:t>def x</a:t>
-                      </a:r>
-                      <a:endParaRPr lang="en-NL" b="1" dirty="0">
-                        <a:solidFill>
-                          <a:schemeClr val="accent5">
-                            <a:lumMod val="75000"/>
-                          </a:schemeClr>
-                        </a:solidFill>
-                        <a:latin typeface="Courier New" panose="02070309020205020404" pitchFamily="49" charset="0"/>
-                        <a:cs typeface="Courier New" panose="02070309020205020404" pitchFamily="49" charset="0"/>
-                      </a:endParaRPr>
-                    </a:p>
-                  </a:txBody>
-                  <a:tcPr/>
-                </a:tc>
-                <a:tc>
-                  <a:txBody>
-                    <a:bodyPr/>
-                    <a:lstStyle/>
-                    <a:p>
-                      <a:pPr algn="ctr"/>
-                      <a:r>
-                        <a:rPr lang="en-US" b="1" dirty="0">
-                          <a:solidFill>
-                            <a:schemeClr val="accent5">
-                              <a:lumMod val="75000"/>
-                            </a:schemeClr>
-                          </a:solidFill>
-                          <a:latin typeface="Courier New" panose="02070309020205020404" pitchFamily="49" charset="0"/>
-                          <a:cs typeface="Courier New" panose="02070309020205020404" pitchFamily="49" charset="0"/>
-                        </a:rPr>
-                        <a:t>def y</a:t>
-                      </a:r>
-                      <a:endParaRPr lang="en-NL" b="1" dirty="0">
-                        <a:solidFill>
-                          <a:schemeClr val="accent5">
-                            <a:lumMod val="75000"/>
-                          </a:schemeClr>
-                        </a:solidFill>
-                        <a:latin typeface="Courier New" panose="02070309020205020404" pitchFamily="49" charset="0"/>
-                        <a:cs typeface="Courier New" panose="02070309020205020404" pitchFamily="49" charset="0"/>
-                      </a:endParaRPr>
-                    </a:p>
-                  </a:txBody>
-                  <a:tcPr/>
-                </a:tc>
-                <a:extLst>
-                  <a:ext uri="{0D108BD9-81ED-4DB2-BD59-A6C34878D82A}">
-                    <a16:rowId xmlns:a16="http://schemas.microsoft.com/office/drawing/2014/main" val="785041814"/>
-                  </a:ext>
-                </a:extLst>
-              </a:tr>
-            </a:tbl>
-          </a:graphicData>
-        </a:graphic>
-      </p:graphicFrame>
-      <p:cxnSp>
-        <p:nvCxnSpPr>
-          <p:cNvPr id="20" name="Straight Arrow Connector 19">
-            <a:extLst>
-              <a:ext uri="{FF2B5EF4-FFF2-40B4-BE49-F238E27FC236}">
-                <a16:creationId xmlns:a16="http://schemas.microsoft.com/office/drawing/2014/main" id="{6E7AC5FE-664D-BC4D-2089-A98B1DA8332F}"/>
-              </a:ext>
-            </a:extLst>
-          </p:cNvPr>
-          <p:cNvCxnSpPr/>
-          <p:nvPr/>
-        </p:nvCxnSpPr>
-        <p:spPr>
-          <a:xfrm flipV="1">
-            <a:off x="1636183" y="2936029"/>
-            <a:ext cx="0" cy="508636"/>
-          </a:xfrm>
-          <a:prstGeom prst="straightConnector1">
-            <a:avLst/>
-          </a:prstGeom>
-          <a:ln>
-            <a:tailEnd type="triangle"/>
-          </a:ln>
-        </p:spPr>
-        <p:style>
-          <a:lnRef idx="3">
-            <a:schemeClr val="accent6"/>
-          </a:lnRef>
-          <a:fillRef idx="0">
-            <a:schemeClr val="accent6"/>
-          </a:fillRef>
-          <a:effectRef idx="2">
-            <a:schemeClr val="accent6"/>
-          </a:effectRef>
-          <a:fontRef idx="minor">
-            <a:schemeClr val="tx1"/>
-          </a:fontRef>
-        </p:style>
-      </p:cxnSp>
-      <p:sp>
-        <p:nvSpPr>
-          <p:cNvPr id="25" name="TextBox 24">
-            <a:extLst>
-              <a:ext uri="{FF2B5EF4-FFF2-40B4-BE49-F238E27FC236}">
-                <a16:creationId xmlns:a16="http://schemas.microsoft.com/office/drawing/2014/main" id="{7E29C54E-8E31-8697-5A5D-3133381BC0DD}"/>
-              </a:ext>
-            </a:extLst>
-          </p:cNvPr>
-          <p:cNvSpPr txBox="1"/>
-          <p:nvPr/>
-        </p:nvSpPr>
-        <p:spPr>
-          <a:xfrm>
-            <a:off x="838199" y="1407704"/>
-            <a:ext cx="4787901" cy="369332"/>
-          </a:xfrm>
-          <a:prstGeom prst="rect">
-            <a:avLst/>
-          </a:prstGeom>
-          <a:noFill/>
-        </p:spPr>
-        <p:txBody>
-          <a:bodyPr wrap="square" rtlCol="0">
-            <a:spAutoFit/>
-          </a:bodyPr>
-          <a:lstStyle/>
-          <a:p>
-            <a:r>
-              <a:rPr lang="en-US" dirty="0" err="1"/>
-              <a:t>Gestapelde</a:t>
-            </a:r>
-            <a:r>
-              <a:rPr lang="en-US" dirty="0"/>
-              <a:t> basis classes:</a:t>
-            </a:r>
-            <a:endParaRPr lang="en-NL" dirty="0"/>
-          </a:p>
-        </p:txBody>
-      </p:sp>
-      <p:cxnSp>
-        <p:nvCxnSpPr>
-          <p:cNvPr id="35" name="Straight Arrow Connector 34">
-            <a:extLst>
-              <a:ext uri="{FF2B5EF4-FFF2-40B4-BE49-F238E27FC236}">
-                <a16:creationId xmlns:a16="http://schemas.microsoft.com/office/drawing/2014/main" id="{077064D2-0639-4331-F791-351BE7441628}"/>
-              </a:ext>
-            </a:extLst>
-          </p:cNvPr>
-          <p:cNvCxnSpPr>
-            <a:cxnSpLocks/>
-            <a:endCxn id="36" idx="2"/>
-          </p:cNvCxnSpPr>
-          <p:nvPr/>
-        </p:nvCxnSpPr>
-        <p:spPr>
-          <a:xfrm flipV="1">
-            <a:off x="8959849" y="2936029"/>
-            <a:ext cx="0" cy="1753872"/>
-          </a:xfrm>
-          <a:prstGeom prst="straightConnector1">
-            <a:avLst/>
-          </a:prstGeom>
-          <a:ln>
-            <a:tailEnd type="triangle"/>
-          </a:ln>
-        </p:spPr>
-        <p:style>
-          <a:lnRef idx="3">
-            <a:schemeClr val="accent1"/>
-          </a:lnRef>
-          <a:fillRef idx="0">
-            <a:schemeClr val="accent1"/>
-          </a:fillRef>
-          <a:effectRef idx="2">
-            <a:schemeClr val="accent1"/>
-          </a:effectRef>
-          <a:fontRef idx="minor">
-            <a:schemeClr val="tx1"/>
-          </a:fontRef>
-        </p:style>
-      </p:cxnSp>
-      <p:graphicFrame>
-        <p:nvGraphicFramePr>
-          <p:cNvPr id="36" name="Table 13">
-            <a:extLst>
-              <a:ext uri="{FF2B5EF4-FFF2-40B4-BE49-F238E27FC236}">
-                <a16:creationId xmlns:a16="http://schemas.microsoft.com/office/drawing/2014/main" id="{65F8BC86-C019-6DFA-8B7D-D2524383A76D}"/>
-              </a:ext>
-            </a:extLst>
-          </p:cNvPr>
-          <p:cNvGraphicFramePr>
-            <a:graphicFrameLocks noGrp="1"/>
-          </p:cNvGraphicFramePr>
-          <p:nvPr/>
-        </p:nvGraphicFramePr>
-        <p:xfrm>
-          <a:off x="6565899" y="2199429"/>
-          <a:ext cx="4787901" cy="736600"/>
-        </p:xfrm>
-        <a:graphic>
-          <a:graphicData uri="http://schemas.openxmlformats.org/drawingml/2006/table">
-            <a:tbl>
-              <a:tblPr firstRow="1" bandRow="1">
-                <a:tableStyleId>{21E4AEA4-8DFA-4A89-87EB-49C32662AFE0}</a:tableStyleId>
-              </a:tblPr>
-              <a:tblGrid>
-                <a:gridCol w="1595967">
-                  <a:extLst>
-                    <a:ext uri="{9D8B030D-6E8A-4147-A177-3AD203B41FA5}">
-                      <a16:colId xmlns:a16="http://schemas.microsoft.com/office/drawing/2014/main" val="3073575854"/>
-                    </a:ext>
-                  </a:extLst>
-                </a:gridCol>
-                <a:gridCol w="1595967">
-                  <a:extLst>
-                    <a:ext uri="{9D8B030D-6E8A-4147-A177-3AD203B41FA5}">
-                      <a16:colId xmlns:a16="http://schemas.microsoft.com/office/drawing/2014/main" val="1785459708"/>
-                    </a:ext>
-                  </a:extLst>
-                </a:gridCol>
-                <a:gridCol w="1595967">
-                  <a:extLst>
-                    <a:ext uri="{9D8B030D-6E8A-4147-A177-3AD203B41FA5}">
-                      <a16:colId xmlns:a16="http://schemas.microsoft.com/office/drawing/2014/main" val="3617932867"/>
-                    </a:ext>
-                  </a:extLst>
-                </a:gridCol>
-              </a:tblGrid>
-              <a:tr h="0">
-                <a:tc gridSpan="3">
-                  <a:txBody>
-                    <a:bodyPr/>
-                    <a:lstStyle/>
-                    <a:p>
-                      <a:pPr algn="ctr"/>
-                      <a:r>
-                        <a:rPr lang="en-US" dirty="0">
-                          <a:latin typeface="Courier New" panose="02070309020205020404" pitchFamily="49" charset="0"/>
-                          <a:cs typeface="Courier New" panose="02070309020205020404" pitchFamily="49" charset="0"/>
-                        </a:rPr>
-                        <a:t>class C(B, A)</a:t>
-                      </a:r>
-                      <a:endParaRPr lang="en-NL" dirty="0">
-                        <a:latin typeface="Courier New" panose="02070309020205020404" pitchFamily="49" charset="0"/>
-                        <a:cs typeface="Courier New" panose="02070309020205020404" pitchFamily="49" charset="0"/>
-                      </a:endParaRPr>
-                    </a:p>
-                  </a:txBody>
-                  <a:tcPr/>
-                </a:tc>
-                <a:tc hMerge="1">
-                  <a:txBody>
-                    <a:bodyPr/>
-                    <a:lstStyle/>
-                    <a:p>
-                      <a:endParaRPr lang="en-NL" dirty="0"/>
-                    </a:p>
-                  </a:txBody>
-                  <a:tcPr/>
-                </a:tc>
-                <a:tc hMerge="1">
-                  <a:txBody>
-                    <a:bodyPr/>
-                    <a:lstStyle/>
-                    <a:p>
-                      <a:endParaRPr lang="en-NL" dirty="0"/>
-                    </a:p>
-                  </a:txBody>
-                  <a:tcPr/>
-                </a:tc>
-                <a:extLst>
-                  <a:ext uri="{0D108BD9-81ED-4DB2-BD59-A6C34878D82A}">
-                    <a16:rowId xmlns:a16="http://schemas.microsoft.com/office/drawing/2014/main" val="2290352773"/>
-                  </a:ext>
-                </a:extLst>
-              </a:tr>
-              <a:tr h="370840">
-                <a:tc>
-                  <a:txBody>
-                    <a:bodyPr/>
-                    <a:lstStyle/>
-                    <a:p>
-                      <a:pPr algn="ctr"/>
-                      <a:r>
-                        <a:rPr lang="en-US" b="1" dirty="0">
-                          <a:solidFill>
-                            <a:schemeClr val="accent6">
-                              <a:lumMod val="75000"/>
-                            </a:schemeClr>
-                          </a:solidFill>
-                          <a:latin typeface="Courier New" panose="02070309020205020404" pitchFamily="49" charset="0"/>
-                          <a:cs typeface="Courier New" panose="02070309020205020404" pitchFamily="49" charset="0"/>
-                        </a:rPr>
-                        <a:t>x</a:t>
-                      </a:r>
-                      <a:endParaRPr lang="en-NL" b="1" dirty="0">
-                        <a:solidFill>
-                          <a:schemeClr val="accent6">
-                            <a:lumMod val="75000"/>
-                          </a:schemeClr>
-                        </a:solidFill>
-                        <a:latin typeface="Courier New" panose="02070309020205020404" pitchFamily="49" charset="0"/>
-                        <a:cs typeface="Courier New" panose="02070309020205020404" pitchFamily="49" charset="0"/>
-                      </a:endParaRPr>
-                    </a:p>
-                  </a:txBody>
-                  <a:tcPr/>
-                </a:tc>
-                <a:tc>
-                  <a:txBody>
-                    <a:bodyPr/>
-                    <a:lstStyle/>
-                    <a:p>
-                      <a:pPr algn="ctr"/>
-                      <a:r>
-                        <a:rPr lang="en-US" b="1" dirty="0">
-                          <a:solidFill>
-                            <a:schemeClr val="accent5">
-                              <a:lumMod val="75000"/>
-                            </a:schemeClr>
-                          </a:solidFill>
-                          <a:latin typeface="Courier New" panose="02070309020205020404" pitchFamily="49" charset="0"/>
-                          <a:cs typeface="Courier New" panose="02070309020205020404" pitchFamily="49" charset="0"/>
-                        </a:rPr>
-                        <a:t>y</a:t>
-                      </a:r>
-                      <a:endParaRPr lang="en-NL" b="1" dirty="0">
-                        <a:solidFill>
-                          <a:schemeClr val="accent5">
-                            <a:lumMod val="75000"/>
-                          </a:schemeClr>
-                        </a:solidFill>
-                        <a:latin typeface="Courier New" panose="02070309020205020404" pitchFamily="49" charset="0"/>
-                        <a:cs typeface="Courier New" panose="02070309020205020404" pitchFamily="49" charset="0"/>
-                      </a:endParaRPr>
-                    </a:p>
-                  </a:txBody>
-                  <a:tcPr/>
-                </a:tc>
-                <a:tc>
-                  <a:txBody>
-                    <a:bodyPr/>
-                    <a:lstStyle/>
-                    <a:p>
-                      <a:pPr algn="ctr"/>
-                      <a:r>
-                        <a:rPr lang="en-US" b="1" dirty="0">
-                          <a:solidFill>
-                            <a:schemeClr val="accent2">
-                              <a:lumMod val="75000"/>
-                            </a:schemeClr>
-                          </a:solidFill>
-                          <a:latin typeface="Courier New" panose="02070309020205020404" pitchFamily="49" charset="0"/>
-                          <a:cs typeface="Courier New" panose="02070309020205020404" pitchFamily="49" charset="0"/>
-                        </a:rPr>
-                        <a:t>def z</a:t>
-                      </a:r>
-                      <a:endParaRPr lang="en-NL" b="1" dirty="0">
-                        <a:solidFill>
-                          <a:schemeClr val="accent2">
-                            <a:lumMod val="75000"/>
-                          </a:schemeClr>
-                        </a:solidFill>
-                        <a:latin typeface="Courier New" panose="02070309020205020404" pitchFamily="49" charset="0"/>
-                        <a:cs typeface="Courier New" panose="02070309020205020404" pitchFamily="49" charset="0"/>
-                      </a:endParaRPr>
-                    </a:p>
-                  </a:txBody>
-                  <a:tcPr/>
-                </a:tc>
-                <a:extLst>
-                  <a:ext uri="{0D108BD9-81ED-4DB2-BD59-A6C34878D82A}">
-                    <a16:rowId xmlns:a16="http://schemas.microsoft.com/office/drawing/2014/main" val="785041814"/>
-                  </a:ext>
-                </a:extLst>
-              </a:tr>
-            </a:tbl>
-          </a:graphicData>
-        </a:graphic>
-      </p:graphicFrame>
-      <p:graphicFrame>
-        <p:nvGraphicFramePr>
-          <p:cNvPr id="37" name="Table 36">
-            <a:extLst>
-              <a:ext uri="{FF2B5EF4-FFF2-40B4-BE49-F238E27FC236}">
-                <a16:creationId xmlns:a16="http://schemas.microsoft.com/office/drawing/2014/main" id="{F78B0BB4-C1B5-70FA-1D00-756DCF22428E}"/>
-              </a:ext>
-            </a:extLst>
-          </p:cNvPr>
-          <p:cNvGraphicFramePr>
-            <a:graphicFrameLocks noGrp="1"/>
-          </p:cNvGraphicFramePr>
-          <p:nvPr/>
-        </p:nvGraphicFramePr>
-        <p:xfrm>
-          <a:off x="6565898" y="3444665"/>
-          <a:ext cx="1595962" cy="736600"/>
-        </p:xfrm>
-        <a:graphic>
-          <a:graphicData uri="http://schemas.openxmlformats.org/drawingml/2006/table">
-            <a:tbl>
-              <a:tblPr firstRow="1" bandRow="1">
-                <a:tableStyleId>{93296810-A885-4BE3-A3E7-6D5BEEA58F35}</a:tableStyleId>
-              </a:tblPr>
-              <a:tblGrid>
-                <a:gridCol w="1595962">
-                  <a:extLst>
-                    <a:ext uri="{9D8B030D-6E8A-4147-A177-3AD203B41FA5}">
-                      <a16:colId xmlns:a16="http://schemas.microsoft.com/office/drawing/2014/main" val="3073575854"/>
-                    </a:ext>
-                  </a:extLst>
-                </a:gridCol>
-              </a:tblGrid>
-              <a:tr h="0">
-                <a:tc>
-                  <a:txBody>
-                    <a:bodyPr/>
-                    <a:lstStyle/>
-                    <a:p>
-                      <a:pPr algn="ctr"/>
-                      <a:r>
-                        <a:rPr lang="en-US" dirty="0">
-                          <a:latin typeface="Courier New" panose="02070309020205020404" pitchFamily="49" charset="0"/>
-                          <a:cs typeface="Courier New" panose="02070309020205020404" pitchFamily="49" charset="0"/>
-                        </a:rPr>
-                        <a:t>class B</a:t>
-                      </a:r>
-                      <a:endParaRPr lang="en-NL" dirty="0">
-                        <a:latin typeface="Courier New" panose="02070309020205020404" pitchFamily="49" charset="0"/>
-                        <a:cs typeface="Courier New" panose="02070309020205020404" pitchFamily="49" charset="0"/>
-                      </a:endParaRPr>
-                    </a:p>
-                  </a:txBody>
-                  <a:tcPr/>
-                </a:tc>
-                <a:extLst>
-                  <a:ext uri="{0D108BD9-81ED-4DB2-BD59-A6C34878D82A}">
-                    <a16:rowId xmlns:a16="http://schemas.microsoft.com/office/drawing/2014/main" val="2290352773"/>
-                  </a:ext>
-                </a:extLst>
-              </a:tr>
-              <a:tr h="370840">
-                <a:tc>
-                  <a:txBody>
-                    <a:bodyPr/>
-                    <a:lstStyle/>
-                    <a:p>
-                      <a:pPr algn="ctr"/>
-                      <a:r>
-                        <a:rPr lang="en-US" b="1" dirty="0">
-                          <a:solidFill>
-                            <a:schemeClr val="accent6">
-                              <a:lumMod val="75000"/>
-                            </a:schemeClr>
-                          </a:solidFill>
-                          <a:latin typeface="Courier New" panose="02070309020205020404" pitchFamily="49" charset="0"/>
-                          <a:cs typeface="Courier New" panose="02070309020205020404" pitchFamily="49" charset="0"/>
-                        </a:rPr>
-                        <a:t>def x</a:t>
-                      </a:r>
-                      <a:endParaRPr lang="en-NL" b="1" dirty="0">
-                        <a:solidFill>
-                          <a:schemeClr val="accent6">
-                            <a:lumMod val="75000"/>
-                          </a:schemeClr>
-                        </a:solidFill>
-                        <a:latin typeface="Courier New" panose="02070309020205020404" pitchFamily="49" charset="0"/>
-                        <a:cs typeface="Courier New" panose="02070309020205020404" pitchFamily="49" charset="0"/>
-                      </a:endParaRPr>
-                    </a:p>
-                  </a:txBody>
-                  <a:tcPr/>
-                </a:tc>
-                <a:extLst>
-                  <a:ext uri="{0D108BD9-81ED-4DB2-BD59-A6C34878D82A}">
-                    <a16:rowId xmlns:a16="http://schemas.microsoft.com/office/drawing/2014/main" val="785041814"/>
-                  </a:ext>
-                </a:extLst>
-              </a:tr>
-            </a:tbl>
-          </a:graphicData>
-        </a:graphic>
-      </p:graphicFrame>
-      <p:graphicFrame>
-        <p:nvGraphicFramePr>
-          <p:cNvPr id="40" name="Table 13">
-            <a:extLst>
-              <a:ext uri="{FF2B5EF4-FFF2-40B4-BE49-F238E27FC236}">
-                <a16:creationId xmlns:a16="http://schemas.microsoft.com/office/drawing/2014/main" id="{B3D6C019-4EB3-9634-3803-1CF3FF3B0DCF}"/>
-              </a:ext>
-            </a:extLst>
-          </p:cNvPr>
-          <p:cNvGraphicFramePr>
-            <a:graphicFrameLocks noGrp="1"/>
-          </p:cNvGraphicFramePr>
-          <p:nvPr/>
-        </p:nvGraphicFramePr>
-        <p:xfrm>
-          <a:off x="6565899" y="4689901"/>
-          <a:ext cx="3191934" cy="736600"/>
-        </p:xfrm>
-        <a:graphic>
-          <a:graphicData uri="http://schemas.openxmlformats.org/drawingml/2006/table">
-            <a:tbl>
-              <a:tblPr firstRow="1" bandRow="1">
-                <a:tableStyleId>{5C22544A-7EE6-4342-B048-85BDC9FD1C3A}</a:tableStyleId>
-              </a:tblPr>
-              <a:tblGrid>
-                <a:gridCol w="1595967">
-                  <a:extLst>
-                    <a:ext uri="{9D8B030D-6E8A-4147-A177-3AD203B41FA5}">
-                      <a16:colId xmlns:a16="http://schemas.microsoft.com/office/drawing/2014/main" val="3073575854"/>
-                    </a:ext>
-                  </a:extLst>
-                </a:gridCol>
-                <a:gridCol w="1595967">
-                  <a:extLst>
-                    <a:ext uri="{9D8B030D-6E8A-4147-A177-3AD203B41FA5}">
-                      <a16:colId xmlns:a16="http://schemas.microsoft.com/office/drawing/2014/main" val="1785459708"/>
-                    </a:ext>
-                  </a:extLst>
-                </a:gridCol>
-              </a:tblGrid>
-              <a:tr h="0">
-                <a:tc gridSpan="2">
-                  <a:txBody>
-                    <a:bodyPr/>
-                    <a:lstStyle/>
-                    <a:p>
-                      <a:pPr algn="ctr"/>
-                      <a:r>
-                        <a:rPr lang="en-US" dirty="0">
-                          <a:latin typeface="Courier New" panose="02070309020205020404" pitchFamily="49" charset="0"/>
-                          <a:cs typeface="Courier New" panose="02070309020205020404" pitchFamily="49" charset="0"/>
-                        </a:rPr>
-                        <a:t>class A</a:t>
-                      </a:r>
-                      <a:endParaRPr lang="en-NL" dirty="0">
-                        <a:latin typeface="Courier New" panose="02070309020205020404" pitchFamily="49" charset="0"/>
-                        <a:cs typeface="Courier New" panose="02070309020205020404" pitchFamily="49" charset="0"/>
-                      </a:endParaRPr>
-                    </a:p>
-                  </a:txBody>
-                  <a:tcPr/>
-                </a:tc>
-                <a:tc hMerge="1">
-                  <a:txBody>
-                    <a:bodyPr/>
-                    <a:lstStyle/>
-                    <a:p>
-                      <a:endParaRPr lang="en-NL" dirty="0"/>
-                    </a:p>
-                  </a:txBody>
-                  <a:tcPr/>
-                </a:tc>
-                <a:extLst>
-                  <a:ext uri="{0D108BD9-81ED-4DB2-BD59-A6C34878D82A}">
-                    <a16:rowId xmlns:a16="http://schemas.microsoft.com/office/drawing/2014/main" val="2290352773"/>
-                  </a:ext>
-                </a:extLst>
-              </a:tr>
-              <a:tr h="370840">
-                <a:tc>
-                  <a:txBody>
-                    <a:bodyPr/>
-                    <a:lstStyle/>
-                    <a:p>
-                      <a:pPr algn="ctr"/>
-                      <a:r>
-                        <a:rPr lang="en-US" b="1" dirty="0">
-                          <a:solidFill>
-                            <a:schemeClr val="accent5">
-                              <a:lumMod val="75000"/>
-                            </a:schemeClr>
-                          </a:solidFill>
-                          <a:latin typeface="Courier New" panose="02070309020205020404" pitchFamily="49" charset="0"/>
-                          <a:cs typeface="Courier New" panose="02070309020205020404" pitchFamily="49" charset="0"/>
-                        </a:rPr>
-                        <a:t>def x</a:t>
-                      </a:r>
-                      <a:endParaRPr lang="en-NL" b="1" dirty="0">
-                        <a:solidFill>
-                          <a:schemeClr val="accent5">
-                            <a:lumMod val="75000"/>
-                          </a:schemeClr>
-                        </a:solidFill>
-                        <a:latin typeface="Courier New" panose="02070309020205020404" pitchFamily="49" charset="0"/>
-                        <a:cs typeface="Courier New" panose="02070309020205020404" pitchFamily="49" charset="0"/>
-                      </a:endParaRPr>
-                    </a:p>
-                  </a:txBody>
-                  <a:tcPr/>
-                </a:tc>
-                <a:tc>
-                  <a:txBody>
-                    <a:bodyPr/>
-                    <a:lstStyle/>
-                    <a:p>
-                      <a:pPr algn="ctr"/>
-                      <a:r>
-                        <a:rPr lang="en-US" b="1" dirty="0">
-                          <a:solidFill>
-                            <a:schemeClr val="accent5">
-                              <a:lumMod val="75000"/>
-                            </a:schemeClr>
-                          </a:solidFill>
-                          <a:latin typeface="Courier New" panose="02070309020205020404" pitchFamily="49" charset="0"/>
-                          <a:cs typeface="Courier New" panose="02070309020205020404" pitchFamily="49" charset="0"/>
-                        </a:rPr>
-                        <a:t>def y</a:t>
-                      </a:r>
-                      <a:endParaRPr lang="en-NL" b="1" dirty="0">
-                        <a:solidFill>
-                          <a:schemeClr val="accent5">
-                            <a:lumMod val="75000"/>
-                          </a:schemeClr>
-                        </a:solidFill>
-                        <a:latin typeface="Courier New" panose="02070309020205020404" pitchFamily="49" charset="0"/>
-                        <a:cs typeface="Courier New" panose="02070309020205020404" pitchFamily="49" charset="0"/>
-                      </a:endParaRPr>
-                    </a:p>
-                  </a:txBody>
-                  <a:tcPr/>
-                </a:tc>
-                <a:extLst>
-                  <a:ext uri="{0D108BD9-81ED-4DB2-BD59-A6C34878D82A}">
-                    <a16:rowId xmlns:a16="http://schemas.microsoft.com/office/drawing/2014/main" val="785041814"/>
-                  </a:ext>
-                </a:extLst>
-              </a:tr>
-            </a:tbl>
-          </a:graphicData>
-        </a:graphic>
-      </p:graphicFrame>
-      <p:cxnSp>
-        <p:nvCxnSpPr>
-          <p:cNvPr id="41" name="Straight Arrow Connector 40">
-            <a:extLst>
-              <a:ext uri="{FF2B5EF4-FFF2-40B4-BE49-F238E27FC236}">
-                <a16:creationId xmlns:a16="http://schemas.microsoft.com/office/drawing/2014/main" id="{46EFC27A-93C4-8674-F8BC-E8B8D394A8F4}"/>
-              </a:ext>
-            </a:extLst>
-          </p:cNvPr>
-          <p:cNvCxnSpPr/>
-          <p:nvPr/>
-        </p:nvCxnSpPr>
-        <p:spPr>
-          <a:xfrm flipV="1">
-            <a:off x="7363882" y="2936029"/>
-            <a:ext cx="0" cy="508636"/>
-          </a:xfrm>
-          <a:prstGeom prst="straightConnector1">
-            <a:avLst/>
-          </a:prstGeom>
-          <a:ln>
-            <a:tailEnd type="triangle"/>
-          </a:ln>
-        </p:spPr>
-        <p:style>
-          <a:lnRef idx="3">
-            <a:schemeClr val="accent6"/>
-          </a:lnRef>
-          <a:fillRef idx="0">
-            <a:schemeClr val="accent6"/>
-          </a:fillRef>
-          <a:effectRef idx="2">
-            <a:schemeClr val="accent6"/>
-          </a:effectRef>
-          <a:fontRef idx="minor">
-            <a:schemeClr val="tx1"/>
-          </a:fontRef>
-        </p:style>
-      </p:cxnSp>
-      <p:sp>
-        <p:nvSpPr>
-          <p:cNvPr id="42" name="TextBox 41">
-            <a:extLst>
-              <a:ext uri="{FF2B5EF4-FFF2-40B4-BE49-F238E27FC236}">
-                <a16:creationId xmlns:a16="http://schemas.microsoft.com/office/drawing/2014/main" id="{660B0507-D999-C8F2-7321-B2A621FB3901}"/>
-              </a:ext>
-            </a:extLst>
-          </p:cNvPr>
-          <p:cNvSpPr txBox="1"/>
-          <p:nvPr/>
-        </p:nvSpPr>
-        <p:spPr>
-          <a:xfrm>
-            <a:off x="6565898" y="1406521"/>
-            <a:ext cx="4787901" cy="369332"/>
-          </a:xfrm>
-          <a:prstGeom prst="rect">
-            <a:avLst/>
-          </a:prstGeom>
-          <a:noFill/>
-        </p:spPr>
-        <p:txBody>
-          <a:bodyPr wrap="square" rtlCol="0">
-            <a:spAutoFit/>
-          </a:bodyPr>
-          <a:lstStyle/>
-          <a:p>
-            <a:r>
-              <a:rPr lang="en-US" dirty="0" err="1"/>
-              <a:t>Meerdere</a:t>
-            </a:r>
-            <a:r>
-              <a:rPr lang="en-US" dirty="0"/>
-              <a:t> basis classes:</a:t>
-            </a:r>
-            <a:endParaRPr lang="en-NL" dirty="0"/>
-          </a:p>
-        </p:txBody>
-      </p:sp>
-      <p:grpSp>
-        <p:nvGrpSpPr>
-          <p:cNvPr id="46" name="Group 45">
-            <a:extLst>
-              <a:ext uri="{FF2B5EF4-FFF2-40B4-BE49-F238E27FC236}">
-                <a16:creationId xmlns:a16="http://schemas.microsoft.com/office/drawing/2014/main" id="{43E25EED-092A-E1CB-7DBB-299AF75B9D41}"/>
-              </a:ext>
-            </a:extLst>
-          </p:cNvPr>
-          <p:cNvGrpSpPr/>
-          <p:nvPr/>
-        </p:nvGrpSpPr>
-        <p:grpSpPr>
-          <a:xfrm>
-            <a:off x="1532464" y="4181265"/>
-            <a:ext cx="207428" cy="508636"/>
-            <a:chOff x="1532464" y="4181265"/>
-            <a:chExt cx="207428" cy="508636"/>
-          </a:xfrm>
-        </p:grpSpPr>
-        <p:cxnSp>
-          <p:nvCxnSpPr>
-            <p:cNvPr id="43" name="Straight Arrow Connector 42">
-              <a:extLst>
-                <a:ext uri="{FF2B5EF4-FFF2-40B4-BE49-F238E27FC236}">
-                  <a16:creationId xmlns:a16="http://schemas.microsoft.com/office/drawing/2014/main" id="{EFD692D0-5F50-9D82-5201-ABC0A469DCFD}"/>
-                </a:ext>
-              </a:extLst>
-            </p:cNvPr>
-            <p:cNvCxnSpPr>
-              <a:cxnSpLocks/>
-            </p:cNvCxnSpPr>
-            <p:nvPr/>
-          </p:nvCxnSpPr>
-          <p:spPr>
-            <a:xfrm flipV="1">
-              <a:off x="1636183" y="4181265"/>
-              <a:ext cx="0" cy="508636"/>
-            </a:xfrm>
-            <a:prstGeom prst="straightConnector1">
-              <a:avLst/>
-            </a:prstGeom>
-            <a:ln>
-              <a:tailEnd type="triangle"/>
-            </a:ln>
-          </p:spPr>
-          <p:style>
-            <a:lnRef idx="3">
-              <a:schemeClr val="accent1"/>
-            </a:lnRef>
-            <a:fillRef idx="0">
-              <a:schemeClr val="accent1"/>
-            </a:fillRef>
-            <a:effectRef idx="2">
-              <a:schemeClr val="accent1"/>
-            </a:effectRef>
-            <a:fontRef idx="minor">
-              <a:schemeClr val="tx1"/>
-            </a:fontRef>
-          </p:style>
-        </p:cxnSp>
-        <p:sp>
-          <p:nvSpPr>
-            <p:cNvPr id="45" name="&quot;Not Allowed&quot; Symbol 44">
-              <a:extLst>
-                <a:ext uri="{FF2B5EF4-FFF2-40B4-BE49-F238E27FC236}">
-                  <a16:creationId xmlns:a16="http://schemas.microsoft.com/office/drawing/2014/main" id="{590B82F8-58DB-52DE-6F22-8243E36770A4}"/>
-                </a:ext>
-              </a:extLst>
-            </p:cNvPr>
-            <p:cNvSpPr/>
-            <p:nvPr/>
-          </p:nvSpPr>
-          <p:spPr>
-            <a:xfrm>
-              <a:off x="1532464" y="4340379"/>
-              <a:ext cx="207428" cy="190408"/>
-            </a:xfrm>
-            <a:prstGeom prst="noSmoking">
-              <a:avLst/>
-            </a:prstGeom>
-            <a:solidFill>
-              <a:srgbClr val="FF0000"/>
-            </a:solidFill>
-          </p:spPr>
-          <p:style>
-            <a:lnRef idx="2">
-              <a:schemeClr val="accent1">
-                <a:shade val="50000"/>
-              </a:schemeClr>
-            </a:lnRef>
-            <a:fillRef idx="1">
-              <a:schemeClr val="accent1"/>
-            </a:fillRef>
-            <a:effectRef idx="0">
-              <a:schemeClr val="accent1"/>
-            </a:effectRef>
-            <a:fontRef idx="minor">
-              <a:schemeClr val="lt1"/>
-            </a:fontRef>
-          </p:style>
-          <p:txBody>
-            <a:bodyPr rtlCol="0" anchor="ctr"/>
-            <a:lstStyle/>
-            <a:p>
-              <a:pPr algn="ctr"/>
-              <a:endParaRPr lang="en-NL">
-                <a:solidFill>
-                  <a:schemeClr val="tx1"/>
-                </a:solidFill>
-              </a:endParaRPr>
-            </a:p>
-          </p:txBody>
-        </p:sp>
-      </p:grpSp>
-      <p:grpSp>
-        <p:nvGrpSpPr>
-          <p:cNvPr id="47" name="Group 46">
-            <a:extLst>
-              <a:ext uri="{FF2B5EF4-FFF2-40B4-BE49-F238E27FC236}">
-                <a16:creationId xmlns:a16="http://schemas.microsoft.com/office/drawing/2014/main" id="{4A2A4214-1E82-59D6-6101-490CD4892C88}"/>
-              </a:ext>
-            </a:extLst>
-          </p:cNvPr>
-          <p:cNvGrpSpPr/>
-          <p:nvPr/>
-        </p:nvGrpSpPr>
-        <p:grpSpPr>
-          <a:xfrm>
-            <a:off x="7254868" y="4184548"/>
-            <a:ext cx="207428" cy="508636"/>
-            <a:chOff x="1532464" y="4181265"/>
-            <a:chExt cx="207428" cy="508636"/>
-          </a:xfrm>
-        </p:grpSpPr>
-        <p:cxnSp>
-          <p:nvCxnSpPr>
-            <p:cNvPr id="48" name="Straight Arrow Connector 47">
-              <a:extLst>
-                <a:ext uri="{FF2B5EF4-FFF2-40B4-BE49-F238E27FC236}">
-                  <a16:creationId xmlns:a16="http://schemas.microsoft.com/office/drawing/2014/main" id="{78DC037C-6F9C-5881-0C1F-EB92DCB2AE3D}"/>
-                </a:ext>
-              </a:extLst>
-            </p:cNvPr>
-            <p:cNvCxnSpPr>
-              <a:cxnSpLocks/>
-            </p:cNvCxnSpPr>
-            <p:nvPr/>
-          </p:nvCxnSpPr>
-          <p:spPr>
-            <a:xfrm flipV="1">
-              <a:off x="1636183" y="4181265"/>
-              <a:ext cx="0" cy="508636"/>
-            </a:xfrm>
-            <a:prstGeom prst="straightConnector1">
-              <a:avLst/>
-            </a:prstGeom>
-            <a:ln>
-              <a:tailEnd type="triangle"/>
-            </a:ln>
-          </p:spPr>
-          <p:style>
-            <a:lnRef idx="3">
-              <a:schemeClr val="accent1"/>
-            </a:lnRef>
-            <a:fillRef idx="0">
-              <a:schemeClr val="accent1"/>
-            </a:fillRef>
-            <a:effectRef idx="2">
-              <a:schemeClr val="accent1"/>
-            </a:effectRef>
-            <a:fontRef idx="minor">
-              <a:schemeClr val="tx1"/>
-            </a:fontRef>
-          </p:style>
-        </p:cxnSp>
-        <p:sp>
-          <p:nvSpPr>
-            <p:cNvPr id="49" name="&quot;Not Allowed&quot; Symbol 48">
-              <a:extLst>
-                <a:ext uri="{FF2B5EF4-FFF2-40B4-BE49-F238E27FC236}">
-                  <a16:creationId xmlns:a16="http://schemas.microsoft.com/office/drawing/2014/main" id="{7B5D8BCB-8B94-0ADC-9919-3F68DEB0A34C}"/>
-                </a:ext>
-              </a:extLst>
-            </p:cNvPr>
-            <p:cNvSpPr/>
-            <p:nvPr/>
-          </p:nvSpPr>
-          <p:spPr>
-            <a:xfrm>
-              <a:off x="1532464" y="4340379"/>
-              <a:ext cx="207428" cy="190408"/>
-            </a:xfrm>
-            <a:prstGeom prst="noSmoking">
-              <a:avLst/>
-            </a:prstGeom>
-            <a:solidFill>
-              <a:srgbClr val="FF0000"/>
-            </a:solidFill>
-          </p:spPr>
-          <p:style>
-            <a:lnRef idx="2">
-              <a:schemeClr val="accent1">
-                <a:shade val="50000"/>
-              </a:schemeClr>
-            </a:lnRef>
-            <a:fillRef idx="1">
-              <a:schemeClr val="accent1"/>
-            </a:fillRef>
-            <a:effectRef idx="0">
-              <a:schemeClr val="accent1"/>
-            </a:effectRef>
-            <a:fontRef idx="minor">
-              <a:schemeClr val="lt1"/>
-            </a:fontRef>
-          </p:style>
-          <p:txBody>
-            <a:bodyPr rtlCol="0" anchor="ctr"/>
-            <a:lstStyle/>
-            <a:p>
-              <a:pPr algn="ctr"/>
-              <a:endParaRPr lang="en-NL" dirty="0">
-                <a:solidFill>
-                  <a:schemeClr val="tx1"/>
-                </a:solidFill>
-              </a:endParaRPr>
-            </a:p>
-          </p:txBody>
-        </p:sp>
-      </p:grpSp>
-      <p:cxnSp>
-        <p:nvCxnSpPr>
-          <p:cNvPr id="51" name="Straight Arrow Connector 50">
-            <a:extLst>
-              <a:ext uri="{FF2B5EF4-FFF2-40B4-BE49-F238E27FC236}">
-                <a16:creationId xmlns:a16="http://schemas.microsoft.com/office/drawing/2014/main" id="{5D3DDD5F-3374-0BC6-1C14-EB47F2BBACA9}"/>
-              </a:ext>
-            </a:extLst>
-          </p:cNvPr>
-          <p:cNvCxnSpPr>
-            <a:cxnSpLocks/>
-          </p:cNvCxnSpPr>
-          <p:nvPr/>
-        </p:nvCxnSpPr>
-        <p:spPr>
-          <a:xfrm flipV="1">
-            <a:off x="3232150" y="2936029"/>
-            <a:ext cx="0" cy="508636"/>
-          </a:xfrm>
-          <a:prstGeom prst="straightConnector1">
-            <a:avLst/>
-          </a:prstGeom>
-          <a:ln>
-            <a:tailEnd type="triangle"/>
-          </a:ln>
-        </p:spPr>
-        <p:style>
-          <a:lnRef idx="3">
-            <a:schemeClr val="accent1"/>
-          </a:lnRef>
-          <a:fillRef idx="0">
-            <a:schemeClr val="accent1"/>
-          </a:fillRef>
-          <a:effectRef idx="2">
-            <a:schemeClr val="accent1"/>
-          </a:effectRef>
-          <a:fontRef idx="minor">
-            <a:schemeClr val="tx1"/>
-          </a:fontRef>
-        </p:style>
-      </p:cxnSp>
-      <p:cxnSp>
-        <p:nvCxnSpPr>
-          <p:cNvPr id="53" name="Straight Arrow Connector 52">
-            <a:extLst>
-              <a:ext uri="{FF2B5EF4-FFF2-40B4-BE49-F238E27FC236}">
-                <a16:creationId xmlns:a16="http://schemas.microsoft.com/office/drawing/2014/main" id="{E7900520-4524-63D0-52CB-89C29C0978BB}"/>
-              </a:ext>
-            </a:extLst>
-          </p:cNvPr>
-          <p:cNvCxnSpPr>
-            <a:cxnSpLocks/>
-          </p:cNvCxnSpPr>
-          <p:nvPr/>
-        </p:nvCxnSpPr>
-        <p:spPr>
-          <a:xfrm flipV="1">
-            <a:off x="3232150" y="4181265"/>
-            <a:ext cx="0" cy="508636"/>
-          </a:xfrm>
-          <a:prstGeom prst="straightConnector1">
-            <a:avLst/>
-          </a:prstGeom>
-          <a:ln>
-            <a:tailEnd type="triangle"/>
-          </a:ln>
-        </p:spPr>
-        <p:style>
-          <a:lnRef idx="3">
-            <a:schemeClr val="accent1"/>
-          </a:lnRef>
-          <a:fillRef idx="0">
-            <a:schemeClr val="accent1"/>
-          </a:fillRef>
-          <a:effectRef idx="2">
-            <a:schemeClr val="accent1"/>
-          </a:effectRef>
-          <a:fontRef idx="minor">
-            <a:schemeClr val="tx1"/>
-          </a:fontRef>
-        </p:style>
-      </p:cxnSp>
-      <p:sp>
-        <p:nvSpPr>
-          <p:cNvPr id="3" name="Rectangle 2">
-            <a:extLst>
-              <a:ext uri="{FF2B5EF4-FFF2-40B4-BE49-F238E27FC236}">
-                <a16:creationId xmlns:a16="http://schemas.microsoft.com/office/drawing/2014/main" id="{E11E8271-51F5-2816-7896-5897A12226C4}"/>
-              </a:ext>
-            </a:extLst>
-          </p:cNvPr>
-          <p:cNvSpPr/>
-          <p:nvPr/>
-        </p:nvSpPr>
-        <p:spPr>
-          <a:xfrm>
-            <a:off x="838188" y="3247178"/>
-            <a:ext cx="4787901" cy="2677371"/>
-          </a:xfrm>
-          <a:prstGeom prst="rect">
-            <a:avLst/>
-          </a:prstGeom>
-          <a:solidFill>
-            <a:schemeClr val="bg2"/>
-          </a:solidFill>
-        </p:spPr>
-        <p:style>
-          <a:lnRef idx="1">
-            <a:schemeClr val="accent3"/>
-          </a:lnRef>
-          <a:fillRef idx="2">
-            <a:schemeClr val="accent3"/>
-          </a:fillRef>
-          <a:effectRef idx="1">
-            <a:schemeClr val="accent3"/>
-          </a:effectRef>
-          <a:fontRef idx="minor">
-            <a:schemeClr val="dk1"/>
-          </a:fontRef>
-        </p:style>
-        <p:txBody>
-          <a:bodyPr lIns="144000" tIns="144000" rIns="144000" bIns="144000" rtlCol="0" anchor="t"/>
-          <a:lstStyle/>
-          <a:p>
-            <a:r>
-              <a:rPr lang="nl-NL" b="1" dirty="0"/>
-              <a:t>Specialisatie</a:t>
-            </a:r>
-          </a:p>
-          <a:p>
-            <a:endParaRPr lang="nl-NL" dirty="0"/>
-          </a:p>
-          <a:p>
-            <a:pPr marL="285750" indent="-285750">
-              <a:buFontTx/>
-              <a:buChar char="-"/>
-            </a:pPr>
-            <a:r>
-              <a:rPr lang="nl-NL" dirty="0"/>
-              <a:t>Classes met zelfde doel / uit zelfde domein.</a:t>
-            </a:r>
-          </a:p>
-          <a:p>
-            <a:pPr marL="285750" indent="-285750">
-              <a:buFontTx/>
-              <a:buChar char="-"/>
-            </a:pPr>
-            <a:r>
-              <a:rPr lang="nl-NL" dirty="0"/>
-              <a:t>Meer gespecialiseerde functionaliteit.</a:t>
-            </a:r>
-          </a:p>
-          <a:p>
-            <a:pPr lvl="1"/>
-            <a:endParaRPr lang="nl-NL" dirty="0"/>
-          </a:p>
-          <a:p>
-            <a:pPr lvl="1"/>
-            <a:r>
-              <a:rPr lang="nl-NL" sz="1400" dirty="0" err="1">
-                <a:latin typeface="Courier New" panose="02070309020205020404" pitchFamily="49" charset="0"/>
-                <a:cs typeface="Courier New" panose="02070309020205020404" pitchFamily="49" charset="0"/>
-              </a:rPr>
-              <a:t>DataReader</a:t>
-            </a:r>
-            <a:endParaRPr lang="nl-NL" sz="1400" dirty="0">
-              <a:latin typeface="Courier New" panose="02070309020205020404" pitchFamily="49" charset="0"/>
-              <a:cs typeface="Courier New" panose="02070309020205020404" pitchFamily="49" charset="0"/>
-            </a:endParaRPr>
-          </a:p>
-          <a:p>
-            <a:pPr lvl="1"/>
-            <a:r>
-              <a:rPr lang="nl-NL" sz="1400" dirty="0">
-                <a:latin typeface="Courier New" panose="02070309020205020404" pitchFamily="49" charset="0"/>
-                <a:cs typeface="Courier New" panose="02070309020205020404" pitchFamily="49" charset="0"/>
-              </a:rPr>
-              <a:t>    =&gt; </a:t>
-            </a:r>
-            <a:r>
-              <a:rPr lang="nl-NL" sz="1400" dirty="0" err="1">
-                <a:latin typeface="Courier New" panose="02070309020205020404" pitchFamily="49" charset="0"/>
-                <a:cs typeface="Courier New" panose="02070309020205020404" pitchFamily="49" charset="0"/>
-              </a:rPr>
-              <a:t>SQLReader</a:t>
-            </a:r>
-            <a:endParaRPr lang="nl-NL" sz="1400" dirty="0">
-              <a:latin typeface="Courier New" panose="02070309020205020404" pitchFamily="49" charset="0"/>
-              <a:cs typeface="Courier New" panose="02070309020205020404" pitchFamily="49" charset="0"/>
-            </a:endParaRPr>
-          </a:p>
-          <a:p>
-            <a:pPr lvl="1"/>
-            <a:r>
-              <a:rPr lang="nl-NL" sz="1400" dirty="0">
-                <a:latin typeface="Courier New" panose="02070309020205020404" pitchFamily="49" charset="0"/>
-                <a:cs typeface="Courier New" panose="02070309020205020404" pitchFamily="49" charset="0"/>
-              </a:rPr>
-              <a:t>        =&gt; </a:t>
-            </a:r>
-            <a:r>
-              <a:rPr lang="nl-NL" sz="1400" dirty="0" err="1">
-                <a:latin typeface="Courier New" panose="02070309020205020404" pitchFamily="49" charset="0"/>
-                <a:cs typeface="Courier New" panose="02070309020205020404" pitchFamily="49" charset="0"/>
-              </a:rPr>
-              <a:t>MicrosoftSQLReader</a:t>
-            </a:r>
-            <a:endParaRPr lang="nl-NL" sz="1400" dirty="0">
-              <a:latin typeface="Courier New" panose="02070309020205020404" pitchFamily="49" charset="0"/>
-              <a:cs typeface="Courier New" panose="02070309020205020404" pitchFamily="49" charset="0"/>
-            </a:endParaRPr>
-          </a:p>
-        </p:txBody>
-      </p:sp>
-      <p:sp>
-        <p:nvSpPr>
-          <p:cNvPr id="4" name="Rectangle 3">
-            <a:extLst>
-              <a:ext uri="{FF2B5EF4-FFF2-40B4-BE49-F238E27FC236}">
-                <a16:creationId xmlns:a16="http://schemas.microsoft.com/office/drawing/2014/main" id="{B391AC0D-107B-6331-D8B5-23418AE5EAA1}"/>
-              </a:ext>
-            </a:extLst>
-          </p:cNvPr>
-          <p:cNvSpPr/>
-          <p:nvPr/>
-        </p:nvSpPr>
-        <p:spPr>
-          <a:xfrm>
-            <a:off x="6565897" y="3247178"/>
-            <a:ext cx="4787901" cy="2677371"/>
-          </a:xfrm>
-          <a:prstGeom prst="rect">
-            <a:avLst/>
-          </a:prstGeom>
-          <a:solidFill>
-            <a:schemeClr val="bg2"/>
-          </a:solidFill>
-        </p:spPr>
-        <p:style>
-          <a:lnRef idx="1">
-            <a:schemeClr val="accent3"/>
-          </a:lnRef>
-          <a:fillRef idx="2">
-            <a:schemeClr val="accent3"/>
-          </a:fillRef>
-          <a:effectRef idx="1">
-            <a:schemeClr val="accent3"/>
-          </a:effectRef>
-          <a:fontRef idx="minor">
-            <a:schemeClr val="dk1"/>
-          </a:fontRef>
-        </p:style>
-        <p:txBody>
-          <a:bodyPr lIns="144000" tIns="144000" rIns="144000" bIns="144000" rtlCol="0" anchor="t"/>
-          <a:lstStyle/>
-          <a:p>
-            <a:r>
-              <a:rPr lang="nl-NL" b="1" dirty="0"/>
-              <a:t>Adaptatie</a:t>
-            </a:r>
-          </a:p>
-          <a:p>
-            <a:endParaRPr lang="nl-NL" dirty="0"/>
-          </a:p>
-          <a:p>
-            <a:pPr marL="285750" indent="-285750">
-              <a:buFontTx/>
-              <a:buChar char="-"/>
-            </a:pPr>
-            <a:r>
-              <a:rPr lang="nl-NL" dirty="0"/>
-              <a:t>Classes met uiteenlopende doelen.</a:t>
-            </a:r>
-          </a:p>
-          <a:p>
-            <a:pPr marL="285750" indent="-285750">
-              <a:buFontTx/>
-              <a:buChar char="-"/>
-            </a:pPr>
-            <a:r>
-              <a:rPr lang="nl-NL" dirty="0"/>
-              <a:t>Behoefte aan gedeelde functionaliteit.</a:t>
-            </a:r>
-          </a:p>
-          <a:p>
-            <a:pPr lvl="1"/>
-            <a:endParaRPr lang="nl-NL" dirty="0"/>
-          </a:p>
-          <a:p>
-            <a:pPr lvl="1"/>
-            <a:r>
-              <a:rPr lang="nl-NL" sz="1400" dirty="0" err="1">
-                <a:latin typeface="Courier New" panose="02070309020205020404" pitchFamily="49" charset="0"/>
-                <a:cs typeface="Courier New" panose="02070309020205020404" pitchFamily="49" charset="0"/>
-              </a:rPr>
-              <a:t>MicrosoftSQLReader</a:t>
-            </a:r>
-            <a:endParaRPr lang="nl-NL" sz="1400" dirty="0">
-              <a:latin typeface="Courier New" panose="02070309020205020404" pitchFamily="49" charset="0"/>
-              <a:cs typeface="Courier New" panose="02070309020205020404" pitchFamily="49" charset="0"/>
-            </a:endParaRPr>
-          </a:p>
-          <a:p>
-            <a:pPr lvl="1"/>
-            <a:r>
-              <a:rPr lang="nl-NL" sz="1400" dirty="0">
-                <a:latin typeface="Courier New" panose="02070309020205020404" pitchFamily="49" charset="0"/>
-                <a:cs typeface="Courier New" panose="02070309020205020404" pitchFamily="49" charset="0"/>
-              </a:rPr>
-              <a:t>    &lt;= </a:t>
-            </a:r>
-            <a:r>
-              <a:rPr lang="nl-NL" sz="1400" dirty="0" err="1">
-                <a:latin typeface="Courier New" panose="02070309020205020404" pitchFamily="49" charset="0"/>
-                <a:cs typeface="Courier New" panose="02070309020205020404" pitchFamily="49" charset="0"/>
-              </a:rPr>
-              <a:t>SQLReader</a:t>
-            </a:r>
-            <a:r>
-              <a:rPr lang="nl-NL" sz="1400" dirty="0">
-                <a:latin typeface="Courier New" panose="02070309020205020404" pitchFamily="49" charset="0"/>
-                <a:cs typeface="Courier New" panose="02070309020205020404" pitchFamily="49" charset="0"/>
-              </a:rPr>
-              <a:t> + </a:t>
-            </a:r>
-            <a:r>
-              <a:rPr lang="nl-NL" sz="1400" dirty="0" err="1">
-                <a:latin typeface="Courier New" panose="02070309020205020404" pitchFamily="49" charset="0"/>
-                <a:cs typeface="Courier New" panose="02070309020205020404" pitchFamily="49" charset="0"/>
-              </a:rPr>
-              <a:t>EncryptionMixin</a:t>
-            </a:r>
-            <a:endParaRPr lang="nl-NL" sz="1400" dirty="0">
-              <a:latin typeface="Courier New" panose="02070309020205020404" pitchFamily="49" charset="0"/>
-              <a:cs typeface="Courier New" panose="02070309020205020404" pitchFamily="49" charset="0"/>
-            </a:endParaRPr>
-          </a:p>
-        </p:txBody>
-      </p:sp>
-    </p:spTree>
-    <p:extLst>
-      <p:ext uri="{BB962C8B-B14F-4D97-AF65-F5344CB8AC3E}">
-        <p14:creationId xmlns:p14="http://schemas.microsoft.com/office/powerpoint/2010/main" val="2209185050"/>
       </p:ext>
     </p:extLst>
   </p:cSld>

--- a/python_course_4p/2_syntax_classes/2_syntax_classes.pptx
+++ b/python_course_4p/2_syntax_classes/2_syntax_classes.pptx
@@ -246,7 +246,7 @@
           <a:p>
             <a:fld id="{3BADDCAA-88FC-44D4-A91A-DD0530AB88E0}" type="datetimeFigureOut">
               <a:rPr lang="en-NL" smtClean="0"/>
-              <a:t>23/09/2026</a:t>
+              <a:t>20/10/2026</a:t>
             </a:fld>
             <a:endParaRPr lang="en-NL"/>
           </a:p>
@@ -1180,7 +1180,7 @@
           <a:p>
             <a:fld id="{0EBB069A-003F-4FC0-8534-236B0C5C7B5F}" type="datetimeFigureOut">
               <a:rPr lang="en-NL" smtClean="0"/>
-              <a:t>23/09/2026</a:t>
+              <a:t>20/10/2026</a:t>
             </a:fld>
             <a:endParaRPr lang="en-NL"/>
           </a:p>
@@ -1380,7 +1380,7 @@
           <a:p>
             <a:fld id="{0EBB069A-003F-4FC0-8534-236B0C5C7B5F}" type="datetimeFigureOut">
               <a:rPr lang="en-NL" smtClean="0"/>
-              <a:t>23/09/2026</a:t>
+              <a:t>20/10/2026</a:t>
             </a:fld>
             <a:endParaRPr lang="en-NL"/>
           </a:p>
@@ -1590,7 +1590,7 @@
           <a:p>
             <a:fld id="{0EBB069A-003F-4FC0-8534-236B0C5C7B5F}" type="datetimeFigureOut">
               <a:rPr lang="en-NL" smtClean="0"/>
-              <a:t>23/09/2026</a:t>
+              <a:t>20/10/2026</a:t>
             </a:fld>
             <a:endParaRPr lang="en-NL"/>
           </a:p>
@@ -1790,7 +1790,7 @@
           <a:p>
             <a:fld id="{0EBB069A-003F-4FC0-8534-236B0C5C7B5F}" type="datetimeFigureOut">
               <a:rPr lang="en-NL" smtClean="0"/>
-              <a:t>23/09/2026</a:t>
+              <a:t>20/10/2026</a:t>
             </a:fld>
             <a:endParaRPr lang="en-NL"/>
           </a:p>
@@ -2066,7 +2066,7 @@
           <a:p>
             <a:fld id="{0EBB069A-003F-4FC0-8534-236B0C5C7B5F}" type="datetimeFigureOut">
               <a:rPr lang="en-NL" smtClean="0"/>
-              <a:t>23/09/2026</a:t>
+              <a:t>20/10/2026</a:t>
             </a:fld>
             <a:endParaRPr lang="en-NL"/>
           </a:p>
@@ -2334,7 +2334,7 @@
           <a:p>
             <a:fld id="{0EBB069A-003F-4FC0-8534-236B0C5C7B5F}" type="datetimeFigureOut">
               <a:rPr lang="en-NL" smtClean="0"/>
-              <a:t>23/09/2026</a:t>
+              <a:t>20/10/2026</a:t>
             </a:fld>
             <a:endParaRPr lang="en-NL"/>
           </a:p>
@@ -2749,7 +2749,7 @@
           <a:p>
             <a:fld id="{0EBB069A-003F-4FC0-8534-236B0C5C7B5F}" type="datetimeFigureOut">
               <a:rPr lang="en-NL" smtClean="0"/>
-              <a:t>23/09/2026</a:t>
+              <a:t>20/10/2026</a:t>
             </a:fld>
             <a:endParaRPr lang="en-NL"/>
           </a:p>
@@ -2891,7 +2891,7 @@
           <a:p>
             <a:fld id="{0EBB069A-003F-4FC0-8534-236B0C5C7B5F}" type="datetimeFigureOut">
               <a:rPr lang="en-NL" smtClean="0"/>
-              <a:t>23/09/2026</a:t>
+              <a:t>20/10/2026</a:t>
             </a:fld>
             <a:endParaRPr lang="en-NL"/>
           </a:p>
@@ -3004,7 +3004,7 @@
           <a:p>
             <a:fld id="{0EBB069A-003F-4FC0-8534-236B0C5C7B5F}" type="datetimeFigureOut">
               <a:rPr lang="en-NL" smtClean="0"/>
-              <a:t>23/09/2026</a:t>
+              <a:t>20/10/2026</a:t>
             </a:fld>
             <a:endParaRPr lang="en-NL"/>
           </a:p>
@@ -3317,7 +3317,7 @@
           <a:p>
             <a:fld id="{0EBB069A-003F-4FC0-8534-236B0C5C7B5F}" type="datetimeFigureOut">
               <a:rPr lang="en-NL" smtClean="0"/>
-              <a:t>23/09/2026</a:t>
+              <a:t>20/10/2026</a:t>
             </a:fld>
             <a:endParaRPr lang="en-NL"/>
           </a:p>
@@ -3606,7 +3606,7 @@
           <a:p>
             <a:fld id="{0EBB069A-003F-4FC0-8534-236B0C5C7B5F}" type="datetimeFigureOut">
               <a:rPr lang="en-NL" smtClean="0"/>
-              <a:t>23/09/2026</a:t>
+              <a:t>20/10/2026</a:t>
             </a:fld>
             <a:endParaRPr lang="en-NL"/>
           </a:p>
@@ -3849,7 +3849,7 @@
           <a:p>
             <a:fld id="{0EBB069A-003F-4FC0-8534-236B0C5C7B5F}" type="datetimeFigureOut">
               <a:rPr lang="en-NL" smtClean="0"/>
-              <a:t>23/09/2026</a:t>
+              <a:t>20/10/2026</a:t>
             </a:fld>
             <a:endParaRPr lang="en-NL"/>
           </a:p>
@@ -12695,8 +12695,13 @@
           <a:p>
             <a:r>
               <a:rPr lang="nl-NL" sz="3600" noProof="0" dirty="0"/>
-              <a:t>Oefeningen II</a:t>
-            </a:r>
+              <a:t>Oefeningen </a:t>
+            </a:r>
+            <a:r>
+              <a:rPr lang="nl-NL" sz="3600" dirty="0"/>
+              <a:t>2</a:t>
+            </a:r>
+            <a:endParaRPr lang="nl-NL" sz="3600" noProof="0" dirty="0"/>
           </a:p>
         </p:txBody>
       </p:sp>
@@ -15145,7 +15150,7 @@
           <a:p>
             <a:r>
               <a:rPr lang="nl-NL" sz="3600" noProof="0" dirty="0"/>
-              <a:t>Oefeningen III</a:t>
+              <a:t>Oefeningen 3</a:t>
             </a:r>
           </a:p>
         </p:txBody>
@@ -27385,8 +27390,13 @@
           <a:p>
             <a:r>
               <a:rPr lang="nl-NL" sz="3600" noProof="0" dirty="0"/>
-              <a:t>Oefeningen IV</a:t>
-            </a:r>
+              <a:t>Oefeningen </a:t>
+            </a:r>
+            <a:r>
+              <a:rPr lang="nl-NL" sz="3600" dirty="0"/>
+              <a:t>4</a:t>
+            </a:r>
+            <a:endParaRPr lang="nl-NL" sz="3600" noProof="0" dirty="0"/>
           </a:p>
         </p:txBody>
       </p:sp>
@@ -35913,9 +35923,10 @@
           <a:lstStyle/>
           <a:p>
             <a:r>
-              <a:rPr lang="nl-NL" sz="3600" noProof="0" dirty="0"/>
-              <a:t>Oefeningen V</a:t>
-            </a:r>
+              <a:rPr lang="nl-NL" sz="3600" noProof="0"/>
+              <a:t>Oefeningen 5</a:t>
+            </a:r>
+            <a:endParaRPr lang="nl-NL" sz="3600" noProof="0" dirty="0"/>
           </a:p>
         </p:txBody>
       </p:sp>
@@ -39530,7 +39541,7 @@
           <a:p>
             <a:r>
               <a:rPr lang="nl-NL" sz="3600" noProof="0" dirty="0"/>
-              <a:t>Oefeningen I</a:t>
+              <a:t>Oefeningen 1</a:t>
             </a:r>
           </a:p>
         </p:txBody>
